--- a/Perwal_Bekasi_51_2024_Pajak_Reklame.pptx
+++ b/Perwal_Bekasi_51_2024_Pajak_Reklame.pptx
@@ -4409,7 +4409,7 @@
         <p:spPr>
           <a:xfrm>
             <a:off x="548640" y="1051560"/>
-            <a:ext cx="5303520" cy="5166360"/>
+            <a:ext cx="5410047" cy="5166360"/>
           </a:xfrm>
           <a:prstGeom prst="roundRect">
             <a:avLst>
@@ -4499,7 +4499,7 @@
         <p:spPr>
           <a:xfrm>
             <a:off x="731520" y="1188720"/>
-            <a:ext cx="4983480" cy="274320"/>
+            <a:ext cx="5090007" cy="274320"/>
           </a:xfrm>
           <a:prstGeom prst="rect">
             <a:avLst/>
@@ -4539,7 +4539,7 @@
         <p:spPr>
           <a:xfrm>
             <a:off x="731520" y="1481328"/>
-            <a:ext cx="4983480" cy="201168"/>
+            <a:ext cx="5090007" cy="201168"/>
           </a:xfrm>
           <a:prstGeom prst="rect">
             <a:avLst/>
@@ -4579,7 +4579,7 @@
         <p:spPr>
           <a:xfrm>
             <a:off x="731520" y="1700784"/>
-            <a:ext cx="4983480" cy="201168"/>
+            <a:ext cx="5090007" cy="201168"/>
           </a:xfrm>
           <a:prstGeom prst="rect">
             <a:avLst/>
@@ -4619,7 +4619,7 @@
         <p:spPr>
           <a:xfrm>
             <a:off x="731520" y="1920240"/>
-            <a:ext cx="4983480" cy="201168"/>
+            <a:ext cx="5090007" cy="201168"/>
           </a:xfrm>
           <a:prstGeom prst="rect">
             <a:avLst/>
@@ -4659,7 +4659,7 @@
         <p:spPr>
           <a:xfrm>
             <a:off x="731520" y="2139696"/>
-            <a:ext cx="4983480" cy="201168"/>
+            <a:ext cx="5090007" cy="201168"/>
           </a:xfrm>
           <a:prstGeom prst="rect">
             <a:avLst/>
@@ -4699,7 +4699,7 @@
         <p:spPr>
           <a:xfrm>
             <a:off x="731520" y="2359152"/>
-            <a:ext cx="4983480" cy="201168"/>
+            <a:ext cx="5090007" cy="201168"/>
           </a:xfrm>
           <a:prstGeom prst="rect">
             <a:avLst/>
@@ -4739,7 +4739,7 @@
         <p:spPr>
           <a:xfrm>
             <a:off x="731520" y="2578608"/>
-            <a:ext cx="4983480" cy="201168"/>
+            <a:ext cx="5090007" cy="201168"/>
           </a:xfrm>
           <a:prstGeom prst="rect">
             <a:avLst/>
@@ -4779,7 +4779,7 @@
         <p:spPr>
           <a:xfrm>
             <a:off x="731520" y="2798064"/>
-            <a:ext cx="4983480" cy="201168"/>
+            <a:ext cx="5090007" cy="201168"/>
           </a:xfrm>
           <a:prstGeom prst="rect">
             <a:avLst/>
@@ -4818,8 +4818,8 @@
         </p:nvSpPr>
         <p:spPr>
           <a:xfrm>
-            <a:off x="6172200" y="1051560"/>
-            <a:ext cx="5303520" cy="5166360"/>
+            <a:off x="6233007" y="1051560"/>
+            <a:ext cx="5410047" cy="5166360"/>
           </a:xfrm>
           <a:prstGeom prst="roundRect">
             <a:avLst>
@@ -4865,7 +4865,7 @@
         </p:nvSpPr>
         <p:spPr>
           <a:xfrm>
-            <a:off x="6172200" y="1051560"/>
+            <a:off x="6233007" y="1051560"/>
             <a:ext cx="45720" cy="5166360"/>
           </a:xfrm>
           <a:prstGeom prst="rect">
@@ -4908,8 +4908,8 @@
         </p:nvSpPr>
         <p:spPr>
           <a:xfrm>
-            <a:off x="6355080" y="1188720"/>
-            <a:ext cx="4983480" cy="274320"/>
+            <a:off x="6415887" y="1188720"/>
+            <a:ext cx="5090007" cy="274320"/>
           </a:xfrm>
           <a:prstGeom prst="rect">
             <a:avLst/>
@@ -4948,8 +4948,8 @@
         </p:nvSpPr>
         <p:spPr>
           <a:xfrm>
-            <a:off x="6355080" y="1481328"/>
-            <a:ext cx="4983480" cy="201168"/>
+            <a:off x="6415887" y="1481328"/>
+            <a:ext cx="5090007" cy="201168"/>
           </a:xfrm>
           <a:prstGeom prst="rect">
             <a:avLst/>
@@ -4988,8 +4988,8 @@
         </p:nvSpPr>
         <p:spPr>
           <a:xfrm>
-            <a:off x="6355080" y="1700784"/>
-            <a:ext cx="4983480" cy="201168"/>
+            <a:off x="6415887" y="1700784"/>
+            <a:ext cx="5090007" cy="201168"/>
           </a:xfrm>
           <a:prstGeom prst="rect">
             <a:avLst/>
@@ -5028,8 +5028,8 @@
         </p:nvSpPr>
         <p:spPr>
           <a:xfrm>
-            <a:off x="6355080" y="1920240"/>
-            <a:ext cx="4983480" cy="201168"/>
+            <a:off x="6415887" y="1920240"/>
+            <a:ext cx="5090007" cy="201168"/>
           </a:xfrm>
           <a:prstGeom prst="rect">
             <a:avLst/>
@@ -5068,8 +5068,8 @@
         </p:nvSpPr>
         <p:spPr>
           <a:xfrm>
-            <a:off x="6355080" y="2139696"/>
-            <a:ext cx="4983480" cy="201168"/>
+            <a:off x="6415887" y="2139696"/>
+            <a:ext cx="5090007" cy="201168"/>
           </a:xfrm>
           <a:prstGeom prst="rect">
             <a:avLst/>
@@ -5108,8 +5108,8 @@
         </p:nvSpPr>
         <p:spPr>
           <a:xfrm>
-            <a:off x="6355080" y="2359152"/>
-            <a:ext cx="4983480" cy="201168"/>
+            <a:off x="6415887" y="2359152"/>
+            <a:ext cx="5090007" cy="201168"/>
           </a:xfrm>
           <a:prstGeom prst="rect">
             <a:avLst/>
@@ -5148,8 +5148,8 @@
         </p:nvSpPr>
         <p:spPr>
           <a:xfrm>
-            <a:off x="6355080" y="2578608"/>
-            <a:ext cx="4983480" cy="201168"/>
+            <a:off x="6415887" y="2578608"/>
+            <a:ext cx="5090007" cy="201168"/>
           </a:xfrm>
           <a:prstGeom prst="rect">
             <a:avLst/>
@@ -5188,8 +5188,8 @@
         </p:nvSpPr>
         <p:spPr>
           <a:xfrm>
-            <a:off x="6355080" y="2798064"/>
-            <a:ext cx="4983480" cy="201168"/>
+            <a:off x="6415887" y="2798064"/>
+            <a:ext cx="5090007" cy="201168"/>
           </a:xfrm>
           <a:prstGeom prst="rect">
             <a:avLst/>
@@ -8173,8 +8173,8 @@
         </p:nvSpPr>
         <p:spPr>
           <a:xfrm>
-            <a:off x="495147" y="1051560"/>
-            <a:ext cx="2560320" cy="2011680"/>
+            <a:off x="548640" y="1051560"/>
+            <a:ext cx="2567863" cy="2011680"/>
           </a:xfrm>
           <a:prstGeom prst="roundRect">
             <a:avLst>
@@ -8220,8 +8220,8 @@
         </p:nvSpPr>
         <p:spPr>
           <a:xfrm>
-            <a:off x="495147" y="1051560"/>
-            <a:ext cx="2560320" cy="45720"/>
+            <a:off x="548640" y="1051560"/>
+            <a:ext cx="2567863" cy="45720"/>
           </a:xfrm>
           <a:prstGeom prst="rect">
             <a:avLst/>
@@ -8263,8 +8263,8 @@
         </p:nvSpPr>
         <p:spPr>
           <a:xfrm>
-            <a:off x="495147" y="1280160"/>
-            <a:ext cx="2560320" cy="640080"/>
+            <a:off x="548640" y="1280160"/>
+            <a:ext cx="2567863" cy="640080"/>
           </a:xfrm>
           <a:prstGeom prst="rect">
             <a:avLst/>
@@ -8303,8 +8303,8 @@
         </p:nvSpPr>
         <p:spPr>
           <a:xfrm>
-            <a:off x="586587" y="1965960"/>
-            <a:ext cx="2377440" cy="640080"/>
+            <a:off x="640080" y="1965960"/>
+            <a:ext cx="2384983" cy="640080"/>
           </a:xfrm>
           <a:prstGeom prst="rect">
             <a:avLst/>
@@ -8347,8 +8347,8 @@
         </p:nvSpPr>
         <p:spPr>
           <a:xfrm>
-            <a:off x="3375507" y="1051560"/>
-            <a:ext cx="2560320" cy="2011680"/>
+            <a:off x="3390823" y="1051560"/>
+            <a:ext cx="2567863" cy="2011680"/>
           </a:xfrm>
           <a:prstGeom prst="roundRect">
             <a:avLst>
@@ -8394,8 +8394,8 @@
         </p:nvSpPr>
         <p:spPr>
           <a:xfrm>
-            <a:off x="3375507" y="1051560"/>
-            <a:ext cx="2560320" cy="45720"/>
+            <a:off x="3390823" y="1051560"/>
+            <a:ext cx="2567863" cy="45720"/>
           </a:xfrm>
           <a:prstGeom prst="rect">
             <a:avLst/>
@@ -8437,8 +8437,8 @@
         </p:nvSpPr>
         <p:spPr>
           <a:xfrm>
-            <a:off x="3375507" y="1280160"/>
-            <a:ext cx="2560320" cy="640080"/>
+            <a:off x="3390823" y="1280160"/>
+            <a:ext cx="2567863" cy="640080"/>
           </a:xfrm>
           <a:prstGeom prst="rect">
             <a:avLst/>
@@ -8477,8 +8477,8 @@
         </p:nvSpPr>
         <p:spPr>
           <a:xfrm>
-            <a:off x="3466947" y="1965960"/>
-            <a:ext cx="2377440" cy="640080"/>
+            <a:off x="3482263" y="1965960"/>
+            <a:ext cx="2384983" cy="640080"/>
           </a:xfrm>
           <a:prstGeom prst="rect">
             <a:avLst/>
@@ -8521,8 +8521,8 @@
         </p:nvSpPr>
         <p:spPr>
           <a:xfrm>
-            <a:off x="6255867" y="1051560"/>
-            <a:ext cx="2560320" cy="2011680"/>
+            <a:off x="6233007" y="1051560"/>
+            <a:ext cx="2567863" cy="2011680"/>
           </a:xfrm>
           <a:prstGeom prst="roundRect">
             <a:avLst>
@@ -8568,8 +8568,8 @@
         </p:nvSpPr>
         <p:spPr>
           <a:xfrm>
-            <a:off x="6255867" y="1051560"/>
-            <a:ext cx="2560320" cy="45720"/>
+            <a:off x="6233007" y="1051560"/>
+            <a:ext cx="2567863" cy="45720"/>
           </a:xfrm>
           <a:prstGeom prst="rect">
             <a:avLst/>
@@ -8611,8 +8611,8 @@
         </p:nvSpPr>
         <p:spPr>
           <a:xfrm>
-            <a:off x="6255867" y="1280160"/>
-            <a:ext cx="2560320" cy="640080"/>
+            <a:off x="6233007" y="1280160"/>
+            <a:ext cx="2567863" cy="640080"/>
           </a:xfrm>
           <a:prstGeom prst="rect">
             <a:avLst/>
@@ -8651,8 +8651,8 @@
         </p:nvSpPr>
         <p:spPr>
           <a:xfrm>
-            <a:off x="6347307" y="1965960"/>
-            <a:ext cx="2377440" cy="640080"/>
+            <a:off x="6324447" y="1965960"/>
+            <a:ext cx="2384983" cy="640080"/>
           </a:xfrm>
           <a:prstGeom prst="rect">
             <a:avLst/>
@@ -8695,8 +8695,8 @@
         </p:nvSpPr>
         <p:spPr>
           <a:xfrm>
-            <a:off x="9136227" y="1051560"/>
-            <a:ext cx="2560320" cy="2011680"/>
+            <a:off x="9075191" y="1051560"/>
+            <a:ext cx="2567863" cy="2011680"/>
           </a:xfrm>
           <a:prstGeom prst="roundRect">
             <a:avLst>
@@ -8742,8 +8742,8 @@
         </p:nvSpPr>
         <p:spPr>
           <a:xfrm>
-            <a:off x="9136227" y="1051560"/>
-            <a:ext cx="2560320" cy="45720"/>
+            <a:off x="9075191" y="1051560"/>
+            <a:ext cx="2567863" cy="45720"/>
           </a:xfrm>
           <a:prstGeom prst="rect">
             <a:avLst/>
@@ -8785,8 +8785,8 @@
         </p:nvSpPr>
         <p:spPr>
           <a:xfrm>
-            <a:off x="9136227" y="1280160"/>
-            <a:ext cx="2560320" cy="640080"/>
+            <a:off x="9075191" y="1280160"/>
+            <a:ext cx="2567863" cy="640080"/>
           </a:xfrm>
           <a:prstGeom prst="rect">
             <a:avLst/>
@@ -8825,8 +8825,8 @@
         </p:nvSpPr>
         <p:spPr>
           <a:xfrm>
-            <a:off x="9227667" y="1965960"/>
-            <a:ext cx="2377440" cy="640080"/>
+            <a:off x="9166631" y="1965960"/>
+            <a:ext cx="2384983" cy="640080"/>
           </a:xfrm>
           <a:prstGeom prst="rect">
             <a:avLst/>
@@ -11971,8 +11971,8 @@
         </p:nvSpPr>
         <p:spPr>
           <a:xfrm>
-            <a:off x="472287" y="1051560"/>
-            <a:ext cx="2606040" cy="5166360"/>
+            <a:off x="548640" y="1051560"/>
+            <a:ext cx="2567863" cy="5257800"/>
           </a:xfrm>
           <a:prstGeom prst="roundRect">
             <a:avLst>
@@ -12018,8 +12018,8 @@
         </p:nvSpPr>
         <p:spPr>
           <a:xfrm>
-            <a:off x="472287" y="1051560"/>
-            <a:ext cx="45720" cy="5166360"/>
+            <a:off x="548640" y="1051560"/>
+            <a:ext cx="45720" cy="5257800"/>
           </a:xfrm>
           <a:prstGeom prst="rect">
             <a:avLst/>
@@ -12061,7 +12061,7 @@
         </p:nvSpPr>
         <p:spPr>
           <a:xfrm>
-            <a:off x="609447" y="1188720"/>
+            <a:off x="685800" y="1188720"/>
             <a:ext cx="384048" cy="384048"/>
           </a:xfrm>
           <a:prstGeom prst="ellipse">
@@ -12104,7 +12104,7 @@
         </p:nvSpPr>
         <p:spPr>
           <a:xfrm>
-            <a:off x="609447" y="1188720"/>
+            <a:off x="685800" y="1188720"/>
             <a:ext cx="384048" cy="384048"/>
           </a:xfrm>
           <a:prstGeom prst="rect">
@@ -12144,8 +12144,8 @@
         </p:nvSpPr>
         <p:spPr>
           <a:xfrm>
-            <a:off x="609447" y="1691640"/>
-            <a:ext cx="2331720" cy="320040"/>
+            <a:off x="685800" y="1691640"/>
+            <a:ext cx="2293543" cy="274320"/>
           </a:xfrm>
           <a:prstGeom prst="rect">
             <a:avLst/>
@@ -12163,7 +12163,7 @@
               <a:spcAft>
                 <a:spcPts val="0"/>
               </a:spcAft>
-              <a:defRPr sz="1400" b="1">
+              <a:defRPr sz="1300" b="1">
                 <a:solidFill>
                   <a:srgbClr val="2563EB"/>
                 </a:solidFill>
@@ -12184,8 +12184,8 @@
         </p:nvSpPr>
         <p:spPr>
           <a:xfrm>
-            <a:off x="609447" y="2075688"/>
-            <a:ext cx="2331720" cy="228600"/>
+            <a:off x="685800" y="2011680"/>
+            <a:ext cx="2293543" cy="201168"/>
           </a:xfrm>
           <a:prstGeom prst="rect">
             <a:avLst/>
@@ -12203,7 +12203,7 @@
               <a:spcAft>
                 <a:spcPts val="0"/>
               </a:spcAft>
-              <a:defRPr sz="1000" b="0">
+              <a:defRPr sz="900" b="0">
                 <a:solidFill>
                   <a:srgbClr val="1A1A2E"/>
                 </a:solidFill>
@@ -12224,8 +12224,8 @@
         </p:nvSpPr>
         <p:spPr>
           <a:xfrm>
-            <a:off x="609447" y="2295144"/>
-            <a:ext cx="2331720" cy="228600"/>
+            <a:off x="685800" y="2212848"/>
+            <a:ext cx="2293543" cy="201168"/>
           </a:xfrm>
           <a:prstGeom prst="rect">
             <a:avLst/>
@@ -12243,7 +12243,7 @@
               <a:spcAft>
                 <a:spcPts val="0"/>
               </a:spcAft>
-              <a:defRPr sz="1000" b="0">
+              <a:defRPr sz="900" b="0">
                 <a:solidFill>
                   <a:srgbClr val="1A1A2E"/>
                 </a:solidFill>
@@ -12264,8 +12264,8 @@
         </p:nvSpPr>
         <p:spPr>
           <a:xfrm>
-            <a:off x="3352647" y="1051560"/>
-            <a:ext cx="2606040" cy="5166360"/>
+            <a:off x="3390823" y="1051560"/>
+            <a:ext cx="2567863" cy="5257800"/>
           </a:xfrm>
           <a:prstGeom prst="roundRect">
             <a:avLst>
@@ -12311,8 +12311,8 @@
         </p:nvSpPr>
         <p:spPr>
           <a:xfrm>
-            <a:off x="3352647" y="1051560"/>
-            <a:ext cx="45720" cy="5166360"/>
+            <a:off x="3390823" y="1051560"/>
+            <a:ext cx="45720" cy="5257800"/>
           </a:xfrm>
           <a:prstGeom prst="rect">
             <a:avLst/>
@@ -12354,7 +12354,7 @@
         </p:nvSpPr>
         <p:spPr>
           <a:xfrm>
-            <a:off x="3489807" y="1188720"/>
+            <a:off x="3527983" y="1188720"/>
             <a:ext cx="384048" cy="384048"/>
           </a:xfrm>
           <a:prstGeom prst="ellipse">
@@ -12397,7 +12397,7 @@
         </p:nvSpPr>
         <p:spPr>
           <a:xfrm>
-            <a:off x="3489807" y="1188720"/>
+            <a:off x="3527983" y="1188720"/>
             <a:ext cx="384048" cy="384048"/>
           </a:xfrm>
           <a:prstGeom prst="rect">
@@ -12437,8 +12437,8 @@
         </p:nvSpPr>
         <p:spPr>
           <a:xfrm>
-            <a:off x="3489807" y="1691640"/>
-            <a:ext cx="2331720" cy="320040"/>
+            <a:off x="3527983" y="1691640"/>
+            <a:ext cx="2293543" cy="274320"/>
           </a:xfrm>
           <a:prstGeom prst="rect">
             <a:avLst/>
@@ -12456,7 +12456,7 @@
               <a:spcAft>
                 <a:spcPts val="0"/>
               </a:spcAft>
-              <a:defRPr sz="1400" b="1">
+              <a:defRPr sz="1300" b="1">
                 <a:solidFill>
                   <a:srgbClr val="0D9488"/>
                 </a:solidFill>
@@ -12477,8 +12477,8 @@
         </p:nvSpPr>
         <p:spPr>
           <a:xfrm>
-            <a:off x="3489807" y="2075688"/>
-            <a:ext cx="2331720" cy="228600"/>
+            <a:off x="3527983" y="2011680"/>
+            <a:ext cx="2293543" cy="201168"/>
           </a:xfrm>
           <a:prstGeom prst="rect">
             <a:avLst/>
@@ -12496,7 +12496,7 @@
               <a:spcAft>
                 <a:spcPts val="0"/>
               </a:spcAft>
-              <a:defRPr sz="1000" b="0">
+              <a:defRPr sz="900" b="0">
                 <a:solidFill>
                   <a:srgbClr val="1A1A2E"/>
                 </a:solidFill>
@@ -12518,7 +12518,7 @@
         <p:spPr>
           <a:xfrm>
             <a:off x="6233007" y="1051560"/>
-            <a:ext cx="2606040" cy="5166360"/>
+            <a:ext cx="2567863" cy="5257800"/>
           </a:xfrm>
           <a:prstGeom prst="roundRect">
             <a:avLst>
@@ -12565,7 +12565,7 @@
         <p:spPr>
           <a:xfrm>
             <a:off x="6233007" y="1051560"/>
-            <a:ext cx="45720" cy="5166360"/>
+            <a:ext cx="45720" cy="5257800"/>
           </a:xfrm>
           <a:prstGeom prst="rect">
             <a:avLst/>
@@ -12691,7 +12691,7 @@
         <p:spPr>
           <a:xfrm>
             <a:off x="6370167" y="1691640"/>
-            <a:ext cx="2331720" cy="320040"/>
+            <a:ext cx="2293543" cy="274320"/>
           </a:xfrm>
           <a:prstGeom prst="rect">
             <a:avLst/>
@@ -12709,7 +12709,7 @@
               <a:spcAft>
                 <a:spcPts val="0"/>
               </a:spcAft>
-              <a:defRPr sz="1400" b="1">
+              <a:defRPr sz="1300" b="1">
                 <a:solidFill>
                   <a:srgbClr val="B8860B"/>
                 </a:solidFill>
@@ -12730,8 +12730,8 @@
         </p:nvSpPr>
         <p:spPr>
           <a:xfrm>
-            <a:off x="6370167" y="2075688"/>
-            <a:ext cx="2331720" cy="228600"/>
+            <a:off x="6370167" y="2011680"/>
+            <a:ext cx="2293543" cy="201168"/>
           </a:xfrm>
           <a:prstGeom prst="rect">
             <a:avLst/>
@@ -12749,7 +12749,7 @@
               <a:spcAft>
                 <a:spcPts val="0"/>
               </a:spcAft>
-              <a:defRPr sz="1000" b="0">
+              <a:defRPr sz="900" b="0">
                 <a:solidFill>
                   <a:srgbClr val="1A1A2E"/>
                 </a:solidFill>
@@ -12770,8 +12770,8 @@
         </p:nvSpPr>
         <p:spPr>
           <a:xfrm>
-            <a:off x="6370167" y="2295144"/>
-            <a:ext cx="2331720" cy="228600"/>
+            <a:off x="6370167" y="2212848"/>
+            <a:ext cx="2293543" cy="201168"/>
           </a:xfrm>
           <a:prstGeom prst="rect">
             <a:avLst/>
@@ -12789,7 +12789,7 @@
               <a:spcAft>
                 <a:spcPts val="0"/>
               </a:spcAft>
-              <a:defRPr sz="1000" b="0">
+              <a:defRPr sz="900" b="0">
                 <a:solidFill>
                   <a:srgbClr val="1A1A2E"/>
                 </a:solidFill>
@@ -12810,8 +12810,8 @@
         </p:nvSpPr>
         <p:spPr>
           <a:xfrm>
-            <a:off x="9113367" y="1051560"/>
-            <a:ext cx="2606040" cy="5166360"/>
+            <a:off x="9075191" y="1051560"/>
+            <a:ext cx="2567863" cy="5257800"/>
           </a:xfrm>
           <a:prstGeom prst="roundRect">
             <a:avLst>
@@ -12857,8 +12857,8 @@
         </p:nvSpPr>
         <p:spPr>
           <a:xfrm>
-            <a:off x="9113367" y="1051560"/>
-            <a:ext cx="45720" cy="5166360"/>
+            <a:off x="9075191" y="1051560"/>
+            <a:ext cx="45720" cy="5257800"/>
           </a:xfrm>
           <a:prstGeom prst="rect">
             <a:avLst/>
@@ -12900,7 +12900,7 @@
         </p:nvSpPr>
         <p:spPr>
           <a:xfrm>
-            <a:off x="9250527" y="1188720"/>
+            <a:off x="9212351" y="1188720"/>
             <a:ext cx="384048" cy="384048"/>
           </a:xfrm>
           <a:prstGeom prst="ellipse">
@@ -12943,7 +12943,7 @@
         </p:nvSpPr>
         <p:spPr>
           <a:xfrm>
-            <a:off x="9250527" y="1188720"/>
+            <a:off x="9212351" y="1188720"/>
             <a:ext cx="384048" cy="384048"/>
           </a:xfrm>
           <a:prstGeom prst="rect">
@@ -12983,8 +12983,8 @@
         </p:nvSpPr>
         <p:spPr>
           <a:xfrm>
-            <a:off x="9250527" y="1691640"/>
-            <a:ext cx="2331720" cy="320040"/>
+            <a:off x="9212351" y="1691640"/>
+            <a:ext cx="2293543" cy="274320"/>
           </a:xfrm>
           <a:prstGeom prst="rect">
             <a:avLst/>
@@ -13002,7 +13002,7 @@
               <a:spcAft>
                 <a:spcPts val="0"/>
               </a:spcAft>
-              <a:defRPr sz="1400" b="1">
+              <a:defRPr sz="1300" b="1">
                 <a:solidFill>
                   <a:srgbClr val="DC2626"/>
                 </a:solidFill>
@@ -13023,8 +13023,8 @@
         </p:nvSpPr>
         <p:spPr>
           <a:xfrm>
-            <a:off x="9250527" y="2075688"/>
-            <a:ext cx="2331720" cy="228600"/>
+            <a:off x="9212351" y="2011680"/>
+            <a:ext cx="2293543" cy="201168"/>
           </a:xfrm>
           <a:prstGeom prst="rect">
             <a:avLst/>
@@ -13042,7 +13042,7 @@
               <a:spcAft>
                 <a:spcPts val="0"/>
               </a:spcAft>
-              <a:defRPr sz="1000" b="0">
+              <a:defRPr sz="900" b="0">
                 <a:solidFill>
                   <a:srgbClr val="1A1A2E"/>
                 </a:solidFill>
@@ -13063,8 +13063,8 @@
         </p:nvSpPr>
         <p:spPr>
           <a:xfrm>
-            <a:off x="9250527" y="2295144"/>
-            <a:ext cx="2331720" cy="228600"/>
+            <a:off x="9212351" y="2212848"/>
+            <a:ext cx="2293543" cy="201168"/>
           </a:xfrm>
           <a:prstGeom prst="rect">
             <a:avLst/>
@@ -13082,7 +13082,7 @@
               <a:spcAft>
                 <a:spcPts val="0"/>
               </a:spcAft>
-              <a:defRPr sz="1000" b="0">
+              <a:defRPr sz="900" b="0">
                 <a:solidFill>
                   <a:srgbClr val="1A1A2E"/>
                 </a:solidFill>
@@ -15359,8 +15359,8 @@
         </p:nvSpPr>
         <p:spPr>
           <a:xfrm>
-            <a:off x="472287" y="1051560"/>
-            <a:ext cx="2606040" cy="5166360"/>
+            <a:off x="548640" y="1051560"/>
+            <a:ext cx="2567863" cy="5257800"/>
           </a:xfrm>
           <a:prstGeom prst="roundRect">
             <a:avLst>
@@ -15406,8 +15406,8 @@
         </p:nvSpPr>
         <p:spPr>
           <a:xfrm>
-            <a:off x="472287" y="1051560"/>
-            <a:ext cx="45720" cy="5166360"/>
+            <a:off x="548640" y="1051560"/>
+            <a:ext cx="45720" cy="5257800"/>
           </a:xfrm>
           <a:prstGeom prst="rect">
             <a:avLst/>
@@ -15449,7 +15449,7 @@
         </p:nvSpPr>
         <p:spPr>
           <a:xfrm>
-            <a:off x="609447" y="1188720"/>
+            <a:off x="685800" y="1188720"/>
             <a:ext cx="384048" cy="384048"/>
           </a:xfrm>
           <a:prstGeom prst="ellipse">
@@ -15492,7 +15492,7 @@
         </p:nvSpPr>
         <p:spPr>
           <a:xfrm>
-            <a:off x="609447" y="1188720"/>
+            <a:off x="685800" y="1188720"/>
             <a:ext cx="384048" cy="384048"/>
           </a:xfrm>
           <a:prstGeom prst="rect">
@@ -15532,8 +15532,8 @@
         </p:nvSpPr>
         <p:spPr>
           <a:xfrm>
-            <a:off x="609447" y="1691640"/>
-            <a:ext cx="2331720" cy="320040"/>
+            <a:off x="685800" y="1691640"/>
+            <a:ext cx="2293543" cy="274320"/>
           </a:xfrm>
           <a:prstGeom prst="rect">
             <a:avLst/>
@@ -15551,7 +15551,7 @@
               <a:spcAft>
                 <a:spcPts val="0"/>
               </a:spcAft>
-              <a:defRPr sz="1400" b="1">
+              <a:defRPr sz="1300" b="1">
                 <a:solidFill>
                   <a:srgbClr val="2563EB"/>
                 </a:solidFill>
@@ -15572,8 +15572,8 @@
         </p:nvSpPr>
         <p:spPr>
           <a:xfrm>
-            <a:off x="609447" y="2075688"/>
-            <a:ext cx="2331720" cy="228600"/>
+            <a:off x="685800" y="2011680"/>
+            <a:ext cx="2293543" cy="201168"/>
           </a:xfrm>
           <a:prstGeom prst="rect">
             <a:avLst/>
@@ -15591,7 +15591,7 @@
               <a:spcAft>
                 <a:spcPts val="0"/>
               </a:spcAft>
-              <a:defRPr sz="1000" b="0">
+              <a:defRPr sz="900" b="0">
                 <a:solidFill>
                   <a:srgbClr val="1A1A2E"/>
                 </a:solidFill>
@@ -15612,8 +15612,8 @@
         </p:nvSpPr>
         <p:spPr>
           <a:xfrm>
-            <a:off x="609447" y="2295144"/>
-            <a:ext cx="2331720" cy="228600"/>
+            <a:off x="685800" y="2212848"/>
+            <a:ext cx="2293543" cy="201168"/>
           </a:xfrm>
           <a:prstGeom prst="rect">
             <a:avLst/>
@@ -15631,7 +15631,7 @@
               <a:spcAft>
                 <a:spcPts val="0"/>
               </a:spcAft>
-              <a:defRPr sz="1000" b="0">
+              <a:defRPr sz="900" b="0">
                 <a:solidFill>
                   <a:srgbClr val="1A1A2E"/>
                 </a:solidFill>
@@ -15652,8 +15652,8 @@
         </p:nvSpPr>
         <p:spPr>
           <a:xfrm>
-            <a:off x="3352647" y="1051560"/>
-            <a:ext cx="2606040" cy="5166360"/>
+            <a:off x="3390823" y="1051560"/>
+            <a:ext cx="2567863" cy="5257800"/>
           </a:xfrm>
           <a:prstGeom prst="roundRect">
             <a:avLst>
@@ -15699,8 +15699,8 @@
         </p:nvSpPr>
         <p:spPr>
           <a:xfrm>
-            <a:off x="3352647" y="1051560"/>
-            <a:ext cx="45720" cy="5166360"/>
+            <a:off x="3390823" y="1051560"/>
+            <a:ext cx="45720" cy="5257800"/>
           </a:xfrm>
           <a:prstGeom prst="rect">
             <a:avLst/>
@@ -15742,7 +15742,7 @@
         </p:nvSpPr>
         <p:spPr>
           <a:xfrm>
-            <a:off x="3489807" y="1188720"/>
+            <a:off x="3527983" y="1188720"/>
             <a:ext cx="384048" cy="384048"/>
           </a:xfrm>
           <a:prstGeom prst="ellipse">
@@ -15785,7 +15785,7 @@
         </p:nvSpPr>
         <p:spPr>
           <a:xfrm>
-            <a:off x="3489807" y="1188720"/>
+            <a:off x="3527983" y="1188720"/>
             <a:ext cx="384048" cy="384048"/>
           </a:xfrm>
           <a:prstGeom prst="rect">
@@ -15825,8 +15825,8 @@
         </p:nvSpPr>
         <p:spPr>
           <a:xfrm>
-            <a:off x="3489807" y="1691640"/>
-            <a:ext cx="2331720" cy="320040"/>
+            <a:off x="3527983" y="1691640"/>
+            <a:ext cx="2293543" cy="274320"/>
           </a:xfrm>
           <a:prstGeom prst="rect">
             <a:avLst/>
@@ -15844,7 +15844,7 @@
               <a:spcAft>
                 <a:spcPts val="0"/>
               </a:spcAft>
-              <a:defRPr sz="1400" b="1">
+              <a:defRPr sz="1300" b="1">
                 <a:solidFill>
                   <a:srgbClr val="0D9488"/>
                 </a:solidFill>
@@ -15865,8 +15865,8 @@
         </p:nvSpPr>
         <p:spPr>
           <a:xfrm>
-            <a:off x="3489807" y="2075688"/>
-            <a:ext cx="2331720" cy="228600"/>
+            <a:off x="3527983" y="2011680"/>
+            <a:ext cx="2293543" cy="201168"/>
           </a:xfrm>
           <a:prstGeom prst="rect">
             <a:avLst/>
@@ -15884,7 +15884,7 @@
               <a:spcAft>
                 <a:spcPts val="0"/>
               </a:spcAft>
-              <a:defRPr sz="1000" b="0">
+              <a:defRPr sz="900" b="0">
                 <a:solidFill>
                   <a:srgbClr val="1A1A2E"/>
                 </a:solidFill>
@@ -15905,8 +15905,8 @@
         </p:nvSpPr>
         <p:spPr>
           <a:xfrm>
-            <a:off x="3489807" y="2295144"/>
-            <a:ext cx="2331720" cy="228600"/>
+            <a:off x="3527983" y="2212848"/>
+            <a:ext cx="2293543" cy="201168"/>
           </a:xfrm>
           <a:prstGeom prst="rect">
             <a:avLst/>
@@ -15924,7 +15924,7 @@
               <a:spcAft>
                 <a:spcPts val="0"/>
               </a:spcAft>
-              <a:defRPr sz="1000" b="0">
+              <a:defRPr sz="900" b="0">
                 <a:solidFill>
                   <a:srgbClr val="1A1A2E"/>
                 </a:solidFill>
@@ -15946,7 +15946,7 @@
         <p:spPr>
           <a:xfrm>
             <a:off x="6233007" y="1051560"/>
-            <a:ext cx="2606040" cy="5166360"/>
+            <a:ext cx="2567863" cy="5257800"/>
           </a:xfrm>
           <a:prstGeom prst="roundRect">
             <a:avLst>
@@ -15993,7 +15993,7 @@
         <p:spPr>
           <a:xfrm>
             <a:off x="6233007" y="1051560"/>
-            <a:ext cx="45720" cy="5166360"/>
+            <a:ext cx="45720" cy="5257800"/>
           </a:xfrm>
           <a:prstGeom prst="rect">
             <a:avLst/>
@@ -16119,7 +16119,7 @@
         <p:spPr>
           <a:xfrm>
             <a:off x="6370167" y="1691640"/>
-            <a:ext cx="2331720" cy="320040"/>
+            <a:ext cx="2293543" cy="274320"/>
           </a:xfrm>
           <a:prstGeom prst="rect">
             <a:avLst/>
@@ -16137,7 +16137,7 @@
               <a:spcAft>
                 <a:spcPts val="0"/>
               </a:spcAft>
-              <a:defRPr sz="1400" b="1">
+              <a:defRPr sz="1300" b="1">
                 <a:solidFill>
                   <a:srgbClr val="B8860B"/>
                 </a:solidFill>
@@ -16158,8 +16158,8 @@
         </p:nvSpPr>
         <p:spPr>
           <a:xfrm>
-            <a:off x="6370167" y="2075688"/>
-            <a:ext cx="2331720" cy="228600"/>
+            <a:off x="6370167" y="2011680"/>
+            <a:ext cx="2293543" cy="201168"/>
           </a:xfrm>
           <a:prstGeom prst="rect">
             <a:avLst/>
@@ -16177,7 +16177,7 @@
               <a:spcAft>
                 <a:spcPts val="0"/>
               </a:spcAft>
-              <a:defRPr sz="1000" b="0">
+              <a:defRPr sz="900" b="0">
                 <a:solidFill>
                   <a:srgbClr val="1A1A2E"/>
                 </a:solidFill>
@@ -16198,8 +16198,8 @@
         </p:nvSpPr>
         <p:spPr>
           <a:xfrm>
-            <a:off x="9113367" y="1051560"/>
-            <a:ext cx="2606040" cy="5166360"/>
+            <a:off x="9075191" y="1051560"/>
+            <a:ext cx="2567863" cy="5257800"/>
           </a:xfrm>
           <a:prstGeom prst="roundRect">
             <a:avLst>
@@ -16245,8 +16245,8 @@
         </p:nvSpPr>
         <p:spPr>
           <a:xfrm>
-            <a:off x="9113367" y="1051560"/>
-            <a:ext cx="45720" cy="5166360"/>
+            <a:off x="9075191" y="1051560"/>
+            <a:ext cx="45720" cy="5257800"/>
           </a:xfrm>
           <a:prstGeom prst="rect">
             <a:avLst/>
@@ -16288,7 +16288,7 @@
         </p:nvSpPr>
         <p:spPr>
           <a:xfrm>
-            <a:off x="9250527" y="1188720"/>
+            <a:off x="9212351" y="1188720"/>
             <a:ext cx="384048" cy="384048"/>
           </a:xfrm>
           <a:prstGeom prst="ellipse">
@@ -16331,7 +16331,7 @@
         </p:nvSpPr>
         <p:spPr>
           <a:xfrm>
-            <a:off x="9250527" y="1188720"/>
+            <a:off x="9212351" y="1188720"/>
             <a:ext cx="384048" cy="384048"/>
           </a:xfrm>
           <a:prstGeom prst="rect">
@@ -16371,8 +16371,8 @@
         </p:nvSpPr>
         <p:spPr>
           <a:xfrm>
-            <a:off x="9250527" y="1691640"/>
-            <a:ext cx="2331720" cy="320040"/>
+            <a:off x="9212351" y="1691640"/>
+            <a:ext cx="2293543" cy="274320"/>
           </a:xfrm>
           <a:prstGeom prst="rect">
             <a:avLst/>
@@ -16390,7 +16390,7 @@
               <a:spcAft>
                 <a:spcPts val="0"/>
               </a:spcAft>
-              <a:defRPr sz="1400" b="1">
+              <a:defRPr sz="1300" b="1">
                 <a:solidFill>
                   <a:srgbClr val="DC2626"/>
                 </a:solidFill>
@@ -16411,8 +16411,8 @@
         </p:nvSpPr>
         <p:spPr>
           <a:xfrm>
-            <a:off x="9250527" y="2075688"/>
-            <a:ext cx="2331720" cy="228600"/>
+            <a:off x="9212351" y="2011680"/>
+            <a:ext cx="2293543" cy="201168"/>
           </a:xfrm>
           <a:prstGeom prst="rect">
             <a:avLst/>
@@ -16430,7 +16430,7 @@
               <a:spcAft>
                 <a:spcPts val="0"/>
               </a:spcAft>
-              <a:defRPr sz="1000" b="0">
+              <a:defRPr sz="900" b="0">
                 <a:solidFill>
                   <a:srgbClr val="1A1A2E"/>
                 </a:solidFill>
@@ -17257,8 +17257,8 @@
         </p:nvSpPr>
         <p:spPr>
           <a:xfrm>
-            <a:off x="655167" y="1188720"/>
-            <a:ext cx="2377440" cy="1828800"/>
+            <a:off x="548640" y="1188720"/>
+            <a:ext cx="2533573" cy="1828800"/>
           </a:xfrm>
           <a:prstGeom prst="roundRect">
             <a:avLst>
@@ -17304,8 +17304,8 @@
         </p:nvSpPr>
         <p:spPr>
           <a:xfrm>
-            <a:off x="655167" y="1188720"/>
-            <a:ext cx="2377440" cy="45720"/>
+            <a:off x="548640" y="1188720"/>
+            <a:ext cx="2533573" cy="45720"/>
           </a:xfrm>
           <a:prstGeom prst="rect">
             <a:avLst/>
@@ -17347,7 +17347,7 @@
         </p:nvSpPr>
         <p:spPr>
           <a:xfrm>
-            <a:off x="1615287" y="1325880"/>
+            <a:off x="1586826" y="1325880"/>
             <a:ext cx="457200" cy="457200"/>
           </a:xfrm>
           <a:prstGeom prst="ellipse">
@@ -17390,7 +17390,7 @@
         </p:nvSpPr>
         <p:spPr>
           <a:xfrm>
-            <a:off x="1615287" y="1325880"/>
+            <a:off x="1586826" y="1325880"/>
             <a:ext cx="457200" cy="457200"/>
           </a:xfrm>
           <a:prstGeom prst="rect">
@@ -17430,8 +17430,8 @@
         </p:nvSpPr>
         <p:spPr>
           <a:xfrm>
-            <a:off x="746607" y="1874520"/>
-            <a:ext cx="2194560" cy="320040"/>
+            <a:off x="640080" y="1874520"/>
+            <a:ext cx="2350693" cy="320040"/>
           </a:xfrm>
           <a:prstGeom prst="rect">
             <a:avLst/>
@@ -17470,8 +17470,8 @@
         </p:nvSpPr>
         <p:spPr>
           <a:xfrm>
-            <a:off x="746607" y="2194560"/>
-            <a:ext cx="2194560" cy="640080"/>
+            <a:off x="640080" y="2194560"/>
+            <a:ext cx="2350693" cy="640080"/>
           </a:xfrm>
           <a:prstGeom prst="rect">
             <a:avLst/>
@@ -17514,8 +17514,8 @@
         </p:nvSpPr>
         <p:spPr>
           <a:xfrm>
-            <a:off x="3032607" y="1828800"/>
-            <a:ext cx="457200" cy="457200"/>
+            <a:off x="3082213" y="1828800"/>
+            <a:ext cx="320040" cy="457200"/>
           </a:xfrm>
           <a:prstGeom prst="rect">
             <a:avLst/>
@@ -17554,8 +17554,8 @@
         </p:nvSpPr>
         <p:spPr>
           <a:xfrm>
-            <a:off x="3489807" y="1188720"/>
-            <a:ext cx="2377440" cy="1828800"/>
+            <a:off x="3402253" y="1188720"/>
+            <a:ext cx="2533573" cy="1828800"/>
           </a:xfrm>
           <a:prstGeom prst="roundRect">
             <a:avLst>
@@ -17601,8 +17601,8 @@
         </p:nvSpPr>
         <p:spPr>
           <a:xfrm>
-            <a:off x="3489807" y="1188720"/>
-            <a:ext cx="2377440" cy="45720"/>
+            <a:off x="3402253" y="1188720"/>
+            <a:ext cx="2533573" cy="45720"/>
           </a:xfrm>
           <a:prstGeom prst="rect">
             <a:avLst/>
@@ -17644,7 +17644,7 @@
         </p:nvSpPr>
         <p:spPr>
           <a:xfrm>
-            <a:off x="4449927" y="1325880"/>
+            <a:off x="4440440" y="1325880"/>
             <a:ext cx="457200" cy="457200"/>
           </a:xfrm>
           <a:prstGeom prst="ellipse">
@@ -17687,7 +17687,7 @@
         </p:nvSpPr>
         <p:spPr>
           <a:xfrm>
-            <a:off x="4449927" y="1325880"/>
+            <a:off x="4440440" y="1325880"/>
             <a:ext cx="457200" cy="457200"/>
           </a:xfrm>
           <a:prstGeom prst="rect">
@@ -17727,8 +17727,8 @@
         </p:nvSpPr>
         <p:spPr>
           <a:xfrm>
-            <a:off x="3581247" y="1874520"/>
-            <a:ext cx="2194560" cy="320040"/>
+            <a:off x="3493693" y="1874520"/>
+            <a:ext cx="2350693" cy="320040"/>
           </a:xfrm>
           <a:prstGeom prst="rect">
             <a:avLst/>
@@ -17767,8 +17767,8 @@
         </p:nvSpPr>
         <p:spPr>
           <a:xfrm>
-            <a:off x="3581247" y="2194560"/>
-            <a:ext cx="2194560" cy="640080"/>
+            <a:off x="3493693" y="2194560"/>
+            <a:ext cx="2350693" cy="640080"/>
           </a:xfrm>
           <a:prstGeom prst="rect">
             <a:avLst/>
@@ -17811,8 +17811,8 @@
         </p:nvSpPr>
         <p:spPr>
           <a:xfrm>
-            <a:off x="5867247" y="1828800"/>
-            <a:ext cx="457200" cy="457200"/>
+            <a:off x="5935827" y="1828800"/>
+            <a:ext cx="320040" cy="457200"/>
           </a:xfrm>
           <a:prstGeom prst="rect">
             <a:avLst/>
@@ -17851,8 +17851,8 @@
         </p:nvSpPr>
         <p:spPr>
           <a:xfrm>
-            <a:off x="6324447" y="1188720"/>
-            <a:ext cx="2377440" cy="1828800"/>
+            <a:off x="6255867" y="1188720"/>
+            <a:ext cx="2533573" cy="1828800"/>
           </a:xfrm>
           <a:prstGeom prst="roundRect">
             <a:avLst>
@@ -17898,8 +17898,8 @@
         </p:nvSpPr>
         <p:spPr>
           <a:xfrm>
-            <a:off x="6324447" y="1188720"/>
-            <a:ext cx="2377440" cy="45720"/>
+            <a:off x="6255867" y="1188720"/>
+            <a:ext cx="2533573" cy="45720"/>
           </a:xfrm>
           <a:prstGeom prst="rect">
             <a:avLst/>
@@ -17941,7 +17941,7 @@
         </p:nvSpPr>
         <p:spPr>
           <a:xfrm>
-            <a:off x="7284567" y="1325880"/>
+            <a:off x="7294054" y="1325880"/>
             <a:ext cx="457200" cy="457200"/>
           </a:xfrm>
           <a:prstGeom prst="ellipse">
@@ -17984,7 +17984,7 @@
         </p:nvSpPr>
         <p:spPr>
           <a:xfrm>
-            <a:off x="7284567" y="1325880"/>
+            <a:off x="7294054" y="1325880"/>
             <a:ext cx="457200" cy="457200"/>
           </a:xfrm>
           <a:prstGeom prst="rect">
@@ -18024,8 +18024,8 @@
         </p:nvSpPr>
         <p:spPr>
           <a:xfrm>
-            <a:off x="6415887" y="1874520"/>
-            <a:ext cx="2194560" cy="320040"/>
+            <a:off x="6347307" y="1874520"/>
+            <a:ext cx="2350693" cy="320040"/>
           </a:xfrm>
           <a:prstGeom prst="rect">
             <a:avLst/>
@@ -18064,8 +18064,8 @@
         </p:nvSpPr>
         <p:spPr>
           <a:xfrm>
-            <a:off x="6415887" y="2194560"/>
-            <a:ext cx="2194560" cy="640080"/>
+            <a:off x="6347307" y="2194560"/>
+            <a:ext cx="2350693" cy="640080"/>
           </a:xfrm>
           <a:prstGeom prst="rect">
             <a:avLst/>
@@ -18108,8 +18108,8 @@
         </p:nvSpPr>
         <p:spPr>
           <a:xfrm>
-            <a:off x="8701887" y="1828800"/>
-            <a:ext cx="457200" cy="457200"/>
+            <a:off x="8789441" y="1828800"/>
+            <a:ext cx="320040" cy="457200"/>
           </a:xfrm>
           <a:prstGeom prst="rect">
             <a:avLst/>
@@ -18148,8 +18148,8 @@
         </p:nvSpPr>
         <p:spPr>
           <a:xfrm>
-            <a:off x="9159087" y="1188720"/>
-            <a:ext cx="2377440" cy="1828800"/>
+            <a:off x="9109481" y="1188720"/>
+            <a:ext cx="2533573" cy="1828800"/>
           </a:xfrm>
           <a:prstGeom prst="roundRect">
             <a:avLst>
@@ -18195,8 +18195,8 @@
         </p:nvSpPr>
         <p:spPr>
           <a:xfrm>
-            <a:off x="9159087" y="1188720"/>
-            <a:ext cx="2377440" cy="45720"/>
+            <a:off x="9109481" y="1188720"/>
+            <a:ext cx="2533573" cy="45720"/>
           </a:xfrm>
           <a:prstGeom prst="rect">
             <a:avLst/>
@@ -18238,7 +18238,7 @@
         </p:nvSpPr>
         <p:spPr>
           <a:xfrm>
-            <a:off x="10119207" y="1325880"/>
+            <a:off x="10147668" y="1325880"/>
             <a:ext cx="457200" cy="457200"/>
           </a:xfrm>
           <a:prstGeom prst="ellipse">
@@ -18281,7 +18281,7 @@
         </p:nvSpPr>
         <p:spPr>
           <a:xfrm>
-            <a:off x="10119207" y="1325880"/>
+            <a:off x="10147668" y="1325880"/>
             <a:ext cx="457200" cy="457200"/>
           </a:xfrm>
           <a:prstGeom prst="rect">
@@ -18321,8 +18321,8 @@
         </p:nvSpPr>
         <p:spPr>
           <a:xfrm>
-            <a:off x="9250527" y="1874520"/>
-            <a:ext cx="2194560" cy="320040"/>
+            <a:off x="9200921" y="1874520"/>
+            <a:ext cx="2350693" cy="320040"/>
           </a:xfrm>
           <a:prstGeom prst="rect">
             <a:avLst/>
@@ -18361,8 +18361,8 @@
         </p:nvSpPr>
         <p:spPr>
           <a:xfrm>
-            <a:off x="9250527" y="2194560"/>
-            <a:ext cx="2194560" cy="640080"/>
+            <a:off x="9200921" y="2194560"/>
+            <a:ext cx="2350693" cy="640080"/>
           </a:xfrm>
           <a:prstGeom prst="rect">
             <a:avLst/>
@@ -19311,7 +19311,7 @@
         <p:spPr>
           <a:xfrm>
             <a:off x="548640" y="1051560"/>
-            <a:ext cx="5303520" cy="5166360"/>
+            <a:ext cx="5410047" cy="5166360"/>
           </a:xfrm>
           <a:prstGeom prst="roundRect">
             <a:avLst>
@@ -19401,7 +19401,7 @@
         <p:spPr>
           <a:xfrm>
             <a:off x="731520" y="1188720"/>
-            <a:ext cx="4983480" cy="274320"/>
+            <a:ext cx="5090007" cy="274320"/>
           </a:xfrm>
           <a:prstGeom prst="rect">
             <a:avLst/>
@@ -19441,7 +19441,7 @@
         <p:spPr>
           <a:xfrm>
             <a:off x="731520" y="1481328"/>
-            <a:ext cx="4983480" cy="201168"/>
+            <a:ext cx="5090007" cy="201168"/>
           </a:xfrm>
           <a:prstGeom prst="rect">
             <a:avLst/>
@@ -19481,7 +19481,7 @@
         <p:spPr>
           <a:xfrm>
             <a:off x="731520" y="1700784"/>
-            <a:ext cx="4983480" cy="201168"/>
+            <a:ext cx="5090007" cy="201168"/>
           </a:xfrm>
           <a:prstGeom prst="rect">
             <a:avLst/>
@@ -19521,7 +19521,7 @@
         <p:spPr>
           <a:xfrm>
             <a:off x="731520" y="1920240"/>
-            <a:ext cx="4983480" cy="201168"/>
+            <a:ext cx="5090007" cy="201168"/>
           </a:xfrm>
           <a:prstGeom prst="rect">
             <a:avLst/>
@@ -19561,7 +19561,7 @@
         <p:spPr>
           <a:xfrm>
             <a:off x="731520" y="2139696"/>
-            <a:ext cx="4983480" cy="201168"/>
+            <a:ext cx="5090007" cy="201168"/>
           </a:xfrm>
           <a:prstGeom prst="rect">
             <a:avLst/>
@@ -19601,7 +19601,7 @@
         <p:spPr>
           <a:xfrm>
             <a:off x="731520" y="2359152"/>
-            <a:ext cx="4983480" cy="201168"/>
+            <a:ext cx="5090007" cy="201168"/>
           </a:xfrm>
           <a:prstGeom prst="rect">
             <a:avLst/>
@@ -19641,7 +19641,7 @@
         <p:spPr>
           <a:xfrm>
             <a:off x="731520" y="2578608"/>
-            <a:ext cx="4983480" cy="201168"/>
+            <a:ext cx="5090007" cy="201168"/>
           </a:xfrm>
           <a:prstGeom prst="rect">
             <a:avLst/>
@@ -19681,7 +19681,7 @@
         <p:spPr>
           <a:xfrm>
             <a:off x="731520" y="2798064"/>
-            <a:ext cx="4983480" cy="201168"/>
+            <a:ext cx="5090007" cy="201168"/>
           </a:xfrm>
           <a:prstGeom prst="rect">
             <a:avLst/>
@@ -19721,7 +19721,7 @@
         <p:spPr>
           <a:xfrm>
             <a:off x="731520" y="3017520"/>
-            <a:ext cx="4983480" cy="201168"/>
+            <a:ext cx="5090007" cy="201168"/>
           </a:xfrm>
           <a:prstGeom prst="rect">
             <a:avLst/>
@@ -19761,7 +19761,7 @@
         <p:spPr>
           <a:xfrm>
             <a:off x="731520" y="3236976"/>
-            <a:ext cx="4983480" cy="201168"/>
+            <a:ext cx="5090007" cy="201168"/>
           </a:xfrm>
           <a:prstGeom prst="rect">
             <a:avLst/>
@@ -19800,8 +19800,8 @@
         </p:nvSpPr>
         <p:spPr>
           <a:xfrm>
-            <a:off x="6172200" y="1051560"/>
-            <a:ext cx="5303520" cy="5166360"/>
+            <a:off x="6233007" y="1051560"/>
+            <a:ext cx="5410047" cy="5166360"/>
           </a:xfrm>
           <a:prstGeom prst="roundRect">
             <a:avLst>
@@ -19847,7 +19847,7 @@
         </p:nvSpPr>
         <p:spPr>
           <a:xfrm>
-            <a:off x="6172200" y="1051560"/>
+            <a:off x="6233007" y="1051560"/>
             <a:ext cx="45720" cy="5166360"/>
           </a:xfrm>
           <a:prstGeom prst="rect">
@@ -19890,8 +19890,8 @@
         </p:nvSpPr>
         <p:spPr>
           <a:xfrm>
-            <a:off x="6355080" y="1188720"/>
-            <a:ext cx="4983480" cy="274320"/>
+            <a:off x="6415887" y="1188720"/>
+            <a:ext cx="5090007" cy="274320"/>
           </a:xfrm>
           <a:prstGeom prst="rect">
             <a:avLst/>
@@ -19930,8 +19930,8 @@
         </p:nvSpPr>
         <p:spPr>
           <a:xfrm>
-            <a:off x="6355080" y="1481328"/>
-            <a:ext cx="4983480" cy="201168"/>
+            <a:off x="6415887" y="1481328"/>
+            <a:ext cx="5090007" cy="201168"/>
           </a:xfrm>
           <a:prstGeom prst="rect">
             <a:avLst/>
@@ -19970,8 +19970,8 @@
         </p:nvSpPr>
         <p:spPr>
           <a:xfrm>
-            <a:off x="6355080" y="1700784"/>
-            <a:ext cx="4983480" cy="201168"/>
+            <a:off x="6415887" y="1700784"/>
+            <a:ext cx="5090007" cy="201168"/>
           </a:xfrm>
           <a:prstGeom prst="rect">
             <a:avLst/>
@@ -20010,8 +20010,8 @@
         </p:nvSpPr>
         <p:spPr>
           <a:xfrm>
-            <a:off x="6355080" y="1920240"/>
-            <a:ext cx="4983480" cy="201168"/>
+            <a:off x="6415887" y="1920240"/>
+            <a:ext cx="5090007" cy="201168"/>
           </a:xfrm>
           <a:prstGeom prst="rect">
             <a:avLst/>
@@ -20050,8 +20050,8 @@
         </p:nvSpPr>
         <p:spPr>
           <a:xfrm>
-            <a:off x="6355080" y="2139696"/>
-            <a:ext cx="4983480" cy="201168"/>
+            <a:off x="6415887" y="2139696"/>
+            <a:ext cx="5090007" cy="201168"/>
           </a:xfrm>
           <a:prstGeom prst="rect">
             <a:avLst/>
@@ -20090,8 +20090,8 @@
         </p:nvSpPr>
         <p:spPr>
           <a:xfrm>
-            <a:off x="6355080" y="2359152"/>
-            <a:ext cx="4983480" cy="201168"/>
+            <a:off x="6415887" y="2359152"/>
+            <a:ext cx="5090007" cy="201168"/>
           </a:xfrm>
           <a:prstGeom prst="rect">
             <a:avLst/>
@@ -20130,8 +20130,8 @@
         </p:nvSpPr>
         <p:spPr>
           <a:xfrm>
-            <a:off x="6355080" y="2578608"/>
-            <a:ext cx="4983480" cy="201168"/>
+            <a:off x="6415887" y="2578608"/>
+            <a:ext cx="5090007" cy="201168"/>
           </a:xfrm>
           <a:prstGeom prst="rect">
             <a:avLst/>
@@ -20529,7 +20529,7 @@
         <p:spPr>
           <a:xfrm>
             <a:off x="548640" y="1051560"/>
-            <a:ext cx="5303520" cy="5166360"/>
+            <a:ext cx="5410047" cy="5166360"/>
           </a:xfrm>
           <a:prstGeom prst="roundRect">
             <a:avLst>
@@ -20619,7 +20619,7 @@
         <p:spPr>
           <a:xfrm>
             <a:off x="731520" y="1188720"/>
-            <a:ext cx="4983480" cy="274320"/>
+            <a:ext cx="5090007" cy="274320"/>
           </a:xfrm>
           <a:prstGeom prst="rect">
             <a:avLst/>
@@ -20659,7 +20659,7 @@
         <p:spPr>
           <a:xfrm>
             <a:off x="731520" y="1481328"/>
-            <a:ext cx="4983480" cy="201168"/>
+            <a:ext cx="5090007" cy="201168"/>
           </a:xfrm>
           <a:prstGeom prst="rect">
             <a:avLst/>
@@ -20699,7 +20699,7 @@
         <p:spPr>
           <a:xfrm>
             <a:off x="731520" y="1700784"/>
-            <a:ext cx="4983480" cy="201168"/>
+            <a:ext cx="5090007" cy="201168"/>
           </a:xfrm>
           <a:prstGeom prst="rect">
             <a:avLst/>
@@ -20739,7 +20739,7 @@
         <p:spPr>
           <a:xfrm>
             <a:off x="731520" y="1920240"/>
-            <a:ext cx="4983480" cy="201168"/>
+            <a:ext cx="5090007" cy="201168"/>
           </a:xfrm>
           <a:prstGeom prst="rect">
             <a:avLst/>
@@ -20779,7 +20779,7 @@
         <p:spPr>
           <a:xfrm>
             <a:off x="731520" y="2139696"/>
-            <a:ext cx="4983480" cy="201168"/>
+            <a:ext cx="5090007" cy="201168"/>
           </a:xfrm>
           <a:prstGeom prst="rect">
             <a:avLst/>
@@ -20819,7 +20819,7 @@
         <p:spPr>
           <a:xfrm>
             <a:off x="731520" y="2359152"/>
-            <a:ext cx="4983480" cy="201168"/>
+            <a:ext cx="5090007" cy="201168"/>
           </a:xfrm>
           <a:prstGeom prst="rect">
             <a:avLst/>
@@ -20859,7 +20859,7 @@
         <p:spPr>
           <a:xfrm>
             <a:off x="731520" y="2578608"/>
-            <a:ext cx="4983480" cy="201168"/>
+            <a:ext cx="5090007" cy="201168"/>
           </a:xfrm>
           <a:prstGeom prst="rect">
             <a:avLst/>
@@ -20899,7 +20899,7 @@
         <p:spPr>
           <a:xfrm>
             <a:off x="731520" y="2798064"/>
-            <a:ext cx="4983480" cy="201168"/>
+            <a:ext cx="5090007" cy="201168"/>
           </a:xfrm>
           <a:prstGeom prst="rect">
             <a:avLst/>
@@ -20938,8 +20938,8 @@
         </p:nvSpPr>
         <p:spPr>
           <a:xfrm>
-            <a:off x="6172200" y="1051560"/>
-            <a:ext cx="5303520" cy="5166360"/>
+            <a:off x="6233007" y="1051560"/>
+            <a:ext cx="5410047" cy="5166360"/>
           </a:xfrm>
           <a:prstGeom prst="roundRect">
             <a:avLst>
@@ -20985,7 +20985,7 @@
         </p:nvSpPr>
         <p:spPr>
           <a:xfrm>
-            <a:off x="6172200" y="1051560"/>
+            <a:off x="6233007" y="1051560"/>
             <a:ext cx="45720" cy="5166360"/>
           </a:xfrm>
           <a:prstGeom prst="rect">
@@ -21028,8 +21028,8 @@
         </p:nvSpPr>
         <p:spPr>
           <a:xfrm>
-            <a:off x="6355080" y="1188720"/>
-            <a:ext cx="4983480" cy="274320"/>
+            <a:off x="6415887" y="1188720"/>
+            <a:ext cx="5090007" cy="274320"/>
           </a:xfrm>
           <a:prstGeom prst="rect">
             <a:avLst/>
@@ -21068,8 +21068,8 @@
         </p:nvSpPr>
         <p:spPr>
           <a:xfrm>
-            <a:off x="6355080" y="1481328"/>
-            <a:ext cx="4983480" cy="201168"/>
+            <a:off x="6415887" y="1481328"/>
+            <a:ext cx="5090007" cy="201168"/>
           </a:xfrm>
           <a:prstGeom prst="rect">
             <a:avLst/>
@@ -21108,8 +21108,8 @@
         </p:nvSpPr>
         <p:spPr>
           <a:xfrm>
-            <a:off x="6355080" y="1700784"/>
-            <a:ext cx="4983480" cy="201168"/>
+            <a:off x="6415887" y="1700784"/>
+            <a:ext cx="5090007" cy="201168"/>
           </a:xfrm>
           <a:prstGeom prst="rect">
             <a:avLst/>
@@ -21148,8 +21148,8 @@
         </p:nvSpPr>
         <p:spPr>
           <a:xfrm>
-            <a:off x="6355080" y="1920240"/>
-            <a:ext cx="4983480" cy="201168"/>
+            <a:off x="6415887" y="1920240"/>
+            <a:ext cx="5090007" cy="201168"/>
           </a:xfrm>
           <a:prstGeom prst="rect">
             <a:avLst/>
@@ -21188,8 +21188,8 @@
         </p:nvSpPr>
         <p:spPr>
           <a:xfrm>
-            <a:off x="6355080" y="2139696"/>
-            <a:ext cx="4983480" cy="201168"/>
+            <a:off x="6415887" y="2139696"/>
+            <a:ext cx="5090007" cy="201168"/>
           </a:xfrm>
           <a:prstGeom prst="rect">
             <a:avLst/>
@@ -21228,8 +21228,8 @@
         </p:nvSpPr>
         <p:spPr>
           <a:xfrm>
-            <a:off x="6355080" y="2359152"/>
-            <a:ext cx="4983480" cy="201168"/>
+            <a:off x="6415887" y="2359152"/>
+            <a:ext cx="5090007" cy="201168"/>
           </a:xfrm>
           <a:prstGeom prst="rect">
             <a:avLst/>
@@ -21268,8 +21268,8 @@
         </p:nvSpPr>
         <p:spPr>
           <a:xfrm>
-            <a:off x="6355080" y="2578608"/>
-            <a:ext cx="4983480" cy="201168"/>
+            <a:off x="6415887" y="2578608"/>
+            <a:ext cx="5090007" cy="201168"/>
           </a:xfrm>
           <a:prstGeom prst="rect">
             <a:avLst/>
@@ -21308,8 +21308,8 @@
         </p:nvSpPr>
         <p:spPr>
           <a:xfrm>
-            <a:off x="6355080" y="2798064"/>
-            <a:ext cx="4983480" cy="201168"/>
+            <a:off x="6415887" y="2798064"/>
+            <a:ext cx="5090007" cy="201168"/>
           </a:xfrm>
           <a:prstGeom prst="rect">
             <a:avLst/>
@@ -22154,8 +22154,8 @@
         </p:nvSpPr>
         <p:spPr>
           <a:xfrm>
-            <a:off x="540867" y="1051560"/>
-            <a:ext cx="3520440" cy="5166360"/>
+            <a:off x="548640" y="1051560"/>
+            <a:ext cx="3515258" cy="5257800"/>
           </a:xfrm>
           <a:prstGeom prst="roundRect">
             <a:avLst>
@@ -22201,8 +22201,8 @@
         </p:nvSpPr>
         <p:spPr>
           <a:xfrm>
-            <a:off x="540867" y="1051560"/>
-            <a:ext cx="45720" cy="5166360"/>
+            <a:off x="548640" y="1051560"/>
+            <a:ext cx="45720" cy="5257800"/>
           </a:xfrm>
           <a:prstGeom prst="rect">
             <a:avLst/>
@@ -22244,7 +22244,7 @@
         </p:nvSpPr>
         <p:spPr>
           <a:xfrm>
-            <a:off x="678027" y="1188720"/>
+            <a:off x="685800" y="1188720"/>
             <a:ext cx="384048" cy="384048"/>
           </a:xfrm>
           <a:prstGeom prst="ellipse">
@@ -22287,7 +22287,7 @@
         </p:nvSpPr>
         <p:spPr>
           <a:xfrm>
-            <a:off x="678027" y="1188720"/>
+            <a:off x="685800" y="1188720"/>
             <a:ext cx="384048" cy="384048"/>
           </a:xfrm>
           <a:prstGeom prst="rect">
@@ -22327,8 +22327,8 @@
         </p:nvSpPr>
         <p:spPr>
           <a:xfrm>
-            <a:off x="678027" y="1691640"/>
-            <a:ext cx="3246120" cy="320040"/>
+            <a:off x="685800" y="1691640"/>
+            <a:ext cx="3240938" cy="274320"/>
           </a:xfrm>
           <a:prstGeom prst="rect">
             <a:avLst/>
@@ -22346,7 +22346,7 @@
               <a:spcAft>
                 <a:spcPts val="0"/>
               </a:spcAft>
-              <a:defRPr sz="1400" b="1">
+              <a:defRPr sz="1300" b="1">
                 <a:solidFill>
                   <a:srgbClr val="2563EB"/>
                 </a:solidFill>
@@ -22367,8 +22367,8 @@
         </p:nvSpPr>
         <p:spPr>
           <a:xfrm>
-            <a:off x="678027" y="2075688"/>
-            <a:ext cx="3246120" cy="228600"/>
+            <a:off x="685800" y="2011680"/>
+            <a:ext cx="3240938" cy="201168"/>
           </a:xfrm>
           <a:prstGeom prst="rect">
             <a:avLst/>
@@ -22386,7 +22386,7 @@
               <a:spcAft>
                 <a:spcPts val="0"/>
               </a:spcAft>
-              <a:defRPr sz="1000" b="0">
+              <a:defRPr sz="900" b="0">
                 <a:solidFill>
                   <a:srgbClr val="1A1A2E"/>
                 </a:solidFill>
@@ -22407,8 +22407,8 @@
         </p:nvSpPr>
         <p:spPr>
           <a:xfrm>
-            <a:off x="678027" y="2295144"/>
-            <a:ext cx="3246120" cy="228600"/>
+            <a:off x="685800" y="2212848"/>
+            <a:ext cx="3240938" cy="201168"/>
           </a:xfrm>
           <a:prstGeom prst="rect">
             <a:avLst/>
@@ -22426,7 +22426,7 @@
               <a:spcAft>
                 <a:spcPts val="0"/>
               </a:spcAft>
-              <a:defRPr sz="1000" b="0">
+              <a:defRPr sz="900" b="0">
                 <a:solidFill>
                   <a:srgbClr val="1A1A2E"/>
                 </a:solidFill>
@@ -22447,8 +22447,8 @@
         </p:nvSpPr>
         <p:spPr>
           <a:xfrm>
-            <a:off x="678027" y="2514600"/>
-            <a:ext cx="3246120" cy="228600"/>
+            <a:off x="685800" y="2414016"/>
+            <a:ext cx="3240938" cy="201168"/>
           </a:xfrm>
           <a:prstGeom prst="rect">
             <a:avLst/>
@@ -22466,7 +22466,7 @@
               <a:spcAft>
                 <a:spcPts val="0"/>
               </a:spcAft>
-              <a:defRPr sz="1000" b="0">
+              <a:defRPr sz="900" b="0">
                 <a:solidFill>
                   <a:srgbClr val="1A1A2E"/>
                 </a:solidFill>
@@ -22487,8 +22487,8 @@
         </p:nvSpPr>
         <p:spPr>
           <a:xfrm>
-            <a:off x="678027" y="2734056"/>
-            <a:ext cx="3246120" cy="228600"/>
+            <a:off x="685800" y="2615184"/>
+            <a:ext cx="3240938" cy="201168"/>
           </a:xfrm>
           <a:prstGeom prst="rect">
             <a:avLst/>
@@ -22506,7 +22506,7 @@
               <a:spcAft>
                 <a:spcPts val="0"/>
               </a:spcAft>
-              <a:defRPr sz="1000" b="0">
+              <a:defRPr sz="900" b="0">
                 <a:solidFill>
                   <a:srgbClr val="1A1A2E"/>
                 </a:solidFill>
@@ -22527,8 +22527,8 @@
         </p:nvSpPr>
         <p:spPr>
           <a:xfrm>
-            <a:off x="678027" y="2953512"/>
-            <a:ext cx="3246120" cy="228600"/>
+            <a:off x="685800" y="2816352"/>
+            <a:ext cx="3240938" cy="201168"/>
           </a:xfrm>
           <a:prstGeom prst="rect">
             <a:avLst/>
@@ -22546,7 +22546,7 @@
               <a:spcAft>
                 <a:spcPts val="0"/>
               </a:spcAft>
-              <a:defRPr sz="1000" b="0">
+              <a:defRPr sz="900" b="0">
                 <a:solidFill>
                   <a:srgbClr val="1A1A2E"/>
                 </a:solidFill>
@@ -22567,8 +22567,8 @@
         </p:nvSpPr>
         <p:spPr>
           <a:xfrm>
-            <a:off x="4335627" y="1051560"/>
-            <a:ext cx="3520440" cy="5166360"/>
+            <a:off x="4338218" y="1051560"/>
+            <a:ext cx="3515258" cy="5257800"/>
           </a:xfrm>
           <a:prstGeom prst="roundRect">
             <a:avLst>
@@ -22614,8 +22614,8 @@
         </p:nvSpPr>
         <p:spPr>
           <a:xfrm>
-            <a:off x="4335627" y="1051560"/>
-            <a:ext cx="45720" cy="5166360"/>
+            <a:off x="4338218" y="1051560"/>
+            <a:ext cx="45720" cy="5257800"/>
           </a:xfrm>
           <a:prstGeom prst="rect">
             <a:avLst/>
@@ -22657,7 +22657,7 @@
         </p:nvSpPr>
         <p:spPr>
           <a:xfrm>
-            <a:off x="4472787" y="1188720"/>
+            <a:off x="4475378" y="1188720"/>
             <a:ext cx="384048" cy="384048"/>
           </a:xfrm>
           <a:prstGeom prst="ellipse">
@@ -22700,7 +22700,7 @@
         </p:nvSpPr>
         <p:spPr>
           <a:xfrm>
-            <a:off x="4472787" y="1188720"/>
+            <a:off x="4475378" y="1188720"/>
             <a:ext cx="384048" cy="384048"/>
           </a:xfrm>
           <a:prstGeom prst="rect">
@@ -22740,8 +22740,8 @@
         </p:nvSpPr>
         <p:spPr>
           <a:xfrm>
-            <a:off x="4472787" y="1691640"/>
-            <a:ext cx="3246120" cy="320040"/>
+            <a:off x="4475378" y="1691640"/>
+            <a:ext cx="3240938" cy="274320"/>
           </a:xfrm>
           <a:prstGeom prst="rect">
             <a:avLst/>
@@ -22759,7 +22759,7 @@
               <a:spcAft>
                 <a:spcPts val="0"/>
               </a:spcAft>
-              <a:defRPr sz="1400" b="1">
+              <a:defRPr sz="1300" b="1">
                 <a:solidFill>
                   <a:srgbClr val="0D9488"/>
                 </a:solidFill>
@@ -22780,8 +22780,8 @@
         </p:nvSpPr>
         <p:spPr>
           <a:xfrm>
-            <a:off x="4472787" y="2075688"/>
-            <a:ext cx="3246120" cy="228600"/>
+            <a:off x="4475378" y="2011680"/>
+            <a:ext cx="3240938" cy="201168"/>
           </a:xfrm>
           <a:prstGeom prst="rect">
             <a:avLst/>
@@ -22799,7 +22799,7 @@
               <a:spcAft>
                 <a:spcPts val="0"/>
               </a:spcAft>
-              <a:defRPr sz="1000" b="0">
+              <a:defRPr sz="900" b="0">
                 <a:solidFill>
                   <a:srgbClr val="1A1A2E"/>
                 </a:solidFill>
@@ -22820,8 +22820,8 @@
         </p:nvSpPr>
         <p:spPr>
           <a:xfrm>
-            <a:off x="4472787" y="2295144"/>
-            <a:ext cx="3246120" cy="228600"/>
+            <a:off x="4475378" y="2212848"/>
+            <a:ext cx="3240938" cy="201168"/>
           </a:xfrm>
           <a:prstGeom prst="rect">
             <a:avLst/>
@@ -22839,7 +22839,7 @@
               <a:spcAft>
                 <a:spcPts val="0"/>
               </a:spcAft>
-              <a:defRPr sz="1000" b="0">
+              <a:defRPr sz="900" b="0">
                 <a:solidFill>
                   <a:srgbClr val="1A1A2E"/>
                 </a:solidFill>
@@ -22860,8 +22860,8 @@
         </p:nvSpPr>
         <p:spPr>
           <a:xfrm>
-            <a:off x="4472787" y="2514600"/>
-            <a:ext cx="3246120" cy="228600"/>
+            <a:off x="4475378" y="2414016"/>
+            <a:ext cx="3240938" cy="201168"/>
           </a:xfrm>
           <a:prstGeom prst="rect">
             <a:avLst/>
@@ -22879,7 +22879,7 @@
               <a:spcAft>
                 <a:spcPts val="0"/>
               </a:spcAft>
-              <a:defRPr sz="1000" b="0">
+              <a:defRPr sz="900" b="0">
                 <a:solidFill>
                   <a:srgbClr val="1A1A2E"/>
                 </a:solidFill>
@@ -22900,8 +22900,8 @@
         </p:nvSpPr>
         <p:spPr>
           <a:xfrm>
-            <a:off x="8130387" y="1051560"/>
-            <a:ext cx="3520440" cy="5166360"/>
+            <a:off x="8127796" y="1051560"/>
+            <a:ext cx="3515258" cy="5257800"/>
           </a:xfrm>
           <a:prstGeom prst="roundRect">
             <a:avLst>
@@ -22947,8 +22947,8 @@
         </p:nvSpPr>
         <p:spPr>
           <a:xfrm>
-            <a:off x="8130387" y="1051560"/>
-            <a:ext cx="45720" cy="5166360"/>
+            <a:off x="8127796" y="1051560"/>
+            <a:ext cx="45720" cy="5257800"/>
           </a:xfrm>
           <a:prstGeom prst="rect">
             <a:avLst/>
@@ -22990,7 +22990,7 @@
         </p:nvSpPr>
         <p:spPr>
           <a:xfrm>
-            <a:off x="8267547" y="1188720"/>
+            <a:off x="8264956" y="1188720"/>
             <a:ext cx="384048" cy="384048"/>
           </a:xfrm>
           <a:prstGeom prst="ellipse">
@@ -23033,7 +23033,7 @@
         </p:nvSpPr>
         <p:spPr>
           <a:xfrm>
-            <a:off x="8267547" y="1188720"/>
+            <a:off x="8264956" y="1188720"/>
             <a:ext cx="384048" cy="384048"/>
           </a:xfrm>
           <a:prstGeom prst="rect">
@@ -23073,8 +23073,8 @@
         </p:nvSpPr>
         <p:spPr>
           <a:xfrm>
-            <a:off x="8267547" y="1691640"/>
-            <a:ext cx="3246120" cy="320040"/>
+            <a:off x="8264956" y="1691640"/>
+            <a:ext cx="3240938" cy="274320"/>
           </a:xfrm>
           <a:prstGeom prst="rect">
             <a:avLst/>
@@ -23092,7 +23092,7 @@
               <a:spcAft>
                 <a:spcPts val="0"/>
               </a:spcAft>
-              <a:defRPr sz="1400" b="1">
+              <a:defRPr sz="1300" b="1">
                 <a:solidFill>
                   <a:srgbClr val="B8860B"/>
                 </a:solidFill>
@@ -23113,8 +23113,8 @@
         </p:nvSpPr>
         <p:spPr>
           <a:xfrm>
-            <a:off x="8267547" y="2075688"/>
-            <a:ext cx="3246120" cy="228600"/>
+            <a:off x="8264956" y="2011680"/>
+            <a:ext cx="3240938" cy="201168"/>
           </a:xfrm>
           <a:prstGeom prst="rect">
             <a:avLst/>
@@ -23132,7 +23132,7 @@
               <a:spcAft>
                 <a:spcPts val="0"/>
               </a:spcAft>
-              <a:defRPr sz="1000" b="0">
+              <a:defRPr sz="900" b="0">
                 <a:solidFill>
                   <a:srgbClr val="1A1A2E"/>
                 </a:solidFill>
@@ -23153,8 +23153,8 @@
         </p:nvSpPr>
         <p:spPr>
           <a:xfrm>
-            <a:off x="8267547" y="2295144"/>
-            <a:ext cx="3246120" cy="228600"/>
+            <a:off x="8264956" y="2212848"/>
+            <a:ext cx="3240938" cy="201168"/>
           </a:xfrm>
           <a:prstGeom prst="rect">
             <a:avLst/>
@@ -23172,7 +23172,7 @@
               <a:spcAft>
                 <a:spcPts val="0"/>
               </a:spcAft>
-              <a:defRPr sz="1000" b="0">
+              <a:defRPr sz="900" b="0">
                 <a:solidFill>
                   <a:srgbClr val="1A1A2E"/>
                 </a:solidFill>
@@ -23193,8 +23193,8 @@
         </p:nvSpPr>
         <p:spPr>
           <a:xfrm>
-            <a:off x="8267547" y="2514600"/>
-            <a:ext cx="3246120" cy="228600"/>
+            <a:off x="8264956" y="2414016"/>
+            <a:ext cx="3240938" cy="201168"/>
           </a:xfrm>
           <a:prstGeom prst="rect">
             <a:avLst/>
@@ -23212,7 +23212,7 @@
               <a:spcAft>
                 <a:spcPts val="0"/>
               </a:spcAft>
-              <a:defRPr sz="1000" b="0">
+              <a:defRPr sz="900" b="0">
                 <a:solidFill>
                   <a:srgbClr val="1A1A2E"/>
                 </a:solidFill>
@@ -23233,8 +23233,8 @@
         </p:nvSpPr>
         <p:spPr>
           <a:xfrm>
-            <a:off x="8267547" y="2734056"/>
-            <a:ext cx="3246120" cy="228600"/>
+            <a:off x="8264956" y="2615184"/>
+            <a:ext cx="3240938" cy="201168"/>
           </a:xfrm>
           <a:prstGeom prst="rect">
             <a:avLst/>
@@ -23252,7 +23252,7 @@
               <a:spcAft>
                 <a:spcPts val="0"/>
               </a:spcAft>
-              <a:defRPr sz="1000" b="0">
+              <a:defRPr sz="900" b="0">
                 <a:solidFill>
                   <a:srgbClr val="1A1A2E"/>
                 </a:solidFill>
@@ -23631,8 +23631,8 @@
         </p:nvSpPr>
         <p:spPr>
           <a:xfrm>
-            <a:off x="655167" y="1188720"/>
-            <a:ext cx="2377440" cy="1828800"/>
+            <a:off x="548640" y="1188720"/>
+            <a:ext cx="2533573" cy="1828800"/>
           </a:xfrm>
           <a:prstGeom prst="roundRect">
             <a:avLst>
@@ -23678,8 +23678,8 @@
         </p:nvSpPr>
         <p:spPr>
           <a:xfrm>
-            <a:off x="655167" y="1188720"/>
-            <a:ext cx="2377440" cy="45720"/>
+            <a:off x="548640" y="1188720"/>
+            <a:ext cx="2533573" cy="45720"/>
           </a:xfrm>
           <a:prstGeom prst="rect">
             <a:avLst/>
@@ -23721,7 +23721,7 @@
         </p:nvSpPr>
         <p:spPr>
           <a:xfrm>
-            <a:off x="1615287" y="1325880"/>
+            <a:off x="1586826" y="1325880"/>
             <a:ext cx="457200" cy="457200"/>
           </a:xfrm>
           <a:prstGeom prst="ellipse">
@@ -23764,7 +23764,7 @@
         </p:nvSpPr>
         <p:spPr>
           <a:xfrm>
-            <a:off x="1615287" y="1325880"/>
+            <a:off x="1586826" y="1325880"/>
             <a:ext cx="457200" cy="457200"/>
           </a:xfrm>
           <a:prstGeom prst="rect">
@@ -23804,8 +23804,8 @@
         </p:nvSpPr>
         <p:spPr>
           <a:xfrm>
-            <a:off x="746607" y="1874520"/>
-            <a:ext cx="2194560" cy="320040"/>
+            <a:off x="640080" y="1874520"/>
+            <a:ext cx="2350693" cy="320040"/>
           </a:xfrm>
           <a:prstGeom prst="rect">
             <a:avLst/>
@@ -23844,8 +23844,8 @@
         </p:nvSpPr>
         <p:spPr>
           <a:xfrm>
-            <a:off x="746607" y="2194560"/>
-            <a:ext cx="2194560" cy="640080"/>
+            <a:off x="640080" y="2194560"/>
+            <a:ext cx="2350693" cy="640080"/>
           </a:xfrm>
           <a:prstGeom prst="rect">
             <a:avLst/>
@@ -23884,8 +23884,8 @@
         </p:nvSpPr>
         <p:spPr>
           <a:xfrm>
-            <a:off x="3032607" y="1828800"/>
-            <a:ext cx="457200" cy="457200"/>
+            <a:off x="3082213" y="1828800"/>
+            <a:ext cx="320040" cy="457200"/>
           </a:xfrm>
           <a:prstGeom prst="rect">
             <a:avLst/>
@@ -23924,8 +23924,8 @@
         </p:nvSpPr>
         <p:spPr>
           <a:xfrm>
-            <a:off x="3489807" y="1188720"/>
-            <a:ext cx="2377440" cy="1828800"/>
+            <a:off x="3402253" y="1188720"/>
+            <a:ext cx="2533573" cy="1828800"/>
           </a:xfrm>
           <a:prstGeom prst="roundRect">
             <a:avLst>
@@ -23971,8 +23971,8 @@
         </p:nvSpPr>
         <p:spPr>
           <a:xfrm>
-            <a:off x="3489807" y="1188720"/>
-            <a:ext cx="2377440" cy="45720"/>
+            <a:off x="3402253" y="1188720"/>
+            <a:ext cx="2533573" cy="45720"/>
           </a:xfrm>
           <a:prstGeom prst="rect">
             <a:avLst/>
@@ -24014,7 +24014,7 @@
         </p:nvSpPr>
         <p:spPr>
           <a:xfrm>
-            <a:off x="4449927" y="1325880"/>
+            <a:off x="4440440" y="1325880"/>
             <a:ext cx="457200" cy="457200"/>
           </a:xfrm>
           <a:prstGeom prst="ellipse">
@@ -24057,7 +24057,7 @@
         </p:nvSpPr>
         <p:spPr>
           <a:xfrm>
-            <a:off x="4449927" y="1325880"/>
+            <a:off x="4440440" y="1325880"/>
             <a:ext cx="457200" cy="457200"/>
           </a:xfrm>
           <a:prstGeom prst="rect">
@@ -24097,8 +24097,8 @@
         </p:nvSpPr>
         <p:spPr>
           <a:xfrm>
-            <a:off x="3581247" y="1874520"/>
-            <a:ext cx="2194560" cy="320040"/>
+            <a:off x="3493693" y="1874520"/>
+            <a:ext cx="2350693" cy="320040"/>
           </a:xfrm>
           <a:prstGeom prst="rect">
             <a:avLst/>
@@ -24137,8 +24137,8 @@
         </p:nvSpPr>
         <p:spPr>
           <a:xfrm>
-            <a:off x="3581247" y="2194560"/>
-            <a:ext cx="2194560" cy="640080"/>
+            <a:off x="3493693" y="2194560"/>
+            <a:ext cx="2350693" cy="640080"/>
           </a:xfrm>
           <a:prstGeom prst="rect">
             <a:avLst/>
@@ -24177,8 +24177,8 @@
         </p:nvSpPr>
         <p:spPr>
           <a:xfrm>
-            <a:off x="5867247" y="1828800"/>
-            <a:ext cx="457200" cy="457200"/>
+            <a:off x="5935827" y="1828800"/>
+            <a:ext cx="320040" cy="457200"/>
           </a:xfrm>
           <a:prstGeom prst="rect">
             <a:avLst/>
@@ -24217,8 +24217,8 @@
         </p:nvSpPr>
         <p:spPr>
           <a:xfrm>
-            <a:off x="6324447" y="1188720"/>
-            <a:ext cx="2377440" cy="1828800"/>
+            <a:off x="6255867" y="1188720"/>
+            <a:ext cx="2533573" cy="1828800"/>
           </a:xfrm>
           <a:prstGeom prst="roundRect">
             <a:avLst>
@@ -24264,8 +24264,8 @@
         </p:nvSpPr>
         <p:spPr>
           <a:xfrm>
-            <a:off x="6324447" y="1188720"/>
-            <a:ext cx="2377440" cy="45720"/>
+            <a:off x="6255867" y="1188720"/>
+            <a:ext cx="2533573" cy="45720"/>
           </a:xfrm>
           <a:prstGeom prst="rect">
             <a:avLst/>
@@ -24307,7 +24307,7 @@
         </p:nvSpPr>
         <p:spPr>
           <a:xfrm>
-            <a:off x="7284567" y="1325880"/>
+            <a:off x="7294054" y="1325880"/>
             <a:ext cx="457200" cy="457200"/>
           </a:xfrm>
           <a:prstGeom prst="ellipse">
@@ -24350,7 +24350,7 @@
         </p:nvSpPr>
         <p:spPr>
           <a:xfrm>
-            <a:off x="7284567" y="1325880"/>
+            <a:off x="7294054" y="1325880"/>
             <a:ext cx="457200" cy="457200"/>
           </a:xfrm>
           <a:prstGeom prst="rect">
@@ -24390,8 +24390,8 @@
         </p:nvSpPr>
         <p:spPr>
           <a:xfrm>
-            <a:off x="6415887" y="1874520"/>
-            <a:ext cx="2194560" cy="320040"/>
+            <a:off x="6347307" y="1874520"/>
+            <a:ext cx="2350693" cy="320040"/>
           </a:xfrm>
           <a:prstGeom prst="rect">
             <a:avLst/>
@@ -24430,8 +24430,8 @@
         </p:nvSpPr>
         <p:spPr>
           <a:xfrm>
-            <a:off x="6415887" y="2194560"/>
-            <a:ext cx="2194560" cy="640080"/>
+            <a:off x="6347307" y="2194560"/>
+            <a:ext cx="2350693" cy="640080"/>
           </a:xfrm>
           <a:prstGeom prst="rect">
             <a:avLst/>
@@ -24470,8 +24470,8 @@
         </p:nvSpPr>
         <p:spPr>
           <a:xfrm>
-            <a:off x="8701887" y="1828800"/>
-            <a:ext cx="457200" cy="457200"/>
+            <a:off x="8789441" y="1828800"/>
+            <a:ext cx="320040" cy="457200"/>
           </a:xfrm>
           <a:prstGeom prst="rect">
             <a:avLst/>
@@ -24510,8 +24510,8 @@
         </p:nvSpPr>
         <p:spPr>
           <a:xfrm>
-            <a:off x="9159087" y="1188720"/>
-            <a:ext cx="2377440" cy="1828800"/>
+            <a:off x="9109481" y="1188720"/>
+            <a:ext cx="2533573" cy="1828800"/>
           </a:xfrm>
           <a:prstGeom prst="roundRect">
             <a:avLst>
@@ -24557,8 +24557,8 @@
         </p:nvSpPr>
         <p:spPr>
           <a:xfrm>
-            <a:off x="9159087" y="1188720"/>
-            <a:ext cx="2377440" cy="45720"/>
+            <a:off x="9109481" y="1188720"/>
+            <a:ext cx="2533573" cy="45720"/>
           </a:xfrm>
           <a:prstGeom prst="rect">
             <a:avLst/>
@@ -24600,7 +24600,7 @@
         </p:nvSpPr>
         <p:spPr>
           <a:xfrm>
-            <a:off x="10119207" y="1325880"/>
+            <a:off x="10147668" y="1325880"/>
             <a:ext cx="457200" cy="457200"/>
           </a:xfrm>
           <a:prstGeom prst="ellipse">
@@ -24643,7 +24643,7 @@
         </p:nvSpPr>
         <p:spPr>
           <a:xfrm>
-            <a:off x="10119207" y="1325880"/>
+            <a:off x="10147668" y="1325880"/>
             <a:ext cx="457200" cy="457200"/>
           </a:xfrm>
           <a:prstGeom prst="rect">
@@ -24683,8 +24683,8 @@
         </p:nvSpPr>
         <p:spPr>
           <a:xfrm>
-            <a:off x="9250527" y="1874520"/>
-            <a:ext cx="2194560" cy="320040"/>
+            <a:off x="9200921" y="1874520"/>
+            <a:ext cx="2350693" cy="320040"/>
           </a:xfrm>
           <a:prstGeom prst="rect">
             <a:avLst/>
@@ -24723,8 +24723,8 @@
         </p:nvSpPr>
         <p:spPr>
           <a:xfrm>
-            <a:off x="9250527" y="2194560"/>
-            <a:ext cx="2194560" cy="640080"/>
+            <a:off x="9200921" y="2194560"/>
+            <a:ext cx="2350693" cy="640080"/>
           </a:xfrm>
           <a:prstGeom prst="rect">
             <a:avLst/>
@@ -26116,8 +26116,8 @@
         </p:nvSpPr>
         <p:spPr>
           <a:xfrm>
-            <a:off x="540867" y="1051560"/>
-            <a:ext cx="3520440" cy="5166360"/>
+            <a:off x="548640" y="1051560"/>
+            <a:ext cx="3515258" cy="5257800"/>
           </a:xfrm>
           <a:prstGeom prst="roundRect">
             <a:avLst>
@@ -26163,8 +26163,8 @@
         </p:nvSpPr>
         <p:spPr>
           <a:xfrm>
-            <a:off x="540867" y="1051560"/>
-            <a:ext cx="45720" cy="5166360"/>
+            <a:off x="548640" y="1051560"/>
+            <a:ext cx="45720" cy="5257800"/>
           </a:xfrm>
           <a:prstGeom prst="rect">
             <a:avLst/>
@@ -26206,7 +26206,7 @@
         </p:nvSpPr>
         <p:spPr>
           <a:xfrm>
-            <a:off x="678027" y="1188720"/>
+            <a:off x="685800" y="1188720"/>
             <a:ext cx="384048" cy="384048"/>
           </a:xfrm>
           <a:prstGeom prst="ellipse">
@@ -26249,7 +26249,7 @@
         </p:nvSpPr>
         <p:spPr>
           <a:xfrm>
-            <a:off x="678027" y="1188720"/>
+            <a:off x="685800" y="1188720"/>
             <a:ext cx="384048" cy="384048"/>
           </a:xfrm>
           <a:prstGeom prst="rect">
@@ -26289,8 +26289,8 @@
         </p:nvSpPr>
         <p:spPr>
           <a:xfrm>
-            <a:off x="678027" y="1691640"/>
-            <a:ext cx="3246120" cy="320040"/>
+            <a:off x="685800" y="1691640"/>
+            <a:ext cx="3240938" cy="274320"/>
           </a:xfrm>
           <a:prstGeom prst="rect">
             <a:avLst/>
@@ -26308,7 +26308,7 @@
               <a:spcAft>
                 <a:spcPts val="0"/>
               </a:spcAft>
-              <a:defRPr sz="1400" b="1">
+              <a:defRPr sz="1300" b="1">
                 <a:solidFill>
                   <a:srgbClr val="2563EB"/>
                 </a:solidFill>
@@ -26329,8 +26329,8 @@
         </p:nvSpPr>
         <p:spPr>
           <a:xfrm>
-            <a:off x="678027" y="2075688"/>
-            <a:ext cx="3246120" cy="228600"/>
+            <a:off x="685800" y="2011680"/>
+            <a:ext cx="3240938" cy="201168"/>
           </a:xfrm>
           <a:prstGeom prst="rect">
             <a:avLst/>
@@ -26348,7 +26348,7 @@
               <a:spcAft>
                 <a:spcPts val="0"/>
               </a:spcAft>
-              <a:defRPr sz="1000" b="0">
+              <a:defRPr sz="900" b="0">
                 <a:solidFill>
                   <a:srgbClr val="1A1A2E"/>
                 </a:solidFill>
@@ -26369,8 +26369,8 @@
         </p:nvSpPr>
         <p:spPr>
           <a:xfrm>
-            <a:off x="678027" y="2295144"/>
-            <a:ext cx="3246120" cy="228600"/>
+            <a:off x="685800" y="2212848"/>
+            <a:ext cx="3240938" cy="201168"/>
           </a:xfrm>
           <a:prstGeom prst="rect">
             <a:avLst/>
@@ -26388,7 +26388,7 @@
               <a:spcAft>
                 <a:spcPts val="0"/>
               </a:spcAft>
-              <a:defRPr sz="1000" b="0">
+              <a:defRPr sz="900" b="0">
                 <a:solidFill>
                   <a:srgbClr val="1A1A2E"/>
                 </a:solidFill>
@@ -26409,8 +26409,8 @@
         </p:nvSpPr>
         <p:spPr>
           <a:xfrm>
-            <a:off x="678027" y="2514600"/>
-            <a:ext cx="3246120" cy="228600"/>
+            <a:off x="685800" y="2414016"/>
+            <a:ext cx="3240938" cy="201168"/>
           </a:xfrm>
           <a:prstGeom prst="rect">
             <a:avLst/>
@@ -26428,7 +26428,7 @@
               <a:spcAft>
                 <a:spcPts val="0"/>
               </a:spcAft>
-              <a:defRPr sz="1000" b="0">
+              <a:defRPr sz="900" b="0">
                 <a:solidFill>
                   <a:srgbClr val="1A1A2E"/>
                 </a:solidFill>
@@ -26449,8 +26449,8 @@
         </p:nvSpPr>
         <p:spPr>
           <a:xfrm>
-            <a:off x="678027" y="2734056"/>
-            <a:ext cx="3246120" cy="228600"/>
+            <a:off x="685800" y="2615184"/>
+            <a:ext cx="3240938" cy="201168"/>
           </a:xfrm>
           <a:prstGeom prst="rect">
             <a:avLst/>
@@ -26468,7 +26468,7 @@
               <a:spcAft>
                 <a:spcPts val="0"/>
               </a:spcAft>
-              <a:defRPr sz="1000" b="0">
+              <a:defRPr sz="900" b="0">
                 <a:solidFill>
                   <a:srgbClr val="1A1A2E"/>
                 </a:solidFill>
@@ -26489,8 +26489,8 @@
         </p:nvSpPr>
         <p:spPr>
           <a:xfrm>
-            <a:off x="678027" y="2953512"/>
-            <a:ext cx="3246120" cy="228600"/>
+            <a:off x="685800" y="2816352"/>
+            <a:ext cx="3240938" cy="201168"/>
           </a:xfrm>
           <a:prstGeom prst="rect">
             <a:avLst/>
@@ -26508,7 +26508,7 @@
               <a:spcAft>
                 <a:spcPts val="0"/>
               </a:spcAft>
-              <a:defRPr sz="1000" b="0">
+              <a:defRPr sz="900" b="0">
                 <a:solidFill>
                   <a:srgbClr val="1A1A2E"/>
                 </a:solidFill>
@@ -26529,8 +26529,8 @@
         </p:nvSpPr>
         <p:spPr>
           <a:xfrm>
-            <a:off x="4335627" y="1051560"/>
-            <a:ext cx="3520440" cy="5166360"/>
+            <a:off x="4338218" y="1051560"/>
+            <a:ext cx="3515258" cy="5257800"/>
           </a:xfrm>
           <a:prstGeom prst="roundRect">
             <a:avLst>
@@ -26576,8 +26576,8 @@
         </p:nvSpPr>
         <p:spPr>
           <a:xfrm>
-            <a:off x="4335627" y="1051560"/>
-            <a:ext cx="45720" cy="5166360"/>
+            <a:off x="4338218" y="1051560"/>
+            <a:ext cx="45720" cy="5257800"/>
           </a:xfrm>
           <a:prstGeom prst="rect">
             <a:avLst/>
@@ -26619,7 +26619,7 @@
         </p:nvSpPr>
         <p:spPr>
           <a:xfrm>
-            <a:off x="4472787" y="1188720"/>
+            <a:off x="4475378" y="1188720"/>
             <a:ext cx="384048" cy="384048"/>
           </a:xfrm>
           <a:prstGeom prst="ellipse">
@@ -26662,7 +26662,7 @@
         </p:nvSpPr>
         <p:spPr>
           <a:xfrm>
-            <a:off x="4472787" y="1188720"/>
+            <a:off x="4475378" y="1188720"/>
             <a:ext cx="384048" cy="384048"/>
           </a:xfrm>
           <a:prstGeom prst="rect">
@@ -26702,8 +26702,8 @@
         </p:nvSpPr>
         <p:spPr>
           <a:xfrm>
-            <a:off x="4472787" y="1691640"/>
-            <a:ext cx="3246120" cy="320040"/>
+            <a:off x="4475378" y="1691640"/>
+            <a:ext cx="3240938" cy="274320"/>
           </a:xfrm>
           <a:prstGeom prst="rect">
             <a:avLst/>
@@ -26721,7 +26721,7 @@
               <a:spcAft>
                 <a:spcPts val="0"/>
               </a:spcAft>
-              <a:defRPr sz="1400" b="1">
+              <a:defRPr sz="1300" b="1">
                 <a:solidFill>
                   <a:srgbClr val="0D9488"/>
                 </a:solidFill>
@@ -26742,8 +26742,8 @@
         </p:nvSpPr>
         <p:spPr>
           <a:xfrm>
-            <a:off x="4472787" y="2075688"/>
-            <a:ext cx="3246120" cy="228600"/>
+            <a:off x="4475378" y="2011680"/>
+            <a:ext cx="3240938" cy="201168"/>
           </a:xfrm>
           <a:prstGeom prst="rect">
             <a:avLst/>
@@ -26761,7 +26761,7 @@
               <a:spcAft>
                 <a:spcPts val="0"/>
               </a:spcAft>
-              <a:defRPr sz="1000" b="0">
+              <a:defRPr sz="900" b="0">
                 <a:solidFill>
                   <a:srgbClr val="1A1A2E"/>
                 </a:solidFill>
@@ -26782,8 +26782,8 @@
         </p:nvSpPr>
         <p:spPr>
           <a:xfrm>
-            <a:off x="4472787" y="2295144"/>
-            <a:ext cx="3246120" cy="228600"/>
+            <a:off x="4475378" y="2212848"/>
+            <a:ext cx="3240938" cy="201168"/>
           </a:xfrm>
           <a:prstGeom prst="rect">
             <a:avLst/>
@@ -26801,7 +26801,7 @@
               <a:spcAft>
                 <a:spcPts val="0"/>
               </a:spcAft>
-              <a:defRPr sz="1000" b="0">
+              <a:defRPr sz="900" b="0">
                 <a:solidFill>
                   <a:srgbClr val="1A1A2E"/>
                 </a:solidFill>
@@ -26822,8 +26822,8 @@
         </p:nvSpPr>
         <p:spPr>
           <a:xfrm>
-            <a:off x="4472787" y="2514600"/>
-            <a:ext cx="3246120" cy="228600"/>
+            <a:off x="4475378" y="2414016"/>
+            <a:ext cx="3240938" cy="201168"/>
           </a:xfrm>
           <a:prstGeom prst="rect">
             <a:avLst/>
@@ -26841,7 +26841,7 @@
               <a:spcAft>
                 <a:spcPts val="0"/>
               </a:spcAft>
-              <a:defRPr sz="1000" b="0">
+              <a:defRPr sz="900" b="0">
                 <a:solidFill>
                   <a:srgbClr val="1A1A2E"/>
                 </a:solidFill>
@@ -26862,8 +26862,8 @@
         </p:nvSpPr>
         <p:spPr>
           <a:xfrm>
-            <a:off x="4472787" y="2734056"/>
-            <a:ext cx="3246120" cy="228600"/>
+            <a:off x="4475378" y="2615184"/>
+            <a:ext cx="3240938" cy="201168"/>
           </a:xfrm>
           <a:prstGeom prst="rect">
             <a:avLst/>
@@ -26881,7 +26881,7 @@
               <a:spcAft>
                 <a:spcPts val="0"/>
               </a:spcAft>
-              <a:defRPr sz="1000" b="0">
+              <a:defRPr sz="900" b="0">
                 <a:solidFill>
                   <a:srgbClr val="1A1A2E"/>
                 </a:solidFill>
@@ -26902,8 +26902,8 @@
         </p:nvSpPr>
         <p:spPr>
           <a:xfrm>
-            <a:off x="8130387" y="1051560"/>
-            <a:ext cx="3520440" cy="5166360"/>
+            <a:off x="8127796" y="1051560"/>
+            <a:ext cx="3515258" cy="5257800"/>
           </a:xfrm>
           <a:prstGeom prst="roundRect">
             <a:avLst>
@@ -26949,8 +26949,8 @@
         </p:nvSpPr>
         <p:spPr>
           <a:xfrm>
-            <a:off x="8130387" y="1051560"/>
-            <a:ext cx="45720" cy="5166360"/>
+            <a:off x="8127796" y="1051560"/>
+            <a:ext cx="45720" cy="5257800"/>
           </a:xfrm>
           <a:prstGeom prst="rect">
             <a:avLst/>
@@ -26992,7 +26992,7 @@
         </p:nvSpPr>
         <p:spPr>
           <a:xfrm>
-            <a:off x="8267547" y="1188720"/>
+            <a:off x="8264956" y="1188720"/>
             <a:ext cx="384048" cy="384048"/>
           </a:xfrm>
           <a:prstGeom prst="ellipse">
@@ -27035,7 +27035,7 @@
         </p:nvSpPr>
         <p:spPr>
           <a:xfrm>
-            <a:off x="8267547" y="1188720"/>
+            <a:off x="8264956" y="1188720"/>
             <a:ext cx="384048" cy="384048"/>
           </a:xfrm>
           <a:prstGeom prst="rect">
@@ -27075,8 +27075,8 @@
         </p:nvSpPr>
         <p:spPr>
           <a:xfrm>
-            <a:off x="8267547" y="1691640"/>
-            <a:ext cx="3246120" cy="320040"/>
+            <a:off x="8264956" y="1691640"/>
+            <a:ext cx="3240938" cy="274320"/>
           </a:xfrm>
           <a:prstGeom prst="rect">
             <a:avLst/>
@@ -27094,7 +27094,7 @@
               <a:spcAft>
                 <a:spcPts val="0"/>
               </a:spcAft>
-              <a:defRPr sz="1400" b="1">
+              <a:defRPr sz="1300" b="1">
                 <a:solidFill>
                   <a:srgbClr val="B8860B"/>
                 </a:solidFill>
@@ -27115,8 +27115,8 @@
         </p:nvSpPr>
         <p:spPr>
           <a:xfrm>
-            <a:off x="8267547" y="2075688"/>
-            <a:ext cx="3246120" cy="228600"/>
+            <a:off x="8264956" y="2011680"/>
+            <a:ext cx="3240938" cy="201168"/>
           </a:xfrm>
           <a:prstGeom prst="rect">
             <a:avLst/>
@@ -27134,7 +27134,7 @@
               <a:spcAft>
                 <a:spcPts val="0"/>
               </a:spcAft>
-              <a:defRPr sz="1000" b="0">
+              <a:defRPr sz="900" b="0">
                 <a:solidFill>
                   <a:srgbClr val="1A1A2E"/>
                 </a:solidFill>
@@ -27155,8 +27155,8 @@
         </p:nvSpPr>
         <p:spPr>
           <a:xfrm>
-            <a:off x="8267547" y="2295144"/>
-            <a:ext cx="3246120" cy="228600"/>
+            <a:off x="8264956" y="2212848"/>
+            <a:ext cx="3240938" cy="201168"/>
           </a:xfrm>
           <a:prstGeom prst="rect">
             <a:avLst/>
@@ -27174,7 +27174,7 @@
               <a:spcAft>
                 <a:spcPts val="0"/>
               </a:spcAft>
-              <a:defRPr sz="1000" b="0">
+              <a:defRPr sz="900" b="0">
                 <a:solidFill>
                   <a:srgbClr val="1A1A2E"/>
                 </a:solidFill>
@@ -27195,8 +27195,8 @@
         </p:nvSpPr>
         <p:spPr>
           <a:xfrm>
-            <a:off x="8267547" y="2514600"/>
-            <a:ext cx="3246120" cy="228600"/>
+            <a:off x="8264956" y="2414016"/>
+            <a:ext cx="3240938" cy="201168"/>
           </a:xfrm>
           <a:prstGeom prst="rect">
             <a:avLst/>
@@ -27214,7 +27214,7 @@
               <a:spcAft>
                 <a:spcPts val="0"/>
               </a:spcAft>
-              <a:defRPr sz="1000" b="0">
+              <a:defRPr sz="900" b="0">
                 <a:solidFill>
                   <a:srgbClr val="1A1A2E"/>
                 </a:solidFill>
@@ -27235,8 +27235,8 @@
         </p:nvSpPr>
         <p:spPr>
           <a:xfrm>
-            <a:off x="8267547" y="2734056"/>
-            <a:ext cx="3246120" cy="228600"/>
+            <a:off x="8264956" y="2615184"/>
+            <a:ext cx="3240938" cy="201168"/>
           </a:xfrm>
           <a:prstGeom prst="rect">
             <a:avLst/>
@@ -27254,7 +27254,7 @@
               <a:spcAft>
                 <a:spcPts val="0"/>
               </a:spcAft>
-              <a:defRPr sz="1000" b="0">
+              <a:defRPr sz="900" b="0">
                 <a:solidFill>
                   <a:srgbClr val="1A1A2E"/>
                 </a:solidFill>
@@ -27275,8 +27275,8 @@
         </p:nvSpPr>
         <p:spPr>
           <a:xfrm>
-            <a:off x="8267547" y="2953512"/>
-            <a:ext cx="3246120" cy="228600"/>
+            <a:off x="8264956" y="2816352"/>
+            <a:ext cx="3240938" cy="201168"/>
           </a:xfrm>
           <a:prstGeom prst="rect">
             <a:avLst/>
@@ -27294,7 +27294,7 @@
               <a:spcAft>
                 <a:spcPts val="0"/>
               </a:spcAft>
-              <a:defRPr sz="1000" b="0">
+              <a:defRPr sz="900" b="0">
                 <a:solidFill>
                   <a:srgbClr val="1A1A2E"/>
                 </a:solidFill>
@@ -28122,7 +28122,7 @@
         <p:spPr>
           <a:xfrm>
             <a:off x="548640" y="1051560"/>
-            <a:ext cx="5303520" cy="5166360"/>
+            <a:ext cx="5410047" cy="5166360"/>
           </a:xfrm>
           <a:prstGeom prst="roundRect">
             <a:avLst>
@@ -28212,7 +28212,7 @@
         <p:spPr>
           <a:xfrm>
             <a:off x="731520" y="1188720"/>
-            <a:ext cx="4983480" cy="274320"/>
+            <a:ext cx="5090007" cy="274320"/>
           </a:xfrm>
           <a:prstGeom prst="rect">
             <a:avLst/>
@@ -28252,7 +28252,7 @@
         <p:spPr>
           <a:xfrm>
             <a:off x="731520" y="1481328"/>
-            <a:ext cx="4983480" cy="201168"/>
+            <a:ext cx="5090007" cy="201168"/>
           </a:xfrm>
           <a:prstGeom prst="rect">
             <a:avLst/>
@@ -28292,7 +28292,7 @@
         <p:spPr>
           <a:xfrm>
             <a:off x="731520" y="1700784"/>
-            <a:ext cx="4983480" cy="201168"/>
+            <a:ext cx="5090007" cy="201168"/>
           </a:xfrm>
           <a:prstGeom prst="rect">
             <a:avLst/>
@@ -28332,7 +28332,7 @@
         <p:spPr>
           <a:xfrm>
             <a:off x="731520" y="1920240"/>
-            <a:ext cx="4983480" cy="201168"/>
+            <a:ext cx="5090007" cy="201168"/>
           </a:xfrm>
           <a:prstGeom prst="rect">
             <a:avLst/>
@@ -28372,7 +28372,7 @@
         <p:spPr>
           <a:xfrm>
             <a:off x="731520" y="2139696"/>
-            <a:ext cx="4983480" cy="201168"/>
+            <a:ext cx="5090007" cy="201168"/>
           </a:xfrm>
           <a:prstGeom prst="rect">
             <a:avLst/>
@@ -28411,8 +28411,8 @@
         </p:nvSpPr>
         <p:spPr>
           <a:xfrm>
-            <a:off x="6172200" y="1051560"/>
-            <a:ext cx="5303520" cy="5166360"/>
+            <a:off x="6233007" y="1051560"/>
+            <a:ext cx="5410047" cy="5166360"/>
           </a:xfrm>
           <a:prstGeom prst="roundRect">
             <a:avLst>
@@ -28458,7 +28458,7 @@
         </p:nvSpPr>
         <p:spPr>
           <a:xfrm>
-            <a:off x="6172200" y="1051560"/>
+            <a:off x="6233007" y="1051560"/>
             <a:ext cx="45720" cy="5166360"/>
           </a:xfrm>
           <a:prstGeom prst="rect">
@@ -28501,8 +28501,8 @@
         </p:nvSpPr>
         <p:spPr>
           <a:xfrm>
-            <a:off x="6355080" y="1188720"/>
-            <a:ext cx="4983480" cy="274320"/>
+            <a:off x="6415887" y="1188720"/>
+            <a:ext cx="5090007" cy="274320"/>
           </a:xfrm>
           <a:prstGeom prst="rect">
             <a:avLst/>
@@ -28541,8 +28541,8 @@
         </p:nvSpPr>
         <p:spPr>
           <a:xfrm>
-            <a:off x="6355080" y="1481328"/>
-            <a:ext cx="4983480" cy="201168"/>
+            <a:off x="6415887" y="1481328"/>
+            <a:ext cx="5090007" cy="201168"/>
           </a:xfrm>
           <a:prstGeom prst="rect">
             <a:avLst/>
@@ -28581,8 +28581,8 @@
         </p:nvSpPr>
         <p:spPr>
           <a:xfrm>
-            <a:off x="6355080" y="1700784"/>
-            <a:ext cx="4983480" cy="201168"/>
+            <a:off x="6415887" y="1700784"/>
+            <a:ext cx="5090007" cy="201168"/>
           </a:xfrm>
           <a:prstGeom prst="rect">
             <a:avLst/>
@@ -28621,8 +28621,8 @@
         </p:nvSpPr>
         <p:spPr>
           <a:xfrm>
-            <a:off x="6355080" y="1920240"/>
-            <a:ext cx="4983480" cy="201168"/>
+            <a:off x="6415887" y="1920240"/>
+            <a:ext cx="5090007" cy="201168"/>
           </a:xfrm>
           <a:prstGeom prst="rect">
             <a:avLst/>
@@ -28661,8 +28661,8 @@
         </p:nvSpPr>
         <p:spPr>
           <a:xfrm>
-            <a:off x="6355080" y="2139696"/>
-            <a:ext cx="4983480" cy="201168"/>
+            <a:off x="6415887" y="2139696"/>
+            <a:ext cx="5090007" cy="201168"/>
           </a:xfrm>
           <a:prstGeom prst="rect">
             <a:avLst/>
@@ -28701,8 +28701,8 @@
         </p:nvSpPr>
         <p:spPr>
           <a:xfrm>
-            <a:off x="6355080" y="2359152"/>
-            <a:ext cx="4983480" cy="201168"/>
+            <a:off x="6415887" y="2359152"/>
+            <a:ext cx="5090007" cy="201168"/>
           </a:xfrm>
           <a:prstGeom prst="rect">
             <a:avLst/>
@@ -28741,8 +28741,8 @@
         </p:nvSpPr>
         <p:spPr>
           <a:xfrm>
-            <a:off x="6355080" y="2578608"/>
-            <a:ext cx="4983480" cy="201168"/>
+            <a:off x="6415887" y="2578608"/>
+            <a:ext cx="5090007" cy="201168"/>
           </a:xfrm>
           <a:prstGeom prst="rect">
             <a:avLst/>
@@ -28781,8 +28781,8 @@
         </p:nvSpPr>
         <p:spPr>
           <a:xfrm>
-            <a:off x="6355080" y="2798064"/>
-            <a:ext cx="4983480" cy="201168"/>
+            <a:off x="6415887" y="2798064"/>
+            <a:ext cx="5090007" cy="201168"/>
           </a:xfrm>
           <a:prstGeom prst="rect">
             <a:avLst/>
@@ -29584,8 +29584,8 @@
         </p:nvSpPr>
         <p:spPr>
           <a:xfrm>
-            <a:off x="-3848252" y="1051560"/>
-            <a:ext cx="2606040" cy="5166360"/>
+            <a:off x="548640" y="1051560"/>
+            <a:ext cx="2567863" cy="2514600"/>
           </a:xfrm>
           <a:prstGeom prst="roundRect">
             <a:avLst>
@@ -29631,8 +29631,8 @@
         </p:nvSpPr>
         <p:spPr>
           <a:xfrm>
-            <a:off x="-3848252" y="1051560"/>
-            <a:ext cx="45720" cy="5166360"/>
+            <a:off x="548640" y="1051560"/>
+            <a:ext cx="45720" cy="2514600"/>
           </a:xfrm>
           <a:prstGeom prst="rect">
             <a:avLst/>
@@ -29674,7 +29674,7 @@
         </p:nvSpPr>
         <p:spPr>
           <a:xfrm>
-            <a:off x="-3711092" y="1188720"/>
+            <a:off x="685800" y="1188720"/>
             <a:ext cx="384048" cy="384048"/>
           </a:xfrm>
           <a:prstGeom prst="ellipse">
@@ -29717,7 +29717,7 @@
         </p:nvSpPr>
         <p:spPr>
           <a:xfrm>
-            <a:off x="-3711092" y="1188720"/>
+            <a:off x="685800" y="1188720"/>
             <a:ext cx="384048" cy="384048"/>
           </a:xfrm>
           <a:prstGeom prst="rect">
@@ -29757,8 +29757,8 @@
         </p:nvSpPr>
         <p:spPr>
           <a:xfrm>
-            <a:off x="-3711092" y="1691640"/>
-            <a:ext cx="2331720" cy="320040"/>
+            <a:off x="685800" y="1691640"/>
+            <a:ext cx="2293543" cy="274320"/>
           </a:xfrm>
           <a:prstGeom prst="rect">
             <a:avLst/>
@@ -29776,7 +29776,7 @@
               <a:spcAft>
                 <a:spcPts val="0"/>
               </a:spcAft>
-              <a:defRPr sz="1400" b="1">
+              <a:defRPr sz="1300" b="1">
                 <a:solidFill>
                   <a:srgbClr val="2563EB"/>
                 </a:solidFill>
@@ -29797,8 +29797,8 @@
         </p:nvSpPr>
         <p:spPr>
           <a:xfrm>
-            <a:off x="-3711092" y="2075688"/>
-            <a:ext cx="2331720" cy="228600"/>
+            <a:off x="685800" y="2011680"/>
+            <a:ext cx="2293543" cy="201168"/>
           </a:xfrm>
           <a:prstGeom prst="rect">
             <a:avLst/>
@@ -29816,7 +29816,7 @@
               <a:spcAft>
                 <a:spcPts val="0"/>
               </a:spcAft>
-              <a:defRPr sz="1000" b="0">
+              <a:defRPr sz="900" b="0">
                 <a:solidFill>
                   <a:srgbClr val="1A1A2E"/>
                 </a:solidFill>
@@ -29837,8 +29837,8 @@
         </p:nvSpPr>
         <p:spPr>
           <a:xfrm>
-            <a:off x="-967892" y="1051560"/>
-            <a:ext cx="2606040" cy="5166360"/>
+            <a:off x="3390823" y="1051560"/>
+            <a:ext cx="2567863" cy="2514600"/>
           </a:xfrm>
           <a:prstGeom prst="roundRect">
             <a:avLst>
@@ -29884,8 +29884,8 @@
         </p:nvSpPr>
         <p:spPr>
           <a:xfrm>
-            <a:off x="-967892" y="1051560"/>
-            <a:ext cx="45720" cy="5166360"/>
+            <a:off x="3390823" y="1051560"/>
+            <a:ext cx="45720" cy="2514600"/>
           </a:xfrm>
           <a:prstGeom prst="rect">
             <a:avLst/>
@@ -29927,7 +29927,7 @@
         </p:nvSpPr>
         <p:spPr>
           <a:xfrm>
-            <a:off x="-830732" y="1188720"/>
+            <a:off x="3527983" y="1188720"/>
             <a:ext cx="384048" cy="384048"/>
           </a:xfrm>
           <a:prstGeom prst="ellipse">
@@ -29970,7 +29970,7 @@
         </p:nvSpPr>
         <p:spPr>
           <a:xfrm>
-            <a:off x="-830732" y="1188720"/>
+            <a:off x="3527983" y="1188720"/>
             <a:ext cx="384048" cy="384048"/>
           </a:xfrm>
           <a:prstGeom prst="rect">
@@ -30010,8 +30010,8 @@
         </p:nvSpPr>
         <p:spPr>
           <a:xfrm>
-            <a:off x="-830732" y="1691640"/>
-            <a:ext cx="2331720" cy="320040"/>
+            <a:off x="3527983" y="1691640"/>
+            <a:ext cx="2293543" cy="274320"/>
           </a:xfrm>
           <a:prstGeom prst="rect">
             <a:avLst/>
@@ -30029,7 +30029,7 @@
               <a:spcAft>
                 <a:spcPts val="0"/>
               </a:spcAft>
-              <a:defRPr sz="1400" b="1">
+              <a:defRPr sz="1300" b="1">
                 <a:solidFill>
                   <a:srgbClr val="0D9488"/>
                 </a:solidFill>
@@ -30050,8 +30050,8 @@
         </p:nvSpPr>
         <p:spPr>
           <a:xfrm>
-            <a:off x="-830732" y="2075688"/>
-            <a:ext cx="2331720" cy="228600"/>
+            <a:off x="3527983" y="2011680"/>
+            <a:ext cx="2293543" cy="201168"/>
           </a:xfrm>
           <a:prstGeom prst="rect">
             <a:avLst/>
@@ -30069,7 +30069,7 @@
               <a:spcAft>
                 <a:spcPts val="0"/>
               </a:spcAft>
-              <a:defRPr sz="1000" b="0">
+              <a:defRPr sz="900" b="0">
                 <a:solidFill>
                   <a:srgbClr val="1A1A2E"/>
                 </a:solidFill>
@@ -30090,8 +30090,8 @@
         </p:nvSpPr>
         <p:spPr>
           <a:xfrm>
-            <a:off x="1912467" y="1051560"/>
-            <a:ext cx="2606040" cy="5166360"/>
+            <a:off x="6233007" y="1051560"/>
+            <a:ext cx="2567863" cy="2514600"/>
           </a:xfrm>
           <a:prstGeom prst="roundRect">
             <a:avLst>
@@ -30137,8 +30137,8 @@
         </p:nvSpPr>
         <p:spPr>
           <a:xfrm>
-            <a:off x="1912467" y="1051560"/>
-            <a:ext cx="45720" cy="5166360"/>
+            <a:off x="6233007" y="1051560"/>
+            <a:ext cx="45720" cy="2514600"/>
           </a:xfrm>
           <a:prstGeom prst="rect">
             <a:avLst/>
@@ -30180,7 +30180,7 @@
         </p:nvSpPr>
         <p:spPr>
           <a:xfrm>
-            <a:off x="2049627" y="1188720"/>
+            <a:off x="6370167" y="1188720"/>
             <a:ext cx="384048" cy="384048"/>
           </a:xfrm>
           <a:prstGeom prst="ellipse">
@@ -30223,7 +30223,7 @@
         </p:nvSpPr>
         <p:spPr>
           <a:xfrm>
-            <a:off x="2049627" y="1188720"/>
+            <a:off x="6370167" y="1188720"/>
             <a:ext cx="384048" cy="384048"/>
           </a:xfrm>
           <a:prstGeom prst="rect">
@@ -30263,8 +30263,8 @@
         </p:nvSpPr>
         <p:spPr>
           <a:xfrm>
-            <a:off x="2049627" y="1691640"/>
-            <a:ext cx="2331720" cy="320040"/>
+            <a:off x="6370167" y="1691640"/>
+            <a:ext cx="2293543" cy="274320"/>
           </a:xfrm>
           <a:prstGeom prst="rect">
             <a:avLst/>
@@ -30282,7 +30282,7 @@
               <a:spcAft>
                 <a:spcPts val="0"/>
               </a:spcAft>
-              <a:defRPr sz="1400" b="1">
+              <a:defRPr sz="1300" b="1">
                 <a:solidFill>
                   <a:srgbClr val="B8860B"/>
                 </a:solidFill>
@@ -30303,8 +30303,8 @@
         </p:nvSpPr>
         <p:spPr>
           <a:xfrm>
-            <a:off x="2049627" y="2075688"/>
-            <a:ext cx="2331720" cy="228600"/>
+            <a:off x="6370167" y="2011680"/>
+            <a:ext cx="2293543" cy="201168"/>
           </a:xfrm>
           <a:prstGeom prst="rect">
             <a:avLst/>
@@ -30322,7 +30322,7 @@
               <a:spcAft>
                 <a:spcPts val="0"/>
               </a:spcAft>
-              <a:defRPr sz="1000" b="0">
+              <a:defRPr sz="900" b="0">
                 <a:solidFill>
                   <a:srgbClr val="1A1A2E"/>
                 </a:solidFill>
@@ -30343,8 +30343,8 @@
         </p:nvSpPr>
         <p:spPr>
           <a:xfrm>
-            <a:off x="4792827" y="1051560"/>
-            <a:ext cx="2606040" cy="5166360"/>
+            <a:off x="9075191" y="1051560"/>
+            <a:ext cx="2567863" cy="2514600"/>
           </a:xfrm>
           <a:prstGeom prst="roundRect">
             <a:avLst>
@@ -30390,8 +30390,8 @@
         </p:nvSpPr>
         <p:spPr>
           <a:xfrm>
-            <a:off x="4792827" y="1051560"/>
-            <a:ext cx="45720" cy="5166360"/>
+            <a:off x="9075191" y="1051560"/>
+            <a:ext cx="45720" cy="2514600"/>
           </a:xfrm>
           <a:prstGeom prst="rect">
             <a:avLst/>
@@ -30433,7 +30433,7 @@
         </p:nvSpPr>
         <p:spPr>
           <a:xfrm>
-            <a:off x="4929987" y="1188720"/>
+            <a:off x="9212351" y="1188720"/>
             <a:ext cx="384048" cy="384048"/>
           </a:xfrm>
           <a:prstGeom prst="ellipse">
@@ -30476,7 +30476,7 @@
         </p:nvSpPr>
         <p:spPr>
           <a:xfrm>
-            <a:off x="4929987" y="1188720"/>
+            <a:off x="9212351" y="1188720"/>
             <a:ext cx="384048" cy="384048"/>
           </a:xfrm>
           <a:prstGeom prst="rect">
@@ -30516,8 +30516,8 @@
         </p:nvSpPr>
         <p:spPr>
           <a:xfrm>
-            <a:off x="4929987" y="1691640"/>
-            <a:ext cx="2331720" cy="320040"/>
+            <a:off x="9212351" y="1691640"/>
+            <a:ext cx="2293543" cy="274320"/>
           </a:xfrm>
           <a:prstGeom prst="rect">
             <a:avLst/>
@@ -30535,7 +30535,7 @@
               <a:spcAft>
                 <a:spcPts val="0"/>
               </a:spcAft>
-              <a:defRPr sz="1400" b="1">
+              <a:defRPr sz="1300" b="1">
                 <a:solidFill>
                   <a:srgbClr val="1B3A6B"/>
                 </a:solidFill>
@@ -30556,8 +30556,8 @@
         </p:nvSpPr>
         <p:spPr>
           <a:xfrm>
-            <a:off x="4929987" y="2075688"/>
-            <a:ext cx="2331720" cy="228600"/>
+            <a:off x="9212351" y="2011680"/>
+            <a:ext cx="2293543" cy="201168"/>
           </a:xfrm>
           <a:prstGeom prst="rect">
             <a:avLst/>
@@ -30575,7 +30575,7 @@
               <a:spcAft>
                 <a:spcPts val="0"/>
               </a:spcAft>
-              <a:defRPr sz="1000" b="0">
+              <a:defRPr sz="900" b="0">
                 <a:solidFill>
                   <a:srgbClr val="1A1A2E"/>
                 </a:solidFill>
@@ -30596,8 +30596,8 @@
         </p:nvSpPr>
         <p:spPr>
           <a:xfrm>
-            <a:off x="7673187" y="1051560"/>
-            <a:ext cx="2606040" cy="5166360"/>
+            <a:off x="548640" y="3794760"/>
+            <a:ext cx="2567863" cy="2514600"/>
           </a:xfrm>
           <a:prstGeom prst="roundRect">
             <a:avLst>
@@ -30643,8 +30643,8 @@
         </p:nvSpPr>
         <p:spPr>
           <a:xfrm>
-            <a:off x="7673187" y="1051560"/>
-            <a:ext cx="45720" cy="5166360"/>
+            <a:off x="548640" y="3794760"/>
+            <a:ext cx="45720" cy="2514600"/>
           </a:xfrm>
           <a:prstGeom prst="rect">
             <a:avLst/>
@@ -30686,7 +30686,7 @@
         </p:nvSpPr>
         <p:spPr>
           <a:xfrm>
-            <a:off x="7810347" y="1188720"/>
+            <a:off x="685800" y="3931920"/>
             <a:ext cx="384048" cy="384048"/>
           </a:xfrm>
           <a:prstGeom prst="ellipse">
@@ -30729,7 +30729,7 @@
         </p:nvSpPr>
         <p:spPr>
           <a:xfrm>
-            <a:off x="7810347" y="1188720"/>
+            <a:off x="685800" y="3931920"/>
             <a:ext cx="384048" cy="384048"/>
           </a:xfrm>
           <a:prstGeom prst="rect">
@@ -30769,8 +30769,8 @@
         </p:nvSpPr>
         <p:spPr>
           <a:xfrm>
-            <a:off x="7810347" y="1691640"/>
-            <a:ext cx="2331720" cy="320040"/>
+            <a:off x="685800" y="4434840"/>
+            <a:ext cx="2293543" cy="274320"/>
           </a:xfrm>
           <a:prstGeom prst="rect">
             <a:avLst/>
@@ -30788,7 +30788,7 @@
               <a:spcAft>
                 <a:spcPts val="0"/>
               </a:spcAft>
-              <a:defRPr sz="1400" b="1">
+              <a:defRPr sz="1300" b="1">
                 <a:solidFill>
                   <a:srgbClr val="2563EB"/>
                 </a:solidFill>
@@ -30809,8 +30809,8 @@
         </p:nvSpPr>
         <p:spPr>
           <a:xfrm>
-            <a:off x="7810347" y="2075688"/>
-            <a:ext cx="2331720" cy="228600"/>
+            <a:off x="685800" y="4754880"/>
+            <a:ext cx="2293543" cy="201168"/>
           </a:xfrm>
           <a:prstGeom prst="rect">
             <a:avLst/>
@@ -30828,7 +30828,7 @@
               <a:spcAft>
                 <a:spcPts val="0"/>
               </a:spcAft>
-              <a:defRPr sz="1000" b="0">
+              <a:defRPr sz="900" b="0">
                 <a:solidFill>
                   <a:srgbClr val="1A1A2E"/>
                 </a:solidFill>
@@ -30849,8 +30849,8 @@
         </p:nvSpPr>
         <p:spPr>
           <a:xfrm>
-            <a:off x="10553547" y="1051560"/>
-            <a:ext cx="2606040" cy="5166360"/>
+            <a:off x="3390823" y="3794760"/>
+            <a:ext cx="2567863" cy="2514600"/>
           </a:xfrm>
           <a:prstGeom prst="roundRect">
             <a:avLst>
@@ -30896,8 +30896,8 @@
         </p:nvSpPr>
         <p:spPr>
           <a:xfrm>
-            <a:off x="10553547" y="1051560"/>
-            <a:ext cx="45720" cy="5166360"/>
+            <a:off x="3390823" y="3794760"/>
+            <a:ext cx="45720" cy="2514600"/>
           </a:xfrm>
           <a:prstGeom prst="rect">
             <a:avLst/>
@@ -30939,7 +30939,7 @@
         </p:nvSpPr>
         <p:spPr>
           <a:xfrm>
-            <a:off x="10690707" y="1188720"/>
+            <a:off x="3527983" y="3931920"/>
             <a:ext cx="384048" cy="384048"/>
           </a:xfrm>
           <a:prstGeom prst="ellipse">
@@ -30982,7 +30982,7 @@
         </p:nvSpPr>
         <p:spPr>
           <a:xfrm>
-            <a:off x="10690707" y="1188720"/>
+            <a:off x="3527983" y="3931920"/>
             <a:ext cx="384048" cy="384048"/>
           </a:xfrm>
           <a:prstGeom prst="rect">
@@ -31022,8 +31022,8 @@
         </p:nvSpPr>
         <p:spPr>
           <a:xfrm>
-            <a:off x="10690707" y="1691640"/>
-            <a:ext cx="2331720" cy="320040"/>
+            <a:off x="3527983" y="4434840"/>
+            <a:ext cx="2293543" cy="274320"/>
           </a:xfrm>
           <a:prstGeom prst="rect">
             <a:avLst/>
@@ -31041,7 +31041,7 @@
               <a:spcAft>
                 <a:spcPts val="0"/>
               </a:spcAft>
-              <a:defRPr sz="1400" b="1">
+              <a:defRPr sz="1300" b="1">
                 <a:solidFill>
                   <a:srgbClr val="0D9488"/>
                 </a:solidFill>
@@ -31062,8 +31062,8 @@
         </p:nvSpPr>
         <p:spPr>
           <a:xfrm>
-            <a:off x="10690707" y="2075688"/>
-            <a:ext cx="2331720" cy="228600"/>
+            <a:off x="3527983" y="4754880"/>
+            <a:ext cx="2293543" cy="201168"/>
           </a:xfrm>
           <a:prstGeom prst="rect">
             <a:avLst/>
@@ -31081,7 +31081,7 @@
               <a:spcAft>
                 <a:spcPts val="0"/>
               </a:spcAft>
-              <a:defRPr sz="1000" b="0">
+              <a:defRPr sz="900" b="0">
                 <a:solidFill>
                   <a:srgbClr val="1A1A2E"/>
                 </a:solidFill>
@@ -31102,8 +31102,8 @@
         </p:nvSpPr>
         <p:spPr>
           <a:xfrm>
-            <a:off x="13433907" y="1051560"/>
-            <a:ext cx="2606040" cy="5166360"/>
+            <a:off x="6233007" y="3794760"/>
+            <a:ext cx="2567863" cy="2514600"/>
           </a:xfrm>
           <a:prstGeom prst="roundRect">
             <a:avLst>
@@ -31149,8 +31149,8 @@
         </p:nvSpPr>
         <p:spPr>
           <a:xfrm>
-            <a:off x="13433907" y="1051560"/>
-            <a:ext cx="45720" cy="5166360"/>
+            <a:off x="6233007" y="3794760"/>
+            <a:ext cx="45720" cy="2514600"/>
           </a:xfrm>
           <a:prstGeom prst="rect">
             <a:avLst/>
@@ -31192,7 +31192,7 @@
         </p:nvSpPr>
         <p:spPr>
           <a:xfrm>
-            <a:off x="13571067" y="1188720"/>
+            <a:off x="6370167" y="3931920"/>
             <a:ext cx="384048" cy="384048"/>
           </a:xfrm>
           <a:prstGeom prst="ellipse">
@@ -31235,7 +31235,7 @@
         </p:nvSpPr>
         <p:spPr>
           <a:xfrm>
-            <a:off x="13571067" y="1188720"/>
+            <a:off x="6370167" y="3931920"/>
             <a:ext cx="384048" cy="384048"/>
           </a:xfrm>
           <a:prstGeom prst="rect">
@@ -31275,8 +31275,8 @@
         </p:nvSpPr>
         <p:spPr>
           <a:xfrm>
-            <a:off x="13571067" y="1691640"/>
-            <a:ext cx="2331720" cy="320040"/>
+            <a:off x="6370167" y="4434840"/>
+            <a:ext cx="2293543" cy="274320"/>
           </a:xfrm>
           <a:prstGeom prst="rect">
             <a:avLst/>
@@ -31294,7 +31294,7 @@
               <a:spcAft>
                 <a:spcPts val="0"/>
               </a:spcAft>
-              <a:defRPr sz="1400" b="1">
+              <a:defRPr sz="1300" b="1">
                 <a:solidFill>
                   <a:srgbClr val="B8860B"/>
                 </a:solidFill>
@@ -31315,8 +31315,8 @@
         </p:nvSpPr>
         <p:spPr>
           <a:xfrm>
-            <a:off x="13571067" y="2075688"/>
-            <a:ext cx="2331720" cy="228600"/>
+            <a:off x="6370167" y="4754880"/>
+            <a:ext cx="2293543" cy="201168"/>
           </a:xfrm>
           <a:prstGeom prst="rect">
             <a:avLst/>
@@ -31334,7 +31334,7 @@
               <a:spcAft>
                 <a:spcPts val="0"/>
               </a:spcAft>
-              <a:defRPr sz="1000" b="0">
+              <a:defRPr sz="900" b="0">
                 <a:solidFill>
                   <a:srgbClr val="1A1A2E"/>
                 </a:solidFill>
@@ -32161,8 +32161,8 @@
         </p:nvSpPr>
         <p:spPr>
           <a:xfrm>
-            <a:off x="655167" y="1051560"/>
-            <a:ext cx="5303520" cy="5166360"/>
+            <a:off x="548640" y="1051560"/>
+            <a:ext cx="5410047" cy="5257800"/>
           </a:xfrm>
           <a:prstGeom prst="roundRect">
             <a:avLst>
@@ -32208,8 +32208,8 @@
         </p:nvSpPr>
         <p:spPr>
           <a:xfrm>
-            <a:off x="655167" y="1051560"/>
-            <a:ext cx="45720" cy="5166360"/>
+            <a:off x="548640" y="1051560"/>
+            <a:ext cx="45720" cy="5257800"/>
           </a:xfrm>
           <a:prstGeom prst="rect">
             <a:avLst/>
@@ -32251,7 +32251,7 @@
         </p:nvSpPr>
         <p:spPr>
           <a:xfrm>
-            <a:off x="792327" y="1188720"/>
+            <a:off x="685800" y="1188720"/>
             <a:ext cx="384048" cy="384048"/>
           </a:xfrm>
           <a:prstGeom prst="ellipse">
@@ -32294,7 +32294,7 @@
         </p:nvSpPr>
         <p:spPr>
           <a:xfrm>
-            <a:off x="792327" y="1188720"/>
+            <a:off x="685800" y="1188720"/>
             <a:ext cx="384048" cy="384048"/>
           </a:xfrm>
           <a:prstGeom prst="rect">
@@ -32334,8 +32334,8 @@
         </p:nvSpPr>
         <p:spPr>
           <a:xfrm>
-            <a:off x="792327" y="1691640"/>
-            <a:ext cx="5029200" cy="320040"/>
+            <a:off x="685800" y="1691640"/>
+            <a:ext cx="5135727" cy="274320"/>
           </a:xfrm>
           <a:prstGeom prst="rect">
             <a:avLst/>
@@ -32353,7 +32353,7 @@
               <a:spcAft>
                 <a:spcPts val="0"/>
               </a:spcAft>
-              <a:defRPr sz="1400" b="1">
+              <a:defRPr sz="1300" b="1">
                 <a:solidFill>
                   <a:srgbClr val="2563EB"/>
                 </a:solidFill>
@@ -32374,8 +32374,8 @@
         </p:nvSpPr>
         <p:spPr>
           <a:xfrm>
-            <a:off x="792327" y="2075688"/>
-            <a:ext cx="5029200" cy="228600"/>
+            <a:off x="685800" y="2011680"/>
+            <a:ext cx="5135727" cy="201168"/>
           </a:xfrm>
           <a:prstGeom prst="rect">
             <a:avLst/>
@@ -32393,7 +32393,7 @@
               <a:spcAft>
                 <a:spcPts val="0"/>
               </a:spcAft>
-              <a:defRPr sz="1000" b="0">
+              <a:defRPr sz="900" b="0">
                 <a:solidFill>
                   <a:srgbClr val="1A1A2E"/>
                 </a:solidFill>
@@ -32414,8 +32414,8 @@
         </p:nvSpPr>
         <p:spPr>
           <a:xfrm>
-            <a:off x="792327" y="2295144"/>
-            <a:ext cx="5029200" cy="228600"/>
+            <a:off x="685800" y="2212848"/>
+            <a:ext cx="5135727" cy="201168"/>
           </a:xfrm>
           <a:prstGeom prst="rect">
             <a:avLst/>
@@ -32433,7 +32433,7 @@
               <a:spcAft>
                 <a:spcPts val="0"/>
               </a:spcAft>
-              <a:defRPr sz="1000" b="0">
+              <a:defRPr sz="900" b="0">
                 <a:solidFill>
                   <a:srgbClr val="1A1A2E"/>
                 </a:solidFill>
@@ -32454,8 +32454,8 @@
         </p:nvSpPr>
         <p:spPr>
           <a:xfrm>
-            <a:off x="792327" y="2514600"/>
-            <a:ext cx="5029200" cy="228600"/>
+            <a:off x="685800" y="2414016"/>
+            <a:ext cx="5135727" cy="201168"/>
           </a:xfrm>
           <a:prstGeom prst="rect">
             <a:avLst/>
@@ -32473,7 +32473,7 @@
               <a:spcAft>
                 <a:spcPts val="0"/>
               </a:spcAft>
-              <a:defRPr sz="1000" b="0">
+              <a:defRPr sz="900" b="0">
                 <a:solidFill>
                   <a:srgbClr val="1A1A2E"/>
                 </a:solidFill>
@@ -32494,8 +32494,8 @@
         </p:nvSpPr>
         <p:spPr>
           <a:xfrm>
-            <a:off x="792327" y="2734056"/>
-            <a:ext cx="5029200" cy="228600"/>
+            <a:off x="685800" y="2615184"/>
+            <a:ext cx="5135727" cy="201168"/>
           </a:xfrm>
           <a:prstGeom prst="rect">
             <a:avLst/>
@@ -32513,7 +32513,7 @@
               <a:spcAft>
                 <a:spcPts val="0"/>
               </a:spcAft>
-              <a:defRPr sz="1000" b="0">
+              <a:defRPr sz="900" b="0">
                 <a:solidFill>
                   <a:srgbClr val="1A1A2E"/>
                 </a:solidFill>
@@ -32534,8 +32534,8 @@
         </p:nvSpPr>
         <p:spPr>
           <a:xfrm>
-            <a:off x="792327" y="2953512"/>
-            <a:ext cx="5029200" cy="228600"/>
+            <a:off x="685800" y="2816352"/>
+            <a:ext cx="5135727" cy="201168"/>
           </a:xfrm>
           <a:prstGeom prst="rect">
             <a:avLst/>
@@ -32553,7 +32553,7 @@
               <a:spcAft>
                 <a:spcPts val="0"/>
               </a:spcAft>
-              <a:defRPr sz="1000" b="0">
+              <a:defRPr sz="900" b="0">
                 <a:solidFill>
                   <a:srgbClr val="1A1A2E"/>
                 </a:solidFill>
@@ -32574,8 +32574,8 @@
         </p:nvSpPr>
         <p:spPr>
           <a:xfrm>
-            <a:off x="792327" y="3172968"/>
-            <a:ext cx="5029200" cy="228600"/>
+            <a:off x="685800" y="3017520"/>
+            <a:ext cx="5135727" cy="201168"/>
           </a:xfrm>
           <a:prstGeom prst="rect">
             <a:avLst/>
@@ -32593,7 +32593,7 @@
               <a:spcAft>
                 <a:spcPts val="0"/>
               </a:spcAft>
-              <a:defRPr sz="1000" b="0">
+              <a:defRPr sz="900" b="0">
                 <a:solidFill>
                   <a:srgbClr val="1A1A2E"/>
                 </a:solidFill>
@@ -32614,8 +32614,8 @@
         </p:nvSpPr>
         <p:spPr>
           <a:xfrm>
-            <a:off x="792327" y="3392424"/>
-            <a:ext cx="5029200" cy="228600"/>
+            <a:off x="685800" y="3218688"/>
+            <a:ext cx="5135727" cy="201168"/>
           </a:xfrm>
           <a:prstGeom prst="rect">
             <a:avLst/>
@@ -32633,7 +32633,7 @@
               <a:spcAft>
                 <a:spcPts val="0"/>
               </a:spcAft>
-              <a:defRPr sz="1000" b="0">
+              <a:defRPr sz="900" b="0">
                 <a:solidFill>
                   <a:srgbClr val="1A1A2E"/>
                 </a:solidFill>
@@ -32654,8 +32654,8 @@
         </p:nvSpPr>
         <p:spPr>
           <a:xfrm>
-            <a:off x="792327" y="3611880"/>
-            <a:ext cx="5029200" cy="228600"/>
+            <a:off x="685800" y="3419856"/>
+            <a:ext cx="5135727" cy="201168"/>
           </a:xfrm>
           <a:prstGeom prst="rect">
             <a:avLst/>
@@ -32673,7 +32673,7 @@
               <a:spcAft>
                 <a:spcPts val="0"/>
               </a:spcAft>
-              <a:defRPr sz="1000" b="0">
+              <a:defRPr sz="900" b="0">
                 <a:solidFill>
                   <a:srgbClr val="1A1A2E"/>
                 </a:solidFill>
@@ -32694,8 +32694,8 @@
         </p:nvSpPr>
         <p:spPr>
           <a:xfrm>
-            <a:off x="792327" y="3831336"/>
-            <a:ext cx="5029200" cy="228600"/>
+            <a:off x="685800" y="3621024"/>
+            <a:ext cx="5135727" cy="201168"/>
           </a:xfrm>
           <a:prstGeom prst="rect">
             <a:avLst/>
@@ -32713,7 +32713,7 @@
               <a:spcAft>
                 <a:spcPts val="0"/>
               </a:spcAft>
-              <a:defRPr sz="1000" b="0">
+              <a:defRPr sz="900" b="0">
                 <a:solidFill>
                   <a:srgbClr val="1A1A2E"/>
                 </a:solidFill>
@@ -32734,8 +32734,8 @@
         </p:nvSpPr>
         <p:spPr>
           <a:xfrm>
-            <a:off x="792327" y="4050792"/>
-            <a:ext cx="5029200" cy="228600"/>
+            <a:off x="685800" y="3822192"/>
+            <a:ext cx="5135727" cy="201168"/>
           </a:xfrm>
           <a:prstGeom prst="rect">
             <a:avLst/>
@@ -32753,7 +32753,7 @@
               <a:spcAft>
                 <a:spcPts val="0"/>
               </a:spcAft>
-              <a:defRPr sz="1000" b="0">
+              <a:defRPr sz="900" b="0">
                 <a:solidFill>
                   <a:srgbClr val="1A1A2E"/>
                 </a:solidFill>
@@ -32775,7 +32775,7 @@
         <p:spPr>
           <a:xfrm>
             <a:off x="6233007" y="1051560"/>
-            <a:ext cx="5303520" cy="5166360"/>
+            <a:ext cx="5410047" cy="5257800"/>
           </a:xfrm>
           <a:prstGeom prst="roundRect">
             <a:avLst>
@@ -32822,7 +32822,7 @@
         <p:spPr>
           <a:xfrm>
             <a:off x="6233007" y="1051560"/>
-            <a:ext cx="45720" cy="5166360"/>
+            <a:ext cx="45720" cy="5257800"/>
           </a:xfrm>
           <a:prstGeom prst="rect">
             <a:avLst/>
@@ -32948,7 +32948,7 @@
         <p:spPr>
           <a:xfrm>
             <a:off x="6370167" y="1691640"/>
-            <a:ext cx="5029200" cy="320040"/>
+            <a:ext cx="5135727" cy="274320"/>
           </a:xfrm>
           <a:prstGeom prst="rect">
             <a:avLst/>
@@ -32966,7 +32966,7 @@
               <a:spcAft>
                 <a:spcPts val="0"/>
               </a:spcAft>
-              <a:defRPr sz="1400" b="1">
+              <a:defRPr sz="1300" b="1">
                 <a:solidFill>
                   <a:srgbClr val="0D9488"/>
                 </a:solidFill>
@@ -32987,8 +32987,8 @@
         </p:nvSpPr>
         <p:spPr>
           <a:xfrm>
-            <a:off x="6370167" y="2075688"/>
-            <a:ext cx="5029200" cy="228600"/>
+            <a:off x="6370167" y="2011680"/>
+            <a:ext cx="5135727" cy="201168"/>
           </a:xfrm>
           <a:prstGeom prst="rect">
             <a:avLst/>
@@ -33006,7 +33006,7 @@
               <a:spcAft>
                 <a:spcPts val="0"/>
               </a:spcAft>
-              <a:defRPr sz="1000" b="0">
+              <a:defRPr sz="900" b="0">
                 <a:solidFill>
                   <a:srgbClr val="1A1A2E"/>
                 </a:solidFill>
@@ -33027,8 +33027,8 @@
         </p:nvSpPr>
         <p:spPr>
           <a:xfrm>
-            <a:off x="6370167" y="2295144"/>
-            <a:ext cx="5029200" cy="228600"/>
+            <a:off x="6370167" y="2212848"/>
+            <a:ext cx="5135727" cy="201168"/>
           </a:xfrm>
           <a:prstGeom prst="rect">
             <a:avLst/>
@@ -33046,7 +33046,7 @@
               <a:spcAft>
                 <a:spcPts val="0"/>
               </a:spcAft>
-              <a:defRPr sz="1000" b="0">
+              <a:defRPr sz="900" b="0">
                 <a:solidFill>
                   <a:srgbClr val="1A1A2E"/>
                 </a:solidFill>
@@ -33067,8 +33067,8 @@
         </p:nvSpPr>
         <p:spPr>
           <a:xfrm>
-            <a:off x="6370167" y="2514600"/>
-            <a:ext cx="5029200" cy="228600"/>
+            <a:off x="6370167" y="2414016"/>
+            <a:ext cx="5135727" cy="201168"/>
           </a:xfrm>
           <a:prstGeom prst="rect">
             <a:avLst/>
@@ -33086,7 +33086,7 @@
               <a:spcAft>
                 <a:spcPts val="0"/>
               </a:spcAft>
-              <a:defRPr sz="1000" b="0">
+              <a:defRPr sz="900" b="0">
                 <a:solidFill>
                   <a:srgbClr val="1A1A2E"/>
                 </a:solidFill>
@@ -33107,8 +33107,8 @@
         </p:nvSpPr>
         <p:spPr>
           <a:xfrm>
-            <a:off x="6370167" y="2734056"/>
-            <a:ext cx="5029200" cy="228600"/>
+            <a:off x="6370167" y="2615184"/>
+            <a:ext cx="5135727" cy="201168"/>
           </a:xfrm>
           <a:prstGeom prst="rect">
             <a:avLst/>
@@ -33126,7 +33126,7 @@
               <a:spcAft>
                 <a:spcPts val="0"/>
               </a:spcAft>
-              <a:defRPr sz="1000" b="0">
+              <a:defRPr sz="900" b="0">
                 <a:solidFill>
                   <a:srgbClr val="1A1A2E"/>
                 </a:solidFill>
@@ -33147,8 +33147,8 @@
         </p:nvSpPr>
         <p:spPr>
           <a:xfrm>
-            <a:off x="6370167" y="2953512"/>
-            <a:ext cx="5029200" cy="228600"/>
+            <a:off x="6370167" y="2816352"/>
+            <a:ext cx="5135727" cy="201168"/>
           </a:xfrm>
           <a:prstGeom prst="rect">
             <a:avLst/>
@@ -33166,7 +33166,7 @@
               <a:spcAft>
                 <a:spcPts val="0"/>
               </a:spcAft>
-              <a:defRPr sz="1000" b="0">
+              <a:defRPr sz="900" b="0">
                 <a:solidFill>
                   <a:srgbClr val="1A1A2E"/>
                 </a:solidFill>
@@ -33187,8 +33187,8 @@
         </p:nvSpPr>
         <p:spPr>
           <a:xfrm>
-            <a:off x="6370167" y="3172968"/>
-            <a:ext cx="5029200" cy="228600"/>
+            <a:off x="6370167" y="3017520"/>
+            <a:ext cx="5135727" cy="201168"/>
           </a:xfrm>
           <a:prstGeom prst="rect">
             <a:avLst/>
@@ -33206,7 +33206,7 @@
               <a:spcAft>
                 <a:spcPts val="0"/>
               </a:spcAft>
-              <a:defRPr sz="1000" b="0">
+              <a:defRPr sz="900" b="0">
                 <a:solidFill>
                   <a:srgbClr val="1A1A2E"/>
                 </a:solidFill>
@@ -33227,8 +33227,8 @@
         </p:nvSpPr>
         <p:spPr>
           <a:xfrm>
-            <a:off x="6370167" y="3392424"/>
-            <a:ext cx="5029200" cy="228600"/>
+            <a:off x="6370167" y="3218688"/>
+            <a:ext cx="5135727" cy="201168"/>
           </a:xfrm>
           <a:prstGeom prst="rect">
             <a:avLst/>
@@ -33246,7 +33246,7 @@
               <a:spcAft>
                 <a:spcPts val="0"/>
               </a:spcAft>
-              <a:defRPr sz="1000" b="0">
+              <a:defRPr sz="900" b="0">
                 <a:solidFill>
                   <a:srgbClr val="1A1A2E"/>
                 </a:solidFill>
@@ -33267,8 +33267,8 @@
         </p:nvSpPr>
         <p:spPr>
           <a:xfrm>
-            <a:off x="6370167" y="3611880"/>
-            <a:ext cx="5029200" cy="228600"/>
+            <a:off x="6370167" y="3419856"/>
+            <a:ext cx="5135727" cy="201168"/>
           </a:xfrm>
           <a:prstGeom prst="rect">
             <a:avLst/>
@@ -33286,7 +33286,7 @@
               <a:spcAft>
                 <a:spcPts val="0"/>
               </a:spcAft>
-              <a:defRPr sz="1000" b="0">
+              <a:defRPr sz="900" b="0">
                 <a:solidFill>
                   <a:srgbClr val="1A1A2E"/>
                 </a:solidFill>
@@ -33665,8 +33665,8 @@
         </p:nvSpPr>
         <p:spPr>
           <a:xfrm>
-            <a:off x="655167" y="1051560"/>
-            <a:ext cx="5303520" cy="5166360"/>
+            <a:off x="548640" y="1051560"/>
+            <a:ext cx="5410047" cy="5257800"/>
           </a:xfrm>
           <a:prstGeom prst="roundRect">
             <a:avLst>
@@ -33712,8 +33712,8 @@
         </p:nvSpPr>
         <p:spPr>
           <a:xfrm>
-            <a:off x="655167" y="1051560"/>
-            <a:ext cx="45720" cy="5166360"/>
+            <a:off x="548640" y="1051560"/>
+            <a:ext cx="45720" cy="5257800"/>
           </a:xfrm>
           <a:prstGeom prst="rect">
             <a:avLst/>
@@ -33755,7 +33755,7 @@
         </p:nvSpPr>
         <p:spPr>
           <a:xfrm>
-            <a:off x="792327" y="1188720"/>
+            <a:off x="685800" y="1188720"/>
             <a:ext cx="384048" cy="384048"/>
           </a:xfrm>
           <a:prstGeom prst="ellipse">
@@ -33798,7 +33798,7 @@
         </p:nvSpPr>
         <p:spPr>
           <a:xfrm>
-            <a:off x="792327" y="1188720"/>
+            <a:off x="685800" y="1188720"/>
             <a:ext cx="384048" cy="384048"/>
           </a:xfrm>
           <a:prstGeom prst="rect">
@@ -33838,8 +33838,8 @@
         </p:nvSpPr>
         <p:spPr>
           <a:xfrm>
-            <a:off x="792327" y="1691640"/>
-            <a:ext cx="5029200" cy="320040"/>
+            <a:off x="685800" y="1691640"/>
+            <a:ext cx="5135727" cy="274320"/>
           </a:xfrm>
           <a:prstGeom prst="rect">
             <a:avLst/>
@@ -33857,7 +33857,7 @@
               <a:spcAft>
                 <a:spcPts val="0"/>
               </a:spcAft>
-              <a:defRPr sz="1400" b="1">
+              <a:defRPr sz="1300" b="1">
                 <a:solidFill>
                   <a:srgbClr val="2563EB"/>
                 </a:solidFill>
@@ -33878,8 +33878,8 @@
         </p:nvSpPr>
         <p:spPr>
           <a:xfrm>
-            <a:off x="792327" y="2075688"/>
-            <a:ext cx="5029200" cy="228600"/>
+            <a:off x="685800" y="2011680"/>
+            <a:ext cx="5135727" cy="201168"/>
           </a:xfrm>
           <a:prstGeom prst="rect">
             <a:avLst/>
@@ -33897,7 +33897,7 @@
               <a:spcAft>
                 <a:spcPts val="0"/>
               </a:spcAft>
-              <a:defRPr sz="1000" b="0">
+              <a:defRPr sz="900" b="0">
                 <a:solidFill>
                   <a:srgbClr val="1A1A2E"/>
                 </a:solidFill>
@@ -33918,8 +33918,8 @@
         </p:nvSpPr>
         <p:spPr>
           <a:xfrm>
-            <a:off x="792327" y="2295144"/>
-            <a:ext cx="5029200" cy="228600"/>
+            <a:off x="685800" y="2212848"/>
+            <a:ext cx="5135727" cy="201168"/>
           </a:xfrm>
           <a:prstGeom prst="rect">
             <a:avLst/>
@@ -33937,7 +33937,7 @@
               <a:spcAft>
                 <a:spcPts val="0"/>
               </a:spcAft>
-              <a:defRPr sz="1000" b="0">
+              <a:defRPr sz="900" b="0">
                 <a:solidFill>
                   <a:srgbClr val="1A1A2E"/>
                 </a:solidFill>
@@ -33959,7 +33959,7 @@
         <p:spPr>
           <a:xfrm>
             <a:off x="6233007" y="1051560"/>
-            <a:ext cx="5303520" cy="5166360"/>
+            <a:ext cx="5410047" cy="5257800"/>
           </a:xfrm>
           <a:prstGeom prst="roundRect">
             <a:avLst>
@@ -34006,7 +34006,7 @@
         <p:spPr>
           <a:xfrm>
             <a:off x="6233007" y="1051560"/>
-            <a:ext cx="45720" cy="5166360"/>
+            <a:ext cx="45720" cy="5257800"/>
           </a:xfrm>
           <a:prstGeom prst="rect">
             <a:avLst/>
@@ -34132,7 +34132,7 @@
         <p:spPr>
           <a:xfrm>
             <a:off x="6370167" y="1691640"/>
-            <a:ext cx="5029200" cy="320040"/>
+            <a:ext cx="5135727" cy="274320"/>
           </a:xfrm>
           <a:prstGeom prst="rect">
             <a:avLst/>
@@ -34150,7 +34150,7 @@
               <a:spcAft>
                 <a:spcPts val="0"/>
               </a:spcAft>
-              <a:defRPr sz="1400" b="1">
+              <a:defRPr sz="1300" b="1">
                 <a:solidFill>
                   <a:srgbClr val="0D9488"/>
                 </a:solidFill>
@@ -34171,8 +34171,8 @@
         </p:nvSpPr>
         <p:spPr>
           <a:xfrm>
-            <a:off x="6370167" y="2075688"/>
-            <a:ext cx="5029200" cy="228600"/>
+            <a:off x="6370167" y="2011680"/>
+            <a:ext cx="5135727" cy="201168"/>
           </a:xfrm>
           <a:prstGeom prst="rect">
             <a:avLst/>
@@ -34190,7 +34190,7 @@
               <a:spcAft>
                 <a:spcPts val="0"/>
               </a:spcAft>
-              <a:defRPr sz="1000" b="0">
+              <a:defRPr sz="900" b="0">
                 <a:solidFill>
                   <a:srgbClr val="1A1A2E"/>
                 </a:solidFill>
@@ -34211,8 +34211,8 @@
         </p:nvSpPr>
         <p:spPr>
           <a:xfrm>
-            <a:off x="6370167" y="2295144"/>
-            <a:ext cx="5029200" cy="228600"/>
+            <a:off x="6370167" y="2212848"/>
+            <a:ext cx="5135727" cy="201168"/>
           </a:xfrm>
           <a:prstGeom prst="rect">
             <a:avLst/>
@@ -34230,7 +34230,7 @@
               <a:spcAft>
                 <a:spcPts val="0"/>
               </a:spcAft>
-              <a:defRPr sz="1000" b="0">
+              <a:defRPr sz="900" b="0">
                 <a:solidFill>
                   <a:srgbClr val="1A1A2E"/>
                 </a:solidFill>
@@ -34251,8 +34251,8 @@
         </p:nvSpPr>
         <p:spPr>
           <a:xfrm>
-            <a:off x="6370167" y="2514600"/>
-            <a:ext cx="5029200" cy="228600"/>
+            <a:off x="6370167" y="2414016"/>
+            <a:ext cx="5135727" cy="201168"/>
           </a:xfrm>
           <a:prstGeom prst="rect">
             <a:avLst/>
@@ -34270,7 +34270,7 @@
               <a:spcAft>
                 <a:spcPts val="0"/>
               </a:spcAft>
-              <a:defRPr sz="1000" b="0">
+              <a:defRPr sz="900" b="0">
                 <a:solidFill>
                   <a:srgbClr val="1A1A2E"/>
                 </a:solidFill>
@@ -34291,8 +34291,8 @@
         </p:nvSpPr>
         <p:spPr>
           <a:xfrm>
-            <a:off x="6370167" y="2734056"/>
-            <a:ext cx="5029200" cy="228600"/>
+            <a:off x="6370167" y="2615184"/>
+            <a:ext cx="5135727" cy="201168"/>
           </a:xfrm>
           <a:prstGeom prst="rect">
             <a:avLst/>
@@ -34310,7 +34310,7 @@
               <a:spcAft>
                 <a:spcPts val="0"/>
               </a:spcAft>
-              <a:defRPr sz="1000" b="0">
+              <a:defRPr sz="900" b="0">
                 <a:solidFill>
                   <a:srgbClr val="1A1A2E"/>
                 </a:solidFill>
@@ -35137,8 +35137,8 @@
         </p:nvSpPr>
         <p:spPr>
           <a:xfrm>
-            <a:off x="495147" y="1051560"/>
-            <a:ext cx="2560320" cy="2011680"/>
+            <a:off x="548640" y="1051560"/>
+            <a:ext cx="2567863" cy="2011680"/>
           </a:xfrm>
           <a:prstGeom prst="roundRect">
             <a:avLst>
@@ -35184,8 +35184,8 @@
         </p:nvSpPr>
         <p:spPr>
           <a:xfrm>
-            <a:off x="495147" y="1051560"/>
-            <a:ext cx="2560320" cy="45720"/>
+            <a:off x="548640" y="1051560"/>
+            <a:ext cx="2567863" cy="45720"/>
           </a:xfrm>
           <a:prstGeom prst="rect">
             <a:avLst/>
@@ -35227,8 +35227,8 @@
         </p:nvSpPr>
         <p:spPr>
           <a:xfrm>
-            <a:off x="495147" y="1280160"/>
-            <a:ext cx="2560320" cy="640080"/>
+            <a:off x="548640" y="1280160"/>
+            <a:ext cx="2567863" cy="640080"/>
           </a:xfrm>
           <a:prstGeom prst="rect">
             <a:avLst/>
@@ -35267,8 +35267,8 @@
         </p:nvSpPr>
         <p:spPr>
           <a:xfrm>
-            <a:off x="586587" y="1965960"/>
-            <a:ext cx="2377440" cy="640080"/>
+            <a:off x="640080" y="1965960"/>
+            <a:ext cx="2384983" cy="640080"/>
           </a:xfrm>
           <a:prstGeom prst="rect">
             <a:avLst/>
@@ -35311,8 +35311,8 @@
         </p:nvSpPr>
         <p:spPr>
           <a:xfrm>
-            <a:off x="3375507" y="1051560"/>
-            <a:ext cx="2560320" cy="2011680"/>
+            <a:off x="3390823" y="1051560"/>
+            <a:ext cx="2567863" cy="2011680"/>
           </a:xfrm>
           <a:prstGeom prst="roundRect">
             <a:avLst>
@@ -35358,8 +35358,8 @@
         </p:nvSpPr>
         <p:spPr>
           <a:xfrm>
-            <a:off x="3375507" y="1051560"/>
-            <a:ext cx="2560320" cy="45720"/>
+            <a:off x="3390823" y="1051560"/>
+            <a:ext cx="2567863" cy="45720"/>
           </a:xfrm>
           <a:prstGeom prst="rect">
             <a:avLst/>
@@ -35401,8 +35401,8 @@
         </p:nvSpPr>
         <p:spPr>
           <a:xfrm>
-            <a:off x="3375507" y="1280160"/>
-            <a:ext cx="2560320" cy="640080"/>
+            <a:off x="3390823" y="1280160"/>
+            <a:ext cx="2567863" cy="640080"/>
           </a:xfrm>
           <a:prstGeom prst="rect">
             <a:avLst/>
@@ -35441,8 +35441,8 @@
         </p:nvSpPr>
         <p:spPr>
           <a:xfrm>
-            <a:off x="3466947" y="1965960"/>
-            <a:ext cx="2377440" cy="640080"/>
+            <a:off x="3482263" y="1965960"/>
+            <a:ext cx="2384983" cy="640080"/>
           </a:xfrm>
           <a:prstGeom prst="rect">
             <a:avLst/>
@@ -35485,8 +35485,8 @@
         </p:nvSpPr>
         <p:spPr>
           <a:xfrm>
-            <a:off x="6255867" y="1051560"/>
-            <a:ext cx="2560320" cy="2011680"/>
+            <a:off x="6233007" y="1051560"/>
+            <a:ext cx="2567863" cy="2011680"/>
           </a:xfrm>
           <a:prstGeom prst="roundRect">
             <a:avLst>
@@ -35532,8 +35532,8 @@
         </p:nvSpPr>
         <p:spPr>
           <a:xfrm>
-            <a:off x="6255867" y="1051560"/>
-            <a:ext cx="2560320" cy="45720"/>
+            <a:off x="6233007" y="1051560"/>
+            <a:ext cx="2567863" cy="45720"/>
           </a:xfrm>
           <a:prstGeom prst="rect">
             <a:avLst/>
@@ -35575,8 +35575,8 @@
         </p:nvSpPr>
         <p:spPr>
           <a:xfrm>
-            <a:off x="6255867" y="1280160"/>
-            <a:ext cx="2560320" cy="640080"/>
+            <a:off x="6233007" y="1280160"/>
+            <a:ext cx="2567863" cy="640080"/>
           </a:xfrm>
           <a:prstGeom prst="rect">
             <a:avLst/>
@@ -35615,8 +35615,8 @@
         </p:nvSpPr>
         <p:spPr>
           <a:xfrm>
-            <a:off x="6347307" y="1965960"/>
-            <a:ext cx="2377440" cy="640080"/>
+            <a:off x="6324447" y="1965960"/>
+            <a:ext cx="2384983" cy="640080"/>
           </a:xfrm>
           <a:prstGeom prst="rect">
             <a:avLst/>
@@ -35659,8 +35659,8 @@
         </p:nvSpPr>
         <p:spPr>
           <a:xfrm>
-            <a:off x="9136227" y="1051560"/>
-            <a:ext cx="2560320" cy="2011680"/>
+            <a:off x="9075191" y="1051560"/>
+            <a:ext cx="2567863" cy="2011680"/>
           </a:xfrm>
           <a:prstGeom prst="roundRect">
             <a:avLst>
@@ -35706,8 +35706,8 @@
         </p:nvSpPr>
         <p:spPr>
           <a:xfrm>
-            <a:off x="9136227" y="1051560"/>
-            <a:ext cx="2560320" cy="45720"/>
+            <a:off x="9075191" y="1051560"/>
+            <a:ext cx="2567863" cy="45720"/>
           </a:xfrm>
           <a:prstGeom prst="rect">
             <a:avLst/>
@@ -35749,8 +35749,8 @@
         </p:nvSpPr>
         <p:spPr>
           <a:xfrm>
-            <a:off x="9136227" y="1280160"/>
-            <a:ext cx="2560320" cy="640080"/>
+            <a:off x="9075191" y="1280160"/>
+            <a:ext cx="2567863" cy="640080"/>
           </a:xfrm>
           <a:prstGeom prst="rect">
             <a:avLst/>
@@ -35789,8 +35789,8 @@
         </p:nvSpPr>
         <p:spPr>
           <a:xfrm>
-            <a:off x="9227667" y="1965960"/>
-            <a:ext cx="2377440" cy="640080"/>
+            <a:off x="9166631" y="1965960"/>
+            <a:ext cx="2384983" cy="640080"/>
           </a:xfrm>
           <a:prstGeom prst="rect">
             <a:avLst/>

--- a/Perwal_Bekasi_51_2024_Pajak_Reklame.pptx
+++ b/Perwal_Bekasi_51_2024_Pajak_Reklame.pptx
@@ -11972,7 +11972,7 @@
         <p:spPr>
           <a:xfrm>
             <a:off x="548640" y="1051560"/>
-            <a:ext cx="2567863" cy="5257800"/>
+            <a:ext cx="2567863" cy="5349240"/>
           </a:xfrm>
           <a:prstGeom prst="roundRect">
             <a:avLst>
@@ -12019,7 +12019,7 @@
         <p:spPr>
           <a:xfrm>
             <a:off x="548640" y="1051560"/>
-            <a:ext cx="45720" cy="5257800"/>
+            <a:ext cx="45720" cy="5349240"/>
           </a:xfrm>
           <a:prstGeom prst="rect">
             <a:avLst/>
@@ -12184,8 +12184,8 @@
         </p:nvSpPr>
         <p:spPr>
           <a:xfrm>
-            <a:off x="685800" y="2011680"/>
-            <a:ext cx="2293543" cy="201168"/>
+            <a:off x="685800" y="2039112"/>
+            <a:ext cx="2293543" cy="320040"/>
           </a:xfrm>
           <a:prstGeom prst="rect">
             <a:avLst/>
@@ -12224,8 +12224,8 @@
         </p:nvSpPr>
         <p:spPr>
           <a:xfrm>
-            <a:off x="685800" y="2212848"/>
-            <a:ext cx="2293543" cy="201168"/>
+            <a:off x="685800" y="2377440"/>
+            <a:ext cx="2293543" cy="320040"/>
           </a:xfrm>
           <a:prstGeom prst="rect">
             <a:avLst/>
@@ -12265,7 +12265,7 @@
         <p:spPr>
           <a:xfrm>
             <a:off x="3390823" y="1051560"/>
-            <a:ext cx="2567863" cy="5257800"/>
+            <a:ext cx="2567863" cy="5349240"/>
           </a:xfrm>
           <a:prstGeom prst="roundRect">
             <a:avLst>
@@ -12312,7 +12312,7 @@
         <p:spPr>
           <a:xfrm>
             <a:off x="3390823" y="1051560"/>
-            <a:ext cx="45720" cy="5257800"/>
+            <a:ext cx="45720" cy="5349240"/>
           </a:xfrm>
           <a:prstGeom prst="rect">
             <a:avLst/>
@@ -12477,8 +12477,8 @@
         </p:nvSpPr>
         <p:spPr>
           <a:xfrm>
-            <a:off x="3527983" y="2011680"/>
-            <a:ext cx="2293543" cy="201168"/>
+            <a:off x="3527983" y="2039112"/>
+            <a:ext cx="2293543" cy="320040"/>
           </a:xfrm>
           <a:prstGeom prst="rect">
             <a:avLst/>
@@ -12518,7 +12518,7 @@
         <p:spPr>
           <a:xfrm>
             <a:off x="6233007" y="1051560"/>
-            <a:ext cx="2567863" cy="5257800"/>
+            <a:ext cx="2567863" cy="5349240"/>
           </a:xfrm>
           <a:prstGeom prst="roundRect">
             <a:avLst>
@@ -12565,7 +12565,7 @@
         <p:spPr>
           <a:xfrm>
             <a:off x="6233007" y="1051560"/>
-            <a:ext cx="45720" cy="5257800"/>
+            <a:ext cx="45720" cy="5349240"/>
           </a:xfrm>
           <a:prstGeom prst="rect">
             <a:avLst/>
@@ -12730,8 +12730,8 @@
         </p:nvSpPr>
         <p:spPr>
           <a:xfrm>
-            <a:off x="6370167" y="2011680"/>
-            <a:ext cx="2293543" cy="201168"/>
+            <a:off x="6370167" y="2039112"/>
+            <a:ext cx="2293543" cy="320040"/>
           </a:xfrm>
           <a:prstGeom prst="rect">
             <a:avLst/>
@@ -12770,8 +12770,8 @@
         </p:nvSpPr>
         <p:spPr>
           <a:xfrm>
-            <a:off x="6370167" y="2212848"/>
-            <a:ext cx="2293543" cy="201168"/>
+            <a:off x="6370167" y="2377440"/>
+            <a:ext cx="2293543" cy="320040"/>
           </a:xfrm>
           <a:prstGeom prst="rect">
             <a:avLst/>
@@ -12811,7 +12811,7 @@
         <p:spPr>
           <a:xfrm>
             <a:off x="9075191" y="1051560"/>
-            <a:ext cx="2567863" cy="5257800"/>
+            <a:ext cx="2567863" cy="5349240"/>
           </a:xfrm>
           <a:prstGeom prst="roundRect">
             <a:avLst>
@@ -12858,7 +12858,7 @@
         <p:spPr>
           <a:xfrm>
             <a:off x="9075191" y="1051560"/>
-            <a:ext cx="45720" cy="5257800"/>
+            <a:ext cx="45720" cy="5349240"/>
           </a:xfrm>
           <a:prstGeom prst="rect">
             <a:avLst/>
@@ -13023,8 +13023,8 @@
         </p:nvSpPr>
         <p:spPr>
           <a:xfrm>
-            <a:off x="9212351" y="2011680"/>
-            <a:ext cx="2293543" cy="201168"/>
+            <a:off x="9212351" y="2039112"/>
+            <a:ext cx="2293543" cy="320040"/>
           </a:xfrm>
           <a:prstGeom prst="rect">
             <a:avLst/>
@@ -13063,8 +13063,8 @@
         </p:nvSpPr>
         <p:spPr>
           <a:xfrm>
-            <a:off x="9212351" y="2212848"/>
-            <a:ext cx="2293543" cy="201168"/>
+            <a:off x="9212351" y="2377440"/>
+            <a:ext cx="2293543" cy="320040"/>
           </a:xfrm>
           <a:prstGeom prst="rect">
             <a:avLst/>
@@ -15360,7 +15360,7 @@
         <p:spPr>
           <a:xfrm>
             <a:off x="548640" y="1051560"/>
-            <a:ext cx="2567863" cy="5257800"/>
+            <a:ext cx="2567863" cy="5349240"/>
           </a:xfrm>
           <a:prstGeom prst="roundRect">
             <a:avLst>
@@ -15407,7 +15407,7 @@
         <p:spPr>
           <a:xfrm>
             <a:off x="548640" y="1051560"/>
-            <a:ext cx="45720" cy="5257800"/>
+            <a:ext cx="45720" cy="5349240"/>
           </a:xfrm>
           <a:prstGeom prst="rect">
             <a:avLst/>
@@ -15572,8 +15572,8 @@
         </p:nvSpPr>
         <p:spPr>
           <a:xfrm>
-            <a:off x="685800" y="2011680"/>
-            <a:ext cx="2293543" cy="201168"/>
+            <a:off x="685800" y="2039112"/>
+            <a:ext cx="2293543" cy="320040"/>
           </a:xfrm>
           <a:prstGeom prst="rect">
             <a:avLst/>
@@ -15612,8 +15612,8 @@
         </p:nvSpPr>
         <p:spPr>
           <a:xfrm>
-            <a:off x="685800" y="2212848"/>
-            <a:ext cx="2293543" cy="201168"/>
+            <a:off x="685800" y="2377440"/>
+            <a:ext cx="2293543" cy="320040"/>
           </a:xfrm>
           <a:prstGeom prst="rect">
             <a:avLst/>
@@ -15653,7 +15653,7 @@
         <p:spPr>
           <a:xfrm>
             <a:off x="3390823" y="1051560"/>
-            <a:ext cx="2567863" cy="5257800"/>
+            <a:ext cx="2567863" cy="5349240"/>
           </a:xfrm>
           <a:prstGeom prst="roundRect">
             <a:avLst>
@@ -15700,7 +15700,7 @@
         <p:spPr>
           <a:xfrm>
             <a:off x="3390823" y="1051560"/>
-            <a:ext cx="45720" cy="5257800"/>
+            <a:ext cx="45720" cy="5349240"/>
           </a:xfrm>
           <a:prstGeom prst="rect">
             <a:avLst/>
@@ -15865,8 +15865,8 @@
         </p:nvSpPr>
         <p:spPr>
           <a:xfrm>
-            <a:off x="3527983" y="2011680"/>
-            <a:ext cx="2293543" cy="201168"/>
+            <a:off x="3527983" y="2039112"/>
+            <a:ext cx="2293543" cy="320040"/>
           </a:xfrm>
           <a:prstGeom prst="rect">
             <a:avLst/>
@@ -15905,8 +15905,8 @@
         </p:nvSpPr>
         <p:spPr>
           <a:xfrm>
-            <a:off x="3527983" y="2212848"/>
-            <a:ext cx="2293543" cy="201168"/>
+            <a:off x="3527983" y="2377440"/>
+            <a:ext cx="2293543" cy="320040"/>
           </a:xfrm>
           <a:prstGeom prst="rect">
             <a:avLst/>
@@ -15946,7 +15946,7 @@
         <p:spPr>
           <a:xfrm>
             <a:off x="6233007" y="1051560"/>
-            <a:ext cx="2567863" cy="5257800"/>
+            <a:ext cx="2567863" cy="5349240"/>
           </a:xfrm>
           <a:prstGeom prst="roundRect">
             <a:avLst>
@@ -15993,7 +15993,7 @@
         <p:spPr>
           <a:xfrm>
             <a:off x="6233007" y="1051560"/>
-            <a:ext cx="45720" cy="5257800"/>
+            <a:ext cx="45720" cy="5349240"/>
           </a:xfrm>
           <a:prstGeom prst="rect">
             <a:avLst/>
@@ -16158,8 +16158,8 @@
         </p:nvSpPr>
         <p:spPr>
           <a:xfrm>
-            <a:off x="6370167" y="2011680"/>
-            <a:ext cx="2293543" cy="201168"/>
+            <a:off x="6370167" y="2039112"/>
+            <a:ext cx="2293543" cy="320040"/>
           </a:xfrm>
           <a:prstGeom prst="rect">
             <a:avLst/>
@@ -16199,7 +16199,7 @@
         <p:spPr>
           <a:xfrm>
             <a:off x="9075191" y="1051560"/>
-            <a:ext cx="2567863" cy="5257800"/>
+            <a:ext cx="2567863" cy="5349240"/>
           </a:xfrm>
           <a:prstGeom prst="roundRect">
             <a:avLst>
@@ -16246,7 +16246,7 @@
         <p:spPr>
           <a:xfrm>
             <a:off x="9075191" y="1051560"/>
-            <a:ext cx="45720" cy="5257800"/>
+            <a:ext cx="45720" cy="5349240"/>
           </a:xfrm>
           <a:prstGeom prst="rect">
             <a:avLst/>
@@ -16411,8 +16411,8 @@
         </p:nvSpPr>
         <p:spPr>
           <a:xfrm>
-            <a:off x="9212351" y="2011680"/>
-            <a:ext cx="2293543" cy="201168"/>
+            <a:off x="9212351" y="2039112"/>
+            <a:ext cx="2293543" cy="320040"/>
           </a:xfrm>
           <a:prstGeom prst="rect">
             <a:avLst/>
@@ -22155,7 +22155,7 @@
         <p:spPr>
           <a:xfrm>
             <a:off x="548640" y="1051560"/>
-            <a:ext cx="3515258" cy="5257800"/>
+            <a:ext cx="3515258" cy="5349240"/>
           </a:xfrm>
           <a:prstGeom prst="roundRect">
             <a:avLst>
@@ -22202,7 +22202,7 @@
         <p:spPr>
           <a:xfrm>
             <a:off x="548640" y="1051560"/>
-            <a:ext cx="45720" cy="5257800"/>
+            <a:ext cx="45720" cy="5349240"/>
           </a:xfrm>
           <a:prstGeom prst="rect">
             <a:avLst/>
@@ -22367,8 +22367,8 @@
         </p:nvSpPr>
         <p:spPr>
           <a:xfrm>
-            <a:off x="685800" y="2011680"/>
-            <a:ext cx="3240938" cy="201168"/>
+            <a:off x="685800" y="2039112"/>
+            <a:ext cx="3240938" cy="320040"/>
           </a:xfrm>
           <a:prstGeom prst="rect">
             <a:avLst/>
@@ -22407,8 +22407,8 @@
         </p:nvSpPr>
         <p:spPr>
           <a:xfrm>
-            <a:off x="685800" y="2212848"/>
-            <a:ext cx="3240938" cy="201168"/>
+            <a:off x="685800" y="2377440"/>
+            <a:ext cx="3240938" cy="320040"/>
           </a:xfrm>
           <a:prstGeom prst="rect">
             <a:avLst/>
@@ -22447,8 +22447,8 @@
         </p:nvSpPr>
         <p:spPr>
           <a:xfrm>
-            <a:off x="685800" y="2414016"/>
-            <a:ext cx="3240938" cy="201168"/>
+            <a:off x="685800" y="2715768"/>
+            <a:ext cx="3240938" cy="320040"/>
           </a:xfrm>
           <a:prstGeom prst="rect">
             <a:avLst/>
@@ -22487,8 +22487,8 @@
         </p:nvSpPr>
         <p:spPr>
           <a:xfrm>
-            <a:off x="685800" y="2615184"/>
-            <a:ext cx="3240938" cy="201168"/>
+            <a:off x="685800" y="3054096"/>
+            <a:ext cx="3240938" cy="320040"/>
           </a:xfrm>
           <a:prstGeom prst="rect">
             <a:avLst/>
@@ -22527,8 +22527,8 @@
         </p:nvSpPr>
         <p:spPr>
           <a:xfrm>
-            <a:off x="685800" y="2816352"/>
-            <a:ext cx="3240938" cy="201168"/>
+            <a:off x="685800" y="3392424"/>
+            <a:ext cx="3240938" cy="320040"/>
           </a:xfrm>
           <a:prstGeom prst="rect">
             <a:avLst/>
@@ -22568,7 +22568,7 @@
         <p:spPr>
           <a:xfrm>
             <a:off x="4338218" y="1051560"/>
-            <a:ext cx="3515258" cy="5257800"/>
+            <a:ext cx="3515258" cy="5349240"/>
           </a:xfrm>
           <a:prstGeom prst="roundRect">
             <a:avLst>
@@ -22615,7 +22615,7 @@
         <p:spPr>
           <a:xfrm>
             <a:off x="4338218" y="1051560"/>
-            <a:ext cx="45720" cy="5257800"/>
+            <a:ext cx="45720" cy="5349240"/>
           </a:xfrm>
           <a:prstGeom prst="rect">
             <a:avLst/>
@@ -22780,8 +22780,8 @@
         </p:nvSpPr>
         <p:spPr>
           <a:xfrm>
-            <a:off x="4475378" y="2011680"/>
-            <a:ext cx="3240938" cy="201168"/>
+            <a:off x="4475378" y="2039112"/>
+            <a:ext cx="3240938" cy="320040"/>
           </a:xfrm>
           <a:prstGeom prst="rect">
             <a:avLst/>
@@ -22820,8 +22820,8 @@
         </p:nvSpPr>
         <p:spPr>
           <a:xfrm>
-            <a:off x="4475378" y="2212848"/>
-            <a:ext cx="3240938" cy="201168"/>
+            <a:off x="4475378" y="2377440"/>
+            <a:ext cx="3240938" cy="320040"/>
           </a:xfrm>
           <a:prstGeom prst="rect">
             <a:avLst/>
@@ -22860,8 +22860,8 @@
         </p:nvSpPr>
         <p:spPr>
           <a:xfrm>
-            <a:off x="4475378" y="2414016"/>
-            <a:ext cx="3240938" cy="201168"/>
+            <a:off x="4475378" y="2715768"/>
+            <a:ext cx="3240938" cy="320040"/>
           </a:xfrm>
           <a:prstGeom prst="rect">
             <a:avLst/>
@@ -22901,7 +22901,7 @@
         <p:spPr>
           <a:xfrm>
             <a:off x="8127796" y="1051560"/>
-            <a:ext cx="3515258" cy="5257800"/>
+            <a:ext cx="3515258" cy="5349240"/>
           </a:xfrm>
           <a:prstGeom prst="roundRect">
             <a:avLst>
@@ -22948,7 +22948,7 @@
         <p:spPr>
           <a:xfrm>
             <a:off x="8127796" y="1051560"/>
-            <a:ext cx="45720" cy="5257800"/>
+            <a:ext cx="45720" cy="5349240"/>
           </a:xfrm>
           <a:prstGeom prst="rect">
             <a:avLst/>
@@ -23113,8 +23113,8 @@
         </p:nvSpPr>
         <p:spPr>
           <a:xfrm>
-            <a:off x="8264956" y="2011680"/>
-            <a:ext cx="3240938" cy="201168"/>
+            <a:off x="8264956" y="2039112"/>
+            <a:ext cx="3240938" cy="320040"/>
           </a:xfrm>
           <a:prstGeom prst="rect">
             <a:avLst/>
@@ -23153,8 +23153,8 @@
         </p:nvSpPr>
         <p:spPr>
           <a:xfrm>
-            <a:off x="8264956" y="2212848"/>
-            <a:ext cx="3240938" cy="201168"/>
+            <a:off x="8264956" y="2377440"/>
+            <a:ext cx="3240938" cy="320040"/>
           </a:xfrm>
           <a:prstGeom prst="rect">
             <a:avLst/>
@@ -23193,8 +23193,8 @@
         </p:nvSpPr>
         <p:spPr>
           <a:xfrm>
-            <a:off x="8264956" y="2414016"/>
-            <a:ext cx="3240938" cy="201168"/>
+            <a:off x="8264956" y="2715768"/>
+            <a:ext cx="3240938" cy="320040"/>
           </a:xfrm>
           <a:prstGeom prst="rect">
             <a:avLst/>
@@ -23233,8 +23233,8 @@
         </p:nvSpPr>
         <p:spPr>
           <a:xfrm>
-            <a:off x="8264956" y="2615184"/>
-            <a:ext cx="3240938" cy="201168"/>
+            <a:off x="8264956" y="3054096"/>
+            <a:ext cx="3240938" cy="320040"/>
           </a:xfrm>
           <a:prstGeom prst="rect">
             <a:avLst/>
@@ -26117,7 +26117,7 @@
         <p:spPr>
           <a:xfrm>
             <a:off x="548640" y="1051560"/>
-            <a:ext cx="3515258" cy="5257800"/>
+            <a:ext cx="3515258" cy="5349240"/>
           </a:xfrm>
           <a:prstGeom prst="roundRect">
             <a:avLst>
@@ -26164,7 +26164,7 @@
         <p:spPr>
           <a:xfrm>
             <a:off x="548640" y="1051560"/>
-            <a:ext cx="45720" cy="5257800"/>
+            <a:ext cx="45720" cy="5349240"/>
           </a:xfrm>
           <a:prstGeom prst="rect">
             <a:avLst/>
@@ -26329,8 +26329,8 @@
         </p:nvSpPr>
         <p:spPr>
           <a:xfrm>
-            <a:off x="685800" y="2011680"/>
-            <a:ext cx="3240938" cy="201168"/>
+            <a:off x="685800" y="2039112"/>
+            <a:ext cx="3240938" cy="320040"/>
           </a:xfrm>
           <a:prstGeom prst="rect">
             <a:avLst/>
@@ -26369,8 +26369,8 @@
         </p:nvSpPr>
         <p:spPr>
           <a:xfrm>
-            <a:off x="685800" y="2212848"/>
-            <a:ext cx="3240938" cy="201168"/>
+            <a:off x="685800" y="2377440"/>
+            <a:ext cx="3240938" cy="320040"/>
           </a:xfrm>
           <a:prstGeom prst="rect">
             <a:avLst/>
@@ -26409,8 +26409,8 @@
         </p:nvSpPr>
         <p:spPr>
           <a:xfrm>
-            <a:off x="685800" y="2414016"/>
-            <a:ext cx="3240938" cy="201168"/>
+            <a:off x="685800" y="2715768"/>
+            <a:ext cx="3240938" cy="320040"/>
           </a:xfrm>
           <a:prstGeom prst="rect">
             <a:avLst/>
@@ -26449,8 +26449,8 @@
         </p:nvSpPr>
         <p:spPr>
           <a:xfrm>
-            <a:off x="685800" y="2615184"/>
-            <a:ext cx="3240938" cy="201168"/>
+            <a:off x="685800" y="3054096"/>
+            <a:ext cx="3240938" cy="320040"/>
           </a:xfrm>
           <a:prstGeom prst="rect">
             <a:avLst/>
@@ -26489,8 +26489,8 @@
         </p:nvSpPr>
         <p:spPr>
           <a:xfrm>
-            <a:off x="685800" y="2816352"/>
-            <a:ext cx="3240938" cy="201168"/>
+            <a:off x="685800" y="3392424"/>
+            <a:ext cx="3240938" cy="320040"/>
           </a:xfrm>
           <a:prstGeom prst="rect">
             <a:avLst/>
@@ -26530,7 +26530,7 @@
         <p:spPr>
           <a:xfrm>
             <a:off x="4338218" y="1051560"/>
-            <a:ext cx="3515258" cy="5257800"/>
+            <a:ext cx="3515258" cy="5349240"/>
           </a:xfrm>
           <a:prstGeom prst="roundRect">
             <a:avLst>
@@ -26577,7 +26577,7 @@
         <p:spPr>
           <a:xfrm>
             <a:off x="4338218" y="1051560"/>
-            <a:ext cx="45720" cy="5257800"/>
+            <a:ext cx="45720" cy="5349240"/>
           </a:xfrm>
           <a:prstGeom prst="rect">
             <a:avLst/>
@@ -26742,8 +26742,8 @@
         </p:nvSpPr>
         <p:spPr>
           <a:xfrm>
-            <a:off x="4475378" y="2011680"/>
-            <a:ext cx="3240938" cy="201168"/>
+            <a:off x="4475378" y="2039112"/>
+            <a:ext cx="3240938" cy="320040"/>
           </a:xfrm>
           <a:prstGeom prst="rect">
             <a:avLst/>
@@ -26782,8 +26782,8 @@
         </p:nvSpPr>
         <p:spPr>
           <a:xfrm>
-            <a:off x="4475378" y="2212848"/>
-            <a:ext cx="3240938" cy="201168"/>
+            <a:off x="4475378" y="2377440"/>
+            <a:ext cx="3240938" cy="320040"/>
           </a:xfrm>
           <a:prstGeom prst="rect">
             <a:avLst/>
@@ -26822,8 +26822,8 @@
         </p:nvSpPr>
         <p:spPr>
           <a:xfrm>
-            <a:off x="4475378" y="2414016"/>
-            <a:ext cx="3240938" cy="201168"/>
+            <a:off x="4475378" y="2715768"/>
+            <a:ext cx="3240938" cy="320040"/>
           </a:xfrm>
           <a:prstGeom prst="rect">
             <a:avLst/>
@@ -26862,8 +26862,8 @@
         </p:nvSpPr>
         <p:spPr>
           <a:xfrm>
-            <a:off x="4475378" y="2615184"/>
-            <a:ext cx="3240938" cy="201168"/>
+            <a:off x="4475378" y="3054096"/>
+            <a:ext cx="3240938" cy="320040"/>
           </a:xfrm>
           <a:prstGeom prst="rect">
             <a:avLst/>
@@ -26903,7 +26903,7 @@
         <p:spPr>
           <a:xfrm>
             <a:off x="8127796" y="1051560"/>
-            <a:ext cx="3515258" cy="5257800"/>
+            <a:ext cx="3515258" cy="5349240"/>
           </a:xfrm>
           <a:prstGeom prst="roundRect">
             <a:avLst>
@@ -26950,7 +26950,7 @@
         <p:spPr>
           <a:xfrm>
             <a:off x="8127796" y="1051560"/>
-            <a:ext cx="45720" cy="5257800"/>
+            <a:ext cx="45720" cy="5349240"/>
           </a:xfrm>
           <a:prstGeom prst="rect">
             <a:avLst/>
@@ -27115,8 +27115,8 @@
         </p:nvSpPr>
         <p:spPr>
           <a:xfrm>
-            <a:off x="8264956" y="2011680"/>
-            <a:ext cx="3240938" cy="201168"/>
+            <a:off x="8264956" y="2039112"/>
+            <a:ext cx="3240938" cy="320040"/>
           </a:xfrm>
           <a:prstGeom prst="rect">
             <a:avLst/>
@@ -27155,8 +27155,8 @@
         </p:nvSpPr>
         <p:spPr>
           <a:xfrm>
-            <a:off x="8264956" y="2212848"/>
-            <a:ext cx="3240938" cy="201168"/>
+            <a:off x="8264956" y="2377440"/>
+            <a:ext cx="3240938" cy="320040"/>
           </a:xfrm>
           <a:prstGeom prst="rect">
             <a:avLst/>
@@ -27195,8 +27195,8 @@
         </p:nvSpPr>
         <p:spPr>
           <a:xfrm>
-            <a:off x="8264956" y="2414016"/>
-            <a:ext cx="3240938" cy="201168"/>
+            <a:off x="8264956" y="2715768"/>
+            <a:ext cx="3240938" cy="320040"/>
           </a:xfrm>
           <a:prstGeom prst="rect">
             <a:avLst/>
@@ -27235,8 +27235,8 @@
         </p:nvSpPr>
         <p:spPr>
           <a:xfrm>
-            <a:off x="8264956" y="2615184"/>
-            <a:ext cx="3240938" cy="201168"/>
+            <a:off x="8264956" y="3054096"/>
+            <a:ext cx="3240938" cy="320040"/>
           </a:xfrm>
           <a:prstGeom prst="rect">
             <a:avLst/>
@@ -27275,8 +27275,8 @@
         </p:nvSpPr>
         <p:spPr>
           <a:xfrm>
-            <a:off x="8264956" y="2816352"/>
-            <a:ext cx="3240938" cy="201168"/>
+            <a:off x="8264956" y="3392424"/>
+            <a:ext cx="3240938" cy="320040"/>
           </a:xfrm>
           <a:prstGeom prst="rect">
             <a:avLst/>
@@ -29585,7 +29585,7 @@
         <p:spPr>
           <a:xfrm>
             <a:off x="548640" y="1051560"/>
-            <a:ext cx="2567863" cy="2514600"/>
+            <a:ext cx="2567863" cy="2537460"/>
           </a:xfrm>
           <a:prstGeom prst="roundRect">
             <a:avLst>
@@ -29632,7 +29632,7 @@
         <p:spPr>
           <a:xfrm>
             <a:off x="548640" y="1051560"/>
-            <a:ext cx="45720" cy="2514600"/>
+            <a:ext cx="45720" cy="2537460"/>
           </a:xfrm>
           <a:prstGeom prst="rect">
             <a:avLst/>
@@ -29797,8 +29797,8 @@
         </p:nvSpPr>
         <p:spPr>
           <a:xfrm>
-            <a:off x="685800" y="2011680"/>
-            <a:ext cx="2293543" cy="201168"/>
+            <a:off x="685800" y="2039112"/>
+            <a:ext cx="2293543" cy="320040"/>
           </a:xfrm>
           <a:prstGeom prst="rect">
             <a:avLst/>
@@ -29838,7 +29838,7 @@
         <p:spPr>
           <a:xfrm>
             <a:off x="3390823" y="1051560"/>
-            <a:ext cx="2567863" cy="2514600"/>
+            <a:ext cx="2567863" cy="2537460"/>
           </a:xfrm>
           <a:prstGeom prst="roundRect">
             <a:avLst>
@@ -29885,7 +29885,7 @@
         <p:spPr>
           <a:xfrm>
             <a:off x="3390823" y="1051560"/>
-            <a:ext cx="45720" cy="2514600"/>
+            <a:ext cx="45720" cy="2537460"/>
           </a:xfrm>
           <a:prstGeom prst="rect">
             <a:avLst/>
@@ -30050,8 +30050,8 @@
         </p:nvSpPr>
         <p:spPr>
           <a:xfrm>
-            <a:off x="3527983" y="2011680"/>
-            <a:ext cx="2293543" cy="201168"/>
+            <a:off x="3527983" y="2039112"/>
+            <a:ext cx="2293543" cy="320040"/>
           </a:xfrm>
           <a:prstGeom prst="rect">
             <a:avLst/>
@@ -30091,7 +30091,7 @@
         <p:spPr>
           <a:xfrm>
             <a:off x="6233007" y="1051560"/>
-            <a:ext cx="2567863" cy="2514600"/>
+            <a:ext cx="2567863" cy="2537460"/>
           </a:xfrm>
           <a:prstGeom prst="roundRect">
             <a:avLst>
@@ -30138,7 +30138,7 @@
         <p:spPr>
           <a:xfrm>
             <a:off x="6233007" y="1051560"/>
-            <a:ext cx="45720" cy="2514600"/>
+            <a:ext cx="45720" cy="2537460"/>
           </a:xfrm>
           <a:prstGeom prst="rect">
             <a:avLst/>
@@ -30303,8 +30303,8 @@
         </p:nvSpPr>
         <p:spPr>
           <a:xfrm>
-            <a:off x="6370167" y="2011680"/>
-            <a:ext cx="2293543" cy="201168"/>
+            <a:off x="6370167" y="2039112"/>
+            <a:ext cx="2293543" cy="320040"/>
           </a:xfrm>
           <a:prstGeom prst="rect">
             <a:avLst/>
@@ -30344,7 +30344,7 @@
         <p:spPr>
           <a:xfrm>
             <a:off x="9075191" y="1051560"/>
-            <a:ext cx="2567863" cy="2514600"/>
+            <a:ext cx="2567863" cy="2537460"/>
           </a:xfrm>
           <a:prstGeom prst="roundRect">
             <a:avLst>
@@ -30391,7 +30391,7 @@
         <p:spPr>
           <a:xfrm>
             <a:off x="9075191" y="1051560"/>
-            <a:ext cx="45720" cy="2514600"/>
+            <a:ext cx="45720" cy="2537460"/>
           </a:xfrm>
           <a:prstGeom prst="rect">
             <a:avLst/>
@@ -30556,8 +30556,8 @@
         </p:nvSpPr>
         <p:spPr>
           <a:xfrm>
-            <a:off x="9212351" y="2011680"/>
-            <a:ext cx="2293543" cy="201168"/>
+            <a:off x="9212351" y="2039112"/>
+            <a:ext cx="2293543" cy="320040"/>
           </a:xfrm>
           <a:prstGeom prst="rect">
             <a:avLst/>
@@ -30596,8 +30596,8 @@
         </p:nvSpPr>
         <p:spPr>
           <a:xfrm>
-            <a:off x="548640" y="3794760"/>
-            <a:ext cx="2567863" cy="2514600"/>
+            <a:off x="548640" y="3863340"/>
+            <a:ext cx="2567863" cy="2537460"/>
           </a:xfrm>
           <a:prstGeom prst="roundRect">
             <a:avLst>
@@ -30643,8 +30643,8 @@
         </p:nvSpPr>
         <p:spPr>
           <a:xfrm>
-            <a:off x="548640" y="3794760"/>
-            <a:ext cx="45720" cy="2514600"/>
+            <a:off x="548640" y="3863340"/>
+            <a:ext cx="45720" cy="2537460"/>
           </a:xfrm>
           <a:prstGeom prst="rect">
             <a:avLst/>
@@ -30686,7 +30686,7 @@
         </p:nvSpPr>
         <p:spPr>
           <a:xfrm>
-            <a:off x="685800" y="3931920"/>
+            <a:off x="685800" y="4000500"/>
             <a:ext cx="384048" cy="384048"/>
           </a:xfrm>
           <a:prstGeom prst="ellipse">
@@ -30729,7 +30729,7 @@
         </p:nvSpPr>
         <p:spPr>
           <a:xfrm>
-            <a:off x="685800" y="3931920"/>
+            <a:off x="685800" y="4000500"/>
             <a:ext cx="384048" cy="384048"/>
           </a:xfrm>
           <a:prstGeom prst="rect">
@@ -30769,7 +30769,7 @@
         </p:nvSpPr>
         <p:spPr>
           <a:xfrm>
-            <a:off x="685800" y="4434840"/>
+            <a:off x="685800" y="4503420"/>
             <a:ext cx="2293543" cy="274320"/>
           </a:xfrm>
           <a:prstGeom prst="rect">
@@ -30809,8 +30809,8 @@
         </p:nvSpPr>
         <p:spPr>
           <a:xfrm>
-            <a:off x="685800" y="4754880"/>
-            <a:ext cx="2293543" cy="201168"/>
+            <a:off x="685800" y="4850892"/>
+            <a:ext cx="2293543" cy="320040"/>
           </a:xfrm>
           <a:prstGeom prst="rect">
             <a:avLst/>
@@ -30849,8 +30849,8 @@
         </p:nvSpPr>
         <p:spPr>
           <a:xfrm>
-            <a:off x="3390823" y="3794760"/>
-            <a:ext cx="2567863" cy="2514600"/>
+            <a:off x="3390823" y="3863340"/>
+            <a:ext cx="2567863" cy="2537460"/>
           </a:xfrm>
           <a:prstGeom prst="roundRect">
             <a:avLst>
@@ -30896,8 +30896,8 @@
         </p:nvSpPr>
         <p:spPr>
           <a:xfrm>
-            <a:off x="3390823" y="3794760"/>
-            <a:ext cx="45720" cy="2514600"/>
+            <a:off x="3390823" y="3863340"/>
+            <a:ext cx="45720" cy="2537460"/>
           </a:xfrm>
           <a:prstGeom prst="rect">
             <a:avLst/>
@@ -30939,7 +30939,7 @@
         </p:nvSpPr>
         <p:spPr>
           <a:xfrm>
-            <a:off x="3527983" y="3931920"/>
+            <a:off x="3527983" y="4000500"/>
             <a:ext cx="384048" cy="384048"/>
           </a:xfrm>
           <a:prstGeom prst="ellipse">
@@ -30982,7 +30982,7 @@
         </p:nvSpPr>
         <p:spPr>
           <a:xfrm>
-            <a:off x="3527983" y="3931920"/>
+            <a:off x="3527983" y="4000500"/>
             <a:ext cx="384048" cy="384048"/>
           </a:xfrm>
           <a:prstGeom prst="rect">
@@ -31022,7 +31022,7 @@
         </p:nvSpPr>
         <p:spPr>
           <a:xfrm>
-            <a:off x="3527983" y="4434840"/>
+            <a:off x="3527983" y="4503420"/>
             <a:ext cx="2293543" cy="274320"/>
           </a:xfrm>
           <a:prstGeom prst="rect">
@@ -31062,8 +31062,8 @@
         </p:nvSpPr>
         <p:spPr>
           <a:xfrm>
-            <a:off x="3527983" y="4754880"/>
-            <a:ext cx="2293543" cy="201168"/>
+            <a:off x="3527983" y="4850892"/>
+            <a:ext cx="2293543" cy="320040"/>
           </a:xfrm>
           <a:prstGeom prst="rect">
             <a:avLst/>
@@ -31102,8 +31102,8 @@
         </p:nvSpPr>
         <p:spPr>
           <a:xfrm>
-            <a:off x="6233007" y="3794760"/>
-            <a:ext cx="2567863" cy="2514600"/>
+            <a:off x="6233007" y="3863340"/>
+            <a:ext cx="2567863" cy="2537460"/>
           </a:xfrm>
           <a:prstGeom prst="roundRect">
             <a:avLst>
@@ -31149,8 +31149,8 @@
         </p:nvSpPr>
         <p:spPr>
           <a:xfrm>
-            <a:off x="6233007" y="3794760"/>
-            <a:ext cx="45720" cy="2514600"/>
+            <a:off x="6233007" y="3863340"/>
+            <a:ext cx="45720" cy="2537460"/>
           </a:xfrm>
           <a:prstGeom prst="rect">
             <a:avLst/>
@@ -31192,7 +31192,7 @@
         </p:nvSpPr>
         <p:spPr>
           <a:xfrm>
-            <a:off x="6370167" y="3931920"/>
+            <a:off x="6370167" y="4000500"/>
             <a:ext cx="384048" cy="384048"/>
           </a:xfrm>
           <a:prstGeom prst="ellipse">
@@ -31235,7 +31235,7 @@
         </p:nvSpPr>
         <p:spPr>
           <a:xfrm>
-            <a:off x="6370167" y="3931920"/>
+            <a:off x="6370167" y="4000500"/>
             <a:ext cx="384048" cy="384048"/>
           </a:xfrm>
           <a:prstGeom prst="rect">
@@ -31275,7 +31275,7 @@
         </p:nvSpPr>
         <p:spPr>
           <a:xfrm>
-            <a:off x="6370167" y="4434840"/>
+            <a:off x="6370167" y="4503420"/>
             <a:ext cx="2293543" cy="274320"/>
           </a:xfrm>
           <a:prstGeom prst="rect">
@@ -31315,8 +31315,8 @@
         </p:nvSpPr>
         <p:spPr>
           <a:xfrm>
-            <a:off x="6370167" y="4754880"/>
-            <a:ext cx="2293543" cy="201168"/>
+            <a:off x="6370167" y="4850892"/>
+            <a:ext cx="2293543" cy="320040"/>
           </a:xfrm>
           <a:prstGeom prst="rect">
             <a:avLst/>
@@ -32162,7 +32162,7 @@
         <p:spPr>
           <a:xfrm>
             <a:off x="548640" y="1051560"/>
-            <a:ext cx="5410047" cy="5257800"/>
+            <a:ext cx="5410047" cy="5349240"/>
           </a:xfrm>
           <a:prstGeom prst="roundRect">
             <a:avLst>
@@ -32209,7 +32209,7 @@
         <p:spPr>
           <a:xfrm>
             <a:off x="548640" y="1051560"/>
-            <a:ext cx="45720" cy="5257800"/>
+            <a:ext cx="45720" cy="5349240"/>
           </a:xfrm>
           <a:prstGeom prst="rect">
             <a:avLst/>
@@ -32374,8 +32374,8 @@
         </p:nvSpPr>
         <p:spPr>
           <a:xfrm>
-            <a:off x="685800" y="2011680"/>
-            <a:ext cx="5135727" cy="201168"/>
+            <a:off x="685800" y="2039112"/>
+            <a:ext cx="5135727" cy="320040"/>
           </a:xfrm>
           <a:prstGeom prst="rect">
             <a:avLst/>
@@ -32414,8 +32414,8 @@
         </p:nvSpPr>
         <p:spPr>
           <a:xfrm>
-            <a:off x="685800" y="2212848"/>
-            <a:ext cx="5135727" cy="201168"/>
+            <a:off x="685800" y="2377440"/>
+            <a:ext cx="5135727" cy="320040"/>
           </a:xfrm>
           <a:prstGeom prst="rect">
             <a:avLst/>
@@ -32454,8 +32454,8 @@
         </p:nvSpPr>
         <p:spPr>
           <a:xfrm>
-            <a:off x="685800" y="2414016"/>
-            <a:ext cx="5135727" cy="201168"/>
+            <a:off x="685800" y="2715768"/>
+            <a:ext cx="5135727" cy="320040"/>
           </a:xfrm>
           <a:prstGeom prst="rect">
             <a:avLst/>
@@ -32494,8 +32494,8 @@
         </p:nvSpPr>
         <p:spPr>
           <a:xfrm>
-            <a:off x="685800" y="2615184"/>
-            <a:ext cx="5135727" cy="201168"/>
+            <a:off x="685800" y="3054096"/>
+            <a:ext cx="5135727" cy="320040"/>
           </a:xfrm>
           <a:prstGeom prst="rect">
             <a:avLst/>
@@ -32534,8 +32534,8 @@
         </p:nvSpPr>
         <p:spPr>
           <a:xfrm>
-            <a:off x="685800" y="2816352"/>
-            <a:ext cx="5135727" cy="201168"/>
+            <a:off x="685800" y="3392424"/>
+            <a:ext cx="5135727" cy="320040"/>
           </a:xfrm>
           <a:prstGeom prst="rect">
             <a:avLst/>
@@ -32574,8 +32574,8 @@
         </p:nvSpPr>
         <p:spPr>
           <a:xfrm>
-            <a:off x="685800" y="3017520"/>
-            <a:ext cx="5135727" cy="201168"/>
+            <a:off x="685800" y="3730752"/>
+            <a:ext cx="5135727" cy="320040"/>
           </a:xfrm>
           <a:prstGeom prst="rect">
             <a:avLst/>
@@ -32614,8 +32614,8 @@
         </p:nvSpPr>
         <p:spPr>
           <a:xfrm>
-            <a:off x="685800" y="3218688"/>
-            <a:ext cx="5135727" cy="201168"/>
+            <a:off x="685800" y="4069080"/>
+            <a:ext cx="5135727" cy="320040"/>
           </a:xfrm>
           <a:prstGeom prst="rect">
             <a:avLst/>
@@ -32654,8 +32654,8 @@
         </p:nvSpPr>
         <p:spPr>
           <a:xfrm>
-            <a:off x="685800" y="3419856"/>
-            <a:ext cx="5135727" cy="201168"/>
+            <a:off x="685800" y="4407408"/>
+            <a:ext cx="5135727" cy="320040"/>
           </a:xfrm>
           <a:prstGeom prst="rect">
             <a:avLst/>
@@ -32694,8 +32694,8 @@
         </p:nvSpPr>
         <p:spPr>
           <a:xfrm>
-            <a:off x="685800" y="3621024"/>
-            <a:ext cx="5135727" cy="201168"/>
+            <a:off x="685800" y="4745736"/>
+            <a:ext cx="5135727" cy="320040"/>
           </a:xfrm>
           <a:prstGeom prst="rect">
             <a:avLst/>
@@ -32734,8 +32734,8 @@
         </p:nvSpPr>
         <p:spPr>
           <a:xfrm>
-            <a:off x="685800" y="3822192"/>
-            <a:ext cx="5135727" cy="201168"/>
+            <a:off x="685800" y="5084064"/>
+            <a:ext cx="5135727" cy="320040"/>
           </a:xfrm>
           <a:prstGeom prst="rect">
             <a:avLst/>
@@ -32775,7 +32775,7 @@
         <p:spPr>
           <a:xfrm>
             <a:off x="6233007" y="1051560"/>
-            <a:ext cx="5410047" cy="5257800"/>
+            <a:ext cx="5410047" cy="5349240"/>
           </a:xfrm>
           <a:prstGeom prst="roundRect">
             <a:avLst>
@@ -32822,7 +32822,7 @@
         <p:spPr>
           <a:xfrm>
             <a:off x="6233007" y="1051560"/>
-            <a:ext cx="45720" cy="5257800"/>
+            <a:ext cx="45720" cy="5349240"/>
           </a:xfrm>
           <a:prstGeom prst="rect">
             <a:avLst/>
@@ -32987,8 +32987,8 @@
         </p:nvSpPr>
         <p:spPr>
           <a:xfrm>
-            <a:off x="6370167" y="2011680"/>
-            <a:ext cx="5135727" cy="201168"/>
+            <a:off x="6370167" y="2039112"/>
+            <a:ext cx="5135727" cy="320040"/>
           </a:xfrm>
           <a:prstGeom prst="rect">
             <a:avLst/>
@@ -33027,8 +33027,8 @@
         </p:nvSpPr>
         <p:spPr>
           <a:xfrm>
-            <a:off x="6370167" y="2212848"/>
-            <a:ext cx="5135727" cy="201168"/>
+            <a:off x="6370167" y="2377440"/>
+            <a:ext cx="5135727" cy="320040"/>
           </a:xfrm>
           <a:prstGeom prst="rect">
             <a:avLst/>
@@ -33067,8 +33067,8 @@
         </p:nvSpPr>
         <p:spPr>
           <a:xfrm>
-            <a:off x="6370167" y="2414016"/>
-            <a:ext cx="5135727" cy="201168"/>
+            <a:off x="6370167" y="2715768"/>
+            <a:ext cx="5135727" cy="320040"/>
           </a:xfrm>
           <a:prstGeom prst="rect">
             <a:avLst/>
@@ -33107,8 +33107,8 @@
         </p:nvSpPr>
         <p:spPr>
           <a:xfrm>
-            <a:off x="6370167" y="2615184"/>
-            <a:ext cx="5135727" cy="201168"/>
+            <a:off x="6370167" y="3054096"/>
+            <a:ext cx="5135727" cy="320040"/>
           </a:xfrm>
           <a:prstGeom prst="rect">
             <a:avLst/>
@@ -33147,8 +33147,8 @@
         </p:nvSpPr>
         <p:spPr>
           <a:xfrm>
-            <a:off x="6370167" y="2816352"/>
-            <a:ext cx="5135727" cy="201168"/>
+            <a:off x="6370167" y="3392424"/>
+            <a:ext cx="5135727" cy="320040"/>
           </a:xfrm>
           <a:prstGeom prst="rect">
             <a:avLst/>
@@ -33187,8 +33187,8 @@
         </p:nvSpPr>
         <p:spPr>
           <a:xfrm>
-            <a:off x="6370167" y="3017520"/>
-            <a:ext cx="5135727" cy="201168"/>
+            <a:off x="6370167" y="3730752"/>
+            <a:ext cx="5135727" cy="320040"/>
           </a:xfrm>
           <a:prstGeom prst="rect">
             <a:avLst/>
@@ -33227,8 +33227,8 @@
         </p:nvSpPr>
         <p:spPr>
           <a:xfrm>
-            <a:off x="6370167" y="3218688"/>
-            <a:ext cx="5135727" cy="201168"/>
+            <a:off x="6370167" y="4069080"/>
+            <a:ext cx="5135727" cy="320040"/>
           </a:xfrm>
           <a:prstGeom prst="rect">
             <a:avLst/>
@@ -33267,8 +33267,8 @@
         </p:nvSpPr>
         <p:spPr>
           <a:xfrm>
-            <a:off x="6370167" y="3419856"/>
-            <a:ext cx="5135727" cy="201168"/>
+            <a:off x="6370167" y="4407408"/>
+            <a:ext cx="5135727" cy="320040"/>
           </a:xfrm>
           <a:prstGeom prst="rect">
             <a:avLst/>
@@ -33666,7 +33666,7 @@
         <p:spPr>
           <a:xfrm>
             <a:off x="548640" y="1051560"/>
-            <a:ext cx="5410047" cy="5257800"/>
+            <a:ext cx="5410047" cy="5349240"/>
           </a:xfrm>
           <a:prstGeom prst="roundRect">
             <a:avLst>
@@ -33713,7 +33713,7 @@
         <p:spPr>
           <a:xfrm>
             <a:off x="548640" y="1051560"/>
-            <a:ext cx="45720" cy="5257800"/>
+            <a:ext cx="45720" cy="5349240"/>
           </a:xfrm>
           <a:prstGeom prst="rect">
             <a:avLst/>
@@ -33878,8 +33878,8 @@
         </p:nvSpPr>
         <p:spPr>
           <a:xfrm>
-            <a:off x="685800" y="2011680"/>
-            <a:ext cx="5135727" cy="201168"/>
+            <a:off x="685800" y="2039112"/>
+            <a:ext cx="5135727" cy="320040"/>
           </a:xfrm>
           <a:prstGeom prst="rect">
             <a:avLst/>
@@ -33918,8 +33918,8 @@
         </p:nvSpPr>
         <p:spPr>
           <a:xfrm>
-            <a:off x="685800" y="2212848"/>
-            <a:ext cx="5135727" cy="201168"/>
+            <a:off x="685800" y="2377440"/>
+            <a:ext cx="5135727" cy="320040"/>
           </a:xfrm>
           <a:prstGeom prst="rect">
             <a:avLst/>
@@ -33959,7 +33959,7 @@
         <p:spPr>
           <a:xfrm>
             <a:off x="6233007" y="1051560"/>
-            <a:ext cx="5410047" cy="5257800"/>
+            <a:ext cx="5410047" cy="5349240"/>
           </a:xfrm>
           <a:prstGeom prst="roundRect">
             <a:avLst>
@@ -34006,7 +34006,7 @@
         <p:spPr>
           <a:xfrm>
             <a:off x="6233007" y="1051560"/>
-            <a:ext cx="45720" cy="5257800"/>
+            <a:ext cx="45720" cy="5349240"/>
           </a:xfrm>
           <a:prstGeom prst="rect">
             <a:avLst/>
@@ -34171,8 +34171,8 @@
         </p:nvSpPr>
         <p:spPr>
           <a:xfrm>
-            <a:off x="6370167" y="2011680"/>
-            <a:ext cx="5135727" cy="201168"/>
+            <a:off x="6370167" y="2039112"/>
+            <a:ext cx="5135727" cy="320040"/>
           </a:xfrm>
           <a:prstGeom prst="rect">
             <a:avLst/>
@@ -34211,8 +34211,8 @@
         </p:nvSpPr>
         <p:spPr>
           <a:xfrm>
-            <a:off x="6370167" y="2212848"/>
-            <a:ext cx="5135727" cy="201168"/>
+            <a:off x="6370167" y="2377440"/>
+            <a:ext cx="5135727" cy="320040"/>
           </a:xfrm>
           <a:prstGeom prst="rect">
             <a:avLst/>
@@ -34251,8 +34251,8 @@
         </p:nvSpPr>
         <p:spPr>
           <a:xfrm>
-            <a:off x="6370167" y="2414016"/>
-            <a:ext cx="5135727" cy="201168"/>
+            <a:off x="6370167" y="2715768"/>
+            <a:ext cx="5135727" cy="320040"/>
           </a:xfrm>
           <a:prstGeom prst="rect">
             <a:avLst/>
@@ -34291,8 +34291,8 @@
         </p:nvSpPr>
         <p:spPr>
           <a:xfrm>
-            <a:off x="6370167" y="2615184"/>
-            <a:ext cx="5135727" cy="201168"/>
+            <a:off x="6370167" y="3054096"/>
+            <a:ext cx="5135727" cy="320040"/>
           </a:xfrm>
           <a:prstGeom prst="rect">
             <a:avLst/>

--- a/Perwal_Bekasi_51_2024_Pajak_Reklame.pptx
+++ b/Perwal_Bekasi_51_2024_Pajak_Reklame.pptx
@@ -3682,8 +3682,8 @@
         </p:nvSpPr>
         <p:spPr>
           <a:xfrm>
-            <a:off x="0" y="6629400"/>
-            <a:ext cx="12191695" cy="228600"/>
+            <a:off x="0" y="6656832"/>
+            <a:ext cx="12191695" cy="201168"/>
           </a:xfrm>
           <a:prstGeom prst="rect">
             <a:avLst/>
@@ -3887,7 +3887,7 @@
             <a:avLst/>
           </a:prstGeom>
           <a:solidFill>
-            <a:srgbClr val="0E203E"/>
+            <a:srgbClr val="12294A"/>
           </a:solidFill>
           <a:ln>
             <a:noFill/>
@@ -4122,46 +4122,6 @@
           <a:lstStyle/>
           <a:p>
             <a:pPr algn="ctr"/>
-          </a:p>
-        </p:txBody>
-      </p:sp>
-      <p:sp>
-        <p:nvSpPr>
-          <p:cNvPr id="11" name="TextBox 10"/>
-          <p:cNvSpPr txBox="1"/>
-          <p:nvPr/>
-        </p:nvSpPr>
-        <p:spPr>
-          <a:xfrm>
-            <a:off x="11277295" y="6473952"/>
-            <a:ext cx="731520" cy="201168"/>
-          </a:xfrm>
-          <a:prstGeom prst="rect">
-            <a:avLst/>
-          </a:prstGeom>
-          <a:noFill/>
-        </p:spPr>
-        <p:txBody>
-          <a:bodyPr wrap="square"/>
-          <a:lstStyle/>
-          <a:p>
-            <a:pPr algn="r">
-              <a:spcBef>
-                <a:spcPts val="0"/>
-              </a:spcBef>
-              <a:spcAft>
-                <a:spcPts val="0"/>
-              </a:spcAft>
-              <a:defRPr sz="800" b="0">
-                <a:solidFill>
-                  <a:srgbClr val="9CA3AF"/>
-                </a:solidFill>
-                <a:latin typeface="Calibri"/>
-              </a:defRPr>
-            </a:pPr>
-            <a:r>
-              <a:t>9</a:t>
-            </a:r>
           </a:p>
         </p:txBody>
       </p:sp>
@@ -4243,7 +4203,7 @@
         <p:spPr>
           <a:xfrm>
             <a:off x="0" y="32004"/>
-            <a:ext cx="12191695" cy="822960"/>
+            <a:ext cx="12191695" cy="822959"/>
           </a:xfrm>
           <a:prstGeom prst="rect">
             <a:avLst/>
@@ -4286,7 +4246,7 @@
         <p:spPr>
           <a:xfrm>
             <a:off x="548640" y="109728"/>
-            <a:ext cx="64008" cy="548640"/>
+            <a:ext cx="64008" cy="502920"/>
           </a:xfrm>
           <a:prstGeom prst="rect">
             <a:avLst/>
@@ -4369,7 +4329,7 @@
         <p:spPr>
           <a:xfrm>
             <a:off x="749808" y="576072"/>
-            <a:ext cx="10637215" cy="274320"/>
+            <a:ext cx="10637215" cy="256032"/>
           </a:xfrm>
           <a:prstGeom prst="rect">
             <a:avLst/>
@@ -4395,7 +4355,7 @@
               </a:defRPr>
             </a:pPr>
             <a:r>
-              <a:t>Pasal 6–8 • Pendaftaran &amp; Pendataan</a:t>
+              <a:t>Pasal 6–8</a:t>
             </a:r>
           </a:p>
         </p:txBody>
@@ -4409,7 +4369,7 @@
         <p:spPr>
           <a:xfrm>
             <a:off x="548640" y="1051560"/>
-            <a:ext cx="5410047" cy="5166360"/>
+            <a:ext cx="5410047" cy="5349240"/>
           </a:xfrm>
           <a:prstGeom prst="roundRect">
             <a:avLst>
@@ -4456,7 +4416,7 @@
         <p:spPr>
           <a:xfrm>
             <a:off x="548640" y="1051560"/>
-            <a:ext cx="45720" cy="5166360"/>
+            <a:ext cx="45720" cy="5349240"/>
           </a:xfrm>
           <a:prstGeom prst="rect">
             <a:avLst/>
@@ -4498,7 +4458,7 @@
         </p:nvSpPr>
         <p:spPr>
           <a:xfrm>
-            <a:off x="731520" y="1188720"/>
+            <a:off x="731520" y="1188719"/>
             <a:ext cx="5090007" cy="274320"/>
           </a:xfrm>
           <a:prstGeom prst="rect">
@@ -4539,7 +4499,7 @@
         <p:spPr>
           <a:xfrm>
             <a:off x="731520" y="1481328"/>
-            <a:ext cx="5090007" cy="201168"/>
+            <a:ext cx="5090007" cy="228600"/>
           </a:xfrm>
           <a:prstGeom prst="rect">
             <a:avLst/>
@@ -4578,8 +4538,8 @@
         </p:nvSpPr>
         <p:spPr>
           <a:xfrm>
-            <a:off x="731520" y="1700784"/>
-            <a:ext cx="5090007" cy="201168"/>
+            <a:off x="731520" y="1719072"/>
+            <a:ext cx="5090007" cy="228600"/>
           </a:xfrm>
           <a:prstGeom prst="rect">
             <a:avLst/>
@@ -4618,8 +4578,8 @@
         </p:nvSpPr>
         <p:spPr>
           <a:xfrm>
-            <a:off x="731520" y="1920240"/>
-            <a:ext cx="5090007" cy="201168"/>
+            <a:off x="731520" y="1956815"/>
+            <a:ext cx="5090007" cy="228600"/>
           </a:xfrm>
           <a:prstGeom prst="rect">
             <a:avLst/>
@@ -4658,8 +4618,8 @@
         </p:nvSpPr>
         <p:spPr>
           <a:xfrm>
-            <a:off x="731520" y="2139696"/>
-            <a:ext cx="5090007" cy="201168"/>
+            <a:off x="731520" y="2194559"/>
+            <a:ext cx="5090007" cy="228600"/>
           </a:xfrm>
           <a:prstGeom prst="rect">
             <a:avLst/>
@@ -4698,8 +4658,8 @@
         </p:nvSpPr>
         <p:spPr>
           <a:xfrm>
-            <a:off x="731520" y="2359152"/>
-            <a:ext cx="5090007" cy="201168"/>
+            <a:off x="731520" y="2432303"/>
+            <a:ext cx="5090007" cy="228600"/>
           </a:xfrm>
           <a:prstGeom prst="rect">
             <a:avLst/>
@@ -4738,8 +4698,8 @@
         </p:nvSpPr>
         <p:spPr>
           <a:xfrm>
-            <a:off x="731520" y="2578608"/>
-            <a:ext cx="5090007" cy="201168"/>
+            <a:off x="731520" y="2670047"/>
+            <a:ext cx="5090007" cy="228600"/>
           </a:xfrm>
           <a:prstGeom prst="rect">
             <a:avLst/>
@@ -4778,8 +4738,8 @@
         </p:nvSpPr>
         <p:spPr>
           <a:xfrm>
-            <a:off x="731520" y="2798064"/>
-            <a:ext cx="5090007" cy="201168"/>
+            <a:off x="731520" y="2907791"/>
+            <a:ext cx="5090007" cy="228600"/>
           </a:xfrm>
           <a:prstGeom prst="rect">
             <a:avLst/>
@@ -4819,7 +4779,7 @@
         <p:spPr>
           <a:xfrm>
             <a:off x="6233007" y="1051560"/>
-            <a:ext cx="5410047" cy="5166360"/>
+            <a:ext cx="5410047" cy="5349240"/>
           </a:xfrm>
           <a:prstGeom prst="roundRect">
             <a:avLst>
@@ -4866,7 +4826,7 @@
         <p:spPr>
           <a:xfrm>
             <a:off x="6233007" y="1051560"/>
-            <a:ext cx="45720" cy="5166360"/>
+            <a:ext cx="45720" cy="5349240"/>
           </a:xfrm>
           <a:prstGeom prst="rect">
             <a:avLst/>
@@ -4908,7 +4868,7 @@
         </p:nvSpPr>
         <p:spPr>
           <a:xfrm>
-            <a:off x="6415887" y="1188720"/>
+            <a:off x="6415887" y="1188719"/>
             <a:ext cx="5090007" cy="274320"/>
           </a:xfrm>
           <a:prstGeom prst="rect">
@@ -4949,7 +4909,7 @@
         <p:spPr>
           <a:xfrm>
             <a:off x="6415887" y="1481328"/>
-            <a:ext cx="5090007" cy="201168"/>
+            <a:ext cx="5090007" cy="228600"/>
           </a:xfrm>
           <a:prstGeom prst="rect">
             <a:avLst/>
@@ -4988,8 +4948,8 @@
         </p:nvSpPr>
         <p:spPr>
           <a:xfrm>
-            <a:off x="6415887" y="1700784"/>
-            <a:ext cx="5090007" cy="201168"/>
+            <a:off x="6415887" y="1719072"/>
+            <a:ext cx="5090007" cy="228600"/>
           </a:xfrm>
           <a:prstGeom prst="rect">
             <a:avLst/>
@@ -5028,8 +4988,8 @@
         </p:nvSpPr>
         <p:spPr>
           <a:xfrm>
-            <a:off x="6415887" y="1920240"/>
-            <a:ext cx="5090007" cy="201168"/>
+            <a:off x="6415887" y="1956815"/>
+            <a:ext cx="5090007" cy="228600"/>
           </a:xfrm>
           <a:prstGeom prst="rect">
             <a:avLst/>
@@ -5068,8 +5028,8 @@
         </p:nvSpPr>
         <p:spPr>
           <a:xfrm>
-            <a:off x="6415887" y="2139696"/>
-            <a:ext cx="5090007" cy="201168"/>
+            <a:off x="6415887" y="2194559"/>
+            <a:ext cx="5090007" cy="228600"/>
           </a:xfrm>
           <a:prstGeom prst="rect">
             <a:avLst/>
@@ -5108,8 +5068,8 @@
         </p:nvSpPr>
         <p:spPr>
           <a:xfrm>
-            <a:off x="6415887" y="2359152"/>
-            <a:ext cx="5090007" cy="201168"/>
+            <a:off x="6415887" y="2432303"/>
+            <a:ext cx="5090007" cy="228600"/>
           </a:xfrm>
           <a:prstGeom prst="rect">
             <a:avLst/>
@@ -5148,8 +5108,8 @@
         </p:nvSpPr>
         <p:spPr>
           <a:xfrm>
-            <a:off x="6415887" y="2578608"/>
-            <a:ext cx="5090007" cy="201168"/>
+            <a:off x="6415887" y="2670047"/>
+            <a:ext cx="5090007" cy="228600"/>
           </a:xfrm>
           <a:prstGeom prst="rect">
             <a:avLst/>
@@ -5188,8 +5148,8 @@
         </p:nvSpPr>
         <p:spPr>
           <a:xfrm>
-            <a:off x="6415887" y="2798064"/>
-            <a:ext cx="5090007" cy="201168"/>
+            <a:off x="6415887" y="2907791"/>
+            <a:ext cx="5090007" cy="228600"/>
           </a:xfrm>
           <a:prstGeom prst="rect">
             <a:avLst/>
@@ -5228,7 +5188,7 @@
         </p:nvSpPr>
         <p:spPr>
           <a:xfrm>
-            <a:off x="0" y="6629400"/>
+            <a:off x="0" y="6400800"/>
             <a:ext cx="12191695" cy="27432"/>
           </a:xfrm>
           <a:prstGeom prst="rect">
@@ -5271,7 +5231,7 @@
         </p:nvSpPr>
         <p:spPr>
           <a:xfrm>
-            <a:off x="548640" y="6473952"/>
+            <a:off x="548640" y="6455664"/>
             <a:ext cx="3657600" cy="201168"/>
           </a:xfrm>
           <a:prstGeom prst="rect">
@@ -5311,7 +5271,7 @@
         </p:nvSpPr>
         <p:spPr>
           <a:xfrm>
-            <a:off x="11277295" y="6473952"/>
+            <a:off x="11277295" y="6455664"/>
             <a:ext cx="731520" cy="201168"/>
           </a:xfrm>
           <a:prstGeom prst="rect">
@@ -5513,7 +5473,7 @@
             <a:avLst/>
           </a:prstGeom>
           <a:solidFill>
-            <a:srgbClr val="0E203E"/>
+            <a:srgbClr val="12294A"/>
           </a:solidFill>
           <a:ln>
             <a:noFill/>
@@ -5748,46 +5708,6 @@
           <a:lstStyle/>
           <a:p>
             <a:pPr algn="ctr"/>
-          </a:p>
-        </p:txBody>
-      </p:sp>
-      <p:sp>
-        <p:nvSpPr>
-          <p:cNvPr id="11" name="TextBox 10"/>
-          <p:cNvSpPr txBox="1"/>
-          <p:nvPr/>
-        </p:nvSpPr>
-        <p:spPr>
-          <a:xfrm>
-            <a:off x="11277295" y="6473952"/>
-            <a:ext cx="731520" cy="201168"/>
-          </a:xfrm>
-          <a:prstGeom prst="rect">
-            <a:avLst/>
-          </a:prstGeom>
-          <a:noFill/>
-        </p:spPr>
-        <p:txBody>
-          <a:bodyPr wrap="square"/>
-          <a:lstStyle/>
-          <a:p>
-            <a:pPr algn="r">
-              <a:spcBef>
-                <a:spcPts val="0"/>
-              </a:spcBef>
-              <a:spcAft>
-                <a:spcPts val="0"/>
-              </a:spcAft>
-              <a:defRPr sz="800" b="0">
-                <a:solidFill>
-                  <a:srgbClr val="9CA3AF"/>
-                </a:solidFill>
-                <a:latin typeface="Calibri"/>
-              </a:defRPr>
-            </a:pPr>
-            <a:r>
-              <a:t>11</a:t>
-            </a:r>
           </a:p>
         </p:txBody>
       </p:sp>
@@ -5869,7 +5789,7 @@
         <p:spPr>
           <a:xfrm>
             <a:off x="0" y="32004"/>
-            <a:ext cx="12191695" cy="822960"/>
+            <a:ext cx="12191695" cy="822959"/>
           </a:xfrm>
           <a:prstGeom prst="rect">
             <a:avLst/>
@@ -5912,7 +5832,7 @@
         <p:spPr>
           <a:xfrm>
             <a:off x="548640" y="109728"/>
-            <a:ext cx="64008" cy="548640"/>
+            <a:ext cx="64008" cy="502920"/>
           </a:xfrm>
           <a:prstGeom prst="rect">
             <a:avLst/>
@@ -5994,8 +5914,8 @@
         </p:nvSpPr>
         <p:spPr>
           <a:xfrm>
-            <a:off x="749808" y="530352"/>
-            <a:ext cx="10637215" cy="274320"/>
+            <a:off x="749808" y="576072"/>
+            <a:ext cx="10637215" cy="256032"/>
           </a:xfrm>
           <a:prstGeom prst="rect">
             <a:avLst/>
@@ -6021,7 +5941,7 @@
               </a:defRPr>
             </a:pPr>
             <a:r>
-              <a:t>Pasal 9 • 7 Faktor Penentu</a:t>
+              <a:t>Pasal 9</a:t>
             </a:r>
           </a:p>
         </p:txBody>
@@ -6034,8 +5954,8 @@
         </p:nvSpPr>
         <p:spPr>
           <a:xfrm>
-            <a:off x="563727" y="1051560"/>
-            <a:ext cx="2560320" cy="1188720"/>
+            <a:off x="548640" y="1051560"/>
+            <a:ext cx="2567863" cy="1188720"/>
           </a:xfrm>
           <a:prstGeom prst="roundRect">
             <a:avLst>
@@ -6081,7 +6001,7 @@
         </p:nvSpPr>
         <p:spPr>
           <a:xfrm>
-            <a:off x="700887" y="1280160"/>
+            <a:off x="685800" y="1280160"/>
             <a:ext cx="502920" cy="502920"/>
           </a:xfrm>
           <a:prstGeom prst="ellipse">
@@ -6124,7 +6044,7 @@
         </p:nvSpPr>
         <p:spPr>
           <a:xfrm>
-            <a:off x="700887" y="1280160"/>
+            <a:off x="685800" y="1280160"/>
             <a:ext cx="502920" cy="502920"/>
           </a:xfrm>
           <a:prstGeom prst="rect">
@@ -6164,8 +6084,8 @@
         </p:nvSpPr>
         <p:spPr>
           <a:xfrm>
-            <a:off x="1295247" y="1234440"/>
-            <a:ext cx="1645920" cy="822960"/>
+            <a:off x="1280160" y="1234439"/>
+            <a:ext cx="1653463" cy="822960"/>
           </a:xfrm>
           <a:prstGeom prst="rect">
             <a:avLst/>
@@ -6204,8 +6124,8 @@
         </p:nvSpPr>
         <p:spPr>
           <a:xfrm>
-            <a:off x="3398367" y="1051560"/>
-            <a:ext cx="2560320" cy="1188720"/>
+            <a:off x="3390823" y="1051560"/>
+            <a:ext cx="2567863" cy="1188720"/>
           </a:xfrm>
           <a:prstGeom prst="roundRect">
             <a:avLst>
@@ -6251,7 +6171,7 @@
         </p:nvSpPr>
         <p:spPr>
           <a:xfrm>
-            <a:off x="3535527" y="1280160"/>
+            <a:off x="3527983" y="1280160"/>
             <a:ext cx="502920" cy="502920"/>
           </a:xfrm>
           <a:prstGeom prst="ellipse">
@@ -6294,7 +6214,7 @@
         </p:nvSpPr>
         <p:spPr>
           <a:xfrm>
-            <a:off x="3535527" y="1280160"/>
+            <a:off x="3527983" y="1280160"/>
             <a:ext cx="502920" cy="502920"/>
           </a:xfrm>
           <a:prstGeom prst="rect">
@@ -6334,8 +6254,8 @@
         </p:nvSpPr>
         <p:spPr>
           <a:xfrm>
-            <a:off x="4129887" y="1234440"/>
-            <a:ext cx="1645920" cy="822960"/>
+            <a:off x="4122343" y="1234439"/>
+            <a:ext cx="1653463" cy="822960"/>
           </a:xfrm>
           <a:prstGeom prst="rect">
             <a:avLst/>
@@ -6375,7 +6295,7 @@
         <p:spPr>
           <a:xfrm>
             <a:off x="6233007" y="1051560"/>
-            <a:ext cx="2560320" cy="1188720"/>
+            <a:ext cx="2567863" cy="1188720"/>
           </a:xfrm>
           <a:prstGeom prst="roundRect">
             <a:avLst>
@@ -6504,8 +6424,8 @@
         </p:nvSpPr>
         <p:spPr>
           <a:xfrm>
-            <a:off x="6964527" y="1234440"/>
-            <a:ext cx="1645920" cy="822960"/>
+            <a:off x="6964527" y="1234439"/>
+            <a:ext cx="1653463" cy="822960"/>
           </a:xfrm>
           <a:prstGeom prst="rect">
             <a:avLst/>
@@ -6544,8 +6464,8 @@
         </p:nvSpPr>
         <p:spPr>
           <a:xfrm>
-            <a:off x="9067647" y="1051560"/>
-            <a:ext cx="2560320" cy="1188720"/>
+            <a:off x="9075191" y="1051560"/>
+            <a:ext cx="2567863" cy="1188720"/>
           </a:xfrm>
           <a:prstGeom prst="roundRect">
             <a:avLst>
@@ -6591,7 +6511,7 @@
         </p:nvSpPr>
         <p:spPr>
           <a:xfrm>
-            <a:off x="9204807" y="1280160"/>
+            <a:off x="9212351" y="1280160"/>
             <a:ext cx="502920" cy="502920"/>
           </a:xfrm>
           <a:prstGeom prst="ellipse">
@@ -6634,7 +6554,7 @@
         </p:nvSpPr>
         <p:spPr>
           <a:xfrm>
-            <a:off x="9204807" y="1280160"/>
+            <a:off x="9212351" y="1280160"/>
             <a:ext cx="502920" cy="502920"/>
           </a:xfrm>
           <a:prstGeom prst="rect">
@@ -6674,8 +6594,8 @@
         </p:nvSpPr>
         <p:spPr>
           <a:xfrm>
-            <a:off x="9799167" y="1234440"/>
-            <a:ext cx="1645920" cy="822960"/>
+            <a:off x="9806711" y="1234439"/>
+            <a:ext cx="1653463" cy="822960"/>
           </a:xfrm>
           <a:prstGeom prst="rect">
             <a:avLst/>
@@ -6701,11 +6621,7 @@
               </a:defRPr>
             </a:pPr>
             <a:r>
-              <a:t>Waktu Tayang</a:t>
-            </a:r>
-            <a:br/>
-            <a:r>
-              <a:t>(detik)</a:t>
+              <a:t>Waktu Tayang (detik)</a:t>
             </a:r>
           </a:p>
         </p:txBody>
@@ -6718,8 +6634,8 @@
         </p:nvSpPr>
         <p:spPr>
           <a:xfrm>
-            <a:off x="563727" y="2514600"/>
-            <a:ext cx="2560320" cy="1188720"/>
+            <a:off x="548640" y="2697480"/>
+            <a:ext cx="2567863" cy="1188720"/>
           </a:xfrm>
           <a:prstGeom prst="roundRect">
             <a:avLst>
@@ -6765,7 +6681,7 @@
         </p:nvSpPr>
         <p:spPr>
           <a:xfrm>
-            <a:off x="700887" y="2743200"/>
+            <a:off x="685800" y="2926080"/>
             <a:ext cx="502920" cy="502920"/>
           </a:xfrm>
           <a:prstGeom prst="ellipse">
@@ -6808,7 +6724,7 @@
         </p:nvSpPr>
         <p:spPr>
           <a:xfrm>
-            <a:off x="700887" y="2743200"/>
+            <a:off x="685800" y="2926080"/>
             <a:ext cx="502920" cy="502920"/>
           </a:xfrm>
           <a:prstGeom prst="rect">
@@ -6848,8 +6764,8 @@
         </p:nvSpPr>
         <p:spPr>
           <a:xfrm>
-            <a:off x="1295247" y="2697480"/>
-            <a:ext cx="1645920" cy="822960"/>
+            <a:off x="1280160" y="2880360"/>
+            <a:ext cx="1653463" cy="822960"/>
           </a:xfrm>
           <a:prstGeom prst="rect">
             <a:avLst/>
@@ -6875,11 +6791,7 @@
               </a:defRPr>
             </a:pPr>
             <a:r>
-              <a:t>Jangka Waktu</a:t>
-            </a:r>
-            <a:br/>
-            <a:r>
-              <a:t>(hari)</a:t>
+              <a:t>Jangka Waktu (hari)</a:t>
             </a:r>
           </a:p>
         </p:txBody>
@@ -6892,8 +6804,8 @@
         </p:nvSpPr>
         <p:spPr>
           <a:xfrm>
-            <a:off x="3398367" y="2514600"/>
-            <a:ext cx="2560320" cy="1188720"/>
+            <a:off x="3390823" y="2697480"/>
+            <a:ext cx="2567863" cy="1188720"/>
           </a:xfrm>
           <a:prstGeom prst="roundRect">
             <a:avLst>
@@ -6939,7 +6851,7 @@
         </p:nvSpPr>
         <p:spPr>
           <a:xfrm>
-            <a:off x="3535527" y="2743200"/>
+            <a:off x="3527983" y="2926080"/>
             <a:ext cx="502920" cy="502920"/>
           </a:xfrm>
           <a:prstGeom prst="ellipse">
@@ -6982,7 +6894,7 @@
         </p:nvSpPr>
         <p:spPr>
           <a:xfrm>
-            <a:off x="3535527" y="2743200"/>
+            <a:off x="3527983" y="2926080"/>
             <a:ext cx="502920" cy="502920"/>
           </a:xfrm>
           <a:prstGeom prst="rect">
@@ -7022,8 +6934,8 @@
         </p:nvSpPr>
         <p:spPr>
           <a:xfrm>
-            <a:off x="4129887" y="2697480"/>
-            <a:ext cx="1645920" cy="822960"/>
+            <a:off x="4122343" y="2880360"/>
+            <a:ext cx="1653463" cy="822960"/>
           </a:xfrm>
           <a:prstGeom prst="rect">
             <a:avLst/>
@@ -7062,8 +6974,8 @@
         </p:nvSpPr>
         <p:spPr>
           <a:xfrm>
-            <a:off x="6233007" y="2514600"/>
-            <a:ext cx="2560320" cy="1188720"/>
+            <a:off x="6233007" y="2697480"/>
+            <a:ext cx="2567863" cy="1188720"/>
           </a:xfrm>
           <a:prstGeom prst="roundRect">
             <a:avLst>
@@ -7109,7 +7021,7 @@
         </p:nvSpPr>
         <p:spPr>
           <a:xfrm>
-            <a:off x="6370167" y="2743200"/>
+            <a:off x="6370167" y="2926080"/>
             <a:ext cx="502920" cy="502920"/>
           </a:xfrm>
           <a:prstGeom prst="ellipse">
@@ -7152,7 +7064,7 @@
         </p:nvSpPr>
         <p:spPr>
           <a:xfrm>
-            <a:off x="6370167" y="2743200"/>
+            <a:off x="6370167" y="2926080"/>
             <a:ext cx="502920" cy="502920"/>
           </a:xfrm>
           <a:prstGeom prst="rect">
@@ -7192,8 +7104,8 @@
         </p:nvSpPr>
         <p:spPr>
           <a:xfrm>
-            <a:off x="6964527" y="2697480"/>
-            <a:ext cx="1645920" cy="822960"/>
+            <a:off x="6964527" y="2880360"/>
+            <a:ext cx="1653463" cy="822960"/>
           </a:xfrm>
           <a:prstGeom prst="rect">
             <a:avLst/>
@@ -7232,7 +7144,7 @@
         </p:nvSpPr>
         <p:spPr>
           <a:xfrm>
-            <a:off x="548640" y="4114800"/>
+            <a:off x="548640" y="2697479"/>
             <a:ext cx="11094415" cy="1554480"/>
           </a:xfrm>
           <a:prstGeom prst="roundRect">
@@ -7279,7 +7191,7 @@
         </p:nvSpPr>
         <p:spPr>
           <a:xfrm>
-            <a:off x="731520" y="4160520"/>
+            <a:off x="731520" y="2743199"/>
             <a:ext cx="4572000" cy="274320"/>
           </a:xfrm>
           <a:prstGeom prst="rect">
@@ -7306,7 +7218,7 @@
               </a:defRPr>
             </a:pPr>
             <a:r>
-              <a:t>KLASIFIKASI KELAS JALAN MENENTUKAN NILAI NSR</a:t>
+              <a:t>KLASIFIKASI KELAS JALAN</a:t>
             </a:r>
           </a:p>
         </p:txBody>
@@ -7319,8 +7231,8 @@
         </p:nvSpPr>
         <p:spPr>
           <a:xfrm>
-            <a:off x="731520" y="4480560"/>
-            <a:ext cx="10728655" cy="914400"/>
+            <a:off x="731520" y="3063239"/>
+            <a:ext cx="10728655" cy="822960"/>
           </a:xfrm>
           <a:prstGeom prst="rect">
             <a:avLst/>
@@ -7367,7 +7279,7 @@
         </p:nvSpPr>
         <p:spPr>
           <a:xfrm>
-            <a:off x="0" y="6629400"/>
+            <a:off x="0" y="6400800"/>
             <a:ext cx="12191695" cy="27432"/>
           </a:xfrm>
           <a:prstGeom prst="rect">
@@ -7410,7 +7322,7 @@
         </p:nvSpPr>
         <p:spPr>
           <a:xfrm>
-            <a:off x="548640" y="6473952"/>
+            <a:off x="548640" y="6455664"/>
             <a:ext cx="3657600" cy="201168"/>
           </a:xfrm>
           <a:prstGeom prst="rect">
@@ -7450,7 +7362,7 @@
         </p:nvSpPr>
         <p:spPr>
           <a:xfrm>
-            <a:off x="11277295" y="6473952"/>
+            <a:off x="11277295" y="6455664"/>
             <a:ext cx="731520" cy="201168"/>
           </a:xfrm>
           <a:prstGeom prst="rect">
@@ -7652,7 +7564,7 @@
             <a:avLst/>
           </a:prstGeom>
           <a:solidFill>
-            <a:srgbClr val="0E203E"/>
+            <a:srgbClr val="12294A"/>
           </a:solidFill>
           <a:ln>
             <a:noFill/>
@@ -7887,46 +7799,6 @@
           <a:lstStyle/>
           <a:p>
             <a:pPr algn="ctr"/>
-          </a:p>
-        </p:txBody>
-      </p:sp>
-      <p:sp>
-        <p:nvSpPr>
-          <p:cNvPr id="11" name="TextBox 10"/>
-          <p:cNvSpPr txBox="1"/>
-          <p:nvPr/>
-        </p:nvSpPr>
-        <p:spPr>
-          <a:xfrm>
-            <a:off x="11277295" y="6473952"/>
-            <a:ext cx="731520" cy="201168"/>
-          </a:xfrm>
-          <a:prstGeom prst="rect">
-            <a:avLst/>
-          </a:prstGeom>
-          <a:noFill/>
-        </p:spPr>
-        <p:txBody>
-          <a:bodyPr wrap="square"/>
-          <a:lstStyle/>
-          <a:p>
-            <a:pPr algn="r">
-              <a:spcBef>
-                <a:spcPts val="0"/>
-              </a:spcBef>
-              <a:spcAft>
-                <a:spcPts val="0"/>
-              </a:spcAft>
-              <a:defRPr sz="800" b="0">
-                <a:solidFill>
-                  <a:srgbClr val="9CA3AF"/>
-                </a:solidFill>
-                <a:latin typeface="Calibri"/>
-              </a:defRPr>
-            </a:pPr>
-            <a:r>
-              <a:t>13</a:t>
-            </a:r>
           </a:p>
         </p:txBody>
       </p:sp>
@@ -8008,7 +7880,7 @@
         <p:spPr>
           <a:xfrm>
             <a:off x="0" y="32004"/>
-            <a:ext cx="12191695" cy="822960"/>
+            <a:ext cx="12191695" cy="822959"/>
           </a:xfrm>
           <a:prstGeom prst="rect">
             <a:avLst/>
@@ -8051,7 +7923,7 @@
         <p:spPr>
           <a:xfrm>
             <a:off x="548640" y="109728"/>
-            <a:ext cx="64008" cy="548640"/>
+            <a:ext cx="64008" cy="502920"/>
           </a:xfrm>
           <a:prstGeom prst="rect">
             <a:avLst/>
@@ -8134,7 +8006,7 @@
         <p:spPr>
           <a:xfrm>
             <a:off x="749808" y="576072"/>
-            <a:ext cx="10637215" cy="274320"/>
+            <a:ext cx="10637215" cy="256032"/>
           </a:xfrm>
           <a:prstGeom prst="rect">
             <a:avLst/>
@@ -8160,7 +8032,7 @@
               </a:defRPr>
             </a:pPr>
             <a:r>
-              <a:t>Pasal 10 • Rumus Dasar</a:t>
+              <a:t>Pasal 10</a:t>
             </a:r>
           </a:p>
         </p:txBody>
@@ -8870,7 +8742,7 @@
         <p:spPr>
           <a:xfrm>
             <a:off x="548640" y="3337560"/>
-            <a:ext cx="11094415" cy="2743200"/>
+            <a:ext cx="11094415" cy="2560320"/>
           </a:xfrm>
           <a:prstGeom prst="roundRect">
             <a:avLst>
@@ -8917,7 +8789,7 @@
         <p:spPr>
           <a:xfrm>
             <a:off x="777240" y="3474720"/>
-            <a:ext cx="10637215" cy="2377440"/>
+            <a:ext cx="10637215" cy="2286000"/>
           </a:xfrm>
           <a:prstGeom prst="rect">
             <a:avLst/>
@@ -8981,7 +8853,7 @@
         </p:nvSpPr>
         <p:spPr>
           <a:xfrm>
-            <a:off x="0" y="6629400"/>
+            <a:off x="0" y="6400800"/>
             <a:ext cx="12191695" cy="27432"/>
           </a:xfrm>
           <a:prstGeom prst="rect">
@@ -9024,7 +8896,7 @@
         </p:nvSpPr>
         <p:spPr>
           <a:xfrm>
-            <a:off x="548640" y="6473952"/>
+            <a:off x="548640" y="6455664"/>
             <a:ext cx="3657600" cy="201168"/>
           </a:xfrm>
           <a:prstGeom prst="rect">
@@ -9064,7 +8936,7 @@
         </p:nvSpPr>
         <p:spPr>
           <a:xfrm>
-            <a:off x="11277295" y="6473952"/>
+            <a:off x="11277295" y="6455664"/>
             <a:ext cx="731520" cy="201168"/>
           </a:xfrm>
           <a:prstGeom prst="rect">
@@ -9174,7 +9046,7 @@
         <p:spPr>
           <a:xfrm>
             <a:off x="0" y="32004"/>
-            <a:ext cx="12191695" cy="822960"/>
+            <a:ext cx="12191695" cy="822959"/>
           </a:xfrm>
           <a:prstGeom prst="rect">
             <a:avLst/>
@@ -9217,7 +9089,7 @@
         <p:spPr>
           <a:xfrm>
             <a:off x="548640" y="109728"/>
-            <a:ext cx="64008" cy="548640"/>
+            <a:ext cx="64008" cy="502920"/>
           </a:xfrm>
           <a:prstGeom prst="rect">
             <a:avLst/>
@@ -9300,7 +9172,7 @@
         <p:spPr>
           <a:xfrm>
             <a:off x="749808" y="576072"/>
-            <a:ext cx="10637215" cy="274320"/>
+            <a:ext cx="10637215" cy="256032"/>
           </a:xfrm>
           <a:prstGeom prst="rect">
             <a:avLst/>
@@ -9326,7 +9198,7 @@
               </a:defRPr>
             </a:pPr>
             <a:r>
-              <a:t>Pasal 10 • Papan / Billboard</a:t>
+              <a:t>Pasal 10</a:t>
             </a:r>
           </a:p>
         </p:txBody>
@@ -9810,7 +9682,7 @@
         </p:nvSpPr>
         <p:spPr>
           <a:xfrm>
-            <a:off x="0" y="6629400"/>
+            <a:off x="0" y="6400800"/>
             <a:ext cx="12191695" cy="27432"/>
           </a:xfrm>
           <a:prstGeom prst="rect">
@@ -9853,7 +9725,7 @@
         </p:nvSpPr>
         <p:spPr>
           <a:xfrm>
-            <a:off x="548640" y="6473952"/>
+            <a:off x="548640" y="6455664"/>
             <a:ext cx="3657600" cy="201168"/>
           </a:xfrm>
           <a:prstGeom prst="rect">
@@ -9893,7 +9765,7 @@
         </p:nvSpPr>
         <p:spPr>
           <a:xfrm>
-            <a:off x="11277295" y="6473952"/>
+            <a:off x="11277295" y="6455664"/>
             <a:ext cx="731520" cy="201168"/>
           </a:xfrm>
           <a:prstGeom prst="rect">
@@ -10003,7 +9875,7 @@
         <p:spPr>
           <a:xfrm>
             <a:off x="0" y="32004"/>
-            <a:ext cx="12191695" cy="822960"/>
+            <a:ext cx="12191695" cy="822959"/>
           </a:xfrm>
           <a:prstGeom prst="rect">
             <a:avLst/>
@@ -10046,7 +9918,7 @@
         <p:spPr>
           <a:xfrm>
             <a:off x="548640" y="109728"/>
-            <a:ext cx="64008" cy="548640"/>
+            <a:ext cx="64008" cy="502920"/>
           </a:xfrm>
           <a:prstGeom prst="rect">
             <a:avLst/>
@@ -10129,7 +10001,7 @@
         <p:spPr>
           <a:xfrm>
             <a:off x="749808" y="576072"/>
-            <a:ext cx="10637215" cy="274320"/>
+            <a:ext cx="10637215" cy="256032"/>
           </a:xfrm>
           <a:prstGeom prst="rect">
             <a:avLst/>
@@ -10155,7 +10027,7 @@
               </a:defRPr>
             </a:pPr>
             <a:r>
-              <a:t>Pasal 10 • Megatron / Videotron</a:t>
+              <a:t>Pasal 10</a:t>
             </a:r>
           </a:p>
         </p:txBody>
@@ -10784,7 +10656,7 @@
         </p:nvSpPr>
         <p:spPr>
           <a:xfrm>
-            <a:off x="0" y="6629400"/>
+            <a:off x="0" y="6400800"/>
             <a:ext cx="12191695" cy="27432"/>
           </a:xfrm>
           <a:prstGeom prst="rect">
@@ -10827,7 +10699,7 @@
         </p:nvSpPr>
         <p:spPr>
           <a:xfrm>
-            <a:off x="548640" y="6473952"/>
+            <a:off x="548640" y="6455664"/>
             <a:ext cx="3657600" cy="201168"/>
           </a:xfrm>
           <a:prstGeom prst="rect">
@@ -10867,7 +10739,7 @@
         </p:nvSpPr>
         <p:spPr>
           <a:xfrm>
-            <a:off x="11277295" y="6473952"/>
+            <a:off x="11277295" y="6455664"/>
             <a:ext cx="731520" cy="201168"/>
           </a:xfrm>
           <a:prstGeom prst="rect">
@@ -10977,7 +10849,7 @@
         <p:spPr>
           <a:xfrm>
             <a:off x="0" y="32004"/>
-            <a:ext cx="12191695" cy="822960"/>
+            <a:ext cx="12191695" cy="822959"/>
           </a:xfrm>
           <a:prstGeom prst="rect">
             <a:avLst/>
@@ -11020,7 +10892,7 @@
         <p:spPr>
           <a:xfrm>
             <a:off x="548640" y="109728"/>
-            <a:ext cx="64008" cy="548640"/>
+            <a:ext cx="64008" cy="502920"/>
           </a:xfrm>
           <a:prstGeom prst="rect">
             <a:avLst/>
@@ -11103,7 +10975,7 @@
         <p:spPr>
           <a:xfrm>
             <a:off x="749808" y="576072"/>
-            <a:ext cx="10637215" cy="274320"/>
+            <a:ext cx="10637215" cy="256032"/>
           </a:xfrm>
           <a:prstGeom prst="rect">
             <a:avLst/>
@@ -11129,7 +11001,7 @@
               </a:defRPr>
             </a:pPr>
             <a:r>
-              <a:t>Pasal 10 • Spanduk / Umbul / Baliho</a:t>
+              <a:t>Pasal 10</a:t>
             </a:r>
           </a:p>
         </p:txBody>
@@ -11613,7 +11485,7 @@
         </p:nvSpPr>
         <p:spPr>
           <a:xfrm>
-            <a:off x="0" y="6629400"/>
+            <a:off x="0" y="6400800"/>
             <a:ext cx="12191695" cy="27432"/>
           </a:xfrm>
           <a:prstGeom prst="rect">
@@ -11656,7 +11528,7 @@
         </p:nvSpPr>
         <p:spPr>
           <a:xfrm>
-            <a:off x="548640" y="6473952"/>
+            <a:off x="548640" y="6455664"/>
             <a:ext cx="3657600" cy="201168"/>
           </a:xfrm>
           <a:prstGeom prst="rect">
@@ -11696,7 +11568,7 @@
         </p:nvSpPr>
         <p:spPr>
           <a:xfrm>
-            <a:off x="11277295" y="6473952"/>
+            <a:off x="11277295" y="6455664"/>
             <a:ext cx="731520" cy="201168"/>
           </a:xfrm>
           <a:prstGeom prst="rect">
@@ -11806,7 +11678,7 @@
         <p:spPr>
           <a:xfrm>
             <a:off x="0" y="32004"/>
-            <a:ext cx="12191695" cy="822960"/>
+            <a:ext cx="12191695" cy="822959"/>
           </a:xfrm>
           <a:prstGeom prst="rect">
             <a:avLst/>
@@ -11849,7 +11721,7 @@
         <p:spPr>
           <a:xfrm>
             <a:off x="548640" y="109728"/>
-            <a:ext cx="64008" cy="548640"/>
+            <a:ext cx="64008" cy="502920"/>
           </a:xfrm>
           <a:prstGeom prst="rect">
             <a:avLst/>
@@ -11932,7 +11804,7 @@
         <p:spPr>
           <a:xfrm>
             <a:off x="749808" y="576072"/>
-            <a:ext cx="10637215" cy="274320"/>
+            <a:ext cx="10637215" cy="256032"/>
           </a:xfrm>
           <a:prstGeom prst="rect">
             <a:avLst/>
@@ -11958,7 +11830,7 @@
               </a:defRPr>
             </a:pPr>
             <a:r>
-              <a:t>Pasal 10 • Jenis Reklame Lainnya</a:t>
+              <a:t>Pasal 10</a:t>
             </a:r>
           </a:p>
         </p:txBody>
@@ -12061,7 +11933,7 @@
         </p:nvSpPr>
         <p:spPr>
           <a:xfrm>
-            <a:off x="685800" y="1188720"/>
+            <a:off x="685800" y="1188719"/>
             <a:ext cx="384048" cy="384048"/>
           </a:xfrm>
           <a:prstGeom prst="ellipse">
@@ -12104,7 +11976,7 @@
         </p:nvSpPr>
         <p:spPr>
           <a:xfrm>
-            <a:off x="685800" y="1188720"/>
+            <a:off x="685800" y="1188719"/>
             <a:ext cx="384048" cy="384048"/>
           </a:xfrm>
           <a:prstGeom prst="rect">
@@ -12144,7 +12016,7 @@
         </p:nvSpPr>
         <p:spPr>
           <a:xfrm>
-            <a:off x="685800" y="1691640"/>
+            <a:off x="685800" y="1691639"/>
             <a:ext cx="2293543" cy="274320"/>
           </a:xfrm>
           <a:prstGeom prst="rect">
@@ -12185,7 +12057,7 @@
         <p:spPr>
           <a:xfrm>
             <a:off x="685800" y="2039112"/>
-            <a:ext cx="2293543" cy="320040"/>
+            <a:ext cx="2293543" cy="274320"/>
           </a:xfrm>
           <a:prstGeom prst="rect">
             <a:avLst/>
@@ -12224,8 +12096,8 @@
         </p:nvSpPr>
         <p:spPr>
           <a:xfrm>
-            <a:off x="685800" y="2377440"/>
-            <a:ext cx="2293543" cy="320040"/>
+            <a:off x="685800" y="2331720"/>
+            <a:ext cx="2293543" cy="274320"/>
           </a:xfrm>
           <a:prstGeom prst="rect">
             <a:avLst/>
@@ -12354,7 +12226,7 @@
         </p:nvSpPr>
         <p:spPr>
           <a:xfrm>
-            <a:off x="3527983" y="1188720"/>
+            <a:off x="3527983" y="1188719"/>
             <a:ext cx="384048" cy="384048"/>
           </a:xfrm>
           <a:prstGeom prst="ellipse">
@@ -12397,7 +12269,7 @@
         </p:nvSpPr>
         <p:spPr>
           <a:xfrm>
-            <a:off x="3527983" y="1188720"/>
+            <a:off x="3527983" y="1188719"/>
             <a:ext cx="384048" cy="384048"/>
           </a:xfrm>
           <a:prstGeom prst="rect">
@@ -12437,7 +12309,7 @@
         </p:nvSpPr>
         <p:spPr>
           <a:xfrm>
-            <a:off x="3527983" y="1691640"/>
+            <a:off x="3527983" y="1691639"/>
             <a:ext cx="2293543" cy="274320"/>
           </a:xfrm>
           <a:prstGeom prst="rect">
@@ -12478,7 +12350,7 @@
         <p:spPr>
           <a:xfrm>
             <a:off x="3527983" y="2039112"/>
-            <a:ext cx="2293543" cy="320040"/>
+            <a:ext cx="2293543" cy="274320"/>
           </a:xfrm>
           <a:prstGeom prst="rect">
             <a:avLst/>
@@ -12607,7 +12479,7 @@
         </p:nvSpPr>
         <p:spPr>
           <a:xfrm>
-            <a:off x="6370167" y="1188720"/>
+            <a:off x="6370167" y="1188719"/>
             <a:ext cx="384048" cy="384048"/>
           </a:xfrm>
           <a:prstGeom prst="ellipse">
@@ -12650,7 +12522,7 @@
         </p:nvSpPr>
         <p:spPr>
           <a:xfrm>
-            <a:off x="6370167" y="1188720"/>
+            <a:off x="6370167" y="1188719"/>
             <a:ext cx="384048" cy="384048"/>
           </a:xfrm>
           <a:prstGeom prst="rect">
@@ -12690,7 +12562,7 @@
         </p:nvSpPr>
         <p:spPr>
           <a:xfrm>
-            <a:off x="6370167" y="1691640"/>
+            <a:off x="6370167" y="1691639"/>
             <a:ext cx="2293543" cy="274320"/>
           </a:xfrm>
           <a:prstGeom prst="rect">
@@ -12731,7 +12603,7 @@
         <p:spPr>
           <a:xfrm>
             <a:off x="6370167" y="2039112"/>
-            <a:ext cx="2293543" cy="320040"/>
+            <a:ext cx="2293543" cy="274320"/>
           </a:xfrm>
           <a:prstGeom prst="rect">
             <a:avLst/>
@@ -12770,8 +12642,8 @@
         </p:nvSpPr>
         <p:spPr>
           <a:xfrm>
-            <a:off x="6370167" y="2377440"/>
-            <a:ext cx="2293543" cy="320040"/>
+            <a:off x="6370167" y="2331720"/>
+            <a:ext cx="2293543" cy="274320"/>
           </a:xfrm>
           <a:prstGeom prst="rect">
             <a:avLst/>
@@ -12900,7 +12772,7 @@
         </p:nvSpPr>
         <p:spPr>
           <a:xfrm>
-            <a:off x="9212351" y="1188720"/>
+            <a:off x="9212351" y="1188719"/>
             <a:ext cx="384048" cy="384048"/>
           </a:xfrm>
           <a:prstGeom prst="ellipse">
@@ -12943,7 +12815,7 @@
         </p:nvSpPr>
         <p:spPr>
           <a:xfrm>
-            <a:off x="9212351" y="1188720"/>
+            <a:off x="9212351" y="1188719"/>
             <a:ext cx="384048" cy="384048"/>
           </a:xfrm>
           <a:prstGeom prst="rect">
@@ -12983,7 +12855,7 @@
         </p:nvSpPr>
         <p:spPr>
           <a:xfrm>
-            <a:off x="9212351" y="1691640"/>
+            <a:off x="9212351" y="1691639"/>
             <a:ext cx="2293543" cy="274320"/>
           </a:xfrm>
           <a:prstGeom prst="rect">
@@ -13024,7 +12896,7 @@
         <p:spPr>
           <a:xfrm>
             <a:off x="9212351" y="2039112"/>
-            <a:ext cx="2293543" cy="320040"/>
+            <a:ext cx="2293543" cy="274320"/>
           </a:xfrm>
           <a:prstGeom prst="rect">
             <a:avLst/>
@@ -13063,8 +12935,8 @@
         </p:nvSpPr>
         <p:spPr>
           <a:xfrm>
-            <a:off x="9212351" y="2377440"/>
-            <a:ext cx="2293543" cy="320040"/>
+            <a:off x="9212351" y="2331720"/>
+            <a:ext cx="2293543" cy="274320"/>
           </a:xfrm>
           <a:prstGeom prst="rect">
             <a:avLst/>
@@ -13103,7 +12975,7 @@
         </p:nvSpPr>
         <p:spPr>
           <a:xfrm>
-            <a:off x="0" y="6629400"/>
+            <a:off x="0" y="6400800"/>
             <a:ext cx="12191695" cy="27432"/>
           </a:xfrm>
           <a:prstGeom prst="rect">
@@ -13146,7 +13018,7 @@
         </p:nvSpPr>
         <p:spPr>
           <a:xfrm>
-            <a:off x="548640" y="6473952"/>
+            <a:off x="548640" y="6455664"/>
             <a:ext cx="3657600" cy="201168"/>
           </a:xfrm>
           <a:prstGeom prst="rect">
@@ -13186,7 +13058,7 @@
         </p:nvSpPr>
         <p:spPr>
           <a:xfrm>
-            <a:off x="11277295" y="6473952"/>
+            <a:off x="11277295" y="6455664"/>
             <a:ext cx="731520" cy="201168"/>
           </a:xfrm>
           <a:prstGeom prst="rect">
@@ -13296,7 +13168,7 @@
         <p:spPr>
           <a:xfrm>
             <a:off x="0" y="32004"/>
-            <a:ext cx="12191695" cy="731520"/>
+            <a:ext cx="12191695" cy="822959"/>
           </a:xfrm>
           <a:prstGeom prst="rect">
             <a:avLst/>
@@ -13339,7 +13211,7 @@
         <p:spPr>
           <a:xfrm>
             <a:off x="548640" y="109728"/>
-            <a:ext cx="64008" cy="457200"/>
+            <a:ext cx="64008" cy="502920"/>
           </a:xfrm>
           <a:prstGeom prst="rect">
             <a:avLst/>
@@ -13381,8 +13253,8 @@
         </p:nvSpPr>
         <p:spPr>
           <a:xfrm>
-            <a:off x="731520" y="137160"/>
-            <a:ext cx="10180015" cy="320040"/>
+            <a:off x="749808" y="137160"/>
+            <a:ext cx="10637215" cy="438912"/>
           </a:xfrm>
           <a:prstGeom prst="rect">
             <a:avLst/>
@@ -13421,8 +13293,8 @@
         </p:nvSpPr>
         <p:spPr>
           <a:xfrm>
-            <a:off x="731520" y="475488"/>
-            <a:ext cx="10180015" cy="228600"/>
+            <a:off x="749808" y="576072"/>
+            <a:ext cx="10637215" cy="256032"/>
           </a:xfrm>
           <a:prstGeom prst="rect">
             <a:avLst/>
@@ -13461,8 +13333,8 @@
         </p:nvSpPr>
         <p:spPr>
           <a:xfrm>
-            <a:off x="906627" y="1005840"/>
-            <a:ext cx="5029200" cy="566928"/>
+            <a:off x="548640" y="1051560"/>
+            <a:ext cx="5387187" cy="521207"/>
           </a:xfrm>
           <a:prstGeom prst="roundRect">
             <a:avLst>
@@ -13508,7 +13380,7 @@
         </p:nvSpPr>
         <p:spPr>
           <a:xfrm>
-            <a:off x="998067" y="1060704"/>
+            <a:off x="640080" y="1106424"/>
             <a:ext cx="457200" cy="457200"/>
           </a:xfrm>
           <a:prstGeom prst="roundRect">
@@ -13561,8 +13433,8 @@
         </p:nvSpPr>
         <p:spPr>
           <a:xfrm>
-            <a:off x="1592427" y="1060704"/>
-            <a:ext cx="4206240" cy="457200"/>
+            <a:off x="1234440" y="1106424"/>
+            <a:ext cx="4564227" cy="457200"/>
           </a:xfrm>
           <a:prstGeom prst="rect">
             <a:avLst/>
@@ -13601,8 +13473,8 @@
         </p:nvSpPr>
         <p:spPr>
           <a:xfrm>
-            <a:off x="906627" y="1755648"/>
-            <a:ext cx="5029200" cy="566928"/>
+            <a:off x="548640" y="1618488"/>
+            <a:ext cx="5387187" cy="521207"/>
           </a:xfrm>
           <a:prstGeom prst="roundRect">
             <a:avLst>
@@ -13648,7 +13520,7 @@
         </p:nvSpPr>
         <p:spPr>
           <a:xfrm>
-            <a:off x="998067" y="1810512"/>
+            <a:off x="640080" y="1673352"/>
             <a:ext cx="457200" cy="457200"/>
           </a:xfrm>
           <a:prstGeom prst="roundRect">
@@ -13701,8 +13573,8 @@
         </p:nvSpPr>
         <p:spPr>
           <a:xfrm>
-            <a:off x="1592427" y="1810512"/>
-            <a:ext cx="4206240" cy="457200"/>
+            <a:off x="1234440" y="1673352"/>
+            <a:ext cx="4564227" cy="457200"/>
           </a:xfrm>
           <a:prstGeom prst="rect">
             <a:avLst/>
@@ -13741,8 +13613,8 @@
         </p:nvSpPr>
         <p:spPr>
           <a:xfrm>
-            <a:off x="906627" y="2505456"/>
-            <a:ext cx="5029200" cy="566928"/>
+            <a:off x="548640" y="2185415"/>
+            <a:ext cx="5387187" cy="521207"/>
           </a:xfrm>
           <a:prstGeom prst="roundRect">
             <a:avLst>
@@ -13788,7 +13660,7 @@
         </p:nvSpPr>
         <p:spPr>
           <a:xfrm>
-            <a:off x="998067" y="2560320"/>
+            <a:off x="640080" y="2240279"/>
             <a:ext cx="457200" cy="457200"/>
           </a:xfrm>
           <a:prstGeom prst="roundRect">
@@ -13841,8 +13713,8 @@
         </p:nvSpPr>
         <p:spPr>
           <a:xfrm>
-            <a:off x="1592427" y="2560320"/>
-            <a:ext cx="4206240" cy="457200"/>
+            <a:off x="1234440" y="2240279"/>
+            <a:ext cx="4564227" cy="457200"/>
           </a:xfrm>
           <a:prstGeom prst="rect">
             <a:avLst/>
@@ -13881,8 +13753,8 @@
         </p:nvSpPr>
         <p:spPr>
           <a:xfrm>
-            <a:off x="906627" y="3255264"/>
-            <a:ext cx="5029200" cy="566928"/>
+            <a:off x="548640" y="2752344"/>
+            <a:ext cx="5387187" cy="521207"/>
           </a:xfrm>
           <a:prstGeom prst="roundRect">
             <a:avLst>
@@ -13928,7 +13800,7 @@
         </p:nvSpPr>
         <p:spPr>
           <a:xfrm>
-            <a:off x="998067" y="3310128"/>
+            <a:off x="640080" y="2807208"/>
             <a:ext cx="457200" cy="457200"/>
           </a:xfrm>
           <a:prstGeom prst="roundRect">
@@ -13981,8 +13853,8 @@
         </p:nvSpPr>
         <p:spPr>
           <a:xfrm>
-            <a:off x="1592427" y="3310128"/>
-            <a:ext cx="4206240" cy="457200"/>
+            <a:off x="1234440" y="2807208"/>
+            <a:ext cx="4564227" cy="457200"/>
           </a:xfrm>
           <a:prstGeom prst="rect">
             <a:avLst/>
@@ -14021,8 +13893,8 @@
         </p:nvSpPr>
         <p:spPr>
           <a:xfrm>
-            <a:off x="906627" y="4005072"/>
-            <a:ext cx="5029200" cy="566928"/>
+            <a:off x="548640" y="3319272"/>
+            <a:ext cx="5387187" cy="521207"/>
           </a:xfrm>
           <a:prstGeom prst="roundRect">
             <a:avLst>
@@ -14068,7 +13940,7 @@
         </p:nvSpPr>
         <p:spPr>
           <a:xfrm>
-            <a:off x="998067" y="4059936"/>
+            <a:off x="640080" y="3374136"/>
             <a:ext cx="457200" cy="457200"/>
           </a:xfrm>
           <a:prstGeom prst="roundRect">
@@ -14121,8 +13993,8 @@
         </p:nvSpPr>
         <p:spPr>
           <a:xfrm>
-            <a:off x="1592427" y="4059936"/>
-            <a:ext cx="4206240" cy="457200"/>
+            <a:off x="1234440" y="3374136"/>
+            <a:ext cx="4564227" cy="457200"/>
           </a:xfrm>
           <a:prstGeom prst="rect">
             <a:avLst/>
@@ -14161,8 +14033,8 @@
         </p:nvSpPr>
         <p:spPr>
           <a:xfrm>
-            <a:off x="906627" y="4754880"/>
-            <a:ext cx="5029200" cy="566928"/>
+            <a:off x="548640" y="3886200"/>
+            <a:ext cx="5387187" cy="521207"/>
           </a:xfrm>
           <a:prstGeom prst="roundRect">
             <a:avLst>
@@ -14208,7 +14080,7 @@
         </p:nvSpPr>
         <p:spPr>
           <a:xfrm>
-            <a:off x="998067" y="4809744"/>
+            <a:off x="640080" y="3941063"/>
             <a:ext cx="457200" cy="457200"/>
           </a:xfrm>
           <a:prstGeom prst="roundRect">
@@ -14261,8 +14133,8 @@
         </p:nvSpPr>
         <p:spPr>
           <a:xfrm>
-            <a:off x="1592427" y="4809744"/>
-            <a:ext cx="4206240" cy="457200"/>
+            <a:off x="1234440" y="3941063"/>
+            <a:ext cx="4564227" cy="457200"/>
           </a:xfrm>
           <a:prstGeom prst="rect">
             <a:avLst/>
@@ -14301,8 +14173,8 @@
         </p:nvSpPr>
         <p:spPr>
           <a:xfrm>
-            <a:off x="6255867" y="1005840"/>
-            <a:ext cx="5029200" cy="566928"/>
+            <a:off x="6255867" y="1051560"/>
+            <a:ext cx="5387187" cy="521207"/>
           </a:xfrm>
           <a:prstGeom prst="roundRect">
             <a:avLst>
@@ -14348,7 +14220,7 @@
         </p:nvSpPr>
         <p:spPr>
           <a:xfrm>
-            <a:off x="6347307" y="1060704"/>
+            <a:off x="6347307" y="1106424"/>
             <a:ext cx="457200" cy="457200"/>
           </a:xfrm>
           <a:prstGeom prst="roundRect">
@@ -14401,8 +14273,8 @@
         </p:nvSpPr>
         <p:spPr>
           <a:xfrm>
-            <a:off x="6941667" y="1060704"/>
-            <a:ext cx="4206240" cy="457200"/>
+            <a:off x="6941667" y="1106424"/>
+            <a:ext cx="4564227" cy="457200"/>
           </a:xfrm>
           <a:prstGeom prst="rect">
             <a:avLst/>
@@ -14441,8 +14313,8 @@
         </p:nvSpPr>
         <p:spPr>
           <a:xfrm>
-            <a:off x="6255867" y="1755648"/>
-            <a:ext cx="5029200" cy="566928"/>
+            <a:off x="6255867" y="1618488"/>
+            <a:ext cx="5387187" cy="521207"/>
           </a:xfrm>
           <a:prstGeom prst="roundRect">
             <a:avLst>
@@ -14488,7 +14360,7 @@
         </p:nvSpPr>
         <p:spPr>
           <a:xfrm>
-            <a:off x="6347307" y="1810512"/>
+            <a:off x="6347307" y="1673352"/>
             <a:ext cx="457200" cy="457200"/>
           </a:xfrm>
           <a:prstGeom prst="roundRect">
@@ -14541,8 +14413,8 @@
         </p:nvSpPr>
         <p:spPr>
           <a:xfrm>
-            <a:off x="6941667" y="1810512"/>
-            <a:ext cx="4206240" cy="457200"/>
+            <a:off x="6941667" y="1673352"/>
+            <a:ext cx="4564227" cy="457200"/>
           </a:xfrm>
           <a:prstGeom prst="rect">
             <a:avLst/>
@@ -14581,8 +14453,8 @@
         </p:nvSpPr>
         <p:spPr>
           <a:xfrm>
-            <a:off x="6255867" y="2505456"/>
-            <a:ext cx="5029200" cy="566928"/>
+            <a:off x="6255867" y="2185415"/>
+            <a:ext cx="5387187" cy="521207"/>
           </a:xfrm>
           <a:prstGeom prst="roundRect">
             <a:avLst>
@@ -14628,7 +14500,7 @@
         </p:nvSpPr>
         <p:spPr>
           <a:xfrm>
-            <a:off x="6347307" y="2560320"/>
+            <a:off x="6347307" y="2240279"/>
             <a:ext cx="457200" cy="457200"/>
           </a:xfrm>
           <a:prstGeom prst="roundRect">
@@ -14681,8 +14553,8 @@
         </p:nvSpPr>
         <p:spPr>
           <a:xfrm>
-            <a:off x="6941667" y="2560320"/>
-            <a:ext cx="4206240" cy="457200"/>
+            <a:off x="6941667" y="2240279"/>
+            <a:ext cx="4564227" cy="457200"/>
           </a:xfrm>
           <a:prstGeom prst="rect">
             <a:avLst/>
@@ -14721,8 +14593,8 @@
         </p:nvSpPr>
         <p:spPr>
           <a:xfrm>
-            <a:off x="6255867" y="3255264"/>
-            <a:ext cx="5029200" cy="566928"/>
+            <a:off x="6255867" y="2752344"/>
+            <a:ext cx="5387187" cy="521207"/>
           </a:xfrm>
           <a:prstGeom prst="roundRect">
             <a:avLst>
@@ -14768,7 +14640,7 @@
         </p:nvSpPr>
         <p:spPr>
           <a:xfrm>
-            <a:off x="6347307" y="3310128"/>
+            <a:off x="6347307" y="2807208"/>
             <a:ext cx="457200" cy="457200"/>
           </a:xfrm>
           <a:prstGeom prst="roundRect">
@@ -14821,8 +14693,8 @@
         </p:nvSpPr>
         <p:spPr>
           <a:xfrm>
-            <a:off x="6941667" y="3310128"/>
-            <a:ext cx="4206240" cy="457200"/>
+            <a:off x="6941667" y="2807208"/>
+            <a:ext cx="4564227" cy="457200"/>
           </a:xfrm>
           <a:prstGeom prst="rect">
             <a:avLst/>
@@ -14861,8 +14733,8 @@
         </p:nvSpPr>
         <p:spPr>
           <a:xfrm>
-            <a:off x="6255867" y="4005072"/>
-            <a:ext cx="5029200" cy="566928"/>
+            <a:off x="6255867" y="3319272"/>
+            <a:ext cx="5387187" cy="521207"/>
           </a:xfrm>
           <a:prstGeom prst="roundRect">
             <a:avLst>
@@ -14908,7 +14780,7 @@
         </p:nvSpPr>
         <p:spPr>
           <a:xfrm>
-            <a:off x="6347307" y="4059936"/>
+            <a:off x="6347307" y="3374136"/>
             <a:ext cx="457200" cy="457200"/>
           </a:xfrm>
           <a:prstGeom prst="roundRect">
@@ -14961,8 +14833,8 @@
         </p:nvSpPr>
         <p:spPr>
           <a:xfrm>
-            <a:off x="6941667" y="4059936"/>
-            <a:ext cx="4206240" cy="457200"/>
+            <a:off x="6941667" y="3374136"/>
+            <a:ext cx="4564227" cy="457200"/>
           </a:xfrm>
           <a:prstGeom prst="rect">
             <a:avLst/>
@@ -15001,7 +14873,7 @@
         </p:nvSpPr>
         <p:spPr>
           <a:xfrm>
-            <a:off x="0" y="6629400"/>
+            <a:off x="0" y="6400800"/>
             <a:ext cx="12191695" cy="27432"/>
           </a:xfrm>
           <a:prstGeom prst="rect">
@@ -15044,7 +14916,7 @@
         </p:nvSpPr>
         <p:spPr>
           <a:xfrm>
-            <a:off x="548640" y="6473952"/>
+            <a:off x="548640" y="6455664"/>
             <a:ext cx="3657600" cy="201168"/>
           </a:xfrm>
           <a:prstGeom prst="rect">
@@ -15084,7 +14956,7 @@
         </p:nvSpPr>
         <p:spPr>
           <a:xfrm>
-            <a:off x="11277295" y="6473952"/>
+            <a:off x="11277295" y="6455664"/>
             <a:ext cx="731520" cy="201168"/>
           </a:xfrm>
           <a:prstGeom prst="rect">
@@ -15194,7 +15066,7 @@
         <p:spPr>
           <a:xfrm>
             <a:off x="0" y="32004"/>
-            <a:ext cx="12191695" cy="822960"/>
+            <a:ext cx="12191695" cy="822959"/>
           </a:xfrm>
           <a:prstGeom prst="rect">
             <a:avLst/>
@@ -15237,7 +15109,7 @@
         <p:spPr>
           <a:xfrm>
             <a:off x="548640" y="109728"/>
-            <a:ext cx="64008" cy="548640"/>
+            <a:ext cx="64008" cy="502920"/>
           </a:xfrm>
           <a:prstGeom prst="rect">
             <a:avLst/>
@@ -15320,7 +15192,7 @@
         <p:spPr>
           <a:xfrm>
             <a:off x="749808" y="576072"/>
-            <a:ext cx="10637215" cy="274320"/>
+            <a:ext cx="10637215" cy="256032"/>
           </a:xfrm>
           <a:prstGeom prst="rect">
             <a:avLst/>
@@ -15346,7 +15218,7 @@
               </a:defRPr>
             </a:pPr>
             <a:r>
-              <a:t>Pasal 10 • Jenis Reklame Lainnya (lanjutan)</a:t>
+              <a:t>Pasal 10</a:t>
             </a:r>
           </a:p>
         </p:txBody>
@@ -15449,7 +15321,7 @@
         </p:nvSpPr>
         <p:spPr>
           <a:xfrm>
-            <a:off x="685800" y="1188720"/>
+            <a:off x="685800" y="1188719"/>
             <a:ext cx="384048" cy="384048"/>
           </a:xfrm>
           <a:prstGeom prst="ellipse">
@@ -15492,7 +15364,7 @@
         </p:nvSpPr>
         <p:spPr>
           <a:xfrm>
-            <a:off x="685800" y="1188720"/>
+            <a:off x="685800" y="1188719"/>
             <a:ext cx="384048" cy="384048"/>
           </a:xfrm>
           <a:prstGeom prst="rect">
@@ -15532,7 +15404,7 @@
         </p:nvSpPr>
         <p:spPr>
           <a:xfrm>
-            <a:off x="685800" y="1691640"/>
+            <a:off x="685800" y="1691639"/>
             <a:ext cx="2293543" cy="274320"/>
           </a:xfrm>
           <a:prstGeom prst="rect">
@@ -15573,7 +15445,7 @@
         <p:spPr>
           <a:xfrm>
             <a:off x="685800" y="2039112"/>
-            <a:ext cx="2293543" cy="320040"/>
+            <a:ext cx="2293543" cy="274320"/>
           </a:xfrm>
           <a:prstGeom prst="rect">
             <a:avLst/>
@@ -15612,8 +15484,8 @@
         </p:nvSpPr>
         <p:spPr>
           <a:xfrm>
-            <a:off x="685800" y="2377440"/>
-            <a:ext cx="2293543" cy="320040"/>
+            <a:off x="685800" y="2331720"/>
+            <a:ext cx="2293543" cy="274320"/>
           </a:xfrm>
           <a:prstGeom prst="rect">
             <a:avLst/>
@@ -15742,7 +15614,7 @@
         </p:nvSpPr>
         <p:spPr>
           <a:xfrm>
-            <a:off x="3527983" y="1188720"/>
+            <a:off x="3527983" y="1188719"/>
             <a:ext cx="384048" cy="384048"/>
           </a:xfrm>
           <a:prstGeom prst="ellipse">
@@ -15785,7 +15657,7 @@
         </p:nvSpPr>
         <p:spPr>
           <a:xfrm>
-            <a:off x="3527983" y="1188720"/>
+            <a:off x="3527983" y="1188719"/>
             <a:ext cx="384048" cy="384048"/>
           </a:xfrm>
           <a:prstGeom prst="rect">
@@ -15825,7 +15697,7 @@
         </p:nvSpPr>
         <p:spPr>
           <a:xfrm>
-            <a:off x="3527983" y="1691640"/>
+            <a:off x="3527983" y="1691639"/>
             <a:ext cx="2293543" cy="274320"/>
           </a:xfrm>
           <a:prstGeom prst="rect">
@@ -15866,7 +15738,7 @@
         <p:spPr>
           <a:xfrm>
             <a:off x="3527983" y="2039112"/>
-            <a:ext cx="2293543" cy="320040"/>
+            <a:ext cx="2293543" cy="274320"/>
           </a:xfrm>
           <a:prstGeom prst="rect">
             <a:avLst/>
@@ -15905,8 +15777,8 @@
         </p:nvSpPr>
         <p:spPr>
           <a:xfrm>
-            <a:off x="3527983" y="2377440"/>
-            <a:ext cx="2293543" cy="320040"/>
+            <a:off x="3527983" y="2331720"/>
+            <a:ext cx="2293543" cy="274320"/>
           </a:xfrm>
           <a:prstGeom prst="rect">
             <a:avLst/>
@@ -16035,7 +15907,7 @@
         </p:nvSpPr>
         <p:spPr>
           <a:xfrm>
-            <a:off x="6370167" y="1188720"/>
+            <a:off x="6370167" y="1188719"/>
             <a:ext cx="384048" cy="384048"/>
           </a:xfrm>
           <a:prstGeom prst="ellipse">
@@ -16078,7 +15950,7 @@
         </p:nvSpPr>
         <p:spPr>
           <a:xfrm>
-            <a:off x="6370167" y="1188720"/>
+            <a:off x="6370167" y="1188719"/>
             <a:ext cx="384048" cy="384048"/>
           </a:xfrm>
           <a:prstGeom prst="rect">
@@ -16118,7 +15990,7 @@
         </p:nvSpPr>
         <p:spPr>
           <a:xfrm>
-            <a:off x="6370167" y="1691640"/>
+            <a:off x="6370167" y="1691639"/>
             <a:ext cx="2293543" cy="274320"/>
           </a:xfrm>
           <a:prstGeom prst="rect">
@@ -16159,7 +16031,7 @@
         <p:spPr>
           <a:xfrm>
             <a:off x="6370167" y="2039112"/>
-            <a:ext cx="2293543" cy="320040"/>
+            <a:ext cx="2293543" cy="274320"/>
           </a:xfrm>
           <a:prstGeom prst="rect">
             <a:avLst/>
@@ -16288,7 +16160,7 @@
         </p:nvSpPr>
         <p:spPr>
           <a:xfrm>
-            <a:off x="9212351" y="1188720"/>
+            <a:off x="9212351" y="1188719"/>
             <a:ext cx="384048" cy="384048"/>
           </a:xfrm>
           <a:prstGeom prst="ellipse">
@@ -16331,7 +16203,7 @@
         </p:nvSpPr>
         <p:spPr>
           <a:xfrm>
-            <a:off x="9212351" y="1188720"/>
+            <a:off x="9212351" y="1188719"/>
             <a:ext cx="384048" cy="384048"/>
           </a:xfrm>
           <a:prstGeom prst="rect">
@@ -16371,7 +16243,7 @@
         </p:nvSpPr>
         <p:spPr>
           <a:xfrm>
-            <a:off x="9212351" y="1691640"/>
+            <a:off x="9212351" y="1691639"/>
             <a:ext cx="2293543" cy="274320"/>
           </a:xfrm>
           <a:prstGeom prst="rect">
@@ -16412,7 +16284,7 @@
         <p:spPr>
           <a:xfrm>
             <a:off x="9212351" y="2039112"/>
-            <a:ext cx="2293543" cy="320040"/>
+            <a:ext cx="2293543" cy="274320"/>
           </a:xfrm>
           <a:prstGeom prst="rect">
             <a:avLst/>
@@ -16451,7 +16323,7 @@
         </p:nvSpPr>
         <p:spPr>
           <a:xfrm>
-            <a:off x="0" y="6629400"/>
+            <a:off x="0" y="6400800"/>
             <a:ext cx="12191695" cy="27432"/>
           </a:xfrm>
           <a:prstGeom prst="rect">
@@ -16494,7 +16366,7 @@
         </p:nvSpPr>
         <p:spPr>
           <a:xfrm>
-            <a:off x="548640" y="6473952"/>
+            <a:off x="548640" y="6455664"/>
             <a:ext cx="3657600" cy="201168"/>
           </a:xfrm>
           <a:prstGeom prst="rect">
@@ -16534,7 +16406,7 @@
         </p:nvSpPr>
         <p:spPr>
           <a:xfrm>
-            <a:off x="11277295" y="6473952"/>
+            <a:off x="11277295" y="6455664"/>
             <a:ext cx="731520" cy="201168"/>
           </a:xfrm>
           <a:prstGeom prst="rect">
@@ -16736,7 +16608,7 @@
             <a:avLst/>
           </a:prstGeom>
           <a:solidFill>
-            <a:srgbClr val="0E203E"/>
+            <a:srgbClr val="12294A"/>
           </a:solidFill>
           <a:ln>
             <a:noFill/>
@@ -16971,46 +16843,6 @@
           <a:lstStyle/>
           <a:p>
             <a:pPr algn="ctr"/>
-          </a:p>
-        </p:txBody>
-      </p:sp>
-      <p:sp>
-        <p:nvSpPr>
-          <p:cNvPr id="11" name="TextBox 10"/>
-          <p:cNvSpPr txBox="1"/>
-          <p:nvPr/>
-        </p:nvSpPr>
-        <p:spPr>
-          <a:xfrm>
-            <a:off x="11277295" y="6473952"/>
-            <a:ext cx="731520" cy="201168"/>
-          </a:xfrm>
-          <a:prstGeom prst="rect">
-            <a:avLst/>
-          </a:prstGeom>
-          <a:noFill/>
-        </p:spPr>
-        <p:txBody>
-          <a:bodyPr wrap="square"/>
-          <a:lstStyle/>
-          <a:p>
-            <a:pPr algn="r">
-              <a:spcBef>
-                <a:spcPts val="0"/>
-              </a:spcBef>
-              <a:spcAft>
-                <a:spcPts val="0"/>
-              </a:spcAft>
-              <a:defRPr sz="800" b="0">
-                <a:solidFill>
-                  <a:srgbClr val="9CA3AF"/>
-                </a:solidFill>
-                <a:latin typeface="Calibri"/>
-              </a:defRPr>
-            </a:pPr>
-            <a:r>
-              <a:t>20</a:t>
-            </a:r>
           </a:p>
         </p:txBody>
       </p:sp>
@@ -17092,7 +16924,7 @@
         <p:spPr>
           <a:xfrm>
             <a:off x="0" y="32004"/>
-            <a:ext cx="12191695" cy="822960"/>
+            <a:ext cx="12191695" cy="822959"/>
           </a:xfrm>
           <a:prstGeom prst="rect">
             <a:avLst/>
@@ -17135,7 +16967,7 @@
         <p:spPr>
           <a:xfrm>
             <a:off x="548640" y="109728"/>
-            <a:ext cx="64008" cy="548640"/>
+            <a:ext cx="64008" cy="502920"/>
           </a:xfrm>
           <a:prstGeom prst="rect">
             <a:avLst/>
@@ -17218,7 +17050,7 @@
         <p:spPr>
           <a:xfrm>
             <a:off x="749808" y="576072"/>
-            <a:ext cx="10637215" cy="274320"/>
+            <a:ext cx="10637215" cy="256032"/>
           </a:xfrm>
           <a:prstGeom prst="rect">
             <a:avLst/>
@@ -17244,7 +17076,7 @@
               </a:defRPr>
             </a:pPr>
             <a:r>
-              <a:t>Pasal 11–14 • Alur Penetapan → Pembayaran</a:t>
+              <a:t>Pasal 11–14</a:t>
             </a:r>
           </a:p>
         </p:txBody>
@@ -17257,8 +17089,8 @@
         </p:nvSpPr>
         <p:spPr>
           <a:xfrm>
-            <a:off x="548640" y="1188720"/>
-            <a:ext cx="2533573" cy="1828800"/>
+            <a:off x="548640" y="1188719"/>
+            <a:ext cx="2567863" cy="1828800"/>
           </a:xfrm>
           <a:prstGeom prst="roundRect">
             <a:avLst>
@@ -17304,8 +17136,8 @@
         </p:nvSpPr>
         <p:spPr>
           <a:xfrm>
-            <a:off x="548640" y="1188720"/>
-            <a:ext cx="2533573" cy="45720"/>
+            <a:off x="548640" y="1188719"/>
+            <a:ext cx="2567863" cy="45720"/>
           </a:xfrm>
           <a:prstGeom prst="rect">
             <a:avLst/>
@@ -17347,7 +17179,7 @@
         </p:nvSpPr>
         <p:spPr>
           <a:xfrm>
-            <a:off x="1586826" y="1325880"/>
+            <a:off x="1603971" y="1325879"/>
             <a:ext cx="457200" cy="457200"/>
           </a:xfrm>
           <a:prstGeom prst="ellipse">
@@ -17390,7 +17222,7 @@
         </p:nvSpPr>
         <p:spPr>
           <a:xfrm>
-            <a:off x="1586826" y="1325880"/>
+            <a:off x="1603971" y="1325879"/>
             <a:ext cx="457200" cy="457200"/>
           </a:xfrm>
           <a:prstGeom prst="rect">
@@ -17430,8 +17262,8 @@
         </p:nvSpPr>
         <p:spPr>
           <a:xfrm>
-            <a:off x="640080" y="1874520"/>
-            <a:ext cx="2350693" cy="320040"/>
+            <a:off x="640080" y="1874519"/>
+            <a:ext cx="2384983" cy="320040"/>
           </a:xfrm>
           <a:prstGeom prst="rect">
             <a:avLst/>
@@ -17471,7 +17303,7 @@
         <p:spPr>
           <a:xfrm>
             <a:off x="640080" y="2194560"/>
-            <a:ext cx="2350693" cy="640080"/>
+            <a:ext cx="2384983" cy="640080"/>
           </a:xfrm>
           <a:prstGeom prst="rect">
             <a:avLst/>
@@ -17514,8 +17346,8 @@
         </p:nvSpPr>
         <p:spPr>
           <a:xfrm>
-            <a:off x="3082213" y="1828800"/>
-            <a:ext cx="320040" cy="457200"/>
+            <a:off x="3116503" y="1828799"/>
+            <a:ext cx="274320" cy="457200"/>
           </a:xfrm>
           <a:prstGeom prst="rect">
             <a:avLst/>
@@ -17554,8 +17386,8 @@
         </p:nvSpPr>
         <p:spPr>
           <a:xfrm>
-            <a:off x="3402253" y="1188720"/>
-            <a:ext cx="2533573" cy="1828800"/>
+            <a:off x="3390823" y="1188719"/>
+            <a:ext cx="2567863" cy="1828800"/>
           </a:xfrm>
           <a:prstGeom prst="roundRect">
             <a:avLst>
@@ -17601,8 +17433,8 @@
         </p:nvSpPr>
         <p:spPr>
           <a:xfrm>
-            <a:off x="3402253" y="1188720"/>
-            <a:ext cx="2533573" cy="45720"/>
+            <a:off x="3390823" y="1188719"/>
+            <a:ext cx="2567863" cy="45720"/>
           </a:xfrm>
           <a:prstGeom prst="rect">
             <a:avLst/>
@@ -17644,7 +17476,7 @@
         </p:nvSpPr>
         <p:spPr>
           <a:xfrm>
-            <a:off x="4440440" y="1325880"/>
+            <a:off x="4446155" y="1325879"/>
             <a:ext cx="457200" cy="457200"/>
           </a:xfrm>
           <a:prstGeom prst="ellipse">
@@ -17687,7 +17519,7 @@
         </p:nvSpPr>
         <p:spPr>
           <a:xfrm>
-            <a:off x="4440440" y="1325880"/>
+            <a:off x="4446155" y="1325879"/>
             <a:ext cx="457200" cy="457200"/>
           </a:xfrm>
           <a:prstGeom prst="rect">
@@ -17727,8 +17559,8 @@
         </p:nvSpPr>
         <p:spPr>
           <a:xfrm>
-            <a:off x="3493693" y="1874520"/>
-            <a:ext cx="2350693" cy="320040"/>
+            <a:off x="3482263" y="1874519"/>
+            <a:ext cx="2384983" cy="320040"/>
           </a:xfrm>
           <a:prstGeom prst="rect">
             <a:avLst/>
@@ -17767,8 +17599,8 @@
         </p:nvSpPr>
         <p:spPr>
           <a:xfrm>
-            <a:off x="3493693" y="2194560"/>
-            <a:ext cx="2350693" cy="640080"/>
+            <a:off x="3482263" y="2194560"/>
+            <a:ext cx="2384983" cy="640080"/>
           </a:xfrm>
           <a:prstGeom prst="rect">
             <a:avLst/>
@@ -17811,8 +17643,8 @@
         </p:nvSpPr>
         <p:spPr>
           <a:xfrm>
-            <a:off x="5935827" y="1828800"/>
-            <a:ext cx="320040" cy="457200"/>
+            <a:off x="5958687" y="1828799"/>
+            <a:ext cx="274320" cy="457200"/>
           </a:xfrm>
           <a:prstGeom prst="rect">
             <a:avLst/>
@@ -17851,8 +17683,8 @@
         </p:nvSpPr>
         <p:spPr>
           <a:xfrm>
-            <a:off x="6255867" y="1188720"/>
-            <a:ext cx="2533573" cy="1828800"/>
+            <a:off x="6233007" y="1188719"/>
+            <a:ext cx="2567863" cy="1828800"/>
           </a:xfrm>
           <a:prstGeom prst="roundRect">
             <a:avLst>
@@ -17898,8 +17730,8 @@
         </p:nvSpPr>
         <p:spPr>
           <a:xfrm>
-            <a:off x="6255867" y="1188720"/>
-            <a:ext cx="2533573" cy="45720"/>
+            <a:off x="6233007" y="1188719"/>
+            <a:ext cx="2567863" cy="45720"/>
           </a:xfrm>
           <a:prstGeom prst="rect">
             <a:avLst/>
@@ -17941,7 +17773,7 @@
         </p:nvSpPr>
         <p:spPr>
           <a:xfrm>
-            <a:off x="7294054" y="1325880"/>
+            <a:off x="7288339" y="1325879"/>
             <a:ext cx="457200" cy="457200"/>
           </a:xfrm>
           <a:prstGeom prst="ellipse">
@@ -17984,7 +17816,7 @@
         </p:nvSpPr>
         <p:spPr>
           <a:xfrm>
-            <a:off x="7294054" y="1325880"/>
+            <a:off x="7288339" y="1325879"/>
             <a:ext cx="457200" cy="457200"/>
           </a:xfrm>
           <a:prstGeom prst="rect">
@@ -18024,8 +17856,8 @@
         </p:nvSpPr>
         <p:spPr>
           <a:xfrm>
-            <a:off x="6347307" y="1874520"/>
-            <a:ext cx="2350693" cy="320040"/>
+            <a:off x="6324447" y="1874519"/>
+            <a:ext cx="2384983" cy="320040"/>
           </a:xfrm>
           <a:prstGeom prst="rect">
             <a:avLst/>
@@ -18064,8 +17896,8 @@
         </p:nvSpPr>
         <p:spPr>
           <a:xfrm>
-            <a:off x="6347307" y="2194560"/>
-            <a:ext cx="2350693" cy="640080"/>
+            <a:off x="6324447" y="2194560"/>
+            <a:ext cx="2384983" cy="640080"/>
           </a:xfrm>
           <a:prstGeom prst="rect">
             <a:avLst/>
@@ -18108,8 +17940,8 @@
         </p:nvSpPr>
         <p:spPr>
           <a:xfrm>
-            <a:off x="8789441" y="1828800"/>
-            <a:ext cx="320040" cy="457200"/>
+            <a:off x="8800871" y="1828799"/>
+            <a:ext cx="274320" cy="457200"/>
           </a:xfrm>
           <a:prstGeom prst="rect">
             <a:avLst/>
@@ -18148,8 +17980,8 @@
         </p:nvSpPr>
         <p:spPr>
           <a:xfrm>
-            <a:off x="9109481" y="1188720"/>
-            <a:ext cx="2533573" cy="1828800"/>
+            <a:off x="9075191" y="1188719"/>
+            <a:ext cx="2567863" cy="1828800"/>
           </a:xfrm>
           <a:prstGeom prst="roundRect">
             <a:avLst>
@@ -18195,8 +18027,8 @@
         </p:nvSpPr>
         <p:spPr>
           <a:xfrm>
-            <a:off x="9109481" y="1188720"/>
-            <a:ext cx="2533573" cy="45720"/>
+            <a:off x="9075191" y="1188719"/>
+            <a:ext cx="2567863" cy="45720"/>
           </a:xfrm>
           <a:prstGeom prst="rect">
             <a:avLst/>
@@ -18238,7 +18070,7 @@
         </p:nvSpPr>
         <p:spPr>
           <a:xfrm>
-            <a:off x="10147668" y="1325880"/>
+            <a:off x="10130523" y="1325879"/>
             <a:ext cx="457200" cy="457200"/>
           </a:xfrm>
           <a:prstGeom prst="ellipse">
@@ -18281,7 +18113,7 @@
         </p:nvSpPr>
         <p:spPr>
           <a:xfrm>
-            <a:off x="10147668" y="1325880"/>
+            <a:off x="10130523" y="1325879"/>
             <a:ext cx="457200" cy="457200"/>
           </a:xfrm>
           <a:prstGeom prst="rect">
@@ -18321,8 +18153,8 @@
         </p:nvSpPr>
         <p:spPr>
           <a:xfrm>
-            <a:off x="9200921" y="1874520"/>
-            <a:ext cx="2350693" cy="320040"/>
+            <a:off x="9166631" y="1874519"/>
+            <a:ext cx="2384983" cy="320040"/>
           </a:xfrm>
           <a:prstGeom prst="rect">
             <a:avLst/>
@@ -18361,8 +18193,8 @@
         </p:nvSpPr>
         <p:spPr>
           <a:xfrm>
-            <a:off x="9200921" y="2194560"/>
-            <a:ext cx="2350693" cy="640080"/>
+            <a:off x="9166631" y="2194560"/>
+            <a:ext cx="2384983" cy="640080"/>
           </a:xfrm>
           <a:prstGeom prst="rect">
             <a:avLst/>
@@ -18405,8 +18237,8 @@
         </p:nvSpPr>
         <p:spPr>
           <a:xfrm>
-            <a:off x="548640" y="3383280"/>
-            <a:ext cx="11094415" cy="2743200"/>
+            <a:off x="548640" y="3383279"/>
+            <a:ext cx="11094415" cy="2560320"/>
           </a:xfrm>
           <a:prstGeom prst="roundRect">
             <a:avLst>
@@ -18452,8 +18284,8 @@
         </p:nvSpPr>
         <p:spPr>
           <a:xfrm>
-            <a:off x="777240" y="3520440"/>
-            <a:ext cx="10637215" cy="2377440"/>
+            <a:off x="777240" y="3520439"/>
+            <a:ext cx="10637215" cy="2286000"/>
           </a:xfrm>
           <a:prstGeom prst="rect">
             <a:avLst/>
@@ -18504,7 +18336,7 @@
         </p:nvSpPr>
         <p:spPr>
           <a:xfrm>
-            <a:off x="0" y="6629400"/>
+            <a:off x="0" y="6400800"/>
             <a:ext cx="12191695" cy="27432"/>
           </a:xfrm>
           <a:prstGeom prst="rect">
@@ -18547,7 +18379,7 @@
         </p:nvSpPr>
         <p:spPr>
           <a:xfrm>
-            <a:off x="548640" y="6473952"/>
+            <a:off x="548640" y="6455664"/>
             <a:ext cx="3657600" cy="201168"/>
           </a:xfrm>
           <a:prstGeom prst="rect">
@@ -18587,7 +18419,7 @@
         </p:nvSpPr>
         <p:spPr>
           <a:xfrm>
-            <a:off x="11277295" y="6473952"/>
+            <a:off x="11277295" y="6455664"/>
             <a:ext cx="731520" cy="201168"/>
           </a:xfrm>
           <a:prstGeom prst="rect">
@@ -18789,7 +18621,7 @@
             <a:avLst/>
           </a:prstGeom>
           <a:solidFill>
-            <a:srgbClr val="0E203E"/>
+            <a:srgbClr val="12294A"/>
           </a:solidFill>
           <a:ln>
             <a:noFill/>
@@ -19024,46 +18856,6 @@
           <a:lstStyle/>
           <a:p>
             <a:pPr algn="ctr"/>
-          </a:p>
-        </p:txBody>
-      </p:sp>
-      <p:sp>
-        <p:nvSpPr>
-          <p:cNvPr id="11" name="TextBox 10"/>
-          <p:cNvSpPr txBox="1"/>
-          <p:nvPr/>
-        </p:nvSpPr>
-        <p:spPr>
-          <a:xfrm>
-            <a:off x="11277295" y="6473952"/>
-            <a:ext cx="731520" cy="201168"/>
-          </a:xfrm>
-          <a:prstGeom prst="rect">
-            <a:avLst/>
-          </a:prstGeom>
-          <a:noFill/>
-        </p:spPr>
-        <p:txBody>
-          <a:bodyPr wrap="square"/>
-          <a:lstStyle/>
-          <a:p>
-            <a:pPr algn="r">
-              <a:spcBef>
-                <a:spcPts val="0"/>
-              </a:spcBef>
-              <a:spcAft>
-                <a:spcPts val="0"/>
-              </a:spcAft>
-              <a:defRPr sz="800" b="0">
-                <a:solidFill>
-                  <a:srgbClr val="9CA3AF"/>
-                </a:solidFill>
-                <a:latin typeface="Calibri"/>
-              </a:defRPr>
-            </a:pPr>
-            <a:r>
-              <a:t>22</a:t>
-            </a:r>
           </a:p>
         </p:txBody>
       </p:sp>
@@ -19145,7 +18937,7 @@
         <p:spPr>
           <a:xfrm>
             <a:off x="0" y="32004"/>
-            <a:ext cx="12191695" cy="822960"/>
+            <a:ext cx="12191695" cy="822959"/>
           </a:xfrm>
           <a:prstGeom prst="rect">
             <a:avLst/>
@@ -19188,7 +18980,7 @@
         <p:spPr>
           <a:xfrm>
             <a:off x="548640" y="109728"/>
-            <a:ext cx="64008" cy="548640"/>
+            <a:ext cx="64008" cy="502920"/>
           </a:xfrm>
           <a:prstGeom prst="rect">
             <a:avLst/>
@@ -19271,7 +19063,7 @@
         <p:spPr>
           <a:xfrm>
             <a:off x="749808" y="576072"/>
-            <a:ext cx="10637215" cy="274320"/>
+            <a:ext cx="10637215" cy="256032"/>
           </a:xfrm>
           <a:prstGeom prst="rect">
             <a:avLst/>
@@ -19297,7 +19089,7 @@
               </a:defRPr>
             </a:pPr>
             <a:r>
-              <a:t>Pasal 15–20 • Pembetulan</a:t>
+              <a:t>Pasal 15–20</a:t>
             </a:r>
           </a:p>
         </p:txBody>
@@ -19311,7 +19103,7 @@
         <p:spPr>
           <a:xfrm>
             <a:off x="548640" y="1051560"/>
-            <a:ext cx="5410047" cy="5166360"/>
+            <a:ext cx="5410047" cy="5349240"/>
           </a:xfrm>
           <a:prstGeom prst="roundRect">
             <a:avLst>
@@ -19358,7 +19150,7 @@
         <p:spPr>
           <a:xfrm>
             <a:off x="548640" y="1051560"/>
-            <a:ext cx="45720" cy="5166360"/>
+            <a:ext cx="45720" cy="5349240"/>
           </a:xfrm>
           <a:prstGeom prst="rect">
             <a:avLst/>
@@ -19400,7 +19192,7 @@
         </p:nvSpPr>
         <p:spPr>
           <a:xfrm>
-            <a:off x="731520" y="1188720"/>
+            <a:off x="731520" y="1188719"/>
             <a:ext cx="5090007" cy="274320"/>
           </a:xfrm>
           <a:prstGeom prst="rect">
@@ -19441,7 +19233,7 @@
         <p:spPr>
           <a:xfrm>
             <a:off x="731520" y="1481328"/>
-            <a:ext cx="5090007" cy="201168"/>
+            <a:ext cx="5090007" cy="228600"/>
           </a:xfrm>
           <a:prstGeom prst="rect">
             <a:avLst/>
@@ -19480,8 +19272,8 @@
         </p:nvSpPr>
         <p:spPr>
           <a:xfrm>
-            <a:off x="731520" y="1700784"/>
-            <a:ext cx="5090007" cy="201168"/>
+            <a:off x="731520" y="1719072"/>
+            <a:ext cx="5090007" cy="228600"/>
           </a:xfrm>
           <a:prstGeom prst="rect">
             <a:avLst/>
@@ -19520,8 +19312,8 @@
         </p:nvSpPr>
         <p:spPr>
           <a:xfrm>
-            <a:off x="731520" y="1920240"/>
-            <a:ext cx="5090007" cy="201168"/>
+            <a:off x="731520" y="1956815"/>
+            <a:ext cx="5090007" cy="228600"/>
           </a:xfrm>
           <a:prstGeom prst="rect">
             <a:avLst/>
@@ -19560,8 +19352,8 @@
         </p:nvSpPr>
         <p:spPr>
           <a:xfrm>
-            <a:off x="731520" y="2139696"/>
-            <a:ext cx="5090007" cy="201168"/>
+            <a:off x="731520" y="2194559"/>
+            <a:ext cx="5090007" cy="228600"/>
           </a:xfrm>
           <a:prstGeom prst="rect">
             <a:avLst/>
@@ -19600,8 +19392,8 @@
         </p:nvSpPr>
         <p:spPr>
           <a:xfrm>
-            <a:off x="731520" y="2359152"/>
-            <a:ext cx="5090007" cy="201168"/>
+            <a:off x="731520" y="2432303"/>
+            <a:ext cx="5090007" cy="228600"/>
           </a:xfrm>
           <a:prstGeom prst="rect">
             <a:avLst/>
@@ -19640,8 +19432,8 @@
         </p:nvSpPr>
         <p:spPr>
           <a:xfrm>
-            <a:off x="731520" y="2578608"/>
-            <a:ext cx="5090007" cy="201168"/>
+            <a:off x="731520" y="2670047"/>
+            <a:ext cx="5090007" cy="228600"/>
           </a:xfrm>
           <a:prstGeom prst="rect">
             <a:avLst/>
@@ -19680,8 +19472,8 @@
         </p:nvSpPr>
         <p:spPr>
           <a:xfrm>
-            <a:off x="731520" y="2798064"/>
-            <a:ext cx="5090007" cy="201168"/>
+            <a:off x="731520" y="2907791"/>
+            <a:ext cx="5090007" cy="228600"/>
           </a:xfrm>
           <a:prstGeom prst="rect">
             <a:avLst/>
@@ -19720,8 +19512,8 @@
         </p:nvSpPr>
         <p:spPr>
           <a:xfrm>
-            <a:off x="731520" y="3017520"/>
-            <a:ext cx="5090007" cy="201168"/>
+            <a:off x="731520" y="3145535"/>
+            <a:ext cx="5090007" cy="228600"/>
           </a:xfrm>
           <a:prstGeom prst="rect">
             <a:avLst/>
@@ -19760,8 +19552,8 @@
         </p:nvSpPr>
         <p:spPr>
           <a:xfrm>
-            <a:off x="731520" y="3236976"/>
-            <a:ext cx="5090007" cy="201168"/>
+            <a:off x="731520" y="3383279"/>
+            <a:ext cx="5090007" cy="228600"/>
           </a:xfrm>
           <a:prstGeom prst="rect">
             <a:avLst/>
@@ -19801,7 +19593,7 @@
         <p:spPr>
           <a:xfrm>
             <a:off x="6233007" y="1051560"/>
-            <a:ext cx="5410047" cy="5166360"/>
+            <a:ext cx="5410047" cy="5349240"/>
           </a:xfrm>
           <a:prstGeom prst="roundRect">
             <a:avLst>
@@ -19848,7 +19640,7 @@
         <p:spPr>
           <a:xfrm>
             <a:off x="6233007" y="1051560"/>
-            <a:ext cx="45720" cy="5166360"/>
+            <a:ext cx="45720" cy="5349240"/>
           </a:xfrm>
           <a:prstGeom prst="rect">
             <a:avLst/>
@@ -19890,7 +19682,7 @@
         </p:nvSpPr>
         <p:spPr>
           <a:xfrm>
-            <a:off x="6415887" y="1188720"/>
+            <a:off x="6415887" y="1188719"/>
             <a:ext cx="5090007" cy="274320"/>
           </a:xfrm>
           <a:prstGeom prst="rect">
@@ -19931,7 +19723,7 @@
         <p:spPr>
           <a:xfrm>
             <a:off x="6415887" y="1481328"/>
-            <a:ext cx="5090007" cy="201168"/>
+            <a:ext cx="5090007" cy="228600"/>
           </a:xfrm>
           <a:prstGeom prst="rect">
             <a:avLst/>
@@ -19970,8 +19762,8 @@
         </p:nvSpPr>
         <p:spPr>
           <a:xfrm>
-            <a:off x="6415887" y="1700784"/>
-            <a:ext cx="5090007" cy="201168"/>
+            <a:off x="6415887" y="1719072"/>
+            <a:ext cx="5090007" cy="228600"/>
           </a:xfrm>
           <a:prstGeom prst="rect">
             <a:avLst/>
@@ -20010,8 +19802,8 @@
         </p:nvSpPr>
         <p:spPr>
           <a:xfrm>
-            <a:off x="6415887" y="1920240"/>
-            <a:ext cx="5090007" cy="201168"/>
+            <a:off x="6415887" y="1956815"/>
+            <a:ext cx="5090007" cy="228600"/>
           </a:xfrm>
           <a:prstGeom prst="rect">
             <a:avLst/>
@@ -20050,8 +19842,8 @@
         </p:nvSpPr>
         <p:spPr>
           <a:xfrm>
-            <a:off x="6415887" y="2139696"/>
-            <a:ext cx="5090007" cy="201168"/>
+            <a:off x="6415887" y="2194559"/>
+            <a:ext cx="5090007" cy="228600"/>
           </a:xfrm>
           <a:prstGeom prst="rect">
             <a:avLst/>
@@ -20090,8 +19882,8 @@
         </p:nvSpPr>
         <p:spPr>
           <a:xfrm>
-            <a:off x="6415887" y="2359152"/>
-            <a:ext cx="5090007" cy="201168"/>
+            <a:off x="6415887" y="2432303"/>
+            <a:ext cx="5090007" cy="228600"/>
           </a:xfrm>
           <a:prstGeom prst="rect">
             <a:avLst/>
@@ -20130,8 +19922,8 @@
         </p:nvSpPr>
         <p:spPr>
           <a:xfrm>
-            <a:off x="6415887" y="2578608"/>
-            <a:ext cx="5090007" cy="201168"/>
+            <a:off x="6415887" y="2670047"/>
+            <a:ext cx="5090007" cy="228600"/>
           </a:xfrm>
           <a:prstGeom prst="rect">
             <a:avLst/>
@@ -20170,7 +19962,7 @@
         </p:nvSpPr>
         <p:spPr>
           <a:xfrm>
-            <a:off x="0" y="6629400"/>
+            <a:off x="0" y="6400800"/>
             <a:ext cx="12191695" cy="27432"/>
           </a:xfrm>
           <a:prstGeom prst="rect">
@@ -20213,7 +20005,7 @@
         </p:nvSpPr>
         <p:spPr>
           <a:xfrm>
-            <a:off x="548640" y="6473952"/>
+            <a:off x="548640" y="6455664"/>
             <a:ext cx="3657600" cy="201168"/>
           </a:xfrm>
           <a:prstGeom prst="rect">
@@ -20253,7 +20045,7 @@
         </p:nvSpPr>
         <p:spPr>
           <a:xfrm>
-            <a:off x="11277295" y="6473952"/>
+            <a:off x="11277295" y="6455664"/>
             <a:ext cx="731520" cy="201168"/>
           </a:xfrm>
           <a:prstGeom prst="rect">
@@ -20363,7 +20155,7 @@
         <p:spPr>
           <a:xfrm>
             <a:off x="0" y="32004"/>
-            <a:ext cx="12191695" cy="822960"/>
+            <a:ext cx="12191695" cy="822959"/>
           </a:xfrm>
           <a:prstGeom prst="rect">
             <a:avLst/>
@@ -20406,7 +20198,7 @@
         <p:spPr>
           <a:xfrm>
             <a:off x="548640" y="109728"/>
-            <a:ext cx="64008" cy="548640"/>
+            <a:ext cx="64008" cy="502920"/>
           </a:xfrm>
           <a:prstGeom prst="rect">
             <a:avLst/>
@@ -20489,7 +20281,7 @@
         <p:spPr>
           <a:xfrm>
             <a:off x="749808" y="576072"/>
-            <a:ext cx="10637215" cy="274320"/>
+            <a:ext cx="10637215" cy="256032"/>
           </a:xfrm>
           <a:prstGeom prst="rect">
             <a:avLst/>
@@ -20515,7 +20307,7 @@
               </a:defRPr>
             </a:pPr>
             <a:r>
-              <a:t>Pasal 29–33 • Keberatan &amp; Banding</a:t>
+              <a:t>Pasal 29–33</a:t>
             </a:r>
           </a:p>
         </p:txBody>
@@ -20529,7 +20321,7 @@
         <p:spPr>
           <a:xfrm>
             <a:off x="548640" y="1051560"/>
-            <a:ext cx="5410047" cy="5166360"/>
+            <a:ext cx="5410047" cy="5349240"/>
           </a:xfrm>
           <a:prstGeom prst="roundRect">
             <a:avLst>
@@ -20576,7 +20368,7 @@
         <p:spPr>
           <a:xfrm>
             <a:off x="548640" y="1051560"/>
-            <a:ext cx="45720" cy="5166360"/>
+            <a:ext cx="45720" cy="5349240"/>
           </a:xfrm>
           <a:prstGeom prst="rect">
             <a:avLst/>
@@ -20618,7 +20410,7 @@
         </p:nvSpPr>
         <p:spPr>
           <a:xfrm>
-            <a:off x="731520" y="1188720"/>
+            <a:off x="731520" y="1188719"/>
             <a:ext cx="5090007" cy="274320"/>
           </a:xfrm>
           <a:prstGeom prst="rect">
@@ -20659,7 +20451,7 @@
         <p:spPr>
           <a:xfrm>
             <a:off x="731520" y="1481328"/>
-            <a:ext cx="5090007" cy="201168"/>
+            <a:ext cx="5090007" cy="228600"/>
           </a:xfrm>
           <a:prstGeom prst="rect">
             <a:avLst/>
@@ -20698,8 +20490,8 @@
         </p:nvSpPr>
         <p:spPr>
           <a:xfrm>
-            <a:off x="731520" y="1700784"/>
-            <a:ext cx="5090007" cy="201168"/>
+            <a:off x="731520" y="1719072"/>
+            <a:ext cx="5090007" cy="228600"/>
           </a:xfrm>
           <a:prstGeom prst="rect">
             <a:avLst/>
@@ -20738,8 +20530,8 @@
         </p:nvSpPr>
         <p:spPr>
           <a:xfrm>
-            <a:off x="731520" y="1920240"/>
-            <a:ext cx="5090007" cy="201168"/>
+            <a:off x="731520" y="1956815"/>
+            <a:ext cx="5090007" cy="228600"/>
           </a:xfrm>
           <a:prstGeom prst="rect">
             <a:avLst/>
@@ -20778,8 +20570,8 @@
         </p:nvSpPr>
         <p:spPr>
           <a:xfrm>
-            <a:off x="731520" y="2139696"/>
-            <a:ext cx="5090007" cy="201168"/>
+            <a:off x="731520" y="2194559"/>
+            <a:ext cx="5090007" cy="228600"/>
           </a:xfrm>
           <a:prstGeom prst="rect">
             <a:avLst/>
@@ -20818,8 +20610,8 @@
         </p:nvSpPr>
         <p:spPr>
           <a:xfrm>
-            <a:off x="731520" y="2359152"/>
-            <a:ext cx="5090007" cy="201168"/>
+            <a:off x="731520" y="2432303"/>
+            <a:ext cx="5090007" cy="228600"/>
           </a:xfrm>
           <a:prstGeom prst="rect">
             <a:avLst/>
@@ -20858,8 +20650,8 @@
         </p:nvSpPr>
         <p:spPr>
           <a:xfrm>
-            <a:off x="731520" y="2578608"/>
-            <a:ext cx="5090007" cy="201168"/>
+            <a:off x="731520" y="2670047"/>
+            <a:ext cx="5090007" cy="228600"/>
           </a:xfrm>
           <a:prstGeom prst="rect">
             <a:avLst/>
@@ -20898,8 +20690,8 @@
         </p:nvSpPr>
         <p:spPr>
           <a:xfrm>
-            <a:off x="731520" y="2798064"/>
-            <a:ext cx="5090007" cy="201168"/>
+            <a:off x="731520" y="2907791"/>
+            <a:ext cx="5090007" cy="228600"/>
           </a:xfrm>
           <a:prstGeom prst="rect">
             <a:avLst/>
@@ -20939,7 +20731,7 @@
         <p:spPr>
           <a:xfrm>
             <a:off x="6233007" y="1051560"/>
-            <a:ext cx="5410047" cy="5166360"/>
+            <a:ext cx="5410047" cy="5349240"/>
           </a:xfrm>
           <a:prstGeom prst="roundRect">
             <a:avLst>
@@ -20986,7 +20778,7 @@
         <p:spPr>
           <a:xfrm>
             <a:off x="6233007" y="1051560"/>
-            <a:ext cx="45720" cy="5166360"/>
+            <a:ext cx="45720" cy="5349240"/>
           </a:xfrm>
           <a:prstGeom prst="rect">
             <a:avLst/>
@@ -21028,7 +20820,7 @@
         </p:nvSpPr>
         <p:spPr>
           <a:xfrm>
-            <a:off x="6415887" y="1188720"/>
+            <a:off x="6415887" y="1188719"/>
             <a:ext cx="5090007" cy="274320"/>
           </a:xfrm>
           <a:prstGeom prst="rect">
@@ -21069,7 +20861,7 @@
         <p:spPr>
           <a:xfrm>
             <a:off x="6415887" y="1481328"/>
-            <a:ext cx="5090007" cy="201168"/>
+            <a:ext cx="5090007" cy="228600"/>
           </a:xfrm>
           <a:prstGeom prst="rect">
             <a:avLst/>
@@ -21108,8 +20900,8 @@
         </p:nvSpPr>
         <p:spPr>
           <a:xfrm>
-            <a:off x="6415887" y="1700784"/>
-            <a:ext cx="5090007" cy="201168"/>
+            <a:off x="6415887" y="1719072"/>
+            <a:ext cx="5090007" cy="228600"/>
           </a:xfrm>
           <a:prstGeom prst="rect">
             <a:avLst/>
@@ -21148,8 +20940,8 @@
         </p:nvSpPr>
         <p:spPr>
           <a:xfrm>
-            <a:off x="6415887" y="1920240"/>
-            <a:ext cx="5090007" cy="201168"/>
+            <a:off x="6415887" y="1956815"/>
+            <a:ext cx="5090007" cy="228600"/>
           </a:xfrm>
           <a:prstGeom prst="rect">
             <a:avLst/>
@@ -21188,8 +20980,8 @@
         </p:nvSpPr>
         <p:spPr>
           <a:xfrm>
-            <a:off x="6415887" y="2139696"/>
-            <a:ext cx="5090007" cy="201168"/>
+            <a:off x="6415887" y="2194559"/>
+            <a:ext cx="5090007" cy="228600"/>
           </a:xfrm>
           <a:prstGeom prst="rect">
             <a:avLst/>
@@ -21228,8 +21020,8 @@
         </p:nvSpPr>
         <p:spPr>
           <a:xfrm>
-            <a:off x="6415887" y="2359152"/>
-            <a:ext cx="5090007" cy="201168"/>
+            <a:off x="6415887" y="2432303"/>
+            <a:ext cx="5090007" cy="228600"/>
           </a:xfrm>
           <a:prstGeom prst="rect">
             <a:avLst/>
@@ -21268,8 +21060,8 @@
         </p:nvSpPr>
         <p:spPr>
           <a:xfrm>
-            <a:off x="6415887" y="2578608"/>
-            <a:ext cx="5090007" cy="201168"/>
+            <a:off x="6415887" y="2670047"/>
+            <a:ext cx="5090007" cy="228600"/>
           </a:xfrm>
           <a:prstGeom prst="rect">
             <a:avLst/>
@@ -21308,8 +21100,8 @@
         </p:nvSpPr>
         <p:spPr>
           <a:xfrm>
-            <a:off x="6415887" y="2798064"/>
-            <a:ext cx="5090007" cy="201168"/>
+            <a:off x="6415887" y="2907791"/>
+            <a:ext cx="5090007" cy="228600"/>
           </a:xfrm>
           <a:prstGeom prst="rect">
             <a:avLst/>
@@ -21348,7 +21140,7 @@
         </p:nvSpPr>
         <p:spPr>
           <a:xfrm>
-            <a:off x="0" y="6629400"/>
+            <a:off x="0" y="6400800"/>
             <a:ext cx="12191695" cy="27432"/>
           </a:xfrm>
           <a:prstGeom prst="rect">
@@ -21391,7 +21183,7 @@
         </p:nvSpPr>
         <p:spPr>
           <a:xfrm>
-            <a:off x="548640" y="6473952"/>
+            <a:off x="548640" y="6455664"/>
             <a:ext cx="3657600" cy="201168"/>
           </a:xfrm>
           <a:prstGeom prst="rect">
@@ -21431,7 +21223,7 @@
         </p:nvSpPr>
         <p:spPr>
           <a:xfrm>
-            <a:off x="11277295" y="6473952"/>
+            <a:off x="11277295" y="6455664"/>
             <a:ext cx="731520" cy="201168"/>
           </a:xfrm>
           <a:prstGeom prst="rect">
@@ -21633,7 +21425,7 @@
             <a:avLst/>
           </a:prstGeom>
           <a:solidFill>
-            <a:srgbClr val="0E203E"/>
+            <a:srgbClr val="12294A"/>
           </a:solidFill>
           <a:ln>
             <a:noFill/>
@@ -21868,46 +21660,6 @@
           <a:lstStyle/>
           <a:p>
             <a:pPr algn="ctr"/>
-          </a:p>
-        </p:txBody>
-      </p:sp>
-      <p:sp>
-        <p:nvSpPr>
-          <p:cNvPr id="11" name="TextBox 10"/>
-          <p:cNvSpPr txBox="1"/>
-          <p:nvPr/>
-        </p:nvSpPr>
-        <p:spPr>
-          <a:xfrm>
-            <a:off x="11277295" y="6473952"/>
-            <a:ext cx="731520" cy="201168"/>
-          </a:xfrm>
-          <a:prstGeom prst="rect">
-            <a:avLst/>
-          </a:prstGeom>
-          <a:noFill/>
-        </p:spPr>
-        <p:txBody>
-          <a:bodyPr wrap="square"/>
-          <a:lstStyle/>
-          <a:p>
-            <a:pPr algn="r">
-              <a:spcBef>
-                <a:spcPts val="0"/>
-              </a:spcBef>
-              <a:spcAft>
-                <a:spcPts val="0"/>
-              </a:spcAft>
-              <a:defRPr sz="800" b="0">
-                <a:solidFill>
-                  <a:srgbClr val="9CA3AF"/>
-                </a:solidFill>
-                <a:latin typeface="Calibri"/>
-              </a:defRPr>
-            </a:pPr>
-            <a:r>
-              <a:t>25</a:t>
-            </a:r>
           </a:p>
         </p:txBody>
       </p:sp>
@@ -21989,7 +21741,7 @@
         <p:spPr>
           <a:xfrm>
             <a:off x="0" y="32004"/>
-            <a:ext cx="12191695" cy="822960"/>
+            <a:ext cx="12191695" cy="822959"/>
           </a:xfrm>
           <a:prstGeom prst="rect">
             <a:avLst/>
@@ -22032,7 +21784,7 @@
         <p:spPr>
           <a:xfrm>
             <a:off x="548640" y="109728"/>
-            <a:ext cx="64008" cy="548640"/>
+            <a:ext cx="64008" cy="502920"/>
           </a:xfrm>
           <a:prstGeom prst="rect">
             <a:avLst/>
@@ -22115,7 +21867,7 @@
         <p:spPr>
           <a:xfrm>
             <a:off x="749808" y="576072"/>
-            <a:ext cx="10637215" cy="274320"/>
+            <a:ext cx="10637215" cy="256032"/>
           </a:xfrm>
           <a:prstGeom prst="rect">
             <a:avLst/>
@@ -22141,7 +21893,7 @@
               </a:defRPr>
             </a:pPr>
             <a:r>
-              <a:t>Pasal 22–25 • Pemeriksaan &amp; Penagihan</a:t>
+              <a:t>Pasal 22–25</a:t>
             </a:r>
           </a:p>
         </p:txBody>
@@ -22244,7 +21996,7 @@
         </p:nvSpPr>
         <p:spPr>
           <a:xfrm>
-            <a:off x="685800" y="1188720"/>
+            <a:off x="685800" y="1188719"/>
             <a:ext cx="384048" cy="384048"/>
           </a:xfrm>
           <a:prstGeom prst="ellipse">
@@ -22287,7 +22039,7 @@
         </p:nvSpPr>
         <p:spPr>
           <a:xfrm>
-            <a:off x="685800" y="1188720"/>
+            <a:off x="685800" y="1188719"/>
             <a:ext cx="384048" cy="384048"/>
           </a:xfrm>
           <a:prstGeom prst="rect">
@@ -22327,7 +22079,7 @@
         </p:nvSpPr>
         <p:spPr>
           <a:xfrm>
-            <a:off x="685800" y="1691640"/>
+            <a:off x="685800" y="1691639"/>
             <a:ext cx="3240938" cy="274320"/>
           </a:xfrm>
           <a:prstGeom prst="rect">
@@ -22368,7 +22120,7 @@
         <p:spPr>
           <a:xfrm>
             <a:off x="685800" y="2039112"/>
-            <a:ext cx="3240938" cy="320040"/>
+            <a:ext cx="3240938" cy="274320"/>
           </a:xfrm>
           <a:prstGeom prst="rect">
             <a:avLst/>
@@ -22407,8 +22159,8 @@
         </p:nvSpPr>
         <p:spPr>
           <a:xfrm>
-            <a:off x="685800" y="2377440"/>
-            <a:ext cx="3240938" cy="320040"/>
+            <a:off x="685800" y="2331720"/>
+            <a:ext cx="3240938" cy="274320"/>
           </a:xfrm>
           <a:prstGeom prst="rect">
             <a:avLst/>
@@ -22447,8 +22199,8 @@
         </p:nvSpPr>
         <p:spPr>
           <a:xfrm>
-            <a:off x="685800" y="2715768"/>
-            <a:ext cx="3240938" cy="320040"/>
+            <a:off x="685800" y="2624327"/>
+            <a:ext cx="3240938" cy="274320"/>
           </a:xfrm>
           <a:prstGeom prst="rect">
             <a:avLst/>
@@ -22487,8 +22239,8 @@
         </p:nvSpPr>
         <p:spPr>
           <a:xfrm>
-            <a:off x="685800" y="3054096"/>
-            <a:ext cx="3240938" cy="320040"/>
+            <a:off x="685800" y="2916935"/>
+            <a:ext cx="3240938" cy="274320"/>
           </a:xfrm>
           <a:prstGeom prst="rect">
             <a:avLst/>
@@ -22527,8 +22279,8 @@
         </p:nvSpPr>
         <p:spPr>
           <a:xfrm>
-            <a:off x="685800" y="3392424"/>
-            <a:ext cx="3240938" cy="320040"/>
+            <a:off x="685800" y="3209543"/>
+            <a:ext cx="3240938" cy="274320"/>
           </a:xfrm>
           <a:prstGeom prst="rect">
             <a:avLst/>
@@ -22657,7 +22409,7 @@
         </p:nvSpPr>
         <p:spPr>
           <a:xfrm>
-            <a:off x="4475378" y="1188720"/>
+            <a:off x="4475378" y="1188719"/>
             <a:ext cx="384048" cy="384048"/>
           </a:xfrm>
           <a:prstGeom prst="ellipse">
@@ -22700,7 +22452,7 @@
         </p:nvSpPr>
         <p:spPr>
           <a:xfrm>
-            <a:off x="4475378" y="1188720"/>
+            <a:off x="4475378" y="1188719"/>
             <a:ext cx="384048" cy="384048"/>
           </a:xfrm>
           <a:prstGeom prst="rect">
@@ -22740,7 +22492,7 @@
         </p:nvSpPr>
         <p:spPr>
           <a:xfrm>
-            <a:off x="4475378" y="1691640"/>
+            <a:off x="4475378" y="1691639"/>
             <a:ext cx="3240938" cy="274320"/>
           </a:xfrm>
           <a:prstGeom prst="rect">
@@ -22781,7 +22533,7 @@
         <p:spPr>
           <a:xfrm>
             <a:off x="4475378" y="2039112"/>
-            <a:ext cx="3240938" cy="320040"/>
+            <a:ext cx="3240938" cy="274320"/>
           </a:xfrm>
           <a:prstGeom prst="rect">
             <a:avLst/>
@@ -22820,8 +22572,8 @@
         </p:nvSpPr>
         <p:spPr>
           <a:xfrm>
-            <a:off x="4475378" y="2377440"/>
-            <a:ext cx="3240938" cy="320040"/>
+            <a:off x="4475378" y="2331720"/>
+            <a:ext cx="3240938" cy="274320"/>
           </a:xfrm>
           <a:prstGeom prst="rect">
             <a:avLst/>
@@ -22860,8 +22612,8 @@
         </p:nvSpPr>
         <p:spPr>
           <a:xfrm>
-            <a:off x="4475378" y="2715768"/>
-            <a:ext cx="3240938" cy="320040"/>
+            <a:off x="4475378" y="2624327"/>
+            <a:ext cx="3240938" cy="274320"/>
           </a:xfrm>
           <a:prstGeom prst="rect">
             <a:avLst/>
@@ -22990,7 +22742,7 @@
         </p:nvSpPr>
         <p:spPr>
           <a:xfrm>
-            <a:off x="8264956" y="1188720"/>
+            <a:off x="8264956" y="1188719"/>
             <a:ext cx="384048" cy="384048"/>
           </a:xfrm>
           <a:prstGeom prst="ellipse">
@@ -23033,7 +22785,7 @@
         </p:nvSpPr>
         <p:spPr>
           <a:xfrm>
-            <a:off x="8264956" y="1188720"/>
+            <a:off x="8264956" y="1188719"/>
             <a:ext cx="384048" cy="384048"/>
           </a:xfrm>
           <a:prstGeom prst="rect">
@@ -23073,7 +22825,7 @@
         </p:nvSpPr>
         <p:spPr>
           <a:xfrm>
-            <a:off x="8264956" y="1691640"/>
+            <a:off x="8264956" y="1691639"/>
             <a:ext cx="3240938" cy="274320"/>
           </a:xfrm>
           <a:prstGeom prst="rect">
@@ -23114,7 +22866,7 @@
         <p:spPr>
           <a:xfrm>
             <a:off x="8264956" y="2039112"/>
-            <a:ext cx="3240938" cy="320040"/>
+            <a:ext cx="3240938" cy="274320"/>
           </a:xfrm>
           <a:prstGeom prst="rect">
             <a:avLst/>
@@ -23153,8 +22905,8 @@
         </p:nvSpPr>
         <p:spPr>
           <a:xfrm>
-            <a:off x="8264956" y="2377440"/>
-            <a:ext cx="3240938" cy="320040"/>
+            <a:off x="8264956" y="2331720"/>
+            <a:ext cx="3240938" cy="274320"/>
           </a:xfrm>
           <a:prstGeom prst="rect">
             <a:avLst/>
@@ -23180,7 +22932,7 @@
               </a:defRPr>
             </a:pPr>
             <a:r>
-              <a:t>• Tertangguh jika ada:</a:t>
+              <a:t>• Tertangguh jika ada: Surat Teguran / Paksa</a:t>
             </a:r>
           </a:p>
         </p:txBody>
@@ -23193,8 +22945,8 @@
         </p:nvSpPr>
         <p:spPr>
           <a:xfrm>
-            <a:off x="8264956" y="2715768"/>
-            <a:ext cx="3240938" cy="320040"/>
+            <a:off x="8264956" y="2624327"/>
+            <a:ext cx="3240938" cy="274320"/>
           </a:xfrm>
           <a:prstGeom prst="rect">
             <a:avLst/>
@@ -23220,46 +22972,6 @@
               </a:defRPr>
             </a:pPr>
             <a:r>
-              <a:t>• Surat Teguran / Paksa</a:t>
-            </a:r>
-          </a:p>
-        </p:txBody>
-      </p:sp>
-      <p:sp>
-        <p:nvSpPr>
-          <p:cNvPr id="33" name="TextBox 32"/>
-          <p:cNvSpPr txBox="1"/>
-          <p:nvPr/>
-        </p:nvSpPr>
-        <p:spPr>
-          <a:xfrm>
-            <a:off x="8264956" y="3054096"/>
-            <a:ext cx="3240938" cy="320040"/>
-          </a:xfrm>
-          <a:prstGeom prst="rect">
-            <a:avLst/>
-          </a:prstGeom>
-          <a:noFill/>
-        </p:spPr>
-        <p:txBody>
-          <a:bodyPr wrap="square"/>
-          <a:lstStyle/>
-          <a:p>
-            <a:pPr algn="l">
-              <a:spcBef>
-                <a:spcPts val="0"/>
-              </a:spcBef>
-              <a:spcAft>
-                <a:spcPts val="0"/>
-              </a:spcAft>
-              <a:defRPr sz="900" b="0">
-                <a:solidFill>
-                  <a:srgbClr val="1A1A2E"/>
-                </a:solidFill>
-                <a:latin typeface="Calibri"/>
-              </a:defRPr>
-            </a:pPr>
-            <a:r>
               <a:t>• Pengakuan utang dari WP</a:t>
             </a:r>
           </a:p>
@@ -23267,13 +22979,13 @@
       </p:sp>
       <p:sp>
         <p:nvSpPr>
-          <p:cNvPr id="34" name="Rectangle 33"/>
+          <p:cNvPr id="33" name="Rectangle 32"/>
           <p:cNvSpPr/>
           <p:nvPr/>
         </p:nvSpPr>
         <p:spPr>
           <a:xfrm>
-            <a:off x="0" y="6629400"/>
+            <a:off x="0" y="6400800"/>
             <a:ext cx="12191695" cy="27432"/>
           </a:xfrm>
           <a:prstGeom prst="rect">
@@ -23310,53 +23022,53 @@
       </p:sp>
       <p:sp>
         <p:nvSpPr>
+          <p:cNvPr id="34" name="TextBox 33"/>
+          <p:cNvSpPr txBox="1"/>
+          <p:nvPr/>
+        </p:nvSpPr>
+        <p:spPr>
+          <a:xfrm>
+            <a:off x="548640" y="6455664"/>
+            <a:ext cx="3657600" cy="201168"/>
+          </a:xfrm>
+          <a:prstGeom prst="rect">
+            <a:avLst/>
+          </a:prstGeom>
+          <a:noFill/>
+        </p:spPr>
+        <p:txBody>
+          <a:bodyPr wrap="square"/>
+          <a:lstStyle/>
+          <a:p>
+            <a:pPr algn="l">
+              <a:spcBef>
+                <a:spcPts val="0"/>
+              </a:spcBef>
+              <a:spcAft>
+                <a:spcPts val="0"/>
+              </a:spcAft>
+              <a:defRPr sz="700" b="0">
+                <a:solidFill>
+                  <a:srgbClr val="9CA3AF"/>
+                </a:solidFill>
+                <a:latin typeface="Calibri"/>
+              </a:defRPr>
+            </a:pPr>
+            <a:r>
+              <a:t>Sumber: Perwal Bekasi No 51/2024</a:t>
+            </a:r>
+          </a:p>
+        </p:txBody>
+      </p:sp>
+      <p:sp>
+        <p:nvSpPr>
           <p:cNvPr id="35" name="TextBox 34"/>
           <p:cNvSpPr txBox="1"/>
           <p:nvPr/>
         </p:nvSpPr>
         <p:spPr>
           <a:xfrm>
-            <a:off x="548640" y="6473952"/>
-            <a:ext cx="3657600" cy="201168"/>
-          </a:xfrm>
-          <a:prstGeom prst="rect">
-            <a:avLst/>
-          </a:prstGeom>
-          <a:noFill/>
-        </p:spPr>
-        <p:txBody>
-          <a:bodyPr wrap="square"/>
-          <a:lstStyle/>
-          <a:p>
-            <a:pPr algn="l">
-              <a:spcBef>
-                <a:spcPts val="0"/>
-              </a:spcBef>
-              <a:spcAft>
-                <a:spcPts val="0"/>
-              </a:spcAft>
-              <a:defRPr sz="700" b="0">
-                <a:solidFill>
-                  <a:srgbClr val="9CA3AF"/>
-                </a:solidFill>
-                <a:latin typeface="Calibri"/>
-              </a:defRPr>
-            </a:pPr>
-            <a:r>
-              <a:t>Sumber: Perwal Bekasi No 51/2024</a:t>
-            </a:r>
-          </a:p>
-        </p:txBody>
-      </p:sp>
-      <p:sp>
-        <p:nvSpPr>
-          <p:cNvPr id="36" name="TextBox 35"/>
-          <p:cNvSpPr txBox="1"/>
-          <p:nvPr/>
-        </p:nvSpPr>
-        <p:spPr>
-          <a:xfrm>
-            <a:off x="11277295" y="6473952"/>
+            <a:off x="11277295" y="6455664"/>
             <a:ext cx="731520" cy="201168"/>
           </a:xfrm>
           <a:prstGeom prst="rect">
@@ -23466,7 +23178,7 @@
         <p:spPr>
           <a:xfrm>
             <a:off x="0" y="32004"/>
-            <a:ext cx="12191695" cy="822960"/>
+            <a:ext cx="12191695" cy="822959"/>
           </a:xfrm>
           <a:prstGeom prst="rect">
             <a:avLst/>
@@ -23509,7 +23221,7 @@
         <p:spPr>
           <a:xfrm>
             <a:off x="548640" y="109728"/>
-            <a:ext cx="64008" cy="548640"/>
+            <a:ext cx="64008" cy="502920"/>
           </a:xfrm>
           <a:prstGeom prst="rect">
             <a:avLst/>
@@ -23592,7 +23304,7 @@
         <p:spPr>
           <a:xfrm>
             <a:off x="749808" y="576072"/>
-            <a:ext cx="10637215" cy="274320"/>
+            <a:ext cx="10637215" cy="256032"/>
           </a:xfrm>
           <a:prstGeom prst="rect">
             <a:avLst/>
@@ -23618,7 +23330,7 @@
               </a:defRPr>
             </a:pPr>
             <a:r>
-              <a:t>Pasal 26 • Penghapusan Piutang</a:t>
+              <a:t>Pasal 26</a:t>
             </a:r>
           </a:p>
         </p:txBody>
@@ -23631,8 +23343,8 @@
         </p:nvSpPr>
         <p:spPr>
           <a:xfrm>
-            <a:off x="548640" y="1188720"/>
-            <a:ext cx="2533573" cy="1828800"/>
+            <a:off x="548640" y="1188719"/>
+            <a:ext cx="2567863" cy="1828800"/>
           </a:xfrm>
           <a:prstGeom prst="roundRect">
             <a:avLst>
@@ -23678,8 +23390,8 @@
         </p:nvSpPr>
         <p:spPr>
           <a:xfrm>
-            <a:off x="548640" y="1188720"/>
-            <a:ext cx="2533573" cy="45720"/>
+            <a:off x="548640" y="1188719"/>
+            <a:ext cx="2567863" cy="45720"/>
           </a:xfrm>
           <a:prstGeom prst="rect">
             <a:avLst/>
@@ -23721,7 +23433,7 @@
         </p:nvSpPr>
         <p:spPr>
           <a:xfrm>
-            <a:off x="1586826" y="1325880"/>
+            <a:off x="1603971" y="1325879"/>
             <a:ext cx="457200" cy="457200"/>
           </a:xfrm>
           <a:prstGeom prst="ellipse">
@@ -23764,7 +23476,7 @@
         </p:nvSpPr>
         <p:spPr>
           <a:xfrm>
-            <a:off x="1586826" y="1325880"/>
+            <a:off x="1603971" y="1325879"/>
             <a:ext cx="457200" cy="457200"/>
           </a:xfrm>
           <a:prstGeom prst="rect">
@@ -23804,8 +23516,8 @@
         </p:nvSpPr>
         <p:spPr>
           <a:xfrm>
-            <a:off x="640080" y="1874520"/>
-            <a:ext cx="2350693" cy="320040"/>
+            <a:off x="640080" y="1874519"/>
+            <a:ext cx="2384983" cy="320040"/>
           </a:xfrm>
           <a:prstGeom prst="rect">
             <a:avLst/>
@@ -23845,7 +23557,7 @@
         <p:spPr>
           <a:xfrm>
             <a:off x="640080" y="2194560"/>
-            <a:ext cx="2350693" cy="640080"/>
+            <a:ext cx="2384983" cy="640080"/>
           </a:xfrm>
           <a:prstGeom prst="rect">
             <a:avLst/>
@@ -23884,8 +23596,8 @@
         </p:nvSpPr>
         <p:spPr>
           <a:xfrm>
-            <a:off x="3082213" y="1828800"/>
-            <a:ext cx="320040" cy="457200"/>
+            <a:off x="3116503" y="1828799"/>
+            <a:ext cx="274320" cy="457200"/>
           </a:xfrm>
           <a:prstGeom prst="rect">
             <a:avLst/>
@@ -23924,8 +23636,8 @@
         </p:nvSpPr>
         <p:spPr>
           <a:xfrm>
-            <a:off x="3402253" y="1188720"/>
-            <a:ext cx="2533573" cy="1828800"/>
+            <a:off x="3390823" y="1188719"/>
+            <a:ext cx="2567863" cy="1828800"/>
           </a:xfrm>
           <a:prstGeom prst="roundRect">
             <a:avLst>
@@ -23971,8 +23683,8 @@
         </p:nvSpPr>
         <p:spPr>
           <a:xfrm>
-            <a:off x="3402253" y="1188720"/>
-            <a:ext cx="2533573" cy="45720"/>
+            <a:off x="3390823" y="1188719"/>
+            <a:ext cx="2567863" cy="45720"/>
           </a:xfrm>
           <a:prstGeom prst="rect">
             <a:avLst/>
@@ -24014,7 +23726,7 @@
         </p:nvSpPr>
         <p:spPr>
           <a:xfrm>
-            <a:off x="4440440" y="1325880"/>
+            <a:off x="4446155" y="1325879"/>
             <a:ext cx="457200" cy="457200"/>
           </a:xfrm>
           <a:prstGeom prst="ellipse">
@@ -24057,7 +23769,7 @@
         </p:nvSpPr>
         <p:spPr>
           <a:xfrm>
-            <a:off x="4440440" y="1325880"/>
+            <a:off x="4446155" y="1325879"/>
             <a:ext cx="457200" cy="457200"/>
           </a:xfrm>
           <a:prstGeom prst="rect">
@@ -24097,8 +23809,8 @@
         </p:nvSpPr>
         <p:spPr>
           <a:xfrm>
-            <a:off x="3493693" y="1874520"/>
-            <a:ext cx="2350693" cy="320040"/>
+            <a:off x="3482263" y="1874519"/>
+            <a:ext cx="2384983" cy="320040"/>
           </a:xfrm>
           <a:prstGeom prst="rect">
             <a:avLst/>
@@ -24137,8 +23849,8 @@
         </p:nvSpPr>
         <p:spPr>
           <a:xfrm>
-            <a:off x="3493693" y="2194560"/>
-            <a:ext cx="2350693" cy="640080"/>
+            <a:off x="3482263" y="2194560"/>
+            <a:ext cx="2384983" cy="640080"/>
           </a:xfrm>
           <a:prstGeom prst="rect">
             <a:avLst/>
@@ -24177,8 +23889,8 @@
         </p:nvSpPr>
         <p:spPr>
           <a:xfrm>
-            <a:off x="5935827" y="1828800"/>
-            <a:ext cx="320040" cy="457200"/>
+            <a:off x="5958687" y="1828799"/>
+            <a:ext cx="274320" cy="457200"/>
           </a:xfrm>
           <a:prstGeom prst="rect">
             <a:avLst/>
@@ -24217,8 +23929,8 @@
         </p:nvSpPr>
         <p:spPr>
           <a:xfrm>
-            <a:off x="6255867" y="1188720"/>
-            <a:ext cx="2533573" cy="1828800"/>
+            <a:off x="6233007" y="1188719"/>
+            <a:ext cx="2567863" cy="1828800"/>
           </a:xfrm>
           <a:prstGeom prst="roundRect">
             <a:avLst>
@@ -24264,8 +23976,8 @@
         </p:nvSpPr>
         <p:spPr>
           <a:xfrm>
-            <a:off x="6255867" y="1188720"/>
-            <a:ext cx="2533573" cy="45720"/>
+            <a:off x="6233007" y="1188719"/>
+            <a:ext cx="2567863" cy="45720"/>
           </a:xfrm>
           <a:prstGeom prst="rect">
             <a:avLst/>
@@ -24307,7 +24019,7 @@
         </p:nvSpPr>
         <p:spPr>
           <a:xfrm>
-            <a:off x="7294054" y="1325880"/>
+            <a:off x="7288339" y="1325879"/>
             <a:ext cx="457200" cy="457200"/>
           </a:xfrm>
           <a:prstGeom prst="ellipse">
@@ -24350,7 +24062,7 @@
         </p:nvSpPr>
         <p:spPr>
           <a:xfrm>
-            <a:off x="7294054" y="1325880"/>
+            <a:off x="7288339" y="1325879"/>
             <a:ext cx="457200" cy="457200"/>
           </a:xfrm>
           <a:prstGeom prst="rect">
@@ -24390,8 +24102,8 @@
         </p:nvSpPr>
         <p:spPr>
           <a:xfrm>
-            <a:off x="6347307" y="1874520"/>
-            <a:ext cx="2350693" cy="320040"/>
+            <a:off x="6324447" y="1874519"/>
+            <a:ext cx="2384983" cy="320040"/>
           </a:xfrm>
           <a:prstGeom prst="rect">
             <a:avLst/>
@@ -24430,8 +24142,8 @@
         </p:nvSpPr>
         <p:spPr>
           <a:xfrm>
-            <a:off x="6347307" y="2194560"/>
-            <a:ext cx="2350693" cy="640080"/>
+            <a:off x="6324447" y="2194560"/>
+            <a:ext cx="2384983" cy="640080"/>
           </a:xfrm>
           <a:prstGeom prst="rect">
             <a:avLst/>
@@ -24470,8 +24182,8 @@
         </p:nvSpPr>
         <p:spPr>
           <a:xfrm>
-            <a:off x="8789441" y="1828800"/>
-            <a:ext cx="320040" cy="457200"/>
+            <a:off x="8800871" y="1828799"/>
+            <a:ext cx="274320" cy="457200"/>
           </a:xfrm>
           <a:prstGeom prst="rect">
             <a:avLst/>
@@ -24510,8 +24222,8 @@
         </p:nvSpPr>
         <p:spPr>
           <a:xfrm>
-            <a:off x="9109481" y="1188720"/>
-            <a:ext cx="2533573" cy="1828800"/>
+            <a:off x="9075191" y="1188719"/>
+            <a:ext cx="2567863" cy="1828800"/>
           </a:xfrm>
           <a:prstGeom prst="roundRect">
             <a:avLst>
@@ -24557,8 +24269,8 @@
         </p:nvSpPr>
         <p:spPr>
           <a:xfrm>
-            <a:off x="9109481" y="1188720"/>
-            <a:ext cx="2533573" cy="45720"/>
+            <a:off x="9075191" y="1188719"/>
+            <a:ext cx="2567863" cy="45720"/>
           </a:xfrm>
           <a:prstGeom prst="rect">
             <a:avLst/>
@@ -24600,7 +24312,7 @@
         </p:nvSpPr>
         <p:spPr>
           <a:xfrm>
-            <a:off x="10147668" y="1325880"/>
+            <a:off x="10130523" y="1325879"/>
             <a:ext cx="457200" cy="457200"/>
           </a:xfrm>
           <a:prstGeom prst="ellipse">
@@ -24643,7 +24355,7 @@
         </p:nvSpPr>
         <p:spPr>
           <a:xfrm>
-            <a:off x="10147668" y="1325880"/>
+            <a:off x="10130523" y="1325879"/>
             <a:ext cx="457200" cy="457200"/>
           </a:xfrm>
           <a:prstGeom prst="rect">
@@ -24683,8 +24395,8 @@
         </p:nvSpPr>
         <p:spPr>
           <a:xfrm>
-            <a:off x="9200921" y="1874520"/>
-            <a:ext cx="2350693" cy="320040"/>
+            <a:off x="9166631" y="1874519"/>
+            <a:ext cx="2384983" cy="320040"/>
           </a:xfrm>
           <a:prstGeom prst="rect">
             <a:avLst/>
@@ -24723,8 +24435,8 @@
         </p:nvSpPr>
         <p:spPr>
           <a:xfrm>
-            <a:off x="9200921" y="2194560"/>
-            <a:ext cx="2350693" cy="640080"/>
+            <a:off x="9166631" y="2194560"/>
+            <a:ext cx="2384983" cy="640080"/>
           </a:xfrm>
           <a:prstGeom prst="rect">
             <a:avLst/>
@@ -24763,8 +24475,8 @@
         </p:nvSpPr>
         <p:spPr>
           <a:xfrm>
-            <a:off x="548640" y="3383280"/>
-            <a:ext cx="11094415" cy="2743200"/>
+            <a:off x="548640" y="3383279"/>
+            <a:ext cx="11094415" cy="2560320"/>
           </a:xfrm>
           <a:prstGeom prst="roundRect">
             <a:avLst>
@@ -24810,8 +24522,8 @@
         </p:nvSpPr>
         <p:spPr>
           <a:xfrm>
-            <a:off x="777240" y="3520440"/>
-            <a:ext cx="10637215" cy="2377440"/>
+            <a:off x="777240" y="3520439"/>
+            <a:ext cx="10637215" cy="2286000"/>
           </a:xfrm>
           <a:prstGeom prst="rect">
             <a:avLst/>
@@ -24862,7 +24574,7 @@
         </p:nvSpPr>
         <p:spPr>
           <a:xfrm>
-            <a:off x="0" y="6629400"/>
+            <a:off x="0" y="6400800"/>
             <a:ext cx="12191695" cy="27432"/>
           </a:xfrm>
           <a:prstGeom prst="rect">
@@ -24905,7 +24617,7 @@
         </p:nvSpPr>
         <p:spPr>
           <a:xfrm>
-            <a:off x="548640" y="6473952"/>
+            <a:off x="548640" y="6455664"/>
             <a:ext cx="3657600" cy="201168"/>
           </a:xfrm>
           <a:prstGeom prst="rect">
@@ -24945,7 +24657,7 @@
         </p:nvSpPr>
         <p:spPr>
           <a:xfrm>
-            <a:off x="11277295" y="6473952"/>
+            <a:off x="11277295" y="6455664"/>
             <a:ext cx="731520" cy="201168"/>
           </a:xfrm>
           <a:prstGeom prst="rect">
@@ -25147,7 +24859,7 @@
             <a:avLst/>
           </a:prstGeom>
           <a:solidFill>
-            <a:srgbClr val="0E203E"/>
+            <a:srgbClr val="12294A"/>
           </a:solidFill>
           <a:ln>
             <a:noFill/>
@@ -25382,46 +25094,6 @@
           <a:lstStyle/>
           <a:p>
             <a:pPr algn="ctr"/>
-          </a:p>
-        </p:txBody>
-      </p:sp>
-      <p:sp>
-        <p:nvSpPr>
-          <p:cNvPr id="11" name="TextBox 10"/>
-          <p:cNvSpPr txBox="1"/>
-          <p:nvPr/>
-        </p:nvSpPr>
-        <p:spPr>
-          <a:xfrm>
-            <a:off x="11277295" y="6473952"/>
-            <a:ext cx="731520" cy="201168"/>
-          </a:xfrm>
-          <a:prstGeom prst="rect">
-            <a:avLst/>
-          </a:prstGeom>
-          <a:noFill/>
-        </p:spPr>
-        <p:txBody>
-          <a:bodyPr wrap="square"/>
-          <a:lstStyle/>
-          <a:p>
-            <a:pPr algn="r">
-              <a:spcBef>
-                <a:spcPts val="0"/>
-              </a:spcBef>
-              <a:spcAft>
-                <a:spcPts val="0"/>
-              </a:spcAft>
-              <a:defRPr sz="800" b="0">
-                <a:solidFill>
-                  <a:srgbClr val="9CA3AF"/>
-                </a:solidFill>
-                <a:latin typeface="Calibri"/>
-              </a:defRPr>
-            </a:pPr>
-            <a:r>
-              <a:t>28</a:t>
-            </a:r>
           </a:p>
         </p:txBody>
       </p:sp>
@@ -25595,7 +25267,7 @@
             <a:avLst/>
           </a:prstGeom>
           <a:solidFill>
-            <a:srgbClr val="0E203E"/>
+            <a:srgbClr val="12294A"/>
           </a:solidFill>
           <a:ln>
             <a:noFill/>
@@ -25830,46 +25502,6 @@
           <a:lstStyle/>
           <a:p>
             <a:pPr algn="ctr"/>
-          </a:p>
-        </p:txBody>
-      </p:sp>
-      <p:sp>
-        <p:nvSpPr>
-          <p:cNvPr id="11" name="TextBox 10"/>
-          <p:cNvSpPr txBox="1"/>
-          <p:nvPr/>
-        </p:nvSpPr>
-        <p:spPr>
-          <a:xfrm>
-            <a:off x="11277295" y="6473952"/>
-            <a:ext cx="731520" cy="201168"/>
-          </a:xfrm>
-          <a:prstGeom prst="rect">
-            <a:avLst/>
-          </a:prstGeom>
-          <a:noFill/>
-        </p:spPr>
-        <p:txBody>
-          <a:bodyPr wrap="square"/>
-          <a:lstStyle/>
-          <a:p>
-            <a:pPr algn="r">
-              <a:spcBef>
-                <a:spcPts val="0"/>
-              </a:spcBef>
-              <a:spcAft>
-                <a:spcPts val="0"/>
-              </a:spcAft>
-              <a:defRPr sz="800" b="0">
-                <a:solidFill>
-                  <a:srgbClr val="9CA3AF"/>
-                </a:solidFill>
-                <a:latin typeface="Calibri"/>
-              </a:defRPr>
-            </a:pPr>
-            <a:r>
-              <a:t>2</a:t>
-            </a:r>
           </a:p>
         </p:txBody>
       </p:sp>
@@ -25951,7 +25583,7 @@
         <p:spPr>
           <a:xfrm>
             <a:off x="0" y="32004"/>
-            <a:ext cx="12191695" cy="822960"/>
+            <a:ext cx="12191695" cy="822959"/>
           </a:xfrm>
           <a:prstGeom prst="rect">
             <a:avLst/>
@@ -25994,7 +25626,7 @@
         <p:spPr>
           <a:xfrm>
             <a:off x="548640" y="109728"/>
-            <a:ext cx="64008" cy="548640"/>
+            <a:ext cx="64008" cy="502920"/>
           </a:xfrm>
           <a:prstGeom prst="rect">
             <a:avLst/>
@@ -26077,7 +25709,7 @@
         <p:spPr>
           <a:xfrm>
             <a:off x="749808" y="576072"/>
-            <a:ext cx="10637215" cy="274320"/>
+            <a:ext cx="10637215" cy="256032"/>
           </a:xfrm>
           <a:prstGeom prst="rect">
             <a:avLst/>
@@ -26103,7 +25735,7 @@
               </a:defRPr>
             </a:pPr>
             <a:r>
-              <a:t>Pasal 27–28, 34–35 • Keringanan, Kemudahan &amp; Penghargaan</a:t>
+              <a:t>Pasal 27–28, 34–35</a:t>
             </a:r>
           </a:p>
         </p:txBody>
@@ -26206,7 +25838,7 @@
         </p:nvSpPr>
         <p:spPr>
           <a:xfrm>
-            <a:off x="685800" y="1188720"/>
+            <a:off x="685800" y="1188719"/>
             <a:ext cx="384048" cy="384048"/>
           </a:xfrm>
           <a:prstGeom prst="ellipse">
@@ -26249,7 +25881,7 @@
         </p:nvSpPr>
         <p:spPr>
           <a:xfrm>
-            <a:off x="685800" y="1188720"/>
+            <a:off x="685800" y="1188719"/>
             <a:ext cx="384048" cy="384048"/>
           </a:xfrm>
           <a:prstGeom prst="rect">
@@ -26289,7 +25921,7 @@
         </p:nvSpPr>
         <p:spPr>
           <a:xfrm>
-            <a:off x="685800" y="1691640"/>
+            <a:off x="685800" y="1691639"/>
             <a:ext cx="3240938" cy="274320"/>
           </a:xfrm>
           <a:prstGeom prst="rect">
@@ -26330,7 +25962,7 @@
         <p:spPr>
           <a:xfrm>
             <a:off x="685800" y="2039112"/>
-            <a:ext cx="3240938" cy="320040"/>
+            <a:ext cx="3240938" cy="274320"/>
           </a:xfrm>
           <a:prstGeom prst="rect">
             <a:avLst/>
@@ -26369,8 +26001,8 @@
         </p:nvSpPr>
         <p:spPr>
           <a:xfrm>
-            <a:off x="685800" y="2377440"/>
-            <a:ext cx="3240938" cy="320040"/>
+            <a:off x="685800" y="2331720"/>
+            <a:ext cx="3240938" cy="274320"/>
           </a:xfrm>
           <a:prstGeom prst="rect">
             <a:avLst/>
@@ -26409,8 +26041,8 @@
         </p:nvSpPr>
         <p:spPr>
           <a:xfrm>
-            <a:off x="685800" y="2715768"/>
-            <a:ext cx="3240938" cy="320040"/>
+            <a:off x="685800" y="2624327"/>
+            <a:ext cx="3240938" cy="274320"/>
           </a:xfrm>
           <a:prstGeom prst="rect">
             <a:avLst/>
@@ -26449,8 +26081,8 @@
         </p:nvSpPr>
         <p:spPr>
           <a:xfrm>
-            <a:off x="685800" y="3054096"/>
-            <a:ext cx="3240938" cy="320040"/>
+            <a:off x="685800" y="2916935"/>
+            <a:ext cx="3240938" cy="274320"/>
           </a:xfrm>
           <a:prstGeom prst="rect">
             <a:avLst/>
@@ -26489,8 +26121,8 @@
         </p:nvSpPr>
         <p:spPr>
           <a:xfrm>
-            <a:off x="685800" y="3392424"/>
-            <a:ext cx="3240938" cy="320040"/>
+            <a:off x="685800" y="3209543"/>
+            <a:ext cx="3240938" cy="274320"/>
           </a:xfrm>
           <a:prstGeom prst="rect">
             <a:avLst/>
@@ -26619,7 +26251,7 @@
         </p:nvSpPr>
         <p:spPr>
           <a:xfrm>
-            <a:off x="4475378" y="1188720"/>
+            <a:off x="4475378" y="1188719"/>
             <a:ext cx="384048" cy="384048"/>
           </a:xfrm>
           <a:prstGeom prst="ellipse">
@@ -26662,7 +26294,7 @@
         </p:nvSpPr>
         <p:spPr>
           <a:xfrm>
-            <a:off x="4475378" y="1188720"/>
+            <a:off x="4475378" y="1188719"/>
             <a:ext cx="384048" cy="384048"/>
           </a:xfrm>
           <a:prstGeom prst="rect">
@@ -26702,7 +26334,7 @@
         </p:nvSpPr>
         <p:spPr>
           <a:xfrm>
-            <a:off x="4475378" y="1691640"/>
+            <a:off x="4475378" y="1691639"/>
             <a:ext cx="3240938" cy="274320"/>
           </a:xfrm>
           <a:prstGeom prst="rect">
@@ -26743,7 +26375,7 @@
         <p:spPr>
           <a:xfrm>
             <a:off x="4475378" y="2039112"/>
-            <a:ext cx="3240938" cy="320040"/>
+            <a:ext cx="3240938" cy="274320"/>
           </a:xfrm>
           <a:prstGeom prst="rect">
             <a:avLst/>
@@ -26782,8 +26414,8 @@
         </p:nvSpPr>
         <p:spPr>
           <a:xfrm>
-            <a:off x="4475378" y="2377440"/>
-            <a:ext cx="3240938" cy="320040"/>
+            <a:off x="4475378" y="2331720"/>
+            <a:ext cx="3240938" cy="274320"/>
           </a:xfrm>
           <a:prstGeom prst="rect">
             <a:avLst/>
@@ -26822,8 +26454,8 @@
         </p:nvSpPr>
         <p:spPr>
           <a:xfrm>
-            <a:off x="4475378" y="2715768"/>
-            <a:ext cx="3240938" cy="320040"/>
+            <a:off x="4475378" y="2624327"/>
+            <a:ext cx="3240938" cy="274320"/>
           </a:xfrm>
           <a:prstGeom prst="rect">
             <a:avLst/>
@@ -26862,8 +26494,8 @@
         </p:nvSpPr>
         <p:spPr>
           <a:xfrm>
-            <a:off x="4475378" y="3054096"/>
-            <a:ext cx="3240938" cy="320040"/>
+            <a:off x="4475378" y="2916935"/>
+            <a:ext cx="3240938" cy="274320"/>
           </a:xfrm>
           <a:prstGeom prst="rect">
             <a:avLst/>
@@ -26992,7 +26624,7 @@
         </p:nvSpPr>
         <p:spPr>
           <a:xfrm>
-            <a:off x="8264956" y="1188720"/>
+            <a:off x="8264956" y="1188719"/>
             <a:ext cx="384048" cy="384048"/>
           </a:xfrm>
           <a:prstGeom prst="ellipse">
@@ -27035,7 +26667,7 @@
         </p:nvSpPr>
         <p:spPr>
           <a:xfrm>
-            <a:off x="8264956" y="1188720"/>
+            <a:off x="8264956" y="1188719"/>
             <a:ext cx="384048" cy="384048"/>
           </a:xfrm>
           <a:prstGeom prst="rect">
@@ -27075,7 +26707,7 @@
         </p:nvSpPr>
         <p:spPr>
           <a:xfrm>
-            <a:off x="8264956" y="1691640"/>
+            <a:off x="8264956" y="1691639"/>
             <a:ext cx="3240938" cy="274320"/>
           </a:xfrm>
           <a:prstGeom prst="rect">
@@ -27116,7 +26748,7 @@
         <p:spPr>
           <a:xfrm>
             <a:off x="8264956" y="2039112"/>
-            <a:ext cx="3240938" cy="320040"/>
+            <a:ext cx="3240938" cy="274320"/>
           </a:xfrm>
           <a:prstGeom prst="rect">
             <a:avLst/>
@@ -27155,8 +26787,8 @@
         </p:nvSpPr>
         <p:spPr>
           <a:xfrm>
-            <a:off x="8264956" y="2377440"/>
-            <a:ext cx="3240938" cy="320040"/>
+            <a:off x="8264956" y="2331720"/>
+            <a:ext cx="3240938" cy="274320"/>
           </a:xfrm>
           <a:prstGeom prst="rect">
             <a:avLst/>
@@ -27195,8 +26827,8 @@
         </p:nvSpPr>
         <p:spPr>
           <a:xfrm>
-            <a:off x="8264956" y="2715768"/>
-            <a:ext cx="3240938" cy="320040"/>
+            <a:off x="8264956" y="2624327"/>
+            <a:ext cx="3240938" cy="274320"/>
           </a:xfrm>
           <a:prstGeom prst="rect">
             <a:avLst/>
@@ -27235,8 +26867,8 @@
         </p:nvSpPr>
         <p:spPr>
           <a:xfrm>
-            <a:off x="8264956" y="3054096"/>
-            <a:ext cx="3240938" cy="320040"/>
+            <a:off x="8264956" y="2916935"/>
+            <a:ext cx="3240938" cy="274320"/>
           </a:xfrm>
           <a:prstGeom prst="rect">
             <a:avLst/>
@@ -27275,8 +26907,8 @@
         </p:nvSpPr>
         <p:spPr>
           <a:xfrm>
-            <a:off x="8264956" y="3392424"/>
-            <a:ext cx="3240938" cy="320040"/>
+            <a:off x="8264956" y="3209543"/>
+            <a:ext cx="3240938" cy="274320"/>
           </a:xfrm>
           <a:prstGeom prst="rect">
             <a:avLst/>
@@ -27315,7 +26947,7 @@
         </p:nvSpPr>
         <p:spPr>
           <a:xfrm>
-            <a:off x="0" y="6629400"/>
+            <a:off x="0" y="6400800"/>
             <a:ext cx="12191695" cy="27432"/>
           </a:xfrm>
           <a:prstGeom prst="rect">
@@ -27358,7 +26990,7 @@
         </p:nvSpPr>
         <p:spPr>
           <a:xfrm>
-            <a:off x="548640" y="6473952"/>
+            <a:off x="548640" y="6455664"/>
             <a:ext cx="3657600" cy="201168"/>
           </a:xfrm>
           <a:prstGeom prst="rect">
@@ -27398,7 +27030,7 @@
         </p:nvSpPr>
         <p:spPr>
           <a:xfrm>
-            <a:off x="11277295" y="6473952"/>
+            <a:off x="11277295" y="6455664"/>
             <a:ext cx="731520" cy="201168"/>
           </a:xfrm>
           <a:prstGeom prst="rect">
@@ -27600,7 +27232,7 @@
             <a:avLst/>
           </a:prstGeom>
           <a:solidFill>
-            <a:srgbClr val="0E203E"/>
+            <a:srgbClr val="12294A"/>
           </a:solidFill>
           <a:ln>
             <a:noFill/>
@@ -27835,46 +27467,6 @@
           <a:lstStyle/>
           <a:p>
             <a:pPr algn="ctr"/>
-          </a:p>
-        </p:txBody>
-      </p:sp>
-      <p:sp>
-        <p:nvSpPr>
-          <p:cNvPr id="11" name="TextBox 10"/>
-          <p:cNvSpPr txBox="1"/>
-          <p:nvPr/>
-        </p:nvSpPr>
-        <p:spPr>
-          <a:xfrm>
-            <a:off x="11277295" y="6473952"/>
-            <a:ext cx="731520" cy="201168"/>
-          </a:xfrm>
-          <a:prstGeom prst="rect">
-            <a:avLst/>
-          </a:prstGeom>
-          <a:noFill/>
-        </p:spPr>
-        <p:txBody>
-          <a:bodyPr wrap="square"/>
-          <a:lstStyle/>
-          <a:p>
-            <a:pPr algn="r">
-              <a:spcBef>
-                <a:spcPts val="0"/>
-              </a:spcBef>
-              <a:spcAft>
-                <a:spcPts val="0"/>
-              </a:spcAft>
-              <a:defRPr sz="800" b="0">
-                <a:solidFill>
-                  <a:srgbClr val="9CA3AF"/>
-                </a:solidFill>
-                <a:latin typeface="Calibri"/>
-              </a:defRPr>
-            </a:pPr>
-            <a:r>
-              <a:t>30</a:t>
-            </a:r>
           </a:p>
         </p:txBody>
       </p:sp>
@@ -27956,7 +27548,7 @@
         <p:spPr>
           <a:xfrm>
             <a:off x="0" y="32004"/>
-            <a:ext cx="12191695" cy="822960"/>
+            <a:ext cx="12191695" cy="822959"/>
           </a:xfrm>
           <a:prstGeom prst="rect">
             <a:avLst/>
@@ -27999,7 +27591,7 @@
         <p:spPr>
           <a:xfrm>
             <a:off x="548640" y="109728"/>
-            <a:ext cx="64008" cy="548640"/>
+            <a:ext cx="64008" cy="502920"/>
           </a:xfrm>
           <a:prstGeom prst="rect">
             <a:avLst/>
@@ -28082,7 +27674,7 @@
         <p:spPr>
           <a:xfrm>
             <a:off x="749808" y="576072"/>
-            <a:ext cx="10637215" cy="274320"/>
+            <a:ext cx="10637215" cy="256032"/>
           </a:xfrm>
           <a:prstGeom prst="rect">
             <a:avLst/>
@@ -28108,7 +27700,7 @@
               </a:defRPr>
             </a:pPr>
             <a:r>
-              <a:t>Pasal 36–37 • Penutup</a:t>
+              <a:t>Pasal 36–37</a:t>
             </a:r>
           </a:p>
         </p:txBody>
@@ -28122,7 +27714,7 @@
         <p:spPr>
           <a:xfrm>
             <a:off x="548640" y="1051560"/>
-            <a:ext cx="5410047" cy="5166360"/>
+            <a:ext cx="5410047" cy="5349240"/>
           </a:xfrm>
           <a:prstGeom prst="roundRect">
             <a:avLst>
@@ -28169,7 +27761,7 @@
         <p:spPr>
           <a:xfrm>
             <a:off x="548640" y="1051560"/>
-            <a:ext cx="45720" cy="5166360"/>
+            <a:ext cx="45720" cy="5349240"/>
           </a:xfrm>
           <a:prstGeom prst="rect">
             <a:avLst/>
@@ -28211,7 +27803,7 @@
         </p:nvSpPr>
         <p:spPr>
           <a:xfrm>
-            <a:off x="731520" y="1188720"/>
+            <a:off x="731520" y="1188719"/>
             <a:ext cx="5090007" cy="274320"/>
           </a:xfrm>
           <a:prstGeom prst="rect">
@@ -28252,7 +27844,7 @@
         <p:spPr>
           <a:xfrm>
             <a:off x="731520" y="1481328"/>
-            <a:ext cx="5090007" cy="201168"/>
+            <a:ext cx="5090007" cy="228600"/>
           </a:xfrm>
           <a:prstGeom prst="rect">
             <a:avLst/>
@@ -28291,8 +27883,8 @@
         </p:nvSpPr>
         <p:spPr>
           <a:xfrm>
-            <a:off x="731520" y="1700784"/>
-            <a:ext cx="5090007" cy="201168"/>
+            <a:off x="731520" y="1719072"/>
+            <a:ext cx="5090007" cy="228600"/>
           </a:xfrm>
           <a:prstGeom prst="rect">
             <a:avLst/>
@@ -28331,8 +27923,8 @@
         </p:nvSpPr>
         <p:spPr>
           <a:xfrm>
-            <a:off x="731520" y="1920240"/>
-            <a:ext cx="5090007" cy="201168"/>
+            <a:off x="731520" y="1956815"/>
+            <a:ext cx="5090007" cy="228600"/>
           </a:xfrm>
           <a:prstGeom prst="rect">
             <a:avLst/>
@@ -28371,8 +27963,8 @@
         </p:nvSpPr>
         <p:spPr>
           <a:xfrm>
-            <a:off x="731520" y="2139696"/>
-            <a:ext cx="5090007" cy="201168"/>
+            <a:off x="731520" y="2194559"/>
+            <a:ext cx="5090007" cy="228600"/>
           </a:xfrm>
           <a:prstGeom prst="rect">
             <a:avLst/>
@@ -28412,7 +28004,7 @@
         <p:spPr>
           <a:xfrm>
             <a:off x="6233007" y="1051560"/>
-            <a:ext cx="5410047" cy="5166360"/>
+            <a:ext cx="5410047" cy="5349240"/>
           </a:xfrm>
           <a:prstGeom prst="roundRect">
             <a:avLst>
@@ -28459,7 +28051,7 @@
         <p:spPr>
           <a:xfrm>
             <a:off x="6233007" y="1051560"/>
-            <a:ext cx="45720" cy="5166360"/>
+            <a:ext cx="45720" cy="5349240"/>
           </a:xfrm>
           <a:prstGeom prst="rect">
             <a:avLst/>
@@ -28501,7 +28093,7 @@
         </p:nvSpPr>
         <p:spPr>
           <a:xfrm>
-            <a:off x="6415887" y="1188720"/>
+            <a:off x="6415887" y="1188719"/>
             <a:ext cx="5090007" cy="274320"/>
           </a:xfrm>
           <a:prstGeom prst="rect">
@@ -28542,7 +28134,7 @@
         <p:spPr>
           <a:xfrm>
             <a:off x="6415887" y="1481328"/>
-            <a:ext cx="5090007" cy="201168"/>
+            <a:ext cx="5090007" cy="228600"/>
           </a:xfrm>
           <a:prstGeom prst="rect">
             <a:avLst/>
@@ -28581,8 +28173,8 @@
         </p:nvSpPr>
         <p:spPr>
           <a:xfrm>
-            <a:off x="6415887" y="1700784"/>
-            <a:ext cx="5090007" cy="201168"/>
+            <a:off x="6415887" y="1719072"/>
+            <a:ext cx="5090007" cy="228600"/>
           </a:xfrm>
           <a:prstGeom prst="rect">
             <a:avLst/>
@@ -28621,8 +28213,8 @@
         </p:nvSpPr>
         <p:spPr>
           <a:xfrm>
-            <a:off x="6415887" y="1920240"/>
-            <a:ext cx="5090007" cy="201168"/>
+            <a:off x="6415887" y="1956815"/>
+            <a:ext cx="5090007" cy="228600"/>
           </a:xfrm>
           <a:prstGeom prst="rect">
             <a:avLst/>
@@ -28661,8 +28253,8 @@
         </p:nvSpPr>
         <p:spPr>
           <a:xfrm>
-            <a:off x="6415887" y="2139696"/>
-            <a:ext cx="5090007" cy="201168"/>
+            <a:off x="6415887" y="2194559"/>
+            <a:ext cx="5090007" cy="228600"/>
           </a:xfrm>
           <a:prstGeom prst="rect">
             <a:avLst/>
@@ -28701,8 +28293,8 @@
         </p:nvSpPr>
         <p:spPr>
           <a:xfrm>
-            <a:off x="6415887" y="2359152"/>
-            <a:ext cx="5090007" cy="201168"/>
+            <a:off x="6415887" y="2432303"/>
+            <a:ext cx="5090007" cy="228600"/>
           </a:xfrm>
           <a:prstGeom prst="rect">
             <a:avLst/>
@@ -28741,8 +28333,8 @@
         </p:nvSpPr>
         <p:spPr>
           <a:xfrm>
-            <a:off x="6415887" y="2578608"/>
-            <a:ext cx="5090007" cy="201168"/>
+            <a:off x="6415887" y="2670047"/>
+            <a:ext cx="5090007" cy="228600"/>
           </a:xfrm>
           <a:prstGeom prst="rect">
             <a:avLst/>
@@ -28781,8 +28373,8 @@
         </p:nvSpPr>
         <p:spPr>
           <a:xfrm>
-            <a:off x="6415887" y="2798064"/>
-            <a:ext cx="5090007" cy="201168"/>
+            <a:off x="6415887" y="2907791"/>
+            <a:ext cx="5090007" cy="228600"/>
           </a:xfrm>
           <a:prstGeom prst="rect">
             <a:avLst/>
@@ -28821,7 +28413,7 @@
         </p:nvSpPr>
         <p:spPr>
           <a:xfrm>
-            <a:off x="0" y="6629400"/>
+            <a:off x="0" y="6400800"/>
             <a:ext cx="12191695" cy="27432"/>
           </a:xfrm>
           <a:prstGeom prst="rect">
@@ -28864,7 +28456,7 @@
         </p:nvSpPr>
         <p:spPr>
           <a:xfrm>
-            <a:off x="548640" y="6473952"/>
+            <a:off x="548640" y="6455664"/>
             <a:ext cx="3657600" cy="201168"/>
           </a:xfrm>
           <a:prstGeom prst="rect">
@@ -28904,7 +28496,7 @@
         </p:nvSpPr>
         <p:spPr>
           <a:xfrm>
-            <a:off x="11277295" y="6473952"/>
+            <a:off x="11277295" y="6455664"/>
             <a:ext cx="731520" cy="201168"/>
           </a:xfrm>
           <a:prstGeom prst="rect">
@@ -29306,8 +28898,8 @@
         </p:nvSpPr>
         <p:spPr>
           <a:xfrm>
-            <a:off x="0" y="6629400"/>
-            <a:ext cx="12191695" cy="228600"/>
+            <a:off x="0" y="6656832"/>
+            <a:ext cx="12191695" cy="201168"/>
           </a:xfrm>
           <a:prstGeom prst="rect">
             <a:avLst/>
@@ -29419,7 +29011,7 @@
         <p:spPr>
           <a:xfrm>
             <a:off x="0" y="32004"/>
-            <a:ext cx="12191695" cy="822960"/>
+            <a:ext cx="12191695" cy="822959"/>
           </a:xfrm>
           <a:prstGeom prst="rect">
             <a:avLst/>
@@ -29462,7 +29054,7 @@
         <p:spPr>
           <a:xfrm>
             <a:off x="548640" y="109728"/>
-            <a:ext cx="64008" cy="548640"/>
+            <a:ext cx="64008" cy="502920"/>
           </a:xfrm>
           <a:prstGeom prst="rect">
             <a:avLst/>
@@ -29545,7 +29137,7 @@
         <p:spPr>
           <a:xfrm>
             <a:off x="749808" y="576072"/>
-            <a:ext cx="10637215" cy="274320"/>
+            <a:ext cx="10637215" cy="256032"/>
           </a:xfrm>
           <a:prstGeom prst="rect">
             <a:avLst/>
@@ -29571,7 +29163,7 @@
               </a:defRPr>
             </a:pPr>
             <a:r>
-              <a:t>Pasal 1 • 7 Definisi Kunci</a:t>
+              <a:t>Pasal 1</a:t>
             </a:r>
           </a:p>
         </p:txBody>
@@ -29674,7 +29266,7 @@
         </p:nvSpPr>
         <p:spPr>
           <a:xfrm>
-            <a:off x="685800" y="1188720"/>
+            <a:off x="685800" y="1188719"/>
             <a:ext cx="384048" cy="384048"/>
           </a:xfrm>
           <a:prstGeom prst="ellipse">
@@ -29717,7 +29309,7 @@
         </p:nvSpPr>
         <p:spPr>
           <a:xfrm>
-            <a:off x="685800" y="1188720"/>
+            <a:off x="685800" y="1188719"/>
             <a:ext cx="384048" cy="384048"/>
           </a:xfrm>
           <a:prstGeom prst="rect">
@@ -29757,7 +29349,7 @@
         </p:nvSpPr>
         <p:spPr>
           <a:xfrm>
-            <a:off x="685800" y="1691640"/>
+            <a:off x="685800" y="1691639"/>
             <a:ext cx="2293543" cy="274320"/>
           </a:xfrm>
           <a:prstGeom prst="rect">
@@ -29798,7 +29390,7 @@
         <p:spPr>
           <a:xfrm>
             <a:off x="685800" y="2039112"/>
-            <a:ext cx="2293543" cy="320040"/>
+            <a:ext cx="2293543" cy="274320"/>
           </a:xfrm>
           <a:prstGeom prst="rect">
             <a:avLst/>
@@ -29927,7 +29519,7 @@
         </p:nvSpPr>
         <p:spPr>
           <a:xfrm>
-            <a:off x="3527983" y="1188720"/>
+            <a:off x="3527983" y="1188719"/>
             <a:ext cx="384048" cy="384048"/>
           </a:xfrm>
           <a:prstGeom prst="ellipse">
@@ -29970,7 +29562,7 @@
         </p:nvSpPr>
         <p:spPr>
           <a:xfrm>
-            <a:off x="3527983" y="1188720"/>
+            <a:off x="3527983" y="1188719"/>
             <a:ext cx="384048" cy="384048"/>
           </a:xfrm>
           <a:prstGeom prst="rect">
@@ -30010,7 +29602,7 @@
         </p:nvSpPr>
         <p:spPr>
           <a:xfrm>
-            <a:off x="3527983" y="1691640"/>
+            <a:off x="3527983" y="1691639"/>
             <a:ext cx="2293543" cy="274320"/>
           </a:xfrm>
           <a:prstGeom prst="rect">
@@ -30051,7 +29643,7 @@
         <p:spPr>
           <a:xfrm>
             <a:off x="3527983" y="2039112"/>
-            <a:ext cx="2293543" cy="320040"/>
+            <a:ext cx="2293543" cy="338328"/>
           </a:xfrm>
           <a:prstGeom prst="rect">
             <a:avLst/>
@@ -30180,7 +29772,7 @@
         </p:nvSpPr>
         <p:spPr>
           <a:xfrm>
-            <a:off x="6370167" y="1188720"/>
+            <a:off x="6370167" y="1188719"/>
             <a:ext cx="384048" cy="384048"/>
           </a:xfrm>
           <a:prstGeom prst="ellipse">
@@ -30223,7 +29815,7 @@
         </p:nvSpPr>
         <p:spPr>
           <a:xfrm>
-            <a:off x="6370167" y="1188720"/>
+            <a:off x="6370167" y="1188719"/>
             <a:ext cx="384048" cy="384048"/>
           </a:xfrm>
           <a:prstGeom prst="rect">
@@ -30263,7 +29855,7 @@
         </p:nvSpPr>
         <p:spPr>
           <a:xfrm>
-            <a:off x="6370167" y="1691640"/>
+            <a:off x="6370167" y="1691639"/>
             <a:ext cx="2293543" cy="274320"/>
           </a:xfrm>
           <a:prstGeom prst="rect">
@@ -30304,7 +29896,7 @@
         <p:spPr>
           <a:xfrm>
             <a:off x="6370167" y="2039112"/>
-            <a:ext cx="2293543" cy="320040"/>
+            <a:ext cx="2293543" cy="338328"/>
           </a:xfrm>
           <a:prstGeom prst="rect">
             <a:avLst/>
@@ -30433,7 +30025,7 @@
         </p:nvSpPr>
         <p:spPr>
           <a:xfrm>
-            <a:off x="9212351" y="1188720"/>
+            <a:off x="9212351" y="1188719"/>
             <a:ext cx="384048" cy="384048"/>
           </a:xfrm>
           <a:prstGeom prst="ellipse">
@@ -30476,7 +30068,7 @@
         </p:nvSpPr>
         <p:spPr>
           <a:xfrm>
-            <a:off x="9212351" y="1188720"/>
+            <a:off x="9212351" y="1188719"/>
             <a:ext cx="384048" cy="384048"/>
           </a:xfrm>
           <a:prstGeom prst="rect">
@@ -30516,7 +30108,7 @@
         </p:nvSpPr>
         <p:spPr>
           <a:xfrm>
-            <a:off x="9212351" y="1691640"/>
+            <a:off x="9212351" y="1691639"/>
             <a:ext cx="2293543" cy="274320"/>
           </a:xfrm>
           <a:prstGeom prst="rect">
@@ -30557,7 +30149,7 @@
         <p:spPr>
           <a:xfrm>
             <a:off x="9212351" y="2039112"/>
-            <a:ext cx="2293543" cy="320040"/>
+            <a:ext cx="2293543" cy="338328"/>
           </a:xfrm>
           <a:prstGeom prst="rect">
             <a:avLst/>
@@ -30596,7 +30188,7 @@
         </p:nvSpPr>
         <p:spPr>
           <a:xfrm>
-            <a:off x="548640" y="3863340"/>
+            <a:off x="548640" y="3863339"/>
             <a:ext cx="2567863" cy="2537460"/>
           </a:xfrm>
           <a:prstGeom prst="roundRect">
@@ -30643,7 +30235,7 @@
         </p:nvSpPr>
         <p:spPr>
           <a:xfrm>
-            <a:off x="548640" y="3863340"/>
+            <a:off x="548640" y="3863339"/>
             <a:ext cx="45720" cy="2537460"/>
           </a:xfrm>
           <a:prstGeom prst="rect">
@@ -30810,7 +30402,7 @@
         <p:spPr>
           <a:xfrm>
             <a:off x="685800" y="4850892"/>
-            <a:ext cx="2293543" cy="320040"/>
+            <a:ext cx="2293543" cy="338328"/>
           </a:xfrm>
           <a:prstGeom prst="rect">
             <a:avLst/>
@@ -30849,7 +30441,7 @@
         </p:nvSpPr>
         <p:spPr>
           <a:xfrm>
-            <a:off x="3390823" y="3863340"/>
+            <a:off x="3390823" y="3863339"/>
             <a:ext cx="2567863" cy="2537460"/>
           </a:xfrm>
           <a:prstGeom prst="roundRect">
@@ -30896,7 +30488,7 @@
         </p:nvSpPr>
         <p:spPr>
           <a:xfrm>
-            <a:off x="3390823" y="3863340"/>
+            <a:off x="3390823" y="3863339"/>
             <a:ext cx="45720" cy="2537460"/>
           </a:xfrm>
           <a:prstGeom prst="rect">
@@ -31063,7 +30655,7 @@
         <p:spPr>
           <a:xfrm>
             <a:off x="3527983" y="4850892"/>
-            <a:ext cx="2293543" cy="320040"/>
+            <a:ext cx="2293543" cy="274320"/>
           </a:xfrm>
           <a:prstGeom prst="rect">
             <a:avLst/>
@@ -31102,7 +30694,7 @@
         </p:nvSpPr>
         <p:spPr>
           <a:xfrm>
-            <a:off x="6233007" y="3863340"/>
+            <a:off x="6233007" y="3863339"/>
             <a:ext cx="2567863" cy="2537460"/>
           </a:xfrm>
           <a:prstGeom prst="roundRect">
@@ -31149,7 +30741,7 @@
         </p:nvSpPr>
         <p:spPr>
           <a:xfrm>
-            <a:off x="6233007" y="3863340"/>
+            <a:off x="6233007" y="3863339"/>
             <a:ext cx="45720" cy="2537460"/>
           </a:xfrm>
           <a:prstGeom prst="rect">
@@ -31316,7 +30908,7 @@
         <p:spPr>
           <a:xfrm>
             <a:off x="6370167" y="4850892"/>
-            <a:ext cx="2293543" cy="320040"/>
+            <a:ext cx="2293543" cy="338328"/>
           </a:xfrm>
           <a:prstGeom prst="rect">
             <a:avLst/>
@@ -31355,7 +30947,7 @@
         </p:nvSpPr>
         <p:spPr>
           <a:xfrm>
-            <a:off x="0" y="6629400"/>
+            <a:off x="0" y="6400800"/>
             <a:ext cx="12191695" cy="27432"/>
           </a:xfrm>
           <a:prstGeom prst="rect">
@@ -31398,7 +30990,7 @@
         </p:nvSpPr>
         <p:spPr>
           <a:xfrm>
-            <a:off x="548640" y="6473952"/>
+            <a:off x="548640" y="6455664"/>
             <a:ext cx="3657600" cy="201168"/>
           </a:xfrm>
           <a:prstGeom prst="rect">
@@ -31438,7 +31030,7 @@
         </p:nvSpPr>
         <p:spPr>
           <a:xfrm>
-            <a:off x="11277295" y="6473952"/>
+            <a:off x="11277295" y="6455664"/>
             <a:ext cx="731520" cy="201168"/>
           </a:xfrm>
           <a:prstGeom prst="rect">
@@ -31640,7 +31232,7 @@
             <a:avLst/>
           </a:prstGeom>
           <a:solidFill>
-            <a:srgbClr val="0E203E"/>
+            <a:srgbClr val="12294A"/>
           </a:solidFill>
           <a:ln>
             <a:noFill/>
@@ -31790,7 +31382,7 @@
               </a:defRPr>
             </a:pPr>
             <a:r>
-              <a:t>10 Jenis Reklame + 8 Pengecualian + 2 Subjek Pajak</a:t>
+              <a:t>10 Jenis Reklame Wajib Pajak + 8 Pengecualian</a:t>
             </a:r>
           </a:p>
         </p:txBody>
@@ -31875,46 +31467,6 @@
           <a:lstStyle/>
           <a:p>
             <a:pPr algn="ctr"/>
-          </a:p>
-        </p:txBody>
-      </p:sp>
-      <p:sp>
-        <p:nvSpPr>
-          <p:cNvPr id="11" name="TextBox 10"/>
-          <p:cNvSpPr txBox="1"/>
-          <p:nvPr/>
-        </p:nvSpPr>
-        <p:spPr>
-          <a:xfrm>
-            <a:off x="11277295" y="6473952"/>
-            <a:ext cx="731520" cy="201168"/>
-          </a:xfrm>
-          <a:prstGeom prst="rect">
-            <a:avLst/>
-          </a:prstGeom>
-          <a:noFill/>
-        </p:spPr>
-        <p:txBody>
-          <a:bodyPr wrap="square"/>
-          <a:lstStyle/>
-          <a:p>
-            <a:pPr algn="r">
-              <a:spcBef>
-                <a:spcPts val="0"/>
-              </a:spcBef>
-              <a:spcAft>
-                <a:spcPts val="0"/>
-              </a:spcAft>
-              <a:defRPr sz="800" b="0">
-                <a:solidFill>
-                  <a:srgbClr val="9CA3AF"/>
-                </a:solidFill>
-                <a:latin typeface="Calibri"/>
-              </a:defRPr>
-            </a:pPr>
-            <a:r>
-              <a:t>4</a:t>
-            </a:r>
           </a:p>
         </p:txBody>
       </p:sp>
@@ -31996,7 +31548,7 @@
         <p:spPr>
           <a:xfrm>
             <a:off x="0" y="32004"/>
-            <a:ext cx="12191695" cy="822960"/>
+            <a:ext cx="12191695" cy="822959"/>
           </a:xfrm>
           <a:prstGeom prst="rect">
             <a:avLst/>
@@ -32039,7 +31591,7 @@
         <p:spPr>
           <a:xfrm>
             <a:off x="548640" y="109728"/>
-            <a:ext cx="64008" cy="548640"/>
+            <a:ext cx="64008" cy="502920"/>
           </a:xfrm>
           <a:prstGeom prst="rect">
             <a:avLst/>
@@ -32122,7 +31674,7 @@
         <p:spPr>
           <a:xfrm>
             <a:off x="749808" y="576072"/>
-            <a:ext cx="10637215" cy="274320"/>
+            <a:ext cx="10637215" cy="256032"/>
           </a:xfrm>
           <a:prstGeom prst="rect">
             <a:avLst/>
@@ -32148,7 +31700,7 @@
               </a:defRPr>
             </a:pPr>
             <a:r>
-              <a:t>Pasal 2–4 • 10 Jenis + 8 Pengecualian</a:t>
+              <a:t>Pasal 2–4</a:t>
             </a:r>
           </a:p>
         </p:txBody>
@@ -32251,7 +31803,7 @@
         </p:nvSpPr>
         <p:spPr>
           <a:xfrm>
-            <a:off x="685800" y="1188720"/>
+            <a:off x="685800" y="1188719"/>
             <a:ext cx="384048" cy="384048"/>
           </a:xfrm>
           <a:prstGeom prst="ellipse">
@@ -32294,7 +31846,7 @@
         </p:nvSpPr>
         <p:spPr>
           <a:xfrm>
-            <a:off x="685800" y="1188720"/>
+            <a:off x="685800" y="1188719"/>
             <a:ext cx="384048" cy="384048"/>
           </a:xfrm>
           <a:prstGeom prst="rect">
@@ -32334,7 +31886,7 @@
         </p:nvSpPr>
         <p:spPr>
           <a:xfrm>
-            <a:off x="685800" y="1691640"/>
+            <a:off x="685800" y="1691639"/>
             <a:ext cx="5135727" cy="274320"/>
           </a:xfrm>
           <a:prstGeom prst="rect">
@@ -32375,7 +31927,7 @@
         <p:spPr>
           <a:xfrm>
             <a:off x="685800" y="2039112"/>
-            <a:ext cx="5135727" cy="320040"/>
+            <a:ext cx="5135727" cy="274320"/>
           </a:xfrm>
           <a:prstGeom prst="rect">
             <a:avLst/>
@@ -32414,8 +31966,8 @@
         </p:nvSpPr>
         <p:spPr>
           <a:xfrm>
-            <a:off x="685800" y="2377440"/>
-            <a:ext cx="5135727" cy="320040"/>
+            <a:off x="685800" y="2331720"/>
+            <a:ext cx="5135727" cy="274320"/>
           </a:xfrm>
           <a:prstGeom prst="rect">
             <a:avLst/>
@@ -32454,8 +32006,8 @@
         </p:nvSpPr>
         <p:spPr>
           <a:xfrm>
-            <a:off x="685800" y="2715768"/>
-            <a:ext cx="5135727" cy="320040"/>
+            <a:off x="685800" y="2624327"/>
+            <a:ext cx="5135727" cy="274320"/>
           </a:xfrm>
           <a:prstGeom prst="rect">
             <a:avLst/>
@@ -32494,8 +32046,8 @@
         </p:nvSpPr>
         <p:spPr>
           <a:xfrm>
-            <a:off x="685800" y="3054096"/>
-            <a:ext cx="5135727" cy="320040"/>
+            <a:off x="685800" y="2916935"/>
+            <a:ext cx="5135727" cy="274320"/>
           </a:xfrm>
           <a:prstGeom prst="rect">
             <a:avLst/>
@@ -32534,8 +32086,8 @@
         </p:nvSpPr>
         <p:spPr>
           <a:xfrm>
-            <a:off x="685800" y="3392424"/>
-            <a:ext cx="5135727" cy="320040"/>
+            <a:off x="685800" y="3209543"/>
+            <a:ext cx="5135727" cy="274320"/>
           </a:xfrm>
           <a:prstGeom prst="rect">
             <a:avLst/>
@@ -32574,8 +32126,8 @@
         </p:nvSpPr>
         <p:spPr>
           <a:xfrm>
-            <a:off x="685800" y="3730752"/>
-            <a:ext cx="5135727" cy="320040"/>
+            <a:off x="685800" y="3502151"/>
+            <a:ext cx="5135727" cy="274320"/>
           </a:xfrm>
           <a:prstGeom prst="rect">
             <a:avLst/>
@@ -32614,8 +32166,8 @@
         </p:nvSpPr>
         <p:spPr>
           <a:xfrm>
-            <a:off x="685800" y="4069080"/>
-            <a:ext cx="5135727" cy="320040"/>
+            <a:off x="685800" y="3794759"/>
+            <a:ext cx="5135727" cy="274320"/>
           </a:xfrm>
           <a:prstGeom prst="rect">
             <a:avLst/>
@@ -32654,8 +32206,8 @@
         </p:nvSpPr>
         <p:spPr>
           <a:xfrm>
-            <a:off x="685800" y="4407408"/>
-            <a:ext cx="5135727" cy="320040"/>
+            <a:off x="685800" y="4087368"/>
+            <a:ext cx="5135727" cy="274320"/>
           </a:xfrm>
           <a:prstGeom prst="rect">
             <a:avLst/>
@@ -32694,8 +32246,8 @@
         </p:nvSpPr>
         <p:spPr>
           <a:xfrm>
-            <a:off x="685800" y="4745736"/>
-            <a:ext cx="5135727" cy="320040"/>
+            <a:off x="685800" y="4379976"/>
+            <a:ext cx="5135727" cy="274320"/>
           </a:xfrm>
           <a:prstGeom prst="rect">
             <a:avLst/>
@@ -32734,8 +32286,8 @@
         </p:nvSpPr>
         <p:spPr>
           <a:xfrm>
-            <a:off x="685800" y="5084064"/>
-            <a:ext cx="5135727" cy="320040"/>
+            <a:off x="685800" y="4672584"/>
+            <a:ext cx="5135727" cy="274320"/>
           </a:xfrm>
           <a:prstGeom prst="rect">
             <a:avLst/>
@@ -32864,7 +32416,7 @@
         </p:nvSpPr>
         <p:spPr>
           <a:xfrm>
-            <a:off x="6370167" y="1188720"/>
+            <a:off x="6370167" y="1188719"/>
             <a:ext cx="384048" cy="384048"/>
           </a:xfrm>
           <a:prstGeom prst="ellipse">
@@ -32907,7 +32459,7 @@
         </p:nvSpPr>
         <p:spPr>
           <a:xfrm>
-            <a:off x="6370167" y="1188720"/>
+            <a:off x="6370167" y="1188719"/>
             <a:ext cx="384048" cy="384048"/>
           </a:xfrm>
           <a:prstGeom prst="rect">
@@ -32947,7 +32499,7 @@
         </p:nvSpPr>
         <p:spPr>
           <a:xfrm>
-            <a:off x="6370167" y="1691640"/>
+            <a:off x="6370167" y="1691639"/>
             <a:ext cx="5135727" cy="274320"/>
           </a:xfrm>
           <a:prstGeom prst="rect">
@@ -32988,7 +32540,7 @@
         <p:spPr>
           <a:xfrm>
             <a:off x="6370167" y="2039112"/>
-            <a:ext cx="5135727" cy="320040"/>
+            <a:ext cx="5135727" cy="274320"/>
           </a:xfrm>
           <a:prstGeom prst="rect">
             <a:avLst/>
@@ -33027,8 +32579,8 @@
         </p:nvSpPr>
         <p:spPr>
           <a:xfrm>
-            <a:off x="6370167" y="2377440"/>
-            <a:ext cx="5135727" cy="320040"/>
+            <a:off x="6370167" y="2331720"/>
+            <a:ext cx="5135727" cy="274320"/>
           </a:xfrm>
           <a:prstGeom prst="rect">
             <a:avLst/>
@@ -33067,8 +32619,8 @@
         </p:nvSpPr>
         <p:spPr>
           <a:xfrm>
-            <a:off x="6370167" y="2715768"/>
-            <a:ext cx="5135727" cy="320040"/>
+            <a:off x="6370167" y="2624327"/>
+            <a:ext cx="5135727" cy="274320"/>
           </a:xfrm>
           <a:prstGeom prst="rect">
             <a:avLst/>
@@ -33107,8 +32659,8 @@
         </p:nvSpPr>
         <p:spPr>
           <a:xfrm>
-            <a:off x="6370167" y="3054096"/>
-            <a:ext cx="5135727" cy="320040"/>
+            <a:off x="6370167" y="2916935"/>
+            <a:ext cx="5135727" cy="274320"/>
           </a:xfrm>
           <a:prstGeom prst="rect">
             <a:avLst/>
@@ -33147,8 +32699,8 @@
         </p:nvSpPr>
         <p:spPr>
           <a:xfrm>
-            <a:off x="6370167" y="3392424"/>
-            <a:ext cx="5135727" cy="320040"/>
+            <a:off x="6370167" y="3209543"/>
+            <a:ext cx="5135727" cy="274320"/>
           </a:xfrm>
           <a:prstGeom prst="rect">
             <a:avLst/>
@@ -33187,8 +32739,8 @@
         </p:nvSpPr>
         <p:spPr>
           <a:xfrm>
-            <a:off x="6370167" y="3730752"/>
-            <a:ext cx="5135727" cy="320040"/>
+            <a:off x="6370167" y="3502151"/>
+            <a:ext cx="5135727" cy="274320"/>
           </a:xfrm>
           <a:prstGeom prst="rect">
             <a:avLst/>
@@ -33227,8 +32779,8 @@
         </p:nvSpPr>
         <p:spPr>
           <a:xfrm>
-            <a:off x="6370167" y="4069080"/>
-            <a:ext cx="5135727" cy="320040"/>
+            <a:off x="6370167" y="3794759"/>
+            <a:ext cx="5135727" cy="274320"/>
           </a:xfrm>
           <a:prstGeom prst="rect">
             <a:avLst/>
@@ -33267,8 +32819,8 @@
         </p:nvSpPr>
         <p:spPr>
           <a:xfrm>
-            <a:off x="6370167" y="4407408"/>
-            <a:ext cx="5135727" cy="320040"/>
+            <a:off x="6370167" y="4087368"/>
+            <a:ext cx="5135727" cy="274320"/>
           </a:xfrm>
           <a:prstGeom prst="rect">
             <a:avLst/>
@@ -33307,7 +32859,7 @@
         </p:nvSpPr>
         <p:spPr>
           <a:xfrm>
-            <a:off x="0" y="6629400"/>
+            <a:off x="0" y="6400800"/>
             <a:ext cx="12191695" cy="27432"/>
           </a:xfrm>
           <a:prstGeom prst="rect">
@@ -33350,7 +32902,7 @@
         </p:nvSpPr>
         <p:spPr>
           <a:xfrm>
-            <a:off x="548640" y="6473952"/>
+            <a:off x="548640" y="6455664"/>
             <a:ext cx="3657600" cy="201168"/>
           </a:xfrm>
           <a:prstGeom prst="rect">
@@ -33390,7 +32942,7 @@
         </p:nvSpPr>
         <p:spPr>
           <a:xfrm>
-            <a:off x="11277295" y="6473952"/>
+            <a:off x="11277295" y="6455664"/>
             <a:ext cx="731520" cy="201168"/>
           </a:xfrm>
           <a:prstGeom prst="rect">
@@ -33500,7 +33052,7 @@
         <p:spPr>
           <a:xfrm>
             <a:off x="0" y="32004"/>
-            <a:ext cx="12191695" cy="822960"/>
+            <a:ext cx="12191695" cy="822959"/>
           </a:xfrm>
           <a:prstGeom prst="rect">
             <a:avLst/>
@@ -33543,7 +33095,7 @@
         <p:spPr>
           <a:xfrm>
             <a:off x="548640" y="109728"/>
-            <a:ext cx="64008" cy="548640"/>
+            <a:ext cx="64008" cy="502920"/>
           </a:xfrm>
           <a:prstGeom prst="rect">
             <a:avLst/>
@@ -33626,7 +33178,7 @@
         <p:spPr>
           <a:xfrm>
             <a:off x="749808" y="576072"/>
-            <a:ext cx="10637215" cy="274320"/>
+            <a:ext cx="10637215" cy="256032"/>
           </a:xfrm>
           <a:prstGeom prst="rect">
             <a:avLst/>
@@ -33652,7 +33204,7 @@
               </a:defRPr>
             </a:pPr>
             <a:r>
-              <a:t>Pasal 3–4 • Subjek &amp; Wajib Pajak</a:t>
+              <a:t>Pasal 3–4</a:t>
             </a:r>
           </a:p>
         </p:txBody>
@@ -33755,7 +33307,7 @@
         </p:nvSpPr>
         <p:spPr>
           <a:xfrm>
-            <a:off x="685800" y="1188720"/>
+            <a:off x="685800" y="1188719"/>
             <a:ext cx="384048" cy="384048"/>
           </a:xfrm>
           <a:prstGeom prst="ellipse">
@@ -33798,7 +33350,7 @@
         </p:nvSpPr>
         <p:spPr>
           <a:xfrm>
-            <a:off x="685800" y="1188720"/>
+            <a:off x="685800" y="1188719"/>
             <a:ext cx="384048" cy="384048"/>
           </a:xfrm>
           <a:prstGeom prst="rect">
@@ -33838,7 +33390,7 @@
         </p:nvSpPr>
         <p:spPr>
           <a:xfrm>
-            <a:off x="685800" y="1691640"/>
+            <a:off x="685800" y="1691639"/>
             <a:ext cx="5135727" cy="274320"/>
           </a:xfrm>
           <a:prstGeom prst="rect">
@@ -33879,7 +33431,7 @@
         <p:spPr>
           <a:xfrm>
             <a:off x="685800" y="2039112"/>
-            <a:ext cx="5135727" cy="320040"/>
+            <a:ext cx="5135727" cy="274320"/>
           </a:xfrm>
           <a:prstGeom prst="rect">
             <a:avLst/>
@@ -33918,8 +33470,8 @@
         </p:nvSpPr>
         <p:spPr>
           <a:xfrm>
-            <a:off x="685800" y="2377440"/>
-            <a:ext cx="5135727" cy="320040"/>
+            <a:off x="685800" y="2331720"/>
+            <a:ext cx="5135727" cy="274320"/>
           </a:xfrm>
           <a:prstGeom prst="rect">
             <a:avLst/>
@@ -34048,7 +33600,7 @@
         </p:nvSpPr>
         <p:spPr>
           <a:xfrm>
-            <a:off x="6370167" y="1188720"/>
+            <a:off x="6370167" y="1188719"/>
             <a:ext cx="384048" cy="384048"/>
           </a:xfrm>
           <a:prstGeom prst="ellipse">
@@ -34091,7 +33643,7 @@
         </p:nvSpPr>
         <p:spPr>
           <a:xfrm>
-            <a:off x="6370167" y="1188720"/>
+            <a:off x="6370167" y="1188719"/>
             <a:ext cx="384048" cy="384048"/>
           </a:xfrm>
           <a:prstGeom prst="rect">
@@ -34131,7 +33683,7 @@
         </p:nvSpPr>
         <p:spPr>
           <a:xfrm>
-            <a:off x="6370167" y="1691640"/>
+            <a:off x="6370167" y="1691639"/>
             <a:ext cx="5135727" cy="274320"/>
           </a:xfrm>
           <a:prstGeom prst="rect">
@@ -34172,7 +33724,7 @@
         <p:spPr>
           <a:xfrm>
             <a:off x="6370167" y="2039112"/>
-            <a:ext cx="5135727" cy="320040"/>
+            <a:ext cx="5135727" cy="274320"/>
           </a:xfrm>
           <a:prstGeom prst="rect">
             <a:avLst/>
@@ -34211,8 +33763,8 @@
         </p:nvSpPr>
         <p:spPr>
           <a:xfrm>
-            <a:off x="6370167" y="2377440"/>
-            <a:ext cx="5135727" cy="320040"/>
+            <a:off x="6370167" y="2331720"/>
+            <a:ext cx="5135727" cy="274320"/>
           </a:xfrm>
           <a:prstGeom prst="rect">
             <a:avLst/>
@@ -34251,8 +33803,8 @@
         </p:nvSpPr>
         <p:spPr>
           <a:xfrm>
-            <a:off x="6370167" y="2715768"/>
-            <a:ext cx="5135727" cy="320040"/>
+            <a:off x="6370167" y="2624327"/>
+            <a:ext cx="5135727" cy="274320"/>
           </a:xfrm>
           <a:prstGeom prst="rect">
             <a:avLst/>
@@ -34291,8 +33843,8 @@
         </p:nvSpPr>
         <p:spPr>
           <a:xfrm>
-            <a:off x="6370167" y="3054096"/>
-            <a:ext cx="5135727" cy="320040"/>
+            <a:off x="6370167" y="2916935"/>
+            <a:ext cx="5135727" cy="274320"/>
           </a:xfrm>
           <a:prstGeom prst="rect">
             <a:avLst/>
@@ -34331,7 +33883,7 @@
         </p:nvSpPr>
         <p:spPr>
           <a:xfrm>
-            <a:off x="0" y="6629400"/>
+            <a:off x="0" y="6400800"/>
             <a:ext cx="12191695" cy="27432"/>
           </a:xfrm>
           <a:prstGeom prst="rect">
@@ -34374,7 +33926,7 @@
         </p:nvSpPr>
         <p:spPr>
           <a:xfrm>
-            <a:off x="548640" y="6473952"/>
+            <a:off x="548640" y="6455664"/>
             <a:ext cx="3657600" cy="201168"/>
           </a:xfrm>
           <a:prstGeom prst="rect">
@@ -34414,7 +33966,7 @@
         </p:nvSpPr>
         <p:spPr>
           <a:xfrm>
-            <a:off x="11277295" y="6473952"/>
+            <a:off x="11277295" y="6455664"/>
             <a:ext cx="731520" cy="201168"/>
           </a:xfrm>
           <a:prstGeom prst="rect">
@@ -34616,7 +34168,7 @@
             <a:avLst/>
           </a:prstGeom>
           <a:solidFill>
-            <a:srgbClr val="0E203E"/>
+            <a:srgbClr val="12294A"/>
           </a:solidFill>
           <a:ln>
             <a:noFill/>
@@ -34851,46 +34403,6 @@
           <a:lstStyle/>
           <a:p>
             <a:pPr algn="ctr"/>
-          </a:p>
-        </p:txBody>
-      </p:sp>
-      <p:sp>
-        <p:nvSpPr>
-          <p:cNvPr id="11" name="TextBox 10"/>
-          <p:cNvSpPr txBox="1"/>
-          <p:nvPr/>
-        </p:nvSpPr>
-        <p:spPr>
-          <a:xfrm>
-            <a:off x="11277295" y="6473952"/>
-            <a:ext cx="731520" cy="201168"/>
-          </a:xfrm>
-          <a:prstGeom prst="rect">
-            <a:avLst/>
-          </a:prstGeom>
-          <a:noFill/>
-        </p:spPr>
-        <p:txBody>
-          <a:bodyPr wrap="square"/>
-          <a:lstStyle/>
-          <a:p>
-            <a:pPr algn="r">
-              <a:spcBef>
-                <a:spcPts val="0"/>
-              </a:spcBef>
-              <a:spcAft>
-                <a:spcPts val="0"/>
-              </a:spcAft>
-              <a:defRPr sz="800" b="0">
-                <a:solidFill>
-                  <a:srgbClr val="9CA3AF"/>
-                </a:solidFill>
-                <a:latin typeface="Calibri"/>
-              </a:defRPr>
-            </a:pPr>
-            <a:r>
-              <a:t>7</a:t>
-            </a:r>
           </a:p>
         </p:txBody>
       </p:sp>
@@ -34972,7 +34484,7 @@
         <p:spPr>
           <a:xfrm>
             <a:off x="0" y="32004"/>
-            <a:ext cx="12191695" cy="822960"/>
+            <a:ext cx="12191695" cy="822959"/>
           </a:xfrm>
           <a:prstGeom prst="rect">
             <a:avLst/>
@@ -35015,7 +34527,7 @@
         <p:spPr>
           <a:xfrm>
             <a:off x="548640" y="109728"/>
-            <a:ext cx="64008" cy="548640"/>
+            <a:ext cx="64008" cy="502920"/>
           </a:xfrm>
           <a:prstGeom prst="rect">
             <a:avLst/>
@@ -35098,7 +34610,7 @@
         <p:spPr>
           <a:xfrm>
             <a:off x="749808" y="576072"/>
-            <a:ext cx="10637215" cy="274320"/>
+            <a:ext cx="10637215" cy="256032"/>
           </a:xfrm>
           <a:prstGeom prst="rect">
             <a:avLst/>
@@ -35124,7 +34636,7 @@
               </a:defRPr>
             </a:pPr>
             <a:r>
-              <a:t>Pasal 5 • Masa &amp; Tahun Pajak</a:t>
+              <a:t>Pasal 5</a:t>
             </a:r>
           </a:p>
         </p:txBody>
@@ -35834,7 +35346,7 @@
         <p:spPr>
           <a:xfrm>
             <a:off x="548640" y="3337560"/>
-            <a:ext cx="11094415" cy="2743200"/>
+            <a:ext cx="11094415" cy="2560320"/>
           </a:xfrm>
           <a:prstGeom prst="roundRect">
             <a:avLst>
@@ -35881,7 +35393,7 @@
         <p:spPr>
           <a:xfrm>
             <a:off x="777240" y="3474720"/>
-            <a:ext cx="10637215" cy="2377440"/>
+            <a:ext cx="10637215" cy="2286000"/>
           </a:xfrm>
           <a:prstGeom prst="rect">
             <a:avLst/>
@@ -35932,7 +35444,7 @@
         </p:nvSpPr>
         <p:spPr>
           <a:xfrm>
-            <a:off x="0" y="6629400"/>
+            <a:off x="0" y="6400800"/>
             <a:ext cx="12191695" cy="27432"/>
           </a:xfrm>
           <a:prstGeom prst="rect">
@@ -35975,7 +35487,7 @@
         </p:nvSpPr>
         <p:spPr>
           <a:xfrm>
-            <a:off x="548640" y="6473952"/>
+            <a:off x="548640" y="6455664"/>
             <a:ext cx="3657600" cy="201168"/>
           </a:xfrm>
           <a:prstGeom prst="rect">
@@ -36015,7 +35527,7 @@
         </p:nvSpPr>
         <p:spPr>
           <a:xfrm>
-            <a:off x="11277295" y="6473952"/>
+            <a:off x="11277295" y="6455664"/>
             <a:ext cx="731520" cy="201168"/>
           </a:xfrm>
           <a:prstGeom prst="rect">
